--- a/output/wordlabs-ject-3day.pptx
+++ b/output/wordlabs-ject-3day.pptx
@@ -6040,7 +6040,7 @@
                 <a:ea typeface="Calibri" pitchFamily="34" charset="-122"/>
                 <a:cs typeface="Calibri" pitchFamily="34" charset="-120"/>
               </a:rPr>
-              <a:t>The teacher asked us to </a:t>
+              <a:t>The nurse will </a:t>
             </a:r>
             <a:pPr algn="l" indent="0" marL="0">
               <a:buNone/>
@@ -6057,7 +6057,7 @@
                 <a:ea typeface="Calibri" pitchFamily="34" charset="-122"/>
                 <a:cs typeface="Calibri" pitchFamily="34" charset="-120"/>
               </a:rPr>
-              <a:t>project</a:t>
+              <a:t>inject</a:t>
             </a:r>
             <a:pPr algn="l" indent="0" marL="0">
               <a:buNone/>
@@ -6071,7 +6071,7 @@
                 <a:ea typeface="Calibri" pitchFamily="34" charset="-122"/>
                 <a:cs typeface="Calibri" pitchFamily="34" charset="-120"/>
               </a:rPr>
-              <a:t> our voices clearly, but Tom had to </a:t>
+              <a:t> the medicine carefully, and the patient should not </a:t>
             </a:r>
             <a:pPr algn="l" indent="0" marL="0">
               <a:buNone/>
@@ -6102,7 +6102,7 @@
                 <a:ea typeface="Calibri" pitchFamily="34" charset="-122"/>
                 <a:cs typeface="Calibri" pitchFamily="34" charset="-120"/>
               </a:rPr>
-              <a:t> the first idea for his speech.</a:t>
+              <a:t> the treatment.</a:t>
             </a:r>
             <a:endParaRPr lang="en-US" sz="1800" dirty="0"/>
           </a:p>
@@ -6257,7 +6257,7 @@
                 <a:ea typeface="Trebuchet MS" pitchFamily="34" charset="-122"/>
                 <a:cs typeface="Trebuchet MS" pitchFamily="34" charset="-120"/>
               </a:rPr>
-              <a:t>project</a:t>
+              <a:t>inject</a:t>
             </a:r>
             <a:endParaRPr lang="en-US" sz="1400" dirty="0"/>
           </a:p>
@@ -6855,7 +6855,7 @@
                 <a:ea typeface="Trebuchet MS" pitchFamily="34" charset="-122"/>
                 <a:cs typeface="Trebuchet MS" pitchFamily="34" charset="-120"/>
               </a:rPr>
-              <a:t>project</a:t>
+              <a:t>inject</a:t>
             </a:r>
             <a:endParaRPr lang="en-US" sz="2800" dirty="0"/>
           </a:p>
@@ -7682,7 +7682,7 @@
                 <a:ea typeface="Trebuchet MS" pitchFamily="34" charset="-122"/>
                 <a:cs typeface="Trebuchet MS" pitchFamily="34" charset="-120"/>
               </a:rPr>
-              <a:t>project</a:t>
+              <a:t>inject</a:t>
             </a:r>
             <a:endParaRPr lang="en-US" sz="2800" dirty="0"/>
           </a:p>
@@ -7821,7 +7821,7 @@
                 <a:ea typeface="Trebuchet MS" pitchFamily="34" charset="-122"/>
                 <a:cs typeface="Trebuchet MS" pitchFamily="34" charset="-120"/>
               </a:rPr>
-              <a:t>pro</a:t>
+              <a:t>in</a:t>
             </a:r>
             <a:endParaRPr lang="en-US" sz="1300" dirty="0"/>
           </a:p>
@@ -7860,7 +7860,7 @@
                 <a:ea typeface="Calibri" pitchFamily="34" charset="-122"/>
                 <a:cs typeface="Calibri" pitchFamily="34" charset="-120"/>
               </a:rPr>
-              <a:t>forward</a:t>
+              <a:t>into</a:t>
             </a:r>
             <a:endParaRPr lang="en-US" sz="850" dirty="0"/>
           </a:p>
@@ -7972,7 +7972,7 @@
                 <a:ea typeface="Calibri" pitchFamily="34" charset="-122"/>
                 <a:cs typeface="Calibri" pitchFamily="34" charset="-120"/>
               </a:rPr>
-              <a:t>throw</a:t>
+              <a:t>to throw</a:t>
             </a:r>
             <a:endParaRPr lang="en-US" sz="850" dirty="0"/>
           </a:p>
@@ -8667,7 +8667,7 @@
                 <a:ea typeface="Trebuchet MS" pitchFamily="34" charset="-122"/>
                 <a:cs typeface="Trebuchet MS" pitchFamily="34" charset="-120"/>
               </a:rPr>
-              <a:t>project</a:t>
+              <a:t>inject</a:t>
             </a:r>
             <a:endParaRPr lang="en-US" sz="2800" dirty="0"/>
           </a:p>
@@ -8806,7 +8806,7 @@
                 <a:ea typeface="Trebuchet MS" pitchFamily="34" charset="-122"/>
                 <a:cs typeface="Trebuchet MS" pitchFamily="34" charset="-120"/>
               </a:rPr>
-              <a:t>pro</a:t>
+              <a:t>in</a:t>
             </a:r>
             <a:endParaRPr lang="en-US" sz="1300" dirty="0"/>
           </a:p>
@@ -8845,7 +8845,7 @@
                 <a:ea typeface="Calibri" pitchFamily="34" charset="-122"/>
                 <a:cs typeface="Calibri" pitchFamily="34" charset="-120"/>
               </a:rPr>
-              <a:t>forward</a:t>
+              <a:t>into</a:t>
             </a:r>
             <a:endParaRPr lang="en-US" sz="850" dirty="0"/>
           </a:p>
@@ -8957,7 +8957,7 @@
                 <a:ea typeface="Calibri" pitchFamily="34" charset="-122"/>
                 <a:cs typeface="Calibri" pitchFamily="34" charset="-120"/>
               </a:rPr>
-              <a:t>throw</a:t>
+              <a:t>to throw</a:t>
             </a:r>
             <a:endParaRPr lang="en-US" sz="850" dirty="0"/>
           </a:p>
@@ -9116,7 +9116,7 @@
                 <a:ea typeface="Trebuchet MS" pitchFamily="34" charset="-122"/>
                 <a:cs typeface="Trebuchet MS" pitchFamily="34" charset="-120"/>
               </a:rPr>
-              <a:t>pro</a:t>
+              <a:t>in</a:t>
             </a:r>
             <a:endParaRPr lang="en-US" sz="1400" dirty="0"/>
           </a:p>
@@ -9784,7 +9784,7 @@
                 <a:ea typeface="Trebuchet MS" pitchFamily="34" charset="-122"/>
                 <a:cs typeface="Trebuchet MS" pitchFamily="34" charset="-120"/>
               </a:rPr>
-              <a:t>project</a:t>
+              <a:t>inject</a:t>
             </a:r>
             <a:endParaRPr lang="en-US" sz="2800" dirty="0"/>
           </a:p>
@@ -9923,7 +9923,7 @@
                 <a:ea typeface="Trebuchet MS" pitchFamily="34" charset="-122"/>
                 <a:cs typeface="Trebuchet MS" pitchFamily="34" charset="-120"/>
               </a:rPr>
-              <a:t>pro</a:t>
+              <a:t>in</a:t>
             </a:r>
             <a:endParaRPr lang="en-US" sz="1300" dirty="0"/>
           </a:p>
@@ -9962,7 +9962,7 @@
                 <a:ea typeface="Calibri" pitchFamily="34" charset="-122"/>
                 <a:cs typeface="Calibri" pitchFamily="34" charset="-120"/>
               </a:rPr>
-              <a:t>forward</a:t>
+              <a:t>into</a:t>
             </a:r>
             <a:endParaRPr lang="en-US" sz="850" dirty="0"/>
           </a:p>
@@ -10074,7 +10074,7 @@
                 <a:ea typeface="Calibri" pitchFamily="34" charset="-122"/>
                 <a:cs typeface="Calibri" pitchFamily="34" charset="-120"/>
               </a:rPr>
-              <a:t>throw</a:t>
+              <a:t>to throw</a:t>
             </a:r>
             <a:endParaRPr lang="en-US" sz="850" dirty="0"/>
           </a:p>
@@ -10233,7 +10233,7 @@
                 <a:ea typeface="Trebuchet MS" pitchFamily="34" charset="-122"/>
                 <a:cs typeface="Trebuchet MS" pitchFamily="34" charset="-120"/>
               </a:rPr>
-              <a:t>pro</a:t>
+              <a:t>in</a:t>
             </a:r>
             <a:endParaRPr lang="en-US" sz="1400" dirty="0"/>
           </a:p>
@@ -10419,11 +10419,11 @@
         <p:spPr>
           <a:xfrm>
             <a:off x="1874520" y="4096512"/>
-            <a:ext cx="6903720" cy="804672"/>
+            <a:ext cx="6903720" cy="658368"/>
           </a:xfrm>
           <a:prstGeom prst="rect">
             <a:avLst>
-              <a:gd name="adj" fmla="val 6818"/>
+              <a:gd name="adj" fmla="val 8333"/>
             </a:avLst>
           </a:prstGeom>
           <a:solidFill>
@@ -10446,11 +10446,11 @@
         <p:spPr>
           <a:xfrm>
             <a:off x="2254649" y="4169664"/>
-            <a:ext cx="685800" cy="384048"/>
+            <a:ext cx="685800" cy="475488"/>
           </a:xfrm>
           <a:prstGeom prst="rect">
             <a:avLst>
-              <a:gd name="adj" fmla="val 9524"/>
+              <a:gd name="adj" fmla="val 7692"/>
             </a:avLst>
           </a:prstGeom>
           <a:solidFill>
@@ -10473,7 +10473,7 @@
         <p:spPr>
           <a:xfrm>
             <a:off x="2254649" y="4169664"/>
-            <a:ext cx="685800" cy="384048"/>
+            <a:ext cx="685800" cy="475488"/>
           </a:xfrm>
           <a:prstGeom prst="rect">
             <a:avLst/>
@@ -10497,7 +10497,7 @@
                 <a:ea typeface="Trebuchet MS" pitchFamily="34" charset="-122"/>
                 <a:cs typeface="Trebuchet MS" pitchFamily="34" charset="-120"/>
               </a:rPr>
-              <a:t>p</a:t>
+              <a:t>i</a:t>
             </a:r>
             <a:endParaRPr lang="en-US" sz="900" dirty="0"/>
           </a:p>
@@ -10512,11 +10512,11 @@
         <p:spPr>
           <a:xfrm>
             <a:off x="3293146" y="4169664"/>
-            <a:ext cx="685800" cy="384048"/>
+            <a:ext cx="685800" cy="475488"/>
           </a:xfrm>
           <a:prstGeom prst="rect">
             <a:avLst>
-              <a:gd name="adj" fmla="val 9524"/>
+              <a:gd name="adj" fmla="val 7692"/>
             </a:avLst>
           </a:prstGeom>
           <a:solidFill>
@@ -10539,7 +10539,7 @@
         <p:spPr>
           <a:xfrm>
             <a:off x="3293146" y="4169664"/>
-            <a:ext cx="685800" cy="384048"/>
+            <a:ext cx="685800" cy="475488"/>
           </a:xfrm>
           <a:prstGeom prst="rect">
             <a:avLst/>
@@ -10563,7 +10563,7 @@
                 <a:ea typeface="Trebuchet MS" pitchFamily="34" charset="-122"/>
                 <a:cs typeface="Trebuchet MS" pitchFamily="34" charset="-120"/>
               </a:rPr>
-              <a:t>r</a:t>
+              <a:t>n</a:t>
             </a:r>
             <a:endParaRPr lang="en-US" sz="900" dirty="0"/>
           </a:p>
@@ -10578,11 +10578,11 @@
         <p:spPr>
           <a:xfrm>
             <a:off x="4331643" y="4169664"/>
-            <a:ext cx="685800" cy="384048"/>
+            <a:ext cx="685800" cy="475488"/>
           </a:xfrm>
           <a:prstGeom prst="rect">
             <a:avLst>
-              <a:gd name="adj" fmla="val 9524"/>
+              <a:gd name="adj" fmla="val 7692"/>
             </a:avLst>
           </a:prstGeom>
           <a:solidFill>
@@ -10605,7 +10605,7 @@
         <p:spPr>
           <a:xfrm>
             <a:off x="4331643" y="4169664"/>
-            <a:ext cx="685800" cy="384048"/>
+            <a:ext cx="685800" cy="475488"/>
           </a:xfrm>
           <a:prstGeom prst="rect">
             <a:avLst/>
@@ -10629,7 +10629,7 @@
                 <a:ea typeface="Trebuchet MS" pitchFamily="34" charset="-122"/>
                 <a:cs typeface="Trebuchet MS" pitchFamily="34" charset="-120"/>
               </a:rPr>
-              <a:t>o</a:t>
+              <a:t>j</a:t>
             </a:r>
             <a:endParaRPr lang="en-US" sz="900" dirty="0"/>
           </a:p>
@@ -10644,11 +10644,11 @@
         <p:spPr>
           <a:xfrm>
             <a:off x="5370141" y="4169664"/>
-            <a:ext cx="685800" cy="384048"/>
+            <a:ext cx="685800" cy="475488"/>
           </a:xfrm>
           <a:prstGeom prst="rect">
             <a:avLst>
-              <a:gd name="adj" fmla="val 9524"/>
+              <a:gd name="adj" fmla="val 7692"/>
             </a:avLst>
           </a:prstGeom>
           <a:solidFill>
@@ -10671,7 +10671,7 @@
         <p:spPr>
           <a:xfrm>
             <a:off x="5370141" y="4169664"/>
-            <a:ext cx="685800" cy="384048"/>
+            <a:ext cx="685800" cy="475488"/>
           </a:xfrm>
           <a:prstGeom prst="rect">
             <a:avLst/>
@@ -10695,7 +10695,7 @@
                 <a:ea typeface="Trebuchet MS" pitchFamily="34" charset="-122"/>
                 <a:cs typeface="Trebuchet MS" pitchFamily="34" charset="-120"/>
               </a:rPr>
-              <a:t>j</a:t>
+              <a:t>e</a:t>
             </a:r>
             <a:endParaRPr lang="en-US" sz="900" dirty="0"/>
           </a:p>
@@ -10710,11 +10710,11 @@
         <p:spPr>
           <a:xfrm>
             <a:off x="6408638" y="4169664"/>
-            <a:ext cx="685800" cy="384048"/>
+            <a:ext cx="685800" cy="475488"/>
           </a:xfrm>
           <a:prstGeom prst="rect">
             <a:avLst>
-              <a:gd name="adj" fmla="val 9524"/>
+              <a:gd name="adj" fmla="val 7692"/>
             </a:avLst>
           </a:prstGeom>
           <a:solidFill>
@@ -10737,7 +10737,7 @@
         <p:spPr>
           <a:xfrm>
             <a:off x="6408638" y="4169664"/>
-            <a:ext cx="685800" cy="384048"/>
+            <a:ext cx="685800" cy="475488"/>
           </a:xfrm>
           <a:prstGeom prst="rect">
             <a:avLst/>
@@ -10761,7 +10761,7 @@
                 <a:ea typeface="Trebuchet MS" pitchFamily="34" charset="-122"/>
                 <a:cs typeface="Trebuchet MS" pitchFamily="34" charset="-120"/>
               </a:rPr>
-              <a:t>e</a:t>
+              <a:t>c</a:t>
             </a:r>
             <a:endParaRPr lang="en-US" sz="900" dirty="0"/>
           </a:p>
@@ -10776,11 +10776,11 @@
         <p:spPr>
           <a:xfrm>
             <a:off x="7447135" y="4169664"/>
-            <a:ext cx="685800" cy="384048"/>
+            <a:ext cx="685800" cy="475488"/>
           </a:xfrm>
           <a:prstGeom prst="rect">
             <a:avLst>
-              <a:gd name="adj" fmla="val 9524"/>
+              <a:gd name="adj" fmla="val 7692"/>
             </a:avLst>
           </a:prstGeom>
           <a:solidFill>
@@ -10803,7 +10803,7 @@
         <p:spPr>
           <a:xfrm>
             <a:off x="7447135" y="4169664"/>
-            <a:ext cx="685800" cy="384048"/>
+            <a:ext cx="685800" cy="475488"/>
           </a:xfrm>
           <a:prstGeom prst="rect">
             <a:avLst/>
@@ -10827,48 +10827,9 @@
                 <a:ea typeface="Trebuchet MS" pitchFamily="34" charset="-122"/>
                 <a:cs typeface="Trebuchet MS" pitchFamily="34" charset="-120"/>
               </a:rPr>
-              <a:t>ct</a:t>
+              <a:t>t</a:t>
             </a:r>
             <a:endParaRPr lang="en-US" sz="900" dirty="0"/>
-          </a:p>
-        </p:txBody>
-      </p:sp>
-      <p:sp>
-        <p:nvSpPr>
-          <p:cNvPr id="45" name="Text 43"/>
-          <p:cNvSpPr/>
-          <p:nvPr/>
-        </p:nvSpPr>
-        <p:spPr>
-          <a:xfrm>
-            <a:off x="7447135" y="4572000"/>
-            <a:ext cx="685800" cy="219456"/>
-          </a:xfrm>
-          <a:prstGeom prst="rect">
-            <a:avLst/>
-          </a:prstGeom>
-          <a:noFill/>
-          <a:ln/>
-        </p:spPr>
-        <p:txBody>
-          <a:bodyPr wrap="square" lIns="0" tIns="0" rIns="0" bIns="0" rtlCol="0" anchor="t"/>
-          <a:lstStyle/>
-          <a:p>
-            <a:pPr algn="ctr" indent="0" marL="0">
-              <a:buNone/>
-            </a:pPr>
-            <a:r>
-              <a:rPr lang="en-US" sz="750" i="1" dirty="0">
-                <a:solidFill>
-                  <a:srgbClr val="94A3B8"/>
-                </a:solidFill>
-                <a:latin typeface="Calibri" pitchFamily="34" charset="0"/>
-                <a:ea typeface="Calibri" pitchFamily="34" charset="-122"/>
-                <a:cs typeface="Calibri" pitchFamily="34" charset="-120"/>
-              </a:rPr>
-              <a:t>/kt/</a:t>
-            </a:r>
-            <a:endParaRPr lang="en-US" sz="750" dirty="0"/>
           </a:p>
         </p:txBody>
       </p:sp>
@@ -12302,7 +12263,7 @@
                 <a:ea typeface="Calibri" pitchFamily="34" charset="-122"/>
                 <a:cs typeface="Calibri" pitchFamily="34" charset="-120"/>
               </a:rPr>
-              <a:t>back, again</a:t>
+              <a:t>back or again</a:t>
             </a:r>
             <a:endParaRPr lang="en-US" sz="850" dirty="0"/>
           </a:p>
@@ -12414,7 +12375,7 @@
                 <a:ea typeface="Calibri" pitchFamily="34" charset="-122"/>
                 <a:cs typeface="Calibri" pitchFamily="34" charset="-120"/>
               </a:rPr>
-              <a:t>throw</a:t>
+              <a:t>to throw</a:t>
             </a:r>
             <a:endParaRPr lang="en-US" sz="850" dirty="0"/>
           </a:p>
@@ -13287,7 +13248,7 @@
                 <a:ea typeface="Calibri" pitchFamily="34" charset="-122"/>
                 <a:cs typeface="Calibri" pitchFamily="34" charset="-120"/>
               </a:rPr>
-              <a:t>back, again</a:t>
+              <a:t>back or again</a:t>
             </a:r>
             <a:endParaRPr lang="en-US" sz="850" dirty="0"/>
           </a:p>
@@ -13399,7 +13360,7 @@
                 <a:ea typeface="Calibri" pitchFamily="34" charset="-122"/>
                 <a:cs typeface="Calibri" pitchFamily="34" charset="-120"/>
               </a:rPr>
-              <a:t>throw</a:t>
+              <a:t>to throw</a:t>
             </a:r>
             <a:endParaRPr lang="en-US" sz="850" dirty="0"/>
           </a:p>
@@ -14669,7 +14630,7 @@
                 <a:ea typeface="Calibri" pitchFamily="34" charset="-122"/>
                 <a:cs typeface="Calibri" pitchFamily="34" charset="-120"/>
               </a:rPr>
-              <a:t>back, again</a:t>
+              <a:t>back or again</a:t>
             </a:r>
             <a:endParaRPr lang="en-US" sz="850" dirty="0"/>
           </a:p>
@@ -14781,7 +14742,7 @@
                 <a:ea typeface="Calibri" pitchFamily="34" charset="-122"/>
                 <a:cs typeface="Calibri" pitchFamily="34" charset="-120"/>
               </a:rPr>
-              <a:t>throw</a:t>
+              <a:t>to throw</a:t>
             </a:r>
             <a:endParaRPr lang="en-US" sz="850" dirty="0"/>
           </a:p>
@@ -15126,11 +15087,11 @@
         <p:spPr>
           <a:xfrm>
             <a:off x="1874520" y="4096512"/>
-            <a:ext cx="6903720" cy="804672"/>
+            <a:ext cx="6903720" cy="658368"/>
           </a:xfrm>
           <a:prstGeom prst="rect">
             <a:avLst>
-              <a:gd name="adj" fmla="val 6818"/>
+              <a:gd name="adj" fmla="val 8333"/>
             </a:avLst>
           </a:prstGeom>
           <a:solidFill>
@@ -15152,12 +15113,12 @@
         </p:nvSpPr>
         <p:spPr>
           <a:xfrm>
-            <a:off x="2427732" y="4169664"/>
-            <a:ext cx="685800" cy="384048"/>
+            <a:off x="2254649" y="4169664"/>
+            <a:ext cx="685800" cy="475488"/>
           </a:xfrm>
           <a:prstGeom prst="rect">
             <a:avLst>
-              <a:gd name="adj" fmla="val 9524"/>
+              <a:gd name="adj" fmla="val 7692"/>
             </a:avLst>
           </a:prstGeom>
           <a:solidFill>
@@ -15179,8 +15140,8 @@
         </p:nvSpPr>
         <p:spPr>
           <a:xfrm>
-            <a:off x="2427732" y="4169664"/>
-            <a:ext cx="685800" cy="384048"/>
+            <a:off x="2254649" y="4169664"/>
+            <a:ext cx="685800" cy="475488"/>
           </a:xfrm>
           <a:prstGeom prst="rect">
             <a:avLst/>
@@ -15218,12 +15179,12 @@
         </p:nvSpPr>
         <p:spPr>
           <a:xfrm>
-            <a:off x="3639312" y="4169664"/>
-            <a:ext cx="685800" cy="384048"/>
+            <a:off x="3293146" y="4169664"/>
+            <a:ext cx="685800" cy="475488"/>
           </a:xfrm>
           <a:prstGeom prst="rect">
             <a:avLst>
-              <a:gd name="adj" fmla="val 9524"/>
+              <a:gd name="adj" fmla="val 7692"/>
             </a:avLst>
           </a:prstGeom>
           <a:solidFill>
@@ -15245,8 +15206,8 @@
         </p:nvSpPr>
         <p:spPr>
           <a:xfrm>
-            <a:off x="3639312" y="4169664"/>
-            <a:ext cx="685800" cy="384048"/>
+            <a:off x="3293146" y="4169664"/>
+            <a:ext cx="685800" cy="475488"/>
           </a:xfrm>
           <a:prstGeom prst="rect">
             <a:avLst/>
@@ -15284,12 +15245,12 @@
         </p:nvSpPr>
         <p:spPr>
           <a:xfrm>
-            <a:off x="4850892" y="4169664"/>
-            <a:ext cx="685800" cy="384048"/>
+            <a:off x="4331643" y="4169664"/>
+            <a:ext cx="685800" cy="475488"/>
           </a:xfrm>
           <a:prstGeom prst="rect">
             <a:avLst>
-              <a:gd name="adj" fmla="val 9524"/>
+              <a:gd name="adj" fmla="val 7692"/>
             </a:avLst>
           </a:prstGeom>
           <a:solidFill>
@@ -15311,8 +15272,8 @@
         </p:nvSpPr>
         <p:spPr>
           <a:xfrm>
-            <a:off x="4850892" y="4169664"/>
-            <a:ext cx="685800" cy="384048"/>
+            <a:off x="4331643" y="4169664"/>
+            <a:ext cx="685800" cy="475488"/>
           </a:xfrm>
           <a:prstGeom prst="rect">
             <a:avLst/>
@@ -15350,12 +15311,12 @@
         </p:nvSpPr>
         <p:spPr>
           <a:xfrm>
-            <a:off x="6062472" y="4169664"/>
-            <a:ext cx="685800" cy="384048"/>
+            <a:off x="5370141" y="4169664"/>
+            <a:ext cx="685800" cy="475488"/>
           </a:xfrm>
           <a:prstGeom prst="rect">
             <a:avLst>
-              <a:gd name="adj" fmla="val 9524"/>
+              <a:gd name="adj" fmla="val 7692"/>
             </a:avLst>
           </a:prstGeom>
           <a:solidFill>
@@ -15377,8 +15338,8 @@
         </p:nvSpPr>
         <p:spPr>
           <a:xfrm>
-            <a:off x="6062472" y="4169664"/>
-            <a:ext cx="685800" cy="384048"/>
+            <a:off x="5370141" y="4169664"/>
+            <a:ext cx="685800" cy="475488"/>
           </a:xfrm>
           <a:prstGeom prst="rect">
             <a:avLst/>
@@ -15416,12 +15377,12 @@
         </p:nvSpPr>
         <p:spPr>
           <a:xfrm>
-            <a:off x="7274052" y="4169664"/>
-            <a:ext cx="685800" cy="384048"/>
+            <a:off x="6408638" y="4169664"/>
+            <a:ext cx="685800" cy="475488"/>
           </a:xfrm>
           <a:prstGeom prst="rect">
             <a:avLst>
-              <a:gd name="adj" fmla="val 9524"/>
+              <a:gd name="adj" fmla="val 7692"/>
             </a:avLst>
           </a:prstGeom>
           <a:solidFill>
@@ -15443,8 +15404,8 @@
         </p:nvSpPr>
         <p:spPr>
           <a:xfrm>
-            <a:off x="7274052" y="4169664"/>
-            <a:ext cx="685800" cy="384048"/>
+            <a:off x="6408638" y="4169664"/>
+            <a:ext cx="685800" cy="475488"/>
           </a:xfrm>
           <a:prstGeom prst="rect">
             <a:avLst/>
@@ -15468,7 +15429,7 @@
                 <a:ea typeface="Trebuchet MS" pitchFamily="34" charset="-122"/>
                 <a:cs typeface="Trebuchet MS" pitchFamily="34" charset="-120"/>
               </a:rPr>
-              <a:t>ct</a:t>
+              <a:t>c</a:t>
             </a:r>
             <a:endParaRPr lang="en-US" sz="900" dirty="0"/>
           </a:p>
@@ -15476,40 +15437,67 @@
       </p:sp>
       <p:sp>
         <p:nvSpPr>
-          <p:cNvPr id="43" name="Text 41"/>
-          <p:cNvSpPr/>
-          <p:nvPr/>
-        </p:nvSpPr>
-        <p:spPr>
-          <a:xfrm>
-            <a:off x="7274052" y="4572000"/>
-            <a:ext cx="685800" cy="219456"/>
-          </a:xfrm>
-          <a:prstGeom prst="rect">
-            <a:avLst/>
-          </a:prstGeom>
-          <a:noFill/>
-          <a:ln/>
-        </p:spPr>
-        <p:txBody>
-          <a:bodyPr wrap="square" lIns="0" tIns="0" rIns="0" bIns="0" rtlCol="0" anchor="t"/>
-          <a:lstStyle/>
-          <a:p>
-            <a:pPr algn="ctr" indent="0" marL="0">
-              <a:buNone/>
-            </a:pPr>
-            <a:r>
-              <a:rPr lang="en-US" sz="750" i="1" dirty="0">
-                <a:solidFill>
-                  <a:srgbClr val="94A3B8"/>
-                </a:solidFill>
-                <a:latin typeface="Calibri" pitchFamily="34" charset="0"/>
-                <a:ea typeface="Calibri" pitchFamily="34" charset="-122"/>
-                <a:cs typeface="Calibri" pitchFamily="34" charset="-120"/>
-              </a:rPr>
-              <a:t>/kt/</a:t>
-            </a:r>
-            <a:endParaRPr lang="en-US" sz="750" dirty="0"/>
+          <p:cNvPr id="43" name="Shape 41"/>
+          <p:cNvSpPr/>
+          <p:nvPr/>
+        </p:nvSpPr>
+        <p:spPr>
+          <a:xfrm>
+            <a:off x="7447135" y="4169664"/>
+            <a:ext cx="685800" cy="475488"/>
+          </a:xfrm>
+          <a:prstGeom prst="rect">
+            <a:avLst>
+              <a:gd name="adj" fmla="val 7692"/>
+            </a:avLst>
+          </a:prstGeom>
+          <a:solidFill>
+            <a:srgbClr val="FFFFFF"/>
+          </a:solidFill>
+          <a:ln w="12700">
+            <a:solidFill>
+              <a:srgbClr val="DB2777"/>
+            </a:solidFill>
+            <a:prstDash val="solid"/>
+          </a:ln>
+        </p:spPr>
+      </p:sp>
+      <p:sp>
+        <p:nvSpPr>
+          <p:cNvPr id="44" name="Text 42"/>
+          <p:cNvSpPr/>
+          <p:nvPr/>
+        </p:nvSpPr>
+        <p:spPr>
+          <a:xfrm>
+            <a:off x="7447135" y="4169664"/>
+            <a:ext cx="685800" cy="475488"/>
+          </a:xfrm>
+          <a:prstGeom prst="rect">
+            <a:avLst/>
+          </a:prstGeom>
+          <a:noFill/>
+          <a:ln/>
+        </p:spPr>
+        <p:txBody>
+          <a:bodyPr wrap="square" lIns="0" tIns="0" rIns="0" bIns="0" rtlCol="0" anchor="ctr"/>
+          <a:lstStyle/>
+          <a:p>
+            <a:pPr algn="ctr" indent="0" marL="0">
+              <a:buNone/>
+            </a:pPr>
+            <a:r>
+              <a:rPr lang="en-US" sz="900" b="1" dirty="0">
+                <a:solidFill>
+                  <a:srgbClr val="9D174D"/>
+                </a:solidFill>
+                <a:latin typeface="Trebuchet MS" pitchFamily="34" charset="0"/>
+                <a:ea typeface="Trebuchet MS" pitchFamily="34" charset="-122"/>
+                <a:cs typeface="Trebuchet MS" pitchFamily="34" charset="-120"/>
+              </a:rPr>
+              <a:t>t</a:t>
+            </a:r>
+            <a:endParaRPr lang="en-US" sz="900" dirty="0"/>
           </a:p>
         </p:txBody>
       </p:sp>
@@ -16415,7 +16403,7 @@
                 <a:ea typeface="Trebuchet MS" pitchFamily="34" charset="-122"/>
                 <a:cs typeface="Trebuchet MS" pitchFamily="34" charset="-120"/>
               </a:rPr>
-              <a:t>1</a:t>
+              <a:t>2</a:t>
             </a:r>
             <a:pPr algn="ctr" indent="0" marL="0">
               <a:buNone/>
@@ -16429,7 +16417,7 @@
                 <a:ea typeface="Trebuchet MS" pitchFamily="34" charset="-122"/>
                 <a:cs typeface="Trebuchet MS" pitchFamily="34" charset="-120"/>
               </a:rPr>
-              <a:t>  punctuation mark</a:t>
+              <a:t>  punctuation marks</a:t>
             </a:r>
             <a:endParaRPr lang="en-US" sz="2800" dirty="0"/>
           </a:p>
@@ -16833,7 +16821,7 @@
                 <a:ea typeface="Calibri" pitchFamily="34" charset="-122"/>
                 <a:cs typeface="Calibri" pitchFamily="34" charset="-120"/>
               </a:rPr>
-              <a:t>After the </a:t>
+              <a:t>The </a:t>
             </a:r>
             <a:pPr algn="l" indent="0" marL="0">
               <a:buNone/>
@@ -16850,7 +16838,7 @@
                 <a:ea typeface="Calibri" pitchFamily="34" charset="-122"/>
                 <a:cs typeface="Calibri" pitchFamily="34" charset="-120"/>
               </a:rPr>
-              <a:t>injection</a:t>
+              <a:t>projectile</a:t>
             </a:r>
             <a:pPr algn="l" indent="0" marL="0">
               <a:buNone/>
@@ -16864,7 +16852,7 @@
                 <a:ea typeface="Calibri" pitchFamily="34" charset="-122"/>
                 <a:cs typeface="Calibri" pitchFamily="34" charset="-120"/>
               </a:rPr>
-              <a:t>, the </a:t>
+              <a:t> flew through the air, which made the </a:t>
             </a:r>
             <a:pPr algn="l" indent="0" marL="0">
               <a:buNone/>
@@ -16895,7 +16883,7 @@
                 <a:ea typeface="Calibri" pitchFamily="34" charset="-122"/>
                 <a:cs typeface="Calibri" pitchFamily="34" charset="-120"/>
               </a:rPr>
-              <a:t> patient began to </a:t>
+              <a:t> team </a:t>
             </a:r>
             <a:pPr algn="l" indent="0" marL="0">
               <a:buNone/>
@@ -16912,7 +16900,7 @@
                 <a:ea typeface="Calibri" pitchFamily="34" charset="-122"/>
                 <a:cs typeface="Calibri" pitchFamily="34" charset="-120"/>
               </a:rPr>
-              <a:t>object</a:t>
+              <a:t>eject</a:t>
             </a:r>
             <a:pPr algn="l" indent="0" marL="0">
               <a:buNone/>
@@ -16926,7 +16914,7 @@
                 <a:ea typeface="Calibri" pitchFamily="34" charset="-122"/>
                 <a:cs typeface="Calibri" pitchFamily="34" charset="-120"/>
               </a:rPr>
-              <a:t> to any further treatment from the nurses.</a:t>
+              <a:t> from the competition early.</a:t>
             </a:r>
             <a:endParaRPr lang="en-US" sz="1800" dirty="0"/>
           </a:p>
@@ -17081,7 +17069,7 @@
                 <a:ea typeface="Trebuchet MS" pitchFamily="34" charset="-122"/>
                 <a:cs typeface="Trebuchet MS" pitchFamily="34" charset="-120"/>
               </a:rPr>
-              <a:t>injection</a:t>
+              <a:t>projectile</a:t>
             </a:r>
             <a:endParaRPr lang="en-US" sz="1400" dirty="0"/>
           </a:p>
@@ -17337,7 +17325,7 @@
                 <a:ea typeface="Trebuchet MS" pitchFamily="34" charset="-122"/>
                 <a:cs typeface="Trebuchet MS" pitchFamily="34" charset="-120"/>
               </a:rPr>
-              <a:t>object</a:t>
+              <a:t>eject</a:t>
             </a:r>
             <a:endParaRPr lang="en-US" sz="1400" dirty="0"/>
           </a:p>
@@ -17807,7 +17795,7 @@
                 <a:ea typeface="Trebuchet MS" pitchFamily="34" charset="-122"/>
                 <a:cs typeface="Trebuchet MS" pitchFamily="34" charset="-120"/>
               </a:rPr>
-              <a:t>injection</a:t>
+              <a:t>projectile</a:t>
             </a:r>
             <a:endParaRPr lang="en-US" sz="2800" dirty="0"/>
           </a:p>
@@ -18634,7 +18622,7 @@
                 <a:ea typeface="Trebuchet MS" pitchFamily="34" charset="-122"/>
                 <a:cs typeface="Trebuchet MS" pitchFamily="34" charset="-120"/>
               </a:rPr>
-              <a:t>injection</a:t>
+              <a:t>projectile</a:t>
             </a:r>
             <a:endParaRPr lang="en-US" sz="2800" dirty="0"/>
           </a:p>
@@ -18773,7 +18761,7 @@
                 <a:ea typeface="Trebuchet MS" pitchFamily="34" charset="-122"/>
                 <a:cs typeface="Trebuchet MS" pitchFamily="34" charset="-120"/>
               </a:rPr>
-              <a:t>in</a:t>
+              <a:t>pro</a:t>
             </a:r>
             <a:endParaRPr lang="en-US" sz="1300" dirty="0"/>
           </a:p>
@@ -18812,7 +18800,7 @@
                 <a:ea typeface="Calibri" pitchFamily="34" charset="-122"/>
                 <a:cs typeface="Calibri" pitchFamily="34" charset="-120"/>
               </a:rPr>
-              <a:t>into</a:t>
+              <a:t>forward</a:t>
             </a:r>
             <a:endParaRPr lang="en-US" sz="850" dirty="0"/>
           </a:p>
@@ -18924,7 +18912,7 @@
                 <a:ea typeface="Calibri" pitchFamily="34" charset="-122"/>
                 <a:cs typeface="Calibri" pitchFamily="34" charset="-120"/>
               </a:rPr>
-              <a:t>throw</a:t>
+              <a:t>to throw</a:t>
             </a:r>
             <a:endParaRPr lang="en-US" sz="850" dirty="0"/>
           </a:p>
@@ -18997,7 +18985,7 @@
                 <a:ea typeface="Trebuchet MS" pitchFamily="34" charset="-122"/>
                 <a:cs typeface="Trebuchet MS" pitchFamily="34" charset="-120"/>
               </a:rPr>
-              <a:t>ion</a:t>
+              <a:t>ile</a:t>
             </a:r>
             <a:endParaRPr lang="en-US" sz="1300" dirty="0"/>
           </a:p>
@@ -19036,7 +19024,7 @@
                 <a:ea typeface="Calibri" pitchFamily="34" charset="-122"/>
                 <a:cs typeface="Calibri" pitchFamily="34" charset="-120"/>
               </a:rPr>
-              <a:t>act or process of</a:t>
+              <a:t>relating to or capable of</a:t>
             </a:r>
             <a:endParaRPr lang="en-US" sz="850" dirty="0"/>
           </a:p>
@@ -19731,7 +19719,7 @@
                 <a:ea typeface="Trebuchet MS" pitchFamily="34" charset="-122"/>
                 <a:cs typeface="Trebuchet MS" pitchFamily="34" charset="-120"/>
               </a:rPr>
-              <a:t>injection</a:t>
+              <a:t>projectile</a:t>
             </a:r>
             <a:endParaRPr lang="en-US" sz="2800" dirty="0"/>
           </a:p>
@@ -19870,7 +19858,7 @@
                 <a:ea typeface="Trebuchet MS" pitchFamily="34" charset="-122"/>
                 <a:cs typeface="Trebuchet MS" pitchFamily="34" charset="-120"/>
               </a:rPr>
-              <a:t>in</a:t>
+              <a:t>pro</a:t>
             </a:r>
             <a:endParaRPr lang="en-US" sz="1300" dirty="0"/>
           </a:p>
@@ -19909,7 +19897,7 @@
                 <a:ea typeface="Calibri" pitchFamily="34" charset="-122"/>
                 <a:cs typeface="Calibri" pitchFamily="34" charset="-120"/>
               </a:rPr>
-              <a:t>into</a:t>
+              <a:t>forward</a:t>
             </a:r>
             <a:endParaRPr lang="en-US" sz="850" dirty="0"/>
           </a:p>
@@ -20021,7 +20009,7 @@
                 <a:ea typeface="Calibri" pitchFamily="34" charset="-122"/>
                 <a:cs typeface="Calibri" pitchFamily="34" charset="-120"/>
               </a:rPr>
-              <a:t>throw</a:t>
+              <a:t>to throw</a:t>
             </a:r>
             <a:endParaRPr lang="en-US" sz="850" dirty="0"/>
           </a:p>
@@ -20094,7 +20082,7 @@
                 <a:ea typeface="Trebuchet MS" pitchFamily="34" charset="-122"/>
                 <a:cs typeface="Trebuchet MS" pitchFamily="34" charset="-120"/>
               </a:rPr>
-              <a:t>ion</a:t>
+              <a:t>ile</a:t>
             </a:r>
             <a:endParaRPr lang="en-US" sz="1300" dirty="0"/>
           </a:p>
@@ -20133,7 +20121,7 @@
                 <a:ea typeface="Calibri" pitchFamily="34" charset="-122"/>
                 <a:cs typeface="Calibri" pitchFamily="34" charset="-120"/>
               </a:rPr>
-              <a:t>act or process of</a:t>
+              <a:t>relating to or capable of</a:t>
             </a:r>
             <a:endParaRPr lang="en-US" sz="850" dirty="0"/>
           </a:p>
@@ -20292,7 +20280,7 @@
                 <a:ea typeface="Trebuchet MS" pitchFamily="34" charset="-122"/>
                 <a:cs typeface="Trebuchet MS" pitchFamily="34" charset="-120"/>
               </a:rPr>
-              <a:t>in</a:t>
+              <a:t>pro</a:t>
             </a:r>
             <a:endParaRPr lang="en-US" sz="1400" dirty="0"/>
           </a:p>
@@ -20502,7 +20490,7 @@
                 <a:ea typeface="Trebuchet MS" pitchFamily="34" charset="-122"/>
                 <a:cs typeface="Trebuchet MS" pitchFamily="34" charset="-120"/>
               </a:rPr>
-              <a:t>tion</a:t>
+              <a:t>tile</a:t>
             </a:r>
             <a:endParaRPr lang="en-US" sz="1400" dirty="0"/>
           </a:p>
@@ -21065,7 +21053,7 @@
                 <a:ea typeface="Trebuchet MS" pitchFamily="34" charset="-122"/>
                 <a:cs typeface="Trebuchet MS" pitchFamily="34" charset="-120"/>
               </a:rPr>
-              <a:t>injection</a:t>
+              <a:t>projectile</a:t>
             </a:r>
             <a:endParaRPr lang="en-US" sz="2800" dirty="0"/>
           </a:p>
@@ -21204,7 +21192,7 @@
                 <a:ea typeface="Trebuchet MS" pitchFamily="34" charset="-122"/>
                 <a:cs typeface="Trebuchet MS" pitchFamily="34" charset="-120"/>
               </a:rPr>
-              <a:t>in</a:t>
+              <a:t>pro</a:t>
             </a:r>
             <a:endParaRPr lang="en-US" sz="1300" dirty="0"/>
           </a:p>
@@ -21243,7 +21231,7 @@
                 <a:ea typeface="Calibri" pitchFamily="34" charset="-122"/>
                 <a:cs typeface="Calibri" pitchFamily="34" charset="-120"/>
               </a:rPr>
-              <a:t>into</a:t>
+              <a:t>forward</a:t>
             </a:r>
             <a:endParaRPr lang="en-US" sz="850" dirty="0"/>
           </a:p>
@@ -21355,7 +21343,7 @@
                 <a:ea typeface="Calibri" pitchFamily="34" charset="-122"/>
                 <a:cs typeface="Calibri" pitchFamily="34" charset="-120"/>
               </a:rPr>
-              <a:t>throw</a:t>
+              <a:t>to throw</a:t>
             </a:r>
             <a:endParaRPr lang="en-US" sz="850" dirty="0"/>
           </a:p>
@@ -21428,7 +21416,7 @@
                 <a:ea typeface="Trebuchet MS" pitchFamily="34" charset="-122"/>
                 <a:cs typeface="Trebuchet MS" pitchFamily="34" charset="-120"/>
               </a:rPr>
-              <a:t>ion</a:t>
+              <a:t>ile</a:t>
             </a:r>
             <a:endParaRPr lang="en-US" sz="1300" dirty="0"/>
           </a:p>
@@ -21467,7 +21455,7 @@
                 <a:ea typeface="Calibri" pitchFamily="34" charset="-122"/>
                 <a:cs typeface="Calibri" pitchFamily="34" charset="-120"/>
               </a:rPr>
-              <a:t>act or process of</a:t>
+              <a:t>relating to or capable of</a:t>
             </a:r>
             <a:endParaRPr lang="en-US" sz="850" dirty="0"/>
           </a:p>
@@ -21626,7 +21614,7 @@
                 <a:ea typeface="Trebuchet MS" pitchFamily="34" charset="-122"/>
                 <a:cs typeface="Trebuchet MS" pitchFamily="34" charset="-120"/>
               </a:rPr>
-              <a:t>in</a:t>
+              <a:t>pro</a:t>
             </a:r>
             <a:endParaRPr lang="en-US" sz="1400" dirty="0"/>
           </a:p>
@@ -21836,7 +21824,7 @@
                 <a:ea typeface="Trebuchet MS" pitchFamily="34" charset="-122"/>
                 <a:cs typeface="Trebuchet MS" pitchFamily="34" charset="-120"/>
               </a:rPr>
-              <a:t>tion</a:t>
+              <a:t>tile</a:t>
             </a:r>
             <a:endParaRPr lang="en-US" sz="1400" dirty="0"/>
           </a:p>
@@ -21917,11 +21905,11 @@
         <p:spPr>
           <a:xfrm>
             <a:off x="1874520" y="4096512"/>
-            <a:ext cx="6903720" cy="804672"/>
+            <a:ext cx="6903720" cy="658368"/>
           </a:xfrm>
           <a:prstGeom prst="rect">
             <a:avLst>
-              <a:gd name="adj" fmla="val 6818"/>
+              <a:gd name="adj" fmla="val 8333"/>
             </a:avLst>
           </a:prstGeom>
           <a:solidFill>
@@ -21943,12 +21931,12 @@
         </p:nvSpPr>
         <p:spPr>
           <a:xfrm>
-            <a:off x="2023872" y="4169664"/>
-            <a:ext cx="685800" cy="384048"/>
+            <a:off x="1951330" y="4169664"/>
+            <a:ext cx="676656" cy="475488"/>
           </a:xfrm>
           <a:prstGeom prst="rect">
             <a:avLst>
-              <a:gd name="adj" fmla="val 9524"/>
+              <a:gd name="adj" fmla="val 7692"/>
             </a:avLst>
           </a:prstGeom>
           <a:solidFill>
@@ -21970,8 +21958,8 @@
         </p:nvSpPr>
         <p:spPr>
           <a:xfrm>
-            <a:off x="2023872" y="4169664"/>
-            <a:ext cx="685800" cy="384048"/>
+            <a:off x="1951330" y="4169664"/>
+            <a:ext cx="676656" cy="475488"/>
           </a:xfrm>
           <a:prstGeom prst="rect">
             <a:avLst/>
@@ -21995,7 +21983,7 @@
                 <a:ea typeface="Trebuchet MS" pitchFamily="34" charset="-122"/>
                 <a:cs typeface="Trebuchet MS" pitchFamily="34" charset="-120"/>
               </a:rPr>
-              <a:t>i</a:t>
+              <a:t>p</a:t>
             </a:r>
             <a:endParaRPr lang="en-US" sz="900" dirty="0"/>
           </a:p>
@@ -22009,12 +21997,12 @@
         </p:nvSpPr>
         <p:spPr>
           <a:xfrm>
-            <a:off x="2831592" y="4169664"/>
-            <a:ext cx="685800" cy="384048"/>
+            <a:off x="2677363" y="4169664"/>
+            <a:ext cx="676656" cy="475488"/>
           </a:xfrm>
           <a:prstGeom prst="rect">
             <a:avLst>
-              <a:gd name="adj" fmla="val 9524"/>
+              <a:gd name="adj" fmla="val 7692"/>
             </a:avLst>
           </a:prstGeom>
           <a:solidFill>
@@ -22036,8 +22024,8 @@
         </p:nvSpPr>
         <p:spPr>
           <a:xfrm>
-            <a:off x="2831592" y="4169664"/>
-            <a:ext cx="685800" cy="384048"/>
+            <a:off x="2677363" y="4169664"/>
+            <a:ext cx="676656" cy="475488"/>
           </a:xfrm>
           <a:prstGeom prst="rect">
             <a:avLst/>
@@ -22061,7 +22049,7 @@
                 <a:ea typeface="Trebuchet MS" pitchFamily="34" charset="-122"/>
                 <a:cs typeface="Trebuchet MS" pitchFamily="34" charset="-120"/>
               </a:rPr>
-              <a:t>n</a:t>
+              <a:t>r</a:t>
             </a:r>
             <a:endParaRPr lang="en-US" sz="900" dirty="0"/>
           </a:p>
@@ -22075,12 +22063,12 @@
         </p:nvSpPr>
         <p:spPr>
           <a:xfrm>
-            <a:off x="3639312" y="4169664"/>
-            <a:ext cx="685800" cy="384048"/>
+            <a:off x="3403397" y="4169664"/>
+            <a:ext cx="676656" cy="475488"/>
           </a:xfrm>
           <a:prstGeom prst="rect">
             <a:avLst>
-              <a:gd name="adj" fmla="val 9524"/>
+              <a:gd name="adj" fmla="val 7692"/>
             </a:avLst>
           </a:prstGeom>
           <a:solidFill>
@@ -22102,8 +22090,8 @@
         </p:nvSpPr>
         <p:spPr>
           <a:xfrm>
-            <a:off x="3639312" y="4169664"/>
-            <a:ext cx="685800" cy="384048"/>
+            <a:off x="3403397" y="4169664"/>
+            <a:ext cx="676656" cy="475488"/>
           </a:xfrm>
           <a:prstGeom prst="rect">
             <a:avLst/>
@@ -22127,7 +22115,7 @@
                 <a:ea typeface="Trebuchet MS" pitchFamily="34" charset="-122"/>
                 <a:cs typeface="Trebuchet MS" pitchFamily="34" charset="-120"/>
               </a:rPr>
-              <a:t>j</a:t>
+              <a:t>o</a:t>
             </a:r>
             <a:endParaRPr lang="en-US" sz="900" dirty="0"/>
           </a:p>
@@ -22141,12 +22129,12 @@
         </p:nvSpPr>
         <p:spPr>
           <a:xfrm>
-            <a:off x="4447032" y="4169664"/>
-            <a:ext cx="685800" cy="384048"/>
+            <a:off x="4129430" y="4169664"/>
+            <a:ext cx="676656" cy="475488"/>
           </a:xfrm>
           <a:prstGeom prst="rect">
             <a:avLst>
-              <a:gd name="adj" fmla="val 9524"/>
+              <a:gd name="adj" fmla="val 7692"/>
             </a:avLst>
           </a:prstGeom>
           <a:solidFill>
@@ -22168,8 +22156,8 @@
         </p:nvSpPr>
         <p:spPr>
           <a:xfrm>
-            <a:off x="4447032" y="4169664"/>
-            <a:ext cx="685800" cy="384048"/>
+            <a:off x="4129430" y="4169664"/>
+            <a:ext cx="676656" cy="475488"/>
           </a:xfrm>
           <a:prstGeom prst="rect">
             <a:avLst/>
@@ -22193,7 +22181,7 @@
                 <a:ea typeface="Trebuchet MS" pitchFamily="34" charset="-122"/>
                 <a:cs typeface="Trebuchet MS" pitchFamily="34" charset="-120"/>
               </a:rPr>
-              <a:t>e</a:t>
+              <a:t>j</a:t>
             </a:r>
             <a:endParaRPr lang="en-US" sz="900" dirty="0"/>
           </a:p>
@@ -22207,12 +22195,12 @@
         </p:nvSpPr>
         <p:spPr>
           <a:xfrm>
-            <a:off x="5254752" y="4169664"/>
-            <a:ext cx="685800" cy="384048"/>
+            <a:off x="4855464" y="4169664"/>
+            <a:ext cx="676656" cy="475488"/>
           </a:xfrm>
           <a:prstGeom prst="rect">
             <a:avLst>
-              <a:gd name="adj" fmla="val 9524"/>
+              <a:gd name="adj" fmla="val 7692"/>
             </a:avLst>
           </a:prstGeom>
           <a:solidFill>
@@ -22234,8 +22222,8 @@
         </p:nvSpPr>
         <p:spPr>
           <a:xfrm>
-            <a:off x="5254752" y="4169664"/>
-            <a:ext cx="685800" cy="384048"/>
+            <a:off x="4855464" y="4169664"/>
+            <a:ext cx="676656" cy="475488"/>
           </a:xfrm>
           <a:prstGeom prst="rect">
             <a:avLst/>
@@ -22259,7 +22247,7 @@
                 <a:ea typeface="Trebuchet MS" pitchFamily="34" charset="-122"/>
                 <a:cs typeface="Trebuchet MS" pitchFamily="34" charset="-120"/>
               </a:rPr>
-              <a:t>c</a:t>
+              <a:t>e</a:t>
             </a:r>
             <a:endParaRPr lang="en-US" sz="900" dirty="0"/>
           </a:p>
@@ -22273,12 +22261,12 @@
         </p:nvSpPr>
         <p:spPr>
           <a:xfrm>
-            <a:off x="6062472" y="4169664"/>
-            <a:ext cx="685800" cy="384048"/>
+            <a:off x="5581498" y="4169664"/>
+            <a:ext cx="676656" cy="475488"/>
           </a:xfrm>
           <a:prstGeom prst="rect">
             <a:avLst>
-              <a:gd name="adj" fmla="val 9524"/>
+              <a:gd name="adj" fmla="val 7692"/>
             </a:avLst>
           </a:prstGeom>
           <a:solidFill>
@@ -22300,8 +22288,8 @@
         </p:nvSpPr>
         <p:spPr>
           <a:xfrm>
-            <a:off x="6062472" y="4169664"/>
-            <a:ext cx="685800" cy="384048"/>
+            <a:off x="5581498" y="4169664"/>
+            <a:ext cx="676656" cy="475488"/>
           </a:xfrm>
           <a:prstGeom prst="rect">
             <a:avLst/>
@@ -22325,7 +22313,7 @@
                 <a:ea typeface="Trebuchet MS" pitchFamily="34" charset="-122"/>
                 <a:cs typeface="Trebuchet MS" pitchFamily="34" charset="-120"/>
               </a:rPr>
-              <a:t>t</a:t>
+              <a:t>c</a:t>
             </a:r>
             <a:endParaRPr lang="en-US" sz="900" dirty="0"/>
           </a:p>
@@ -22339,12 +22327,12 @@
         </p:nvSpPr>
         <p:spPr>
           <a:xfrm>
-            <a:off x="6870192" y="4169664"/>
-            <a:ext cx="685800" cy="384048"/>
+            <a:off x="6307531" y="4169664"/>
+            <a:ext cx="676656" cy="475488"/>
           </a:xfrm>
           <a:prstGeom prst="rect">
             <a:avLst>
-              <a:gd name="adj" fmla="val 9524"/>
+              <a:gd name="adj" fmla="val 7692"/>
             </a:avLst>
           </a:prstGeom>
           <a:solidFill>
@@ -22366,8 +22354,8 @@
         </p:nvSpPr>
         <p:spPr>
           <a:xfrm>
-            <a:off x="6870192" y="4169664"/>
-            <a:ext cx="685800" cy="384048"/>
+            <a:off x="6307531" y="4169664"/>
+            <a:ext cx="676656" cy="475488"/>
           </a:xfrm>
           <a:prstGeom prst="rect">
             <a:avLst/>
@@ -22391,7 +22379,7 @@
                 <a:ea typeface="Trebuchet MS" pitchFamily="34" charset="-122"/>
                 <a:cs typeface="Trebuchet MS" pitchFamily="34" charset="-120"/>
               </a:rPr>
-              <a:t>io</a:t>
+              <a:t>t</a:t>
             </a:r>
             <a:endParaRPr lang="en-US" sz="900" dirty="0"/>
           </a:p>
@@ -22399,57 +22387,18 @@
       </p:sp>
       <p:sp>
         <p:nvSpPr>
-          <p:cNvPr id="53" name="Text 51"/>
-          <p:cNvSpPr/>
-          <p:nvPr/>
-        </p:nvSpPr>
-        <p:spPr>
-          <a:xfrm>
-            <a:off x="6870192" y="4572000"/>
-            <a:ext cx="685800" cy="219456"/>
-          </a:xfrm>
-          <a:prstGeom prst="rect">
-            <a:avLst/>
-          </a:prstGeom>
-          <a:noFill/>
-          <a:ln/>
-        </p:spPr>
-        <p:txBody>
-          <a:bodyPr wrap="square" lIns="0" tIns="0" rIns="0" bIns="0" rtlCol="0" anchor="t"/>
-          <a:lstStyle/>
-          <a:p>
-            <a:pPr algn="ctr" indent="0" marL="0">
-              <a:buNone/>
-            </a:pPr>
-            <a:r>
-              <a:rPr lang="en-US" sz="750" i="1" dirty="0">
-                <a:solidFill>
-                  <a:srgbClr val="94A3B8"/>
-                </a:solidFill>
-                <a:latin typeface="Calibri" pitchFamily="34" charset="0"/>
-                <a:ea typeface="Calibri" pitchFamily="34" charset="-122"/>
-                <a:cs typeface="Calibri" pitchFamily="34" charset="-120"/>
-              </a:rPr>
-              <a:t>/sh/</a:t>
-            </a:r>
-            <a:endParaRPr lang="en-US" sz="750" dirty="0"/>
-          </a:p>
-        </p:txBody>
-      </p:sp>
-      <p:sp>
-        <p:nvSpPr>
-          <p:cNvPr id="54" name="Shape 52"/>
-          <p:cNvSpPr/>
-          <p:nvPr/>
-        </p:nvSpPr>
-        <p:spPr>
-          <a:xfrm>
-            <a:off x="7677912" y="4169664"/>
-            <a:ext cx="685800" cy="384048"/>
+          <p:cNvPr id="53" name="Shape 51"/>
+          <p:cNvSpPr/>
+          <p:nvPr/>
+        </p:nvSpPr>
+        <p:spPr>
+          <a:xfrm>
+            <a:off x="7033565" y="4169664"/>
+            <a:ext cx="676656" cy="475488"/>
           </a:xfrm>
           <a:prstGeom prst="rect">
             <a:avLst>
-              <a:gd name="adj" fmla="val 9524"/>
+              <a:gd name="adj" fmla="val 7692"/>
             </a:avLst>
           </a:prstGeom>
           <a:solidFill>
@@ -22465,14 +22414,14 @@
       </p:sp>
       <p:sp>
         <p:nvSpPr>
-          <p:cNvPr id="55" name="Text 53"/>
-          <p:cNvSpPr/>
-          <p:nvPr/>
-        </p:nvSpPr>
-        <p:spPr>
-          <a:xfrm>
-            <a:off x="7677912" y="4169664"/>
-            <a:ext cx="685800" cy="384048"/>
+          <p:cNvPr id="54" name="Text 52"/>
+          <p:cNvSpPr/>
+          <p:nvPr/>
+        </p:nvSpPr>
+        <p:spPr>
+          <a:xfrm>
+            <a:off x="7033565" y="4169664"/>
+            <a:ext cx="676656" cy="475488"/>
           </a:xfrm>
           <a:prstGeom prst="rect">
             <a:avLst/>
@@ -22496,7 +22445,73 @@
                 <a:ea typeface="Trebuchet MS" pitchFamily="34" charset="-122"/>
                 <a:cs typeface="Trebuchet MS" pitchFamily="34" charset="-120"/>
               </a:rPr>
-              <a:t>n</a:t>
+              <a:t>i</a:t>
+            </a:r>
+            <a:endParaRPr lang="en-US" sz="900" dirty="0"/>
+          </a:p>
+        </p:txBody>
+      </p:sp>
+      <p:sp>
+        <p:nvSpPr>
+          <p:cNvPr id="55" name="Shape 53"/>
+          <p:cNvSpPr/>
+          <p:nvPr/>
+        </p:nvSpPr>
+        <p:spPr>
+          <a:xfrm>
+            <a:off x="7759598" y="4169664"/>
+            <a:ext cx="676656" cy="475488"/>
+          </a:xfrm>
+          <a:prstGeom prst="rect">
+            <a:avLst>
+              <a:gd name="adj" fmla="val 7692"/>
+            </a:avLst>
+          </a:prstGeom>
+          <a:solidFill>
+            <a:srgbClr val="FFFFFF"/>
+          </a:solidFill>
+          <a:ln w="12700">
+            <a:solidFill>
+              <a:srgbClr val="DB2777"/>
+            </a:solidFill>
+            <a:prstDash val="solid"/>
+          </a:ln>
+        </p:spPr>
+      </p:sp>
+      <p:sp>
+        <p:nvSpPr>
+          <p:cNvPr id="56" name="Text 54"/>
+          <p:cNvSpPr/>
+          <p:nvPr/>
+        </p:nvSpPr>
+        <p:spPr>
+          <a:xfrm>
+            <a:off x="7759598" y="4169664"/>
+            <a:ext cx="676656" cy="475488"/>
+          </a:xfrm>
+          <a:prstGeom prst="rect">
+            <a:avLst/>
+          </a:prstGeom>
+          <a:noFill/>
+          <a:ln/>
+        </p:spPr>
+        <p:txBody>
+          <a:bodyPr wrap="square" lIns="0" tIns="0" rIns="0" bIns="0" rtlCol="0" anchor="ctr"/>
+          <a:lstStyle/>
+          <a:p>
+            <a:pPr algn="ctr" indent="0" marL="0">
+              <a:buNone/>
+            </a:pPr>
+            <a:r>
+              <a:rPr lang="en-US" sz="900" b="1" dirty="0">
+                <a:solidFill>
+                  <a:srgbClr val="9D174D"/>
+                </a:solidFill>
+                <a:latin typeface="Trebuchet MS" pitchFamily="34" charset="0"/>
+                <a:ea typeface="Trebuchet MS" pitchFamily="34" charset="-122"/>
+                <a:cs typeface="Trebuchet MS" pitchFamily="34" charset="-120"/>
+              </a:rPr>
+              <a:t>le</a:t>
             </a:r>
             <a:endParaRPr lang="en-US" sz="900" dirty="0"/>
           </a:p>
@@ -23932,7 +23947,7 @@
                 <a:ea typeface="Calibri" pitchFamily="34" charset="-122"/>
                 <a:cs typeface="Calibri" pitchFamily="34" charset="-120"/>
               </a:rPr>
-              <a:t>down, away</a:t>
+              <a:t>down or away</a:t>
             </a:r>
             <a:endParaRPr lang="en-US" sz="850" dirty="0"/>
           </a:p>
@@ -24044,7 +24059,7 @@
                 <a:ea typeface="Calibri" pitchFamily="34" charset="-122"/>
                 <a:cs typeface="Calibri" pitchFamily="34" charset="-120"/>
               </a:rPr>
-              <a:t>throw</a:t>
+              <a:t>to throw</a:t>
             </a:r>
             <a:endParaRPr lang="en-US" sz="850" dirty="0"/>
           </a:p>
@@ -24156,7 +24171,7 @@
                 <a:ea typeface="Calibri" pitchFamily="34" charset="-122"/>
                 <a:cs typeface="Calibri" pitchFamily="34" charset="-120"/>
               </a:rPr>
-              <a:t>past tense or describing state</a:t>
+              <a:t>past tense or having a quality</a:t>
             </a:r>
             <a:endParaRPr lang="en-US" sz="850" dirty="0"/>
           </a:p>
@@ -25748,7 +25763,7 @@
                 <a:ea typeface="Calibri" pitchFamily="34" charset="-122"/>
                 <a:cs typeface="Calibri" pitchFamily="34" charset="-120"/>
               </a:rPr>
-              <a:t>down, away</a:t>
+              <a:t>down or away</a:t>
             </a:r>
             <a:endParaRPr lang="en-US" sz="850" dirty="0"/>
           </a:p>
@@ -25860,7 +25875,7 @@
                 <a:ea typeface="Calibri" pitchFamily="34" charset="-122"/>
                 <a:cs typeface="Calibri" pitchFamily="34" charset="-120"/>
               </a:rPr>
-              <a:t>throw</a:t>
+              <a:t>to throw</a:t>
             </a:r>
             <a:endParaRPr lang="en-US" sz="850" dirty="0"/>
           </a:p>
@@ -25972,7 +25987,7 @@
                 <a:ea typeface="Calibri" pitchFamily="34" charset="-122"/>
                 <a:cs typeface="Calibri" pitchFamily="34" charset="-120"/>
               </a:rPr>
-              <a:t>past tense or describing state</a:t>
+              <a:t>past tense or having a quality</a:t>
             </a:r>
             <a:endParaRPr lang="en-US" sz="850" dirty="0"/>
           </a:p>
@@ -27082,7 +27097,7 @@
                 <a:ea typeface="Calibri" pitchFamily="34" charset="-122"/>
                 <a:cs typeface="Calibri" pitchFamily="34" charset="-120"/>
               </a:rPr>
-              <a:t>down, away</a:t>
+              <a:t>down or away</a:t>
             </a:r>
             <a:endParaRPr lang="en-US" sz="850" dirty="0"/>
           </a:p>
@@ -27194,7 +27209,7 @@
                 <a:ea typeface="Calibri" pitchFamily="34" charset="-122"/>
                 <a:cs typeface="Calibri" pitchFamily="34" charset="-120"/>
               </a:rPr>
-              <a:t>throw</a:t>
+              <a:t>to throw</a:t>
             </a:r>
             <a:endParaRPr lang="en-US" sz="850" dirty="0"/>
           </a:p>
@@ -27306,7 +27321,7 @@
                 <a:ea typeface="Calibri" pitchFamily="34" charset="-122"/>
                 <a:cs typeface="Calibri" pitchFamily="34" charset="-120"/>
               </a:rPr>
-              <a:t>past tense or describing state</a:t>
+              <a:t>past tense or having a quality</a:t>
             </a:r>
             <a:endParaRPr lang="en-US" sz="850" dirty="0"/>
           </a:p>
@@ -28727,7 +28742,7 @@
                 <a:ea typeface="Trebuchet MS" pitchFamily="34" charset="-122"/>
                 <a:cs typeface="Trebuchet MS" pitchFamily="34" charset="-120"/>
               </a:rPr>
-              <a:t>object</a:t>
+              <a:t>eject</a:t>
             </a:r>
             <a:endParaRPr lang="en-US" sz="2800" dirty="0"/>
           </a:p>
@@ -29554,7 +29569,7 @@
                 <a:ea typeface="Trebuchet MS" pitchFamily="34" charset="-122"/>
                 <a:cs typeface="Trebuchet MS" pitchFamily="34" charset="-120"/>
               </a:rPr>
-              <a:t>object</a:t>
+              <a:t>eject</a:t>
             </a:r>
             <a:endParaRPr lang="en-US" sz="2800" dirty="0"/>
           </a:p>
@@ -29693,7 +29708,7 @@
                 <a:ea typeface="Trebuchet MS" pitchFamily="34" charset="-122"/>
                 <a:cs typeface="Trebuchet MS" pitchFamily="34" charset="-120"/>
               </a:rPr>
-              <a:t>ob</a:t>
+              <a:t>e</a:t>
             </a:r>
             <a:endParaRPr lang="en-US" sz="1300" dirty="0"/>
           </a:p>
@@ -29732,7 +29747,7 @@
                 <a:ea typeface="Calibri" pitchFamily="34" charset="-122"/>
                 <a:cs typeface="Calibri" pitchFamily="34" charset="-120"/>
               </a:rPr>
-              <a:t>against, toward</a:t>
+              <a:t>out</a:t>
             </a:r>
             <a:endParaRPr lang="en-US" sz="850" dirty="0"/>
           </a:p>
@@ -29844,7 +29859,7 @@
                 <a:ea typeface="Calibri" pitchFamily="34" charset="-122"/>
                 <a:cs typeface="Calibri" pitchFamily="34" charset="-120"/>
               </a:rPr>
-              <a:t>throw</a:t>
+              <a:t>to throw</a:t>
             </a:r>
             <a:endParaRPr lang="en-US" sz="850" dirty="0"/>
           </a:p>
@@ -30539,7 +30554,7 @@
                 <a:ea typeface="Trebuchet MS" pitchFamily="34" charset="-122"/>
                 <a:cs typeface="Trebuchet MS" pitchFamily="34" charset="-120"/>
               </a:rPr>
-              <a:t>object</a:t>
+              <a:t>eject</a:t>
             </a:r>
             <a:endParaRPr lang="en-US" sz="2800" dirty="0"/>
           </a:p>
@@ -30678,7 +30693,7 @@
                 <a:ea typeface="Trebuchet MS" pitchFamily="34" charset="-122"/>
                 <a:cs typeface="Trebuchet MS" pitchFamily="34" charset="-120"/>
               </a:rPr>
-              <a:t>ob</a:t>
+              <a:t>e</a:t>
             </a:r>
             <a:endParaRPr lang="en-US" sz="1300" dirty="0"/>
           </a:p>
@@ -30717,7 +30732,7 @@
                 <a:ea typeface="Calibri" pitchFamily="34" charset="-122"/>
                 <a:cs typeface="Calibri" pitchFamily="34" charset="-120"/>
               </a:rPr>
-              <a:t>against, toward</a:t>
+              <a:t>out</a:t>
             </a:r>
             <a:endParaRPr lang="en-US" sz="850" dirty="0"/>
           </a:p>
@@ -30829,7 +30844,7 @@
                 <a:ea typeface="Calibri" pitchFamily="34" charset="-122"/>
                 <a:cs typeface="Calibri" pitchFamily="34" charset="-120"/>
               </a:rPr>
-              <a:t>throw</a:t>
+              <a:t>to throw</a:t>
             </a:r>
             <a:endParaRPr lang="en-US" sz="850" dirty="0"/>
           </a:p>
@@ -30988,7 +31003,7 @@
                 <a:ea typeface="Trebuchet MS" pitchFamily="34" charset="-122"/>
                 <a:cs typeface="Trebuchet MS" pitchFamily="34" charset="-120"/>
               </a:rPr>
-              <a:t>ob</a:t>
+              <a:t>e</a:t>
             </a:r>
             <a:endParaRPr lang="en-US" sz="1400" dirty="0"/>
           </a:p>
@@ -31656,7 +31671,7 @@
                 <a:ea typeface="Trebuchet MS" pitchFamily="34" charset="-122"/>
                 <a:cs typeface="Trebuchet MS" pitchFamily="34" charset="-120"/>
               </a:rPr>
-              <a:t>object</a:t>
+              <a:t>eject</a:t>
             </a:r>
             <a:endParaRPr lang="en-US" sz="2800" dirty="0"/>
           </a:p>
@@ -31795,7 +31810,7 @@
                 <a:ea typeface="Trebuchet MS" pitchFamily="34" charset="-122"/>
                 <a:cs typeface="Trebuchet MS" pitchFamily="34" charset="-120"/>
               </a:rPr>
-              <a:t>ob</a:t>
+              <a:t>e</a:t>
             </a:r>
             <a:endParaRPr lang="en-US" sz="1300" dirty="0"/>
           </a:p>
@@ -31834,7 +31849,7 @@
                 <a:ea typeface="Calibri" pitchFamily="34" charset="-122"/>
                 <a:cs typeface="Calibri" pitchFamily="34" charset="-120"/>
               </a:rPr>
-              <a:t>against, toward</a:t>
+              <a:t>out</a:t>
             </a:r>
             <a:endParaRPr lang="en-US" sz="850" dirty="0"/>
           </a:p>
@@ -31946,7 +31961,7 @@
                 <a:ea typeface="Calibri" pitchFamily="34" charset="-122"/>
                 <a:cs typeface="Calibri" pitchFamily="34" charset="-120"/>
               </a:rPr>
-              <a:t>throw</a:t>
+              <a:t>to throw</a:t>
             </a:r>
             <a:endParaRPr lang="en-US" sz="850" dirty="0"/>
           </a:p>
@@ -32105,7 +32120,7 @@
                 <a:ea typeface="Trebuchet MS" pitchFamily="34" charset="-122"/>
                 <a:cs typeface="Trebuchet MS" pitchFamily="34" charset="-120"/>
               </a:rPr>
-              <a:t>ob</a:t>
+              <a:t>e</a:t>
             </a:r>
             <a:endParaRPr lang="en-US" sz="1400" dirty="0"/>
           </a:p>
@@ -32291,11 +32306,11 @@
         <p:spPr>
           <a:xfrm>
             <a:off x="1874520" y="4096512"/>
-            <a:ext cx="6903720" cy="804672"/>
+            <a:ext cx="6903720" cy="658368"/>
           </a:xfrm>
           <a:prstGeom prst="rect">
             <a:avLst>
-              <a:gd name="adj" fmla="val 6818"/>
+              <a:gd name="adj" fmla="val 8333"/>
             </a:avLst>
           </a:prstGeom>
           <a:solidFill>
@@ -32318,11 +32333,11 @@
         <p:spPr>
           <a:xfrm>
             <a:off x="2427732" y="4169664"/>
-            <a:ext cx="685800" cy="384048"/>
+            <a:ext cx="685800" cy="475488"/>
           </a:xfrm>
           <a:prstGeom prst="rect">
             <a:avLst>
-              <a:gd name="adj" fmla="val 9524"/>
+              <a:gd name="adj" fmla="val 7692"/>
             </a:avLst>
           </a:prstGeom>
           <a:solidFill>
@@ -32345,7 +32360,7 @@
         <p:spPr>
           <a:xfrm>
             <a:off x="2427732" y="4169664"/>
-            <a:ext cx="685800" cy="384048"/>
+            <a:ext cx="685800" cy="475488"/>
           </a:xfrm>
           <a:prstGeom prst="rect">
             <a:avLst/>
@@ -32369,7 +32384,7 @@
                 <a:ea typeface="Trebuchet MS" pitchFamily="34" charset="-122"/>
                 <a:cs typeface="Trebuchet MS" pitchFamily="34" charset="-120"/>
               </a:rPr>
-              <a:t>o</a:t>
+              <a:t>e</a:t>
             </a:r>
             <a:endParaRPr lang="en-US" sz="900" dirty="0"/>
           </a:p>
@@ -32384,11 +32399,11 @@
         <p:spPr>
           <a:xfrm>
             <a:off x="3639312" y="4169664"/>
-            <a:ext cx="685800" cy="384048"/>
+            <a:ext cx="685800" cy="475488"/>
           </a:xfrm>
           <a:prstGeom prst="rect">
             <a:avLst>
-              <a:gd name="adj" fmla="val 9524"/>
+              <a:gd name="adj" fmla="val 7692"/>
             </a:avLst>
           </a:prstGeom>
           <a:solidFill>
@@ -32411,7 +32426,7 @@
         <p:spPr>
           <a:xfrm>
             <a:off x="3639312" y="4169664"/>
-            <a:ext cx="685800" cy="384048"/>
+            <a:ext cx="685800" cy="475488"/>
           </a:xfrm>
           <a:prstGeom prst="rect">
             <a:avLst/>
@@ -32435,7 +32450,7 @@
                 <a:ea typeface="Trebuchet MS" pitchFamily="34" charset="-122"/>
                 <a:cs typeface="Trebuchet MS" pitchFamily="34" charset="-120"/>
               </a:rPr>
-              <a:t>b</a:t>
+              <a:t>j</a:t>
             </a:r>
             <a:endParaRPr lang="en-US" sz="900" dirty="0"/>
           </a:p>
@@ -32450,11 +32465,11 @@
         <p:spPr>
           <a:xfrm>
             <a:off x="4850892" y="4169664"/>
-            <a:ext cx="685800" cy="384048"/>
+            <a:ext cx="685800" cy="475488"/>
           </a:xfrm>
           <a:prstGeom prst="rect">
             <a:avLst>
-              <a:gd name="adj" fmla="val 9524"/>
+              <a:gd name="adj" fmla="val 7692"/>
             </a:avLst>
           </a:prstGeom>
           <a:solidFill>
@@ -32477,7 +32492,7 @@
         <p:spPr>
           <a:xfrm>
             <a:off x="4850892" y="4169664"/>
-            <a:ext cx="685800" cy="384048"/>
+            <a:ext cx="685800" cy="475488"/>
           </a:xfrm>
           <a:prstGeom prst="rect">
             <a:avLst/>
@@ -32501,7 +32516,7 @@
                 <a:ea typeface="Trebuchet MS" pitchFamily="34" charset="-122"/>
                 <a:cs typeface="Trebuchet MS" pitchFamily="34" charset="-120"/>
               </a:rPr>
-              <a:t>j</a:t>
+              <a:t>e</a:t>
             </a:r>
             <a:endParaRPr lang="en-US" sz="900" dirty="0"/>
           </a:p>
@@ -32516,11 +32531,11 @@
         <p:spPr>
           <a:xfrm>
             <a:off x="6062472" y="4169664"/>
-            <a:ext cx="685800" cy="384048"/>
+            <a:ext cx="685800" cy="475488"/>
           </a:xfrm>
           <a:prstGeom prst="rect">
             <a:avLst>
-              <a:gd name="adj" fmla="val 9524"/>
+              <a:gd name="adj" fmla="val 7692"/>
             </a:avLst>
           </a:prstGeom>
           <a:solidFill>
@@ -32543,7 +32558,7 @@
         <p:spPr>
           <a:xfrm>
             <a:off x="6062472" y="4169664"/>
-            <a:ext cx="685800" cy="384048"/>
+            <a:ext cx="685800" cy="475488"/>
           </a:xfrm>
           <a:prstGeom prst="rect">
             <a:avLst/>
@@ -32567,7 +32582,7 @@
                 <a:ea typeface="Trebuchet MS" pitchFamily="34" charset="-122"/>
                 <a:cs typeface="Trebuchet MS" pitchFamily="34" charset="-120"/>
               </a:rPr>
-              <a:t>e</a:t>
+              <a:t>c</a:t>
             </a:r>
             <a:endParaRPr lang="en-US" sz="900" dirty="0"/>
           </a:p>
@@ -32582,11 +32597,11 @@
         <p:spPr>
           <a:xfrm>
             <a:off x="7274052" y="4169664"/>
-            <a:ext cx="685800" cy="384048"/>
+            <a:ext cx="685800" cy="475488"/>
           </a:xfrm>
           <a:prstGeom prst="rect">
             <a:avLst>
-              <a:gd name="adj" fmla="val 9524"/>
+              <a:gd name="adj" fmla="val 7692"/>
             </a:avLst>
           </a:prstGeom>
           <a:solidFill>
@@ -32609,7 +32624,7 @@
         <p:spPr>
           <a:xfrm>
             <a:off x="7274052" y="4169664"/>
-            <a:ext cx="685800" cy="384048"/>
+            <a:ext cx="685800" cy="475488"/>
           </a:xfrm>
           <a:prstGeom prst="rect">
             <a:avLst/>
@@ -32633,48 +32648,9 @@
                 <a:ea typeface="Trebuchet MS" pitchFamily="34" charset="-122"/>
                 <a:cs typeface="Trebuchet MS" pitchFamily="34" charset="-120"/>
               </a:rPr>
-              <a:t>ct</a:t>
+              <a:t>t</a:t>
             </a:r>
             <a:endParaRPr lang="en-US" sz="900" dirty="0"/>
-          </a:p>
-        </p:txBody>
-      </p:sp>
-      <p:sp>
-        <p:nvSpPr>
-          <p:cNvPr id="43" name="Text 41"/>
-          <p:cNvSpPr/>
-          <p:nvPr/>
-        </p:nvSpPr>
-        <p:spPr>
-          <a:xfrm>
-            <a:off x="7274052" y="4572000"/>
-            <a:ext cx="685800" cy="219456"/>
-          </a:xfrm>
-          <a:prstGeom prst="rect">
-            <a:avLst/>
-          </a:prstGeom>
-          <a:noFill/>
-          <a:ln/>
-        </p:spPr>
-        <p:txBody>
-          <a:bodyPr wrap="square" lIns="0" tIns="0" rIns="0" bIns="0" rtlCol="0" anchor="t"/>
-          <a:lstStyle/>
-          <a:p>
-            <a:pPr algn="ctr" indent="0" marL="0">
-              <a:buNone/>
-            </a:pPr>
-            <a:r>
-              <a:rPr lang="en-US" sz="750" i="1" dirty="0">
-                <a:solidFill>
-                  <a:srgbClr val="94A3B8"/>
-                </a:solidFill>
-                <a:latin typeface="Calibri" pitchFamily="34" charset="0"/>
-                <a:ea typeface="Calibri" pitchFamily="34" charset="-122"/>
-                <a:cs typeface="Calibri" pitchFamily="34" charset="-120"/>
-              </a:rPr>
-              <a:t>/kt/</a:t>
-            </a:r>
-            <a:endParaRPr lang="en-US" sz="750" dirty="0"/>
           </a:p>
         </p:txBody>
       </p:sp>
@@ -35021,7 +34997,7 @@
                 <a:ea typeface="Trebuchet MS" pitchFamily="34" charset="-122"/>
                 <a:cs typeface="Trebuchet MS" pitchFamily="34" charset="-120"/>
               </a:rPr>
-              <a:t>-or</a:t>
+              <a:t>-ile</a:t>
             </a:r>
             <a:endParaRPr lang="en-US" sz="1300" dirty="0"/>
           </a:p>
@@ -35174,7 +35150,7 @@
                 <a:ea typeface="Trebuchet MS" pitchFamily="34" charset="-122"/>
                 <a:cs typeface="Trebuchet MS" pitchFamily="34" charset="-120"/>
               </a:rPr>
-              <a:t>-ile</a:t>
+              <a:t>-or</a:t>
             </a:r>
             <a:endParaRPr lang="en-US" sz="1300" dirty="0"/>
           </a:p>
@@ -35279,7 +35255,7 @@
                 <a:ea typeface="Trebuchet MS" pitchFamily="34" charset="-122"/>
                 <a:cs typeface="Trebuchet MS" pitchFamily="34" charset="-120"/>
               </a:rPr>
-              <a:t>reject</a:t>
+              <a:t>inject</a:t>
             </a:r>
             <a:endParaRPr lang="en-US" sz="1200" dirty="0"/>
           </a:p>
@@ -35345,7 +35321,7 @@
                 <a:ea typeface="Trebuchet MS" pitchFamily="34" charset="-122"/>
                 <a:cs typeface="Trebuchet MS" pitchFamily="34" charset="-120"/>
               </a:rPr>
-              <a:t>project</a:t>
+              <a:t>reject</a:t>
             </a:r>
             <a:endParaRPr lang="en-US" sz="1200" dirty="0"/>
           </a:p>
@@ -35411,7 +35387,7 @@
                 <a:ea typeface="Trebuchet MS" pitchFamily="34" charset="-122"/>
                 <a:cs typeface="Trebuchet MS" pitchFamily="34" charset="-120"/>
               </a:rPr>
-              <a:t>inject</a:t>
+              <a:t>project</a:t>
             </a:r>
             <a:endParaRPr lang="en-US" sz="1200" dirty="0"/>
           </a:p>
@@ -35741,7 +35717,7 @@
                 <a:ea typeface="Trebuchet MS" pitchFamily="34" charset="-122"/>
                 <a:cs typeface="Trebuchet MS" pitchFamily="34" charset="-120"/>
               </a:rPr>
-              <a:t>projectile</a:t>
+              <a:t>trajectory</a:t>
             </a:r>
             <a:endParaRPr lang="en-US" sz="1200" dirty="0"/>
           </a:p>
@@ -36929,7 +36905,7 @@
                 <a:ea typeface="Calibri" pitchFamily="34" charset="-122"/>
                 <a:cs typeface="Calibri" pitchFamily="34" charset="-120"/>
               </a:rPr>
-              <a:t>1.  The root 'ject' comes from a Latin word meaning to throw.</a:t>
+              <a:t>1.  The word 'eject' contains the root 'ject'.</a:t>
             </a:r>
             <a:endParaRPr lang="en-US" sz="1300" dirty="0"/>
           </a:p>
@@ -37068,7 +37044,7 @@
                 <a:ea typeface="Calibri" pitchFamily="34" charset="-122"/>
                 <a:cs typeface="Calibri" pitchFamily="34" charset="-120"/>
               </a:rPr>
-              <a:t>2.  The word 'inject' means to throw something outward away from the body.</a:t>
+              <a:t>2.  The prefix 're' in 'reject' means back, so reject means to throw back.</a:t>
             </a:r>
             <a:endParaRPr lang="en-US" sz="1300" dirty="0"/>
           </a:p>
@@ -37091,11 +37067,11 @@
             </a:avLst>
           </a:prstGeom>
           <a:solidFill>
-            <a:srgbClr val="FEE2E2"/>
-          </a:solidFill>
-          <a:ln w="12700">
-            <a:solidFill>
-              <a:srgbClr val="DC2626"/>
+            <a:srgbClr val="DCFCE7"/>
+          </a:solidFill>
+          <a:ln w="12700">
+            <a:solidFill>
+              <a:srgbClr val="16A34A"/>
             </a:solidFill>
             <a:prstDash val="solid"/>
           </a:ln>
@@ -37128,13 +37104,13 @@
             <a:r>
               <a:rPr lang="en-US" sz="1100" b="1" dirty="0">
                 <a:solidFill>
-                  <a:srgbClr val="DC2626"/>
+                  <a:srgbClr val="16A34A"/>
                 </a:solidFill>
                 <a:latin typeface="Trebuchet MS" pitchFamily="34" charset="0"/>
                 <a:ea typeface="Trebuchet MS" pitchFamily="34" charset="-122"/>
                 <a:cs typeface="Trebuchet MS" pitchFamily="34" charset="-120"/>
               </a:rPr>
-              <a:t>FALSE</a:t>
+              <a:t>TRUE</a:t>
             </a:r>
             <a:endParaRPr lang="en-US" sz="1100" dirty="0"/>
           </a:p>
@@ -37207,7 +37183,7 @@
                 <a:ea typeface="Calibri" pitchFamily="34" charset="-122"/>
                 <a:cs typeface="Calibri" pitchFamily="34" charset="-120"/>
               </a:rPr>
-              <a:t>3.  A projectile is something that is thrown or launched through the air.</a:t>
+              <a:t>3.  The word 'inject' means to throw something away from you.</a:t>
             </a:r>
             <a:endParaRPr lang="en-US" sz="1300" dirty="0"/>
           </a:p>
@@ -37230,11 +37206,11 @@
             </a:avLst>
           </a:prstGeom>
           <a:solidFill>
-            <a:srgbClr val="DCFCE7"/>
-          </a:solidFill>
-          <a:ln w="12700">
-            <a:solidFill>
-              <a:srgbClr val="16A34A"/>
+            <a:srgbClr val="FEE2E2"/>
+          </a:solidFill>
+          <a:ln w="12700">
+            <a:solidFill>
+              <a:srgbClr val="DC2626"/>
             </a:solidFill>
             <a:prstDash val="solid"/>
           </a:ln>
@@ -37267,13 +37243,13 @@
             <a:r>
               <a:rPr lang="en-US" sz="1100" b="1" dirty="0">
                 <a:solidFill>
-                  <a:srgbClr val="16A34A"/>
+                  <a:srgbClr val="DC2626"/>
                 </a:solidFill>
                 <a:latin typeface="Trebuchet MS" pitchFamily="34" charset="0"/>
                 <a:ea typeface="Trebuchet MS" pitchFamily="34" charset="-122"/>
                 <a:cs typeface="Trebuchet MS" pitchFamily="34" charset="-120"/>
               </a:rPr>
-              <a:t>TRUE</a:t>
+              <a:t>FALSE</a:t>
             </a:r>
             <a:endParaRPr lang="en-US" sz="1100" dirty="0"/>
           </a:p>
@@ -37346,7 +37322,7 @@
                 <a:ea typeface="Calibri" pitchFamily="34" charset="-122"/>
                 <a:cs typeface="Calibri" pitchFamily="34" charset="-120"/>
               </a:rPr>
-              <a:t>4.  The prefix 're' in 'reject' means back, so reject means to throw back.</a:t>
+              <a:t>4.  The root 'ject' originally came from a Greek word.</a:t>
             </a:r>
             <a:endParaRPr lang="en-US" sz="1300" dirty="0"/>
           </a:p>
@@ -37369,11 +37345,11 @@
             </a:avLst>
           </a:prstGeom>
           <a:solidFill>
-            <a:srgbClr val="DCFCE7"/>
-          </a:solidFill>
-          <a:ln w="12700">
-            <a:solidFill>
-              <a:srgbClr val="16A34A"/>
+            <a:srgbClr val="FEE2E2"/>
+          </a:solidFill>
+          <a:ln w="12700">
+            <a:solidFill>
+              <a:srgbClr val="DC2626"/>
             </a:solidFill>
             <a:prstDash val="solid"/>
           </a:ln>
@@ -37406,13 +37382,13 @@
             <a:r>
               <a:rPr lang="en-US" sz="1100" b="1" dirty="0">
                 <a:solidFill>
-                  <a:srgbClr val="16A34A"/>
+                  <a:srgbClr val="DC2626"/>
                 </a:solidFill>
                 <a:latin typeface="Trebuchet MS" pitchFamily="34" charset="0"/>
                 <a:ea typeface="Trebuchet MS" pitchFamily="34" charset="-122"/>
                 <a:cs typeface="Trebuchet MS" pitchFamily="34" charset="-120"/>
               </a:rPr>
-              <a:t>TRUE</a:t>
+              <a:t>FALSE</a:t>
             </a:r>
             <a:endParaRPr lang="en-US" sz="1100" dirty="0"/>
           </a:p>
@@ -37485,7 +37461,7 @@
                 <a:ea typeface="Calibri" pitchFamily="34" charset="-122"/>
                 <a:cs typeface="Calibri" pitchFamily="34" charset="-120"/>
               </a:rPr>
-              <a:t>5.  The root 'ject' comes from a Greek word meaning to carry.</a:t>
+              <a:t>5.  The root 'ject' comes from a Latin word meaning 'to throw'.</a:t>
             </a:r>
             <a:endParaRPr lang="en-US" sz="1300" dirty="0"/>
           </a:p>
@@ -37508,11 +37484,11 @@
             </a:avLst>
           </a:prstGeom>
           <a:solidFill>
-            <a:srgbClr val="FEE2E2"/>
-          </a:solidFill>
-          <a:ln w="12700">
-            <a:solidFill>
-              <a:srgbClr val="DC2626"/>
+            <a:srgbClr val="DCFCE7"/>
+          </a:solidFill>
+          <a:ln w="12700">
+            <a:solidFill>
+              <a:srgbClr val="16A34A"/>
             </a:solidFill>
             <a:prstDash val="solid"/>
           </a:ln>
@@ -37545,13 +37521,13 @@
             <a:r>
               <a:rPr lang="en-US" sz="1100" b="1" dirty="0">
                 <a:solidFill>
-                  <a:srgbClr val="DC2626"/>
+                  <a:srgbClr val="16A34A"/>
                 </a:solidFill>
                 <a:latin typeface="Trebuchet MS" pitchFamily="34" charset="0"/>
                 <a:ea typeface="Trebuchet MS" pitchFamily="34" charset="-122"/>
                 <a:cs typeface="Trebuchet MS" pitchFamily="34" charset="-120"/>
               </a:rPr>
-              <a:t>FALSE</a:t>
+              <a:t>TRUE</a:t>
             </a:r>
             <a:endParaRPr lang="en-US" sz="1100" dirty="0"/>
           </a:p>
@@ -38124,7 +38100,7 @@
                 <a:ea typeface="Trebuchet MS" pitchFamily="34" charset="-122"/>
                 <a:cs typeface="Trebuchet MS" pitchFamily="34" charset="-120"/>
               </a:rPr>
-              <a:t>reject</a:t>
+              <a:t>inject</a:t>
             </a:r>
             <a:endParaRPr lang="en-US" sz="1300" dirty="0"/>
           </a:p>
@@ -38190,7 +38166,7 @@
                 <a:ea typeface="Trebuchet MS" pitchFamily="34" charset="-122"/>
                 <a:cs typeface="Trebuchet MS" pitchFamily="34" charset="-120"/>
               </a:rPr>
-              <a:t>project</a:t>
+              <a:t>reject</a:t>
             </a:r>
             <a:endParaRPr lang="en-US" sz="1300" dirty="0"/>
           </a:p>
@@ -38256,7 +38232,7 @@
                 <a:ea typeface="Trebuchet MS" pitchFamily="34" charset="-122"/>
                 <a:cs typeface="Trebuchet MS" pitchFamily="34" charset="-120"/>
               </a:rPr>
-              <a:t>inject</a:t>
+              <a:t>project</a:t>
             </a:r>
             <a:endParaRPr lang="en-US" sz="1300" dirty="0"/>
           </a:p>
@@ -39700,7 +39676,7 @@
                 <a:ea typeface="Trebuchet MS" pitchFamily="34" charset="-122"/>
                 <a:cs typeface="Trebuchet MS" pitchFamily="34" charset="-120"/>
               </a:rPr>
-              <a:t>-or</a:t>
+              <a:t>-ile</a:t>
             </a:r>
             <a:endParaRPr lang="en-US" sz="1300" dirty="0"/>
           </a:p>
@@ -39853,7 +39829,7 @@
                 <a:ea typeface="Trebuchet MS" pitchFamily="34" charset="-122"/>
                 <a:cs typeface="Trebuchet MS" pitchFamily="34" charset="-120"/>
               </a:rPr>
-              <a:t>-ile</a:t>
+              <a:t>-or</a:t>
             </a:r>
             <a:endParaRPr lang="en-US" sz="1300" dirty="0"/>
           </a:p>
@@ -40294,7 +40270,7 @@
                 <a:ea typeface="Trebuchet MS" pitchFamily="34" charset="-122"/>
                 <a:cs typeface="Trebuchet MS" pitchFamily="34" charset="-120"/>
               </a:rPr>
-              <a:t>reject</a:t>
+              <a:t>inject</a:t>
             </a:r>
             <a:endParaRPr lang="en-US" sz="1400" dirty="0"/>
           </a:p>
@@ -40698,7 +40674,7 @@
                 <a:ea typeface="Trebuchet MS" pitchFamily="34" charset="-122"/>
                 <a:cs typeface="Trebuchet MS" pitchFamily="34" charset="-120"/>
               </a:rPr>
-              <a:t>reject</a:t>
+              <a:t>inject</a:t>
             </a:r>
             <a:endParaRPr lang="en-US" sz="1200" dirty="0"/>
           </a:p>
@@ -40764,7 +40740,7 @@
                 <a:ea typeface="Calibri" pitchFamily="34" charset="-122"/>
                 <a:cs typeface="Calibri" pitchFamily="34" charset="-120"/>
               </a:rPr>
-              <a:t>To throw liquid into something, like when a doctor injects medicine using a needle.</a:t>
+              <a:t>To throw an idea forward or show something on a screen, or a big piece of work you do at school.</a:t>
             </a:r>
             <a:endParaRPr lang="en-US" sz="1200" dirty="0"/>
           </a:p>
@@ -40837,7 +40813,7 @@
                 <a:ea typeface="Trebuchet MS" pitchFamily="34" charset="-122"/>
                 <a:cs typeface="Trebuchet MS" pitchFamily="34" charset="-120"/>
               </a:rPr>
-              <a:t>project</a:t>
+              <a:t>reject</a:t>
             </a:r>
             <a:endParaRPr lang="en-US" sz="1200" dirty="0"/>
           </a:p>
@@ -40903,7 +40879,7 @@
                 <a:ea typeface="Calibri" pitchFamily="34" charset="-122"/>
                 <a:cs typeface="Calibri" pitchFamily="34" charset="-120"/>
               </a:rPr>
-              <a:t>Something thrown under discussion, like a school subject or the topic of a conversation.</a:t>
+              <a:t>Something thrown under discussion, like a topic at school such as maths or science.</a:t>
             </a:r>
             <a:endParaRPr lang="en-US" sz="1200" dirty="0"/>
           </a:p>
@@ -40976,7 +40952,7 @@
                 <a:ea typeface="Trebuchet MS" pitchFamily="34" charset="-122"/>
                 <a:cs typeface="Trebuchet MS" pitchFamily="34" charset="-120"/>
               </a:rPr>
-              <a:t>inject</a:t>
+              <a:t>project</a:t>
             </a:r>
             <a:endParaRPr lang="en-US" sz="1200" dirty="0"/>
           </a:p>
@@ -41042,7 +41018,7 @@
                 <a:ea typeface="Calibri" pitchFamily="34" charset="-122"/>
                 <a:cs typeface="Calibri" pitchFamily="34" charset="-120"/>
               </a:rPr>
-              <a:t>To throw something back or say no to it, like rejecting an idea you don't agree with.</a:t>
+              <a:t>To push liquid into something using a needle, like when a doctor gives you a vaccination.</a:t>
             </a:r>
             <a:endParaRPr lang="en-US" sz="1200" dirty="0"/>
           </a:p>
@@ -41181,7 +41157,7 @@
                 <a:ea typeface="Calibri" pitchFamily="34" charset="-122"/>
                 <a:cs typeface="Calibri" pitchFamily="34" charset="-120"/>
               </a:rPr>
-              <a:t>Feeling thrown down or very sad and disappointed about something.</a:t>
+              <a:t>Feeling thrown down and very sad or disappointed about something.</a:t>
             </a:r>
             <a:endParaRPr lang="en-US" sz="1200" dirty="0"/>
           </a:p>
@@ -41320,7 +41296,7 @@
                 <a:ea typeface="Calibri" pitchFamily="34" charset="-122"/>
                 <a:cs typeface="Calibri" pitchFamily="34" charset="-120"/>
               </a:rPr>
-              <a:t>To throw your opinion against something, meaning you disagree with it.</a:t>
+              <a:t>To throw your feelings against something because you disagree with it, or a thing you can touch.</a:t>
             </a:r>
             <a:endParaRPr lang="en-US" sz="1200" dirty="0"/>
           </a:p>
@@ -41459,7 +41435,7 @@
                 <a:ea typeface="Calibri" pitchFamily="34" charset="-122"/>
                 <a:cs typeface="Calibri" pitchFamily="34" charset="-120"/>
               </a:rPr>
-              <a:t>To throw something out, like ejecting a disc from a player or being forced to leave somewhere.</a:t>
+              <a:t>To throw something out forcefully, like being pushed out of a seat or removing a disc from a machine.</a:t>
             </a:r>
             <a:endParaRPr lang="en-US" sz="1200" dirty="0"/>
           </a:p>
@@ -41598,7 +41574,7 @@
                 <a:ea typeface="Calibri" pitchFamily="34" charset="-122"/>
                 <a:cs typeface="Calibri" pitchFamily="34" charset="-120"/>
               </a:rPr>
-              <a:t>To throw something forward, like projecting your voice so everyone can hear, or a task you work on.</a:t>
+              <a:t>To throw something back or say no to it, like when you don't want to keep something.</a:t>
             </a:r>
             <a:endParaRPr lang="en-US" sz="1200" dirty="0"/>
           </a:p>
@@ -42093,7 +42069,7 @@
                 <a:ea typeface="Calibri" pitchFamily="34" charset="-122"/>
                 <a:cs typeface="Calibri" pitchFamily="34" charset="-120"/>
               </a:rPr>
-              <a:t>The judges decided to reject the entry because it did not follow the competition rules.</a:t>
+              <a:t>The scientist had to reject the results of the experiment because they were not accurate.</a:t>
             </a:r>
             <a:endParaRPr lang="en-US" sz="1500" dirty="0"/>
           </a:p>
@@ -42257,7 +42233,7 @@
                 <a:ea typeface="Calibri" pitchFamily="34" charset="-122"/>
                 <a:cs typeface="Calibri" pitchFamily="34" charset="-120"/>
               </a:rPr>
-              <a:t>She felt dejected after she missed the winning goal in the final minute of the match.</a:t>
+              <a:t>The teacher asked us to project our voices so everyone in the classroom could hear us clearly.</a:t>
             </a:r>
             <a:endParaRPr lang="en-US" sz="1500" dirty="0"/>
           </a:p>
@@ -42421,7 +42397,7 @@
                 <a:ea typeface="Calibri" pitchFamily="34" charset="-122"/>
                 <a:cs typeface="Calibri" pitchFamily="34" charset="-120"/>
               </a:rPr>
-              <a:t>The scientists studied the path of the projectile as it flew across the field.</a:t>
+              <a:t>After missing the goal, the player felt dejected and sat quietly on the bench.</a:t>
             </a:r>
             <a:endParaRPr lang="en-US" sz="1500" dirty="0"/>
           </a:p>

--- a/output/wordlabs-ject-3day.pptx
+++ b/output/wordlabs-ject-3day.pptx
@@ -4240,7 +4240,7 @@
                 <a:ea typeface="Calibri" pitchFamily="34" charset="-122"/>
                 <a:cs typeface="Calibri" pitchFamily="34" charset="-120"/>
               </a:rPr>
-              <a:t>"to throw or hurl"</a:t>
+              <a:t>"throw"</a:t>
             </a:r>
             <a:endParaRPr lang="en-US" sz="2200" dirty="0"/>
           </a:p>
@@ -4279,7 +4279,7 @@
                 <a:ea typeface="Calibri" pitchFamily="34" charset="-122"/>
                 <a:cs typeface="Calibri" pitchFamily="34" charset="-120"/>
               </a:rPr>
-              <a:t>Origin: Latin: jacere</a:t>
+              <a:t>Origin: Latin root</a:t>
             </a:r>
             <a:endParaRPr lang="en-US" sz="1300" dirty="0"/>
           </a:p>
@@ -5288,7 +5288,7 @@
                 <a:ea typeface="Calibri" pitchFamily="34" charset="-122"/>
                 <a:cs typeface="Calibri" pitchFamily="34" charset="-120"/>
               </a:rPr>
-              <a:t>Word Labs  •  wordlabs.app  •  Root: 'ject' = to throw or hurl</a:t>
+              <a:t>Word Labs  •  wordlabs.app  •  Root: 'ject' = throw</a:t>
             </a:r>
             <a:endParaRPr lang="en-US" sz="800" dirty="0"/>
           </a:p>
@@ -5622,7 +5622,7 @@
                 <a:ea typeface="Trebuchet MS" pitchFamily="34" charset="-122"/>
                 <a:cs typeface="Trebuchet MS" pitchFamily="34" charset="-120"/>
               </a:rPr>
-              <a:t>1</a:t>
+              <a:t>0</a:t>
             </a:r>
             <a:pPr algn="ctr" indent="0" marL="0">
               <a:buNone/>
@@ -5928,7 +5928,7 @@
                 <a:ea typeface="Calibri" pitchFamily="34" charset="-122"/>
                 <a:cs typeface="Calibri" pitchFamily="34" charset="-120"/>
               </a:rPr>
-              <a:t>Word Labs  •  wordlabs.app  •  Root: 'ject' = to throw or hurl</a:t>
+              <a:t>Word Labs  •  wordlabs.app  •  Root: 'ject' = throw</a:t>
             </a:r>
             <a:endParaRPr lang="en-US" sz="800" dirty="0"/>
           </a:p>
@@ -6040,7 +6040,7 @@
                 <a:ea typeface="Calibri" pitchFamily="34" charset="-122"/>
                 <a:cs typeface="Calibri" pitchFamily="34" charset="-120"/>
               </a:rPr>
-              <a:t>The nurse will </a:t>
+              <a:t>Our main </a:t>
             </a:r>
             <a:pPr algn="l" indent="0" marL="0">
               <a:buNone/>
@@ -6057,7 +6057,7 @@
                 <a:ea typeface="Calibri" pitchFamily="34" charset="-122"/>
                 <a:cs typeface="Calibri" pitchFamily="34" charset="-120"/>
               </a:rPr>
-              <a:t>inject</a:t>
+              <a:t>objective</a:t>
             </a:r>
             <a:pPr algn="l" indent="0" marL="0">
               <a:buNone/>
@@ -6071,7 +6071,7 @@
                 <a:ea typeface="Calibri" pitchFamily="34" charset="-122"/>
                 <a:cs typeface="Calibri" pitchFamily="34" charset="-120"/>
               </a:rPr>
-              <a:t> the medicine carefully, and the patient should not </a:t>
+              <a:t> this term is to improve our writing skills. The committee raised several </a:t>
             </a:r>
             <a:pPr algn="l" indent="0" marL="0">
               <a:buNone/>
@@ -6088,7 +6088,7 @@
                 <a:ea typeface="Calibri" pitchFamily="34" charset="-122"/>
                 <a:cs typeface="Calibri" pitchFamily="34" charset="-120"/>
               </a:rPr>
-              <a:t>reject</a:t>
+              <a:t>objections</a:t>
             </a:r>
             <a:pPr algn="l" indent="0" marL="0">
               <a:buNone/>
@@ -6102,7 +6102,7 @@
                 <a:ea typeface="Calibri" pitchFamily="34" charset="-122"/>
                 <a:cs typeface="Calibri" pitchFamily="34" charset="-120"/>
               </a:rPr>
-              <a:t> the treatment.</a:t>
+              <a:t> to the new plan.</a:t>
             </a:r>
             <a:endParaRPr lang="en-US" sz="1800" dirty="0"/>
           </a:p>
@@ -6257,7 +6257,7 @@
                 <a:ea typeface="Trebuchet MS" pitchFamily="34" charset="-122"/>
                 <a:cs typeface="Trebuchet MS" pitchFamily="34" charset="-120"/>
               </a:rPr>
-              <a:t>inject</a:t>
+              <a:t>objective</a:t>
             </a:r>
             <a:endParaRPr lang="en-US" sz="1400" dirty="0"/>
           </a:p>
@@ -6385,7 +6385,7 @@
                 <a:ea typeface="Trebuchet MS" pitchFamily="34" charset="-122"/>
                 <a:cs typeface="Trebuchet MS" pitchFamily="34" charset="-120"/>
               </a:rPr>
-              <a:t>reject</a:t>
+              <a:t>objections</a:t>
             </a:r>
             <a:endParaRPr lang="en-US" sz="1400" dirty="0"/>
           </a:p>
@@ -6716,7 +6716,7 @@
                 <a:ea typeface="Calibri" pitchFamily="34" charset="-122"/>
                 <a:cs typeface="Calibri" pitchFamily="34" charset="-120"/>
               </a:rPr>
-              <a:t>Word Labs  •  wordlabs.app  •  Root: 'ject' = to throw or hurl</a:t>
+              <a:t>Word Labs  •  wordlabs.app  •  Root: 'ject' = throw</a:t>
             </a:r>
             <a:endParaRPr lang="en-US" sz="800" dirty="0"/>
           </a:p>
@@ -6855,7 +6855,7 @@
                 <a:ea typeface="Trebuchet MS" pitchFamily="34" charset="-122"/>
                 <a:cs typeface="Trebuchet MS" pitchFamily="34" charset="-120"/>
               </a:rPr>
-              <a:t>inject</a:t>
+              <a:t>objective</a:t>
             </a:r>
             <a:endParaRPr lang="en-US" sz="2800" dirty="0"/>
           </a:p>
@@ -7543,7 +7543,7 @@
                 <a:ea typeface="Calibri" pitchFamily="34" charset="-122"/>
                 <a:cs typeface="Calibri" pitchFamily="34" charset="-120"/>
               </a:rPr>
-              <a:t>Word Labs  •  wordlabs.app  •  Root: 'ject' = to throw or hurl</a:t>
+              <a:t>Word Labs  •  wordlabs.app  •  Root: 'ject' = throw</a:t>
             </a:r>
             <a:endParaRPr lang="en-US" sz="800" dirty="0"/>
           </a:p>
@@ -7682,7 +7682,7 @@
                 <a:ea typeface="Trebuchet MS" pitchFamily="34" charset="-122"/>
                 <a:cs typeface="Trebuchet MS" pitchFamily="34" charset="-120"/>
               </a:rPr>
-              <a:t>inject</a:t>
+              <a:t>objective</a:t>
             </a:r>
             <a:endParaRPr lang="en-US" sz="2800" dirty="0"/>
           </a:p>
@@ -7762,7 +7762,7 @@
         </p:nvSpPr>
         <p:spPr>
           <a:xfrm>
-            <a:off x="2938272" y="2258568"/>
+            <a:off x="2221992" y="2258568"/>
             <a:ext cx="1828800" cy="292608"/>
           </a:xfrm>
           <a:prstGeom prst="rect">
@@ -7796,7 +7796,7 @@
         </p:nvSpPr>
         <p:spPr>
           <a:xfrm>
-            <a:off x="2938272" y="2258568"/>
+            <a:off x="2221992" y="2258568"/>
             <a:ext cx="1828800" cy="292608"/>
           </a:xfrm>
           <a:prstGeom prst="rect">
@@ -7821,7 +7821,7 @@
                 <a:ea typeface="Trebuchet MS" pitchFamily="34" charset="-122"/>
                 <a:cs typeface="Trebuchet MS" pitchFamily="34" charset="-120"/>
               </a:rPr>
-              <a:t>in</a:t>
+              <a:t>ob</a:t>
             </a:r>
             <a:endParaRPr lang="en-US" sz="1300" dirty="0"/>
           </a:p>
@@ -7835,7 +7835,7 @@
         </p:nvSpPr>
         <p:spPr>
           <a:xfrm>
-            <a:off x="2938272" y="2569464"/>
+            <a:off x="2221992" y="2569464"/>
             <a:ext cx="1828800" cy="201168"/>
           </a:xfrm>
           <a:prstGeom prst="rect">
@@ -7860,7 +7860,7 @@
                 <a:ea typeface="Calibri" pitchFamily="34" charset="-122"/>
                 <a:cs typeface="Calibri" pitchFamily="34" charset="-120"/>
               </a:rPr>
-              <a:t>into</a:t>
+              <a:t>against; in the way of; towards</a:t>
             </a:r>
             <a:endParaRPr lang="en-US" sz="850" dirty="0"/>
           </a:p>
@@ -7874,7 +7874,7 @@
         </p:nvSpPr>
         <p:spPr>
           <a:xfrm>
-            <a:off x="5803392" y="2258568"/>
+            <a:off x="4370832" y="2258568"/>
             <a:ext cx="1828800" cy="292608"/>
           </a:xfrm>
           <a:prstGeom prst="rect">
@@ -7908,7 +7908,7 @@
         </p:nvSpPr>
         <p:spPr>
           <a:xfrm>
-            <a:off x="5803392" y="2258568"/>
+            <a:off x="4370832" y="2258568"/>
             <a:ext cx="1828800" cy="292608"/>
           </a:xfrm>
           <a:prstGeom prst="rect">
@@ -7947,7 +7947,7 @@
         </p:nvSpPr>
         <p:spPr>
           <a:xfrm>
-            <a:off x="5803392" y="2569464"/>
+            <a:off x="4370832" y="2569464"/>
             <a:ext cx="1828800" cy="201168"/>
           </a:xfrm>
           <a:prstGeom prst="rect">
@@ -7972,7 +7972,7 @@
                 <a:ea typeface="Calibri" pitchFamily="34" charset="-122"/>
                 <a:cs typeface="Calibri" pitchFamily="34" charset="-120"/>
               </a:rPr>
-              <a:t>to throw</a:t>
+              <a:t>throw</a:t>
             </a:r>
             <a:endParaRPr lang="en-US" sz="850" dirty="0"/>
           </a:p>
@@ -7981,6 +7981,118 @@
       <p:sp>
         <p:nvSpPr>
           <p:cNvPr id="22" name="Shape 20"/>
+          <p:cNvSpPr/>
+          <p:nvPr/>
+        </p:nvSpPr>
+        <p:spPr>
+          <a:xfrm>
+            <a:off x="6519672" y="2258568"/>
+            <a:ext cx="1828800" cy="292608"/>
+          </a:xfrm>
+          <a:prstGeom prst="rect">
+            <a:avLst>
+              <a:gd name="adj" fmla="val 25000"/>
+            </a:avLst>
+          </a:prstGeom>
+          <a:solidFill>
+            <a:srgbClr val="FCE7F3"/>
+          </a:solidFill>
+          <a:ln w="19050">
+            <a:solidFill>
+              <a:srgbClr val="DB2777"/>
+            </a:solidFill>
+            <a:prstDash val="solid"/>
+          </a:ln>
+          <a:effectLst>
+            <a:outerShdw sx="100000" sy="100000" kx="0" ky="0" algn="bl" rotWithShape="0" blurRad="101600" dist="38100" dir="8100000">
+              <a:srgbClr val="000000">
+                <a:alpha val="12000"/>
+              </a:srgbClr>
+            </a:outerShdw>
+          </a:effectLst>
+        </p:spPr>
+      </p:sp>
+      <p:sp>
+        <p:nvSpPr>
+          <p:cNvPr id="23" name="Text 21"/>
+          <p:cNvSpPr/>
+          <p:nvPr/>
+        </p:nvSpPr>
+        <p:spPr>
+          <a:xfrm>
+            <a:off x="6519672" y="2258568"/>
+            <a:ext cx="1828800" cy="292608"/>
+          </a:xfrm>
+          <a:prstGeom prst="rect">
+            <a:avLst/>
+          </a:prstGeom>
+          <a:noFill/>
+          <a:ln/>
+        </p:spPr>
+        <p:txBody>
+          <a:bodyPr wrap="square" lIns="0" tIns="0" rIns="0" bIns="0" rtlCol="0" anchor="ctr"/>
+          <a:lstStyle/>
+          <a:p>
+            <a:pPr algn="ctr" indent="0" marL="0">
+              <a:buNone/>
+            </a:pPr>
+            <a:r>
+              <a:rPr lang="en-US" sz="1300" b="1" dirty="0">
+                <a:solidFill>
+                  <a:srgbClr val="9D174D"/>
+                </a:solidFill>
+                <a:latin typeface="Trebuchet MS" pitchFamily="34" charset="0"/>
+                <a:ea typeface="Trebuchet MS" pitchFamily="34" charset="-122"/>
+                <a:cs typeface="Trebuchet MS" pitchFamily="34" charset="-120"/>
+              </a:rPr>
+              <a:t>ive</a:t>
+            </a:r>
+            <a:endParaRPr lang="en-US" sz="1300" dirty="0"/>
+          </a:p>
+        </p:txBody>
+      </p:sp>
+      <p:sp>
+        <p:nvSpPr>
+          <p:cNvPr id="24" name="Text 22"/>
+          <p:cNvSpPr/>
+          <p:nvPr/>
+        </p:nvSpPr>
+        <p:spPr>
+          <a:xfrm>
+            <a:off x="6519672" y="2569464"/>
+            <a:ext cx="1828800" cy="201168"/>
+          </a:xfrm>
+          <a:prstGeom prst="rect">
+            <a:avLst/>
+          </a:prstGeom>
+          <a:noFill/>
+          <a:ln/>
+        </p:spPr>
+        <p:txBody>
+          <a:bodyPr wrap="square" lIns="0" tIns="0" rIns="0" bIns="0" rtlCol="0" anchor="t"/>
+          <a:lstStyle/>
+          <a:p>
+            <a:pPr algn="ctr" indent="0" marL="0">
+              <a:buNone/>
+            </a:pPr>
+            <a:r>
+              <a:rPr lang="en-US" sz="850" dirty="0">
+                <a:solidFill>
+                  <a:srgbClr val="475569"/>
+                </a:solidFill>
+                <a:latin typeface="Calibri" pitchFamily="34" charset="0"/>
+                <a:ea typeface="Calibri" pitchFamily="34" charset="-122"/>
+                <a:cs typeface="Calibri" pitchFamily="34" charset="-120"/>
+              </a:rPr>
+              <a:t>having quality of</a:t>
+            </a:r>
+            <a:endParaRPr lang="en-US" sz="850" dirty="0"/>
+          </a:p>
+        </p:txBody>
+      </p:sp>
+      <p:sp>
+        <p:nvSpPr>
+          <p:cNvPr id="25" name="Shape 23"/>
           <p:cNvSpPr/>
           <p:nvPr/>
         </p:nvSpPr>
@@ -8007,7 +8119,7 @@
       </p:sp>
       <p:sp>
         <p:nvSpPr>
-          <p:cNvPr id="23" name="Text 21"/>
+          <p:cNvPr id="26" name="Text 24"/>
           <p:cNvSpPr/>
           <p:nvPr/>
         </p:nvSpPr>
@@ -8046,7 +8158,7 @@
       </p:sp>
       <p:sp>
         <p:nvSpPr>
-          <p:cNvPr id="24" name="Shape 22"/>
+          <p:cNvPr id="27" name="Shape 25"/>
           <p:cNvSpPr/>
           <p:nvPr/>
         </p:nvSpPr>
@@ -8073,7 +8185,7 @@
       </p:sp>
       <p:sp>
         <p:nvSpPr>
-          <p:cNvPr id="25" name="Text 23"/>
+          <p:cNvPr id="28" name="Text 26"/>
           <p:cNvSpPr/>
           <p:nvPr/>
         </p:nvSpPr>
@@ -8112,7 +8224,7 @@
       </p:sp>
       <p:sp>
         <p:nvSpPr>
-          <p:cNvPr id="26" name="Shape 24"/>
+          <p:cNvPr id="29" name="Shape 27"/>
           <p:cNvSpPr/>
           <p:nvPr/>
         </p:nvSpPr>
@@ -8139,7 +8251,7 @@
       </p:sp>
       <p:sp>
         <p:nvSpPr>
-          <p:cNvPr id="27" name="Text 25"/>
+          <p:cNvPr id="30" name="Text 28"/>
           <p:cNvSpPr/>
           <p:nvPr/>
         </p:nvSpPr>
@@ -8178,7 +8290,7 @@
       </p:sp>
       <p:sp>
         <p:nvSpPr>
-          <p:cNvPr id="28" name="Shape 26"/>
+          <p:cNvPr id="31" name="Shape 29"/>
           <p:cNvSpPr/>
           <p:nvPr/>
         </p:nvSpPr>
@@ -8205,7 +8317,7 @@
       </p:sp>
       <p:sp>
         <p:nvSpPr>
-          <p:cNvPr id="29" name="Text 27"/>
+          <p:cNvPr id="32" name="Text 30"/>
           <p:cNvSpPr/>
           <p:nvPr/>
         </p:nvSpPr>
@@ -8528,7 +8640,7 @@
                 <a:ea typeface="Calibri" pitchFamily="34" charset="-122"/>
                 <a:cs typeface="Calibri" pitchFamily="34" charset="-120"/>
               </a:rPr>
-              <a:t>Word Labs  •  wordlabs.app  •  Root: 'ject' = to throw or hurl</a:t>
+              <a:t>Word Labs  •  wordlabs.app  •  Root: 'ject' = throw</a:t>
             </a:r>
             <a:endParaRPr lang="en-US" sz="800" dirty="0"/>
           </a:p>
@@ -8667,7 +8779,7 @@
                 <a:ea typeface="Trebuchet MS" pitchFamily="34" charset="-122"/>
                 <a:cs typeface="Trebuchet MS" pitchFamily="34" charset="-120"/>
               </a:rPr>
-              <a:t>inject</a:t>
+              <a:t>objective</a:t>
             </a:r>
             <a:endParaRPr lang="en-US" sz="2800" dirty="0"/>
           </a:p>
@@ -8747,7 +8859,7 @@
         </p:nvSpPr>
         <p:spPr>
           <a:xfrm>
-            <a:off x="2938272" y="2258568"/>
+            <a:off x="2221992" y="2258568"/>
             <a:ext cx="1828800" cy="292608"/>
           </a:xfrm>
           <a:prstGeom prst="rect">
@@ -8781,7 +8893,7 @@
         </p:nvSpPr>
         <p:spPr>
           <a:xfrm>
-            <a:off x="2938272" y="2258568"/>
+            <a:off x="2221992" y="2258568"/>
             <a:ext cx="1828800" cy="292608"/>
           </a:xfrm>
           <a:prstGeom prst="rect">
@@ -8806,7 +8918,7 @@
                 <a:ea typeface="Trebuchet MS" pitchFamily="34" charset="-122"/>
                 <a:cs typeface="Trebuchet MS" pitchFamily="34" charset="-120"/>
               </a:rPr>
-              <a:t>in</a:t>
+              <a:t>ob</a:t>
             </a:r>
             <a:endParaRPr lang="en-US" sz="1300" dirty="0"/>
           </a:p>
@@ -8820,7 +8932,7 @@
         </p:nvSpPr>
         <p:spPr>
           <a:xfrm>
-            <a:off x="2938272" y="2569464"/>
+            <a:off x="2221992" y="2569464"/>
             <a:ext cx="1828800" cy="201168"/>
           </a:xfrm>
           <a:prstGeom prst="rect">
@@ -8845,7 +8957,7 @@
                 <a:ea typeface="Calibri" pitchFamily="34" charset="-122"/>
                 <a:cs typeface="Calibri" pitchFamily="34" charset="-120"/>
               </a:rPr>
-              <a:t>into</a:t>
+              <a:t>against; in the way of; towards</a:t>
             </a:r>
             <a:endParaRPr lang="en-US" sz="850" dirty="0"/>
           </a:p>
@@ -8859,7 +8971,7 @@
         </p:nvSpPr>
         <p:spPr>
           <a:xfrm>
-            <a:off x="5803392" y="2258568"/>
+            <a:off x="4370832" y="2258568"/>
             <a:ext cx="1828800" cy="292608"/>
           </a:xfrm>
           <a:prstGeom prst="rect">
@@ -8893,7 +9005,7 @@
         </p:nvSpPr>
         <p:spPr>
           <a:xfrm>
-            <a:off x="5803392" y="2258568"/>
+            <a:off x="4370832" y="2258568"/>
             <a:ext cx="1828800" cy="292608"/>
           </a:xfrm>
           <a:prstGeom prst="rect">
@@ -8932,7 +9044,7 @@
         </p:nvSpPr>
         <p:spPr>
           <a:xfrm>
-            <a:off x="5803392" y="2569464"/>
+            <a:off x="4370832" y="2569464"/>
             <a:ext cx="1828800" cy="201168"/>
           </a:xfrm>
           <a:prstGeom prst="rect">
@@ -8957,7 +9069,7 @@
                 <a:ea typeface="Calibri" pitchFamily="34" charset="-122"/>
                 <a:cs typeface="Calibri" pitchFamily="34" charset="-120"/>
               </a:rPr>
-              <a:t>to throw</a:t>
+              <a:t>throw</a:t>
             </a:r>
             <a:endParaRPr lang="en-US" sz="850" dirty="0"/>
           </a:p>
@@ -8966,6 +9078,118 @@
       <p:sp>
         <p:nvSpPr>
           <p:cNvPr id="22" name="Shape 20"/>
+          <p:cNvSpPr/>
+          <p:nvPr/>
+        </p:nvSpPr>
+        <p:spPr>
+          <a:xfrm>
+            <a:off x="6519672" y="2258568"/>
+            <a:ext cx="1828800" cy="292608"/>
+          </a:xfrm>
+          <a:prstGeom prst="rect">
+            <a:avLst>
+              <a:gd name="adj" fmla="val 25000"/>
+            </a:avLst>
+          </a:prstGeom>
+          <a:solidFill>
+            <a:srgbClr val="FCE7F3"/>
+          </a:solidFill>
+          <a:ln w="19050">
+            <a:solidFill>
+              <a:srgbClr val="DB2777"/>
+            </a:solidFill>
+            <a:prstDash val="solid"/>
+          </a:ln>
+          <a:effectLst>
+            <a:outerShdw sx="100000" sy="100000" kx="0" ky="0" algn="bl" rotWithShape="0" blurRad="101600" dist="38100" dir="8100000">
+              <a:srgbClr val="000000">
+                <a:alpha val="12000"/>
+              </a:srgbClr>
+            </a:outerShdw>
+          </a:effectLst>
+        </p:spPr>
+      </p:sp>
+      <p:sp>
+        <p:nvSpPr>
+          <p:cNvPr id="23" name="Text 21"/>
+          <p:cNvSpPr/>
+          <p:nvPr/>
+        </p:nvSpPr>
+        <p:spPr>
+          <a:xfrm>
+            <a:off x="6519672" y="2258568"/>
+            <a:ext cx="1828800" cy="292608"/>
+          </a:xfrm>
+          <a:prstGeom prst="rect">
+            <a:avLst/>
+          </a:prstGeom>
+          <a:noFill/>
+          <a:ln/>
+        </p:spPr>
+        <p:txBody>
+          <a:bodyPr wrap="square" lIns="0" tIns="0" rIns="0" bIns="0" rtlCol="0" anchor="ctr"/>
+          <a:lstStyle/>
+          <a:p>
+            <a:pPr algn="ctr" indent="0" marL="0">
+              <a:buNone/>
+            </a:pPr>
+            <a:r>
+              <a:rPr lang="en-US" sz="1300" b="1" dirty="0">
+                <a:solidFill>
+                  <a:srgbClr val="9D174D"/>
+                </a:solidFill>
+                <a:latin typeface="Trebuchet MS" pitchFamily="34" charset="0"/>
+                <a:ea typeface="Trebuchet MS" pitchFamily="34" charset="-122"/>
+                <a:cs typeface="Trebuchet MS" pitchFamily="34" charset="-120"/>
+              </a:rPr>
+              <a:t>ive</a:t>
+            </a:r>
+            <a:endParaRPr lang="en-US" sz="1300" dirty="0"/>
+          </a:p>
+        </p:txBody>
+      </p:sp>
+      <p:sp>
+        <p:nvSpPr>
+          <p:cNvPr id="24" name="Text 22"/>
+          <p:cNvSpPr/>
+          <p:nvPr/>
+        </p:nvSpPr>
+        <p:spPr>
+          <a:xfrm>
+            <a:off x="6519672" y="2569464"/>
+            <a:ext cx="1828800" cy="201168"/>
+          </a:xfrm>
+          <a:prstGeom prst="rect">
+            <a:avLst/>
+          </a:prstGeom>
+          <a:noFill/>
+          <a:ln/>
+        </p:spPr>
+        <p:txBody>
+          <a:bodyPr wrap="square" lIns="0" tIns="0" rIns="0" bIns="0" rtlCol="0" anchor="t"/>
+          <a:lstStyle/>
+          <a:p>
+            <a:pPr algn="ctr" indent="0" marL="0">
+              <a:buNone/>
+            </a:pPr>
+            <a:r>
+              <a:rPr lang="en-US" sz="850" dirty="0">
+                <a:solidFill>
+                  <a:srgbClr val="475569"/>
+                </a:solidFill>
+                <a:latin typeface="Calibri" pitchFamily="34" charset="0"/>
+                <a:ea typeface="Calibri" pitchFamily="34" charset="-122"/>
+                <a:cs typeface="Calibri" pitchFamily="34" charset="-120"/>
+              </a:rPr>
+              <a:t>having quality of</a:t>
+            </a:r>
+            <a:endParaRPr lang="en-US" sz="850" dirty="0"/>
+          </a:p>
+        </p:txBody>
+      </p:sp>
+      <p:sp>
+        <p:nvSpPr>
+          <p:cNvPr id="25" name="Shape 23"/>
           <p:cNvSpPr/>
           <p:nvPr/>
         </p:nvSpPr>
@@ -8992,7 +9216,7 @@
       </p:sp>
       <p:sp>
         <p:nvSpPr>
-          <p:cNvPr id="23" name="Text 21"/>
+          <p:cNvPr id="26" name="Text 24"/>
           <p:cNvSpPr/>
           <p:nvPr/>
         </p:nvSpPr>
@@ -9031,7 +9255,7 @@
       </p:sp>
       <p:sp>
         <p:nvSpPr>
-          <p:cNvPr id="24" name="Shape 22"/>
+          <p:cNvPr id="27" name="Shape 25"/>
           <p:cNvSpPr/>
           <p:nvPr/>
         </p:nvSpPr>
@@ -9058,13 +9282,13 @@
       </p:sp>
       <p:sp>
         <p:nvSpPr>
-          <p:cNvPr id="25" name="Shape 23"/>
-          <p:cNvSpPr/>
-          <p:nvPr/>
-        </p:nvSpPr>
-        <p:spPr>
-          <a:xfrm>
-            <a:off x="2999232" y="3364992"/>
+          <p:cNvPr id="28" name="Shape 26"/>
+          <p:cNvSpPr/>
+          <p:nvPr/>
+        </p:nvSpPr>
+        <p:spPr>
+          <a:xfrm>
+            <a:off x="2313432" y="3364992"/>
             <a:ext cx="1645920" cy="475488"/>
           </a:xfrm>
           <a:prstGeom prst="rect">
@@ -9085,13 +9309,13 @@
       </p:sp>
       <p:sp>
         <p:nvSpPr>
-          <p:cNvPr id="26" name="Text 24"/>
-          <p:cNvSpPr/>
-          <p:nvPr/>
-        </p:nvSpPr>
-        <p:spPr>
-          <a:xfrm>
-            <a:off x="2999232" y="3364992"/>
+          <p:cNvPr id="29" name="Text 27"/>
+          <p:cNvSpPr/>
+          <p:nvPr/>
+        </p:nvSpPr>
+        <p:spPr>
+          <a:xfrm>
+            <a:off x="2313432" y="3364992"/>
             <a:ext cx="1645920" cy="475488"/>
           </a:xfrm>
           <a:prstGeom prst="rect">
@@ -9116,7 +9340,7 @@
                 <a:ea typeface="Trebuchet MS" pitchFamily="34" charset="-122"/>
                 <a:cs typeface="Trebuchet MS" pitchFamily="34" charset="-120"/>
               </a:rPr>
-              <a:t>in</a:t>
+              <a:t>ob</a:t>
             </a:r>
             <a:endParaRPr lang="en-US" sz="1400" dirty="0"/>
           </a:p>
@@ -9124,14 +9348,14 @@
       </p:sp>
       <p:sp>
         <p:nvSpPr>
-          <p:cNvPr id="27" name="Text 25"/>
-          <p:cNvSpPr/>
-          <p:nvPr/>
-        </p:nvSpPr>
-        <p:spPr>
-          <a:xfrm>
-            <a:off x="4645152" y="3364992"/>
-            <a:ext cx="1097280" cy="475488"/>
+          <p:cNvPr id="30" name="Text 28"/>
+          <p:cNvSpPr/>
+          <p:nvPr/>
+        </p:nvSpPr>
+        <p:spPr>
+          <a:xfrm>
+            <a:off x="3959352" y="3364992"/>
+            <a:ext cx="411480" cy="475488"/>
           </a:xfrm>
           <a:prstGeom prst="rect">
             <a:avLst/>
@@ -9163,13 +9387,13 @@
       </p:sp>
       <p:sp>
         <p:nvSpPr>
-          <p:cNvPr id="28" name="Shape 26"/>
-          <p:cNvSpPr/>
-          <p:nvPr/>
-        </p:nvSpPr>
-        <p:spPr>
-          <a:xfrm>
-            <a:off x="5742432" y="3364992"/>
+          <p:cNvPr id="31" name="Shape 29"/>
+          <p:cNvSpPr/>
+          <p:nvPr/>
+        </p:nvSpPr>
+        <p:spPr>
+          <a:xfrm>
+            <a:off x="4370832" y="3364992"/>
             <a:ext cx="1645920" cy="475488"/>
           </a:xfrm>
           <a:prstGeom prst="rect">
@@ -9190,13 +9414,13 @@
       </p:sp>
       <p:sp>
         <p:nvSpPr>
-          <p:cNvPr id="29" name="Text 27"/>
-          <p:cNvSpPr/>
-          <p:nvPr/>
-        </p:nvSpPr>
-        <p:spPr>
-          <a:xfrm>
-            <a:off x="5742432" y="3364992"/>
+          <p:cNvPr id="32" name="Text 30"/>
+          <p:cNvSpPr/>
+          <p:nvPr/>
+        </p:nvSpPr>
+        <p:spPr>
+          <a:xfrm>
+            <a:off x="4370832" y="3364992"/>
             <a:ext cx="1645920" cy="475488"/>
           </a:xfrm>
           <a:prstGeom prst="rect">
@@ -9221,7 +9445,7 @@
                 <a:ea typeface="Trebuchet MS" pitchFamily="34" charset="-122"/>
                 <a:cs typeface="Trebuchet MS" pitchFamily="34" charset="-120"/>
               </a:rPr>
-              <a:t>ject</a:t>
+              <a:t>jec</a:t>
             </a:r>
             <a:endParaRPr lang="en-US" sz="1400" dirty="0"/>
           </a:p>
@@ -9229,7 +9453,112 @@
       </p:sp>
       <p:sp>
         <p:nvSpPr>
-          <p:cNvPr id="30" name="Shape 28"/>
+          <p:cNvPr id="33" name="Text 31"/>
+          <p:cNvSpPr/>
+          <p:nvPr/>
+        </p:nvSpPr>
+        <p:spPr>
+          <a:xfrm>
+            <a:off x="6016752" y="3364992"/>
+            <a:ext cx="411480" cy="475488"/>
+          </a:xfrm>
+          <a:prstGeom prst="rect">
+            <a:avLst/>
+          </a:prstGeom>
+          <a:noFill/>
+          <a:ln/>
+        </p:spPr>
+        <p:txBody>
+          <a:bodyPr wrap="square" lIns="0" tIns="0" rIns="0" bIns="0" rtlCol="0" anchor="ctr"/>
+          <a:lstStyle/>
+          <a:p>
+            <a:pPr algn="ctr" indent="0" marL="0">
+              <a:buNone/>
+            </a:pPr>
+            <a:r>
+              <a:rPr lang="en-US" sz="1600" b="1" dirty="0">
+                <a:solidFill>
+                  <a:srgbClr val="0D9488"/>
+                </a:solidFill>
+                <a:latin typeface="Trebuchet MS" pitchFamily="34" charset="0"/>
+                <a:ea typeface="Trebuchet MS" pitchFamily="34" charset="-122"/>
+                <a:cs typeface="Trebuchet MS" pitchFamily="34" charset="-120"/>
+              </a:rPr>
+              <a:t>·</a:t>
+            </a:r>
+            <a:endParaRPr lang="en-US" sz="1600" dirty="0"/>
+          </a:p>
+        </p:txBody>
+      </p:sp>
+      <p:sp>
+        <p:nvSpPr>
+          <p:cNvPr id="34" name="Shape 32"/>
+          <p:cNvSpPr/>
+          <p:nvPr/>
+        </p:nvSpPr>
+        <p:spPr>
+          <a:xfrm>
+            <a:off x="6428232" y="3364992"/>
+            <a:ext cx="1645920" cy="475488"/>
+          </a:xfrm>
+          <a:prstGeom prst="rect">
+            <a:avLst>
+              <a:gd name="adj" fmla="val 9615"/>
+            </a:avLst>
+          </a:prstGeom>
+          <a:solidFill>
+            <a:srgbClr val="FFFFFF"/>
+          </a:solidFill>
+          <a:ln w="12700">
+            <a:solidFill>
+              <a:srgbClr val="0D9488"/>
+            </a:solidFill>
+            <a:prstDash val="solid"/>
+          </a:ln>
+        </p:spPr>
+      </p:sp>
+      <p:sp>
+        <p:nvSpPr>
+          <p:cNvPr id="35" name="Text 33"/>
+          <p:cNvSpPr/>
+          <p:nvPr/>
+        </p:nvSpPr>
+        <p:spPr>
+          <a:xfrm>
+            <a:off x="6428232" y="3364992"/>
+            <a:ext cx="1645920" cy="475488"/>
+          </a:xfrm>
+          <a:prstGeom prst="rect">
+            <a:avLst/>
+          </a:prstGeom>
+          <a:noFill/>
+          <a:ln/>
+        </p:spPr>
+        <p:txBody>
+          <a:bodyPr wrap="square" lIns="0" tIns="0" rIns="0" bIns="0" rtlCol="0" anchor="ctr"/>
+          <a:lstStyle/>
+          <a:p>
+            <a:pPr algn="ctr" indent="0" marL="0">
+              <a:buNone/>
+            </a:pPr>
+            <a:r>
+              <a:rPr lang="en-US" sz="1400" b="1" dirty="0">
+                <a:solidFill>
+                  <a:srgbClr val="0D9488"/>
+                </a:solidFill>
+                <a:latin typeface="Trebuchet MS" pitchFamily="34" charset="0"/>
+                <a:ea typeface="Trebuchet MS" pitchFamily="34" charset="-122"/>
+                <a:cs typeface="Trebuchet MS" pitchFamily="34" charset="-120"/>
+              </a:rPr>
+              <a:t>tive</a:t>
+            </a:r>
+            <a:endParaRPr lang="en-US" sz="1400" dirty="0"/>
+          </a:p>
+        </p:txBody>
+      </p:sp>
+      <p:sp>
+        <p:nvSpPr>
+          <p:cNvPr id="36" name="Shape 34"/>
           <p:cNvSpPr/>
           <p:nvPr/>
         </p:nvSpPr>
@@ -9256,7 +9585,7 @@
       </p:sp>
       <p:sp>
         <p:nvSpPr>
-          <p:cNvPr id="31" name="Text 29"/>
+          <p:cNvPr id="37" name="Text 35"/>
           <p:cNvSpPr/>
           <p:nvPr/>
         </p:nvSpPr>
@@ -9295,7 +9624,7 @@
       </p:sp>
       <p:sp>
         <p:nvSpPr>
-          <p:cNvPr id="32" name="Shape 30"/>
+          <p:cNvPr id="38" name="Shape 36"/>
           <p:cNvSpPr/>
           <p:nvPr/>
         </p:nvSpPr>
@@ -9322,7 +9651,7 @@
       </p:sp>
       <p:sp>
         <p:nvSpPr>
-          <p:cNvPr id="33" name="Text 31"/>
+          <p:cNvPr id="39" name="Text 37"/>
           <p:cNvSpPr/>
           <p:nvPr/>
         </p:nvSpPr>
@@ -9645,7 +9974,7 @@
                 <a:ea typeface="Calibri" pitchFamily="34" charset="-122"/>
                 <a:cs typeface="Calibri" pitchFamily="34" charset="-120"/>
               </a:rPr>
-              <a:t>Word Labs  •  wordlabs.app  •  Root: 'ject' = to throw or hurl</a:t>
+              <a:t>Word Labs  •  wordlabs.app  •  Root: 'ject' = throw</a:t>
             </a:r>
             <a:endParaRPr lang="en-US" sz="800" dirty="0"/>
           </a:p>
@@ -9784,7 +10113,7 @@
                 <a:ea typeface="Trebuchet MS" pitchFamily="34" charset="-122"/>
                 <a:cs typeface="Trebuchet MS" pitchFamily="34" charset="-120"/>
               </a:rPr>
-              <a:t>inject</a:t>
+              <a:t>objective</a:t>
             </a:r>
             <a:endParaRPr lang="en-US" sz="2800" dirty="0"/>
           </a:p>
@@ -9864,7 +10193,7 @@
         </p:nvSpPr>
         <p:spPr>
           <a:xfrm>
-            <a:off x="2938272" y="2258568"/>
+            <a:off x="2221992" y="2258568"/>
             <a:ext cx="1828800" cy="292608"/>
           </a:xfrm>
           <a:prstGeom prst="rect">
@@ -9898,7 +10227,7 @@
         </p:nvSpPr>
         <p:spPr>
           <a:xfrm>
-            <a:off x="2938272" y="2258568"/>
+            <a:off x="2221992" y="2258568"/>
             <a:ext cx="1828800" cy="292608"/>
           </a:xfrm>
           <a:prstGeom prst="rect">
@@ -9923,7 +10252,7 @@
                 <a:ea typeface="Trebuchet MS" pitchFamily="34" charset="-122"/>
                 <a:cs typeface="Trebuchet MS" pitchFamily="34" charset="-120"/>
               </a:rPr>
-              <a:t>in</a:t>
+              <a:t>ob</a:t>
             </a:r>
             <a:endParaRPr lang="en-US" sz="1300" dirty="0"/>
           </a:p>
@@ -9937,7 +10266,7 @@
         </p:nvSpPr>
         <p:spPr>
           <a:xfrm>
-            <a:off x="2938272" y="2569464"/>
+            <a:off x="2221992" y="2569464"/>
             <a:ext cx="1828800" cy="201168"/>
           </a:xfrm>
           <a:prstGeom prst="rect">
@@ -9962,7 +10291,7 @@
                 <a:ea typeface="Calibri" pitchFamily="34" charset="-122"/>
                 <a:cs typeface="Calibri" pitchFamily="34" charset="-120"/>
               </a:rPr>
-              <a:t>into</a:t>
+              <a:t>against; in the way of; towards</a:t>
             </a:r>
             <a:endParaRPr lang="en-US" sz="850" dirty="0"/>
           </a:p>
@@ -9976,7 +10305,7 @@
         </p:nvSpPr>
         <p:spPr>
           <a:xfrm>
-            <a:off x="5803392" y="2258568"/>
+            <a:off x="4370832" y="2258568"/>
             <a:ext cx="1828800" cy="292608"/>
           </a:xfrm>
           <a:prstGeom prst="rect">
@@ -10010,7 +10339,7 @@
         </p:nvSpPr>
         <p:spPr>
           <a:xfrm>
-            <a:off x="5803392" y="2258568"/>
+            <a:off x="4370832" y="2258568"/>
             <a:ext cx="1828800" cy="292608"/>
           </a:xfrm>
           <a:prstGeom prst="rect">
@@ -10049,7 +10378,7 @@
         </p:nvSpPr>
         <p:spPr>
           <a:xfrm>
-            <a:off x="5803392" y="2569464"/>
+            <a:off x="4370832" y="2569464"/>
             <a:ext cx="1828800" cy="201168"/>
           </a:xfrm>
           <a:prstGeom prst="rect">
@@ -10074,7 +10403,7 @@
                 <a:ea typeface="Calibri" pitchFamily="34" charset="-122"/>
                 <a:cs typeface="Calibri" pitchFamily="34" charset="-120"/>
               </a:rPr>
-              <a:t>to throw</a:t>
+              <a:t>throw</a:t>
             </a:r>
             <a:endParaRPr lang="en-US" sz="850" dirty="0"/>
           </a:p>
@@ -10083,6 +10412,118 @@
       <p:sp>
         <p:nvSpPr>
           <p:cNvPr id="22" name="Shape 20"/>
+          <p:cNvSpPr/>
+          <p:nvPr/>
+        </p:nvSpPr>
+        <p:spPr>
+          <a:xfrm>
+            <a:off x="6519672" y="2258568"/>
+            <a:ext cx="1828800" cy="292608"/>
+          </a:xfrm>
+          <a:prstGeom prst="rect">
+            <a:avLst>
+              <a:gd name="adj" fmla="val 25000"/>
+            </a:avLst>
+          </a:prstGeom>
+          <a:solidFill>
+            <a:srgbClr val="FCE7F3"/>
+          </a:solidFill>
+          <a:ln w="19050">
+            <a:solidFill>
+              <a:srgbClr val="DB2777"/>
+            </a:solidFill>
+            <a:prstDash val="solid"/>
+          </a:ln>
+          <a:effectLst>
+            <a:outerShdw sx="100000" sy="100000" kx="0" ky="0" algn="bl" rotWithShape="0" blurRad="101600" dist="38100" dir="8100000">
+              <a:srgbClr val="000000">
+                <a:alpha val="12000"/>
+              </a:srgbClr>
+            </a:outerShdw>
+          </a:effectLst>
+        </p:spPr>
+      </p:sp>
+      <p:sp>
+        <p:nvSpPr>
+          <p:cNvPr id="23" name="Text 21"/>
+          <p:cNvSpPr/>
+          <p:nvPr/>
+        </p:nvSpPr>
+        <p:spPr>
+          <a:xfrm>
+            <a:off x="6519672" y="2258568"/>
+            <a:ext cx="1828800" cy="292608"/>
+          </a:xfrm>
+          <a:prstGeom prst="rect">
+            <a:avLst/>
+          </a:prstGeom>
+          <a:noFill/>
+          <a:ln/>
+        </p:spPr>
+        <p:txBody>
+          <a:bodyPr wrap="square" lIns="0" tIns="0" rIns="0" bIns="0" rtlCol="0" anchor="ctr"/>
+          <a:lstStyle/>
+          <a:p>
+            <a:pPr algn="ctr" indent="0" marL="0">
+              <a:buNone/>
+            </a:pPr>
+            <a:r>
+              <a:rPr lang="en-US" sz="1300" b="1" dirty="0">
+                <a:solidFill>
+                  <a:srgbClr val="9D174D"/>
+                </a:solidFill>
+                <a:latin typeface="Trebuchet MS" pitchFamily="34" charset="0"/>
+                <a:ea typeface="Trebuchet MS" pitchFamily="34" charset="-122"/>
+                <a:cs typeface="Trebuchet MS" pitchFamily="34" charset="-120"/>
+              </a:rPr>
+              <a:t>ive</a:t>
+            </a:r>
+            <a:endParaRPr lang="en-US" sz="1300" dirty="0"/>
+          </a:p>
+        </p:txBody>
+      </p:sp>
+      <p:sp>
+        <p:nvSpPr>
+          <p:cNvPr id="24" name="Text 22"/>
+          <p:cNvSpPr/>
+          <p:nvPr/>
+        </p:nvSpPr>
+        <p:spPr>
+          <a:xfrm>
+            <a:off x="6519672" y="2569464"/>
+            <a:ext cx="1828800" cy="201168"/>
+          </a:xfrm>
+          <a:prstGeom prst="rect">
+            <a:avLst/>
+          </a:prstGeom>
+          <a:noFill/>
+          <a:ln/>
+        </p:spPr>
+        <p:txBody>
+          <a:bodyPr wrap="square" lIns="0" tIns="0" rIns="0" bIns="0" rtlCol="0" anchor="t"/>
+          <a:lstStyle/>
+          <a:p>
+            <a:pPr algn="ctr" indent="0" marL="0">
+              <a:buNone/>
+            </a:pPr>
+            <a:r>
+              <a:rPr lang="en-US" sz="850" dirty="0">
+                <a:solidFill>
+                  <a:srgbClr val="475569"/>
+                </a:solidFill>
+                <a:latin typeface="Calibri" pitchFamily="34" charset="0"/>
+                <a:ea typeface="Calibri" pitchFamily="34" charset="-122"/>
+                <a:cs typeface="Calibri" pitchFamily="34" charset="-120"/>
+              </a:rPr>
+              <a:t>having quality of</a:t>
+            </a:r>
+            <a:endParaRPr lang="en-US" sz="850" dirty="0"/>
+          </a:p>
+        </p:txBody>
+      </p:sp>
+      <p:sp>
+        <p:nvSpPr>
+          <p:cNvPr id="25" name="Shape 23"/>
           <p:cNvSpPr/>
           <p:nvPr/>
         </p:nvSpPr>
@@ -10109,7 +10550,7 @@
       </p:sp>
       <p:sp>
         <p:nvSpPr>
-          <p:cNvPr id="23" name="Text 21"/>
+          <p:cNvPr id="26" name="Text 24"/>
           <p:cNvSpPr/>
           <p:nvPr/>
         </p:nvSpPr>
@@ -10148,7 +10589,7 @@
       </p:sp>
       <p:sp>
         <p:nvSpPr>
-          <p:cNvPr id="24" name="Shape 22"/>
+          <p:cNvPr id="27" name="Shape 25"/>
           <p:cNvSpPr/>
           <p:nvPr/>
         </p:nvSpPr>
@@ -10175,13 +10616,13 @@
       </p:sp>
       <p:sp>
         <p:nvSpPr>
-          <p:cNvPr id="25" name="Shape 23"/>
-          <p:cNvSpPr/>
-          <p:nvPr/>
-        </p:nvSpPr>
-        <p:spPr>
-          <a:xfrm>
-            <a:off x="2999232" y="3364992"/>
+          <p:cNvPr id="28" name="Shape 26"/>
+          <p:cNvSpPr/>
+          <p:nvPr/>
+        </p:nvSpPr>
+        <p:spPr>
+          <a:xfrm>
+            <a:off x="2313432" y="3364992"/>
             <a:ext cx="1645920" cy="475488"/>
           </a:xfrm>
           <a:prstGeom prst="rect">
@@ -10202,13 +10643,13 @@
       </p:sp>
       <p:sp>
         <p:nvSpPr>
-          <p:cNvPr id="26" name="Text 24"/>
-          <p:cNvSpPr/>
-          <p:nvPr/>
-        </p:nvSpPr>
-        <p:spPr>
-          <a:xfrm>
-            <a:off x="2999232" y="3364992"/>
+          <p:cNvPr id="29" name="Text 27"/>
+          <p:cNvSpPr/>
+          <p:nvPr/>
+        </p:nvSpPr>
+        <p:spPr>
+          <a:xfrm>
+            <a:off x="2313432" y="3364992"/>
             <a:ext cx="1645920" cy="475488"/>
           </a:xfrm>
           <a:prstGeom prst="rect">
@@ -10233,7 +10674,7 @@
                 <a:ea typeface="Trebuchet MS" pitchFamily="34" charset="-122"/>
                 <a:cs typeface="Trebuchet MS" pitchFamily="34" charset="-120"/>
               </a:rPr>
-              <a:t>in</a:t>
+              <a:t>ob</a:t>
             </a:r>
             <a:endParaRPr lang="en-US" sz="1400" dirty="0"/>
           </a:p>
@@ -10241,14 +10682,14 @@
       </p:sp>
       <p:sp>
         <p:nvSpPr>
-          <p:cNvPr id="27" name="Text 25"/>
-          <p:cNvSpPr/>
-          <p:nvPr/>
-        </p:nvSpPr>
-        <p:spPr>
-          <a:xfrm>
-            <a:off x="4645152" y="3364992"/>
-            <a:ext cx="1097280" cy="475488"/>
+          <p:cNvPr id="30" name="Text 28"/>
+          <p:cNvSpPr/>
+          <p:nvPr/>
+        </p:nvSpPr>
+        <p:spPr>
+          <a:xfrm>
+            <a:off x="3959352" y="3364992"/>
+            <a:ext cx="411480" cy="475488"/>
           </a:xfrm>
           <a:prstGeom prst="rect">
             <a:avLst/>
@@ -10280,13 +10721,13 @@
       </p:sp>
       <p:sp>
         <p:nvSpPr>
-          <p:cNvPr id="28" name="Shape 26"/>
-          <p:cNvSpPr/>
-          <p:nvPr/>
-        </p:nvSpPr>
-        <p:spPr>
-          <a:xfrm>
-            <a:off x="5742432" y="3364992"/>
+          <p:cNvPr id="31" name="Shape 29"/>
+          <p:cNvSpPr/>
+          <p:nvPr/>
+        </p:nvSpPr>
+        <p:spPr>
+          <a:xfrm>
+            <a:off x="4370832" y="3364992"/>
             <a:ext cx="1645920" cy="475488"/>
           </a:xfrm>
           <a:prstGeom prst="rect">
@@ -10307,13 +10748,13 @@
       </p:sp>
       <p:sp>
         <p:nvSpPr>
-          <p:cNvPr id="29" name="Text 27"/>
-          <p:cNvSpPr/>
-          <p:nvPr/>
-        </p:nvSpPr>
-        <p:spPr>
-          <a:xfrm>
-            <a:off x="5742432" y="3364992"/>
+          <p:cNvPr id="32" name="Text 30"/>
+          <p:cNvSpPr/>
+          <p:nvPr/>
+        </p:nvSpPr>
+        <p:spPr>
+          <a:xfrm>
+            <a:off x="4370832" y="3364992"/>
             <a:ext cx="1645920" cy="475488"/>
           </a:xfrm>
           <a:prstGeom prst="rect">
@@ -10338,7 +10779,7 @@
                 <a:ea typeface="Trebuchet MS" pitchFamily="34" charset="-122"/>
                 <a:cs typeface="Trebuchet MS" pitchFamily="34" charset="-120"/>
               </a:rPr>
-              <a:t>ject</a:t>
+              <a:t>jec</a:t>
             </a:r>
             <a:endParaRPr lang="en-US" sz="1400" dirty="0"/>
           </a:p>
@@ -10346,7 +10787,112 @@
       </p:sp>
       <p:sp>
         <p:nvSpPr>
-          <p:cNvPr id="30" name="Shape 28"/>
+          <p:cNvPr id="33" name="Text 31"/>
+          <p:cNvSpPr/>
+          <p:nvPr/>
+        </p:nvSpPr>
+        <p:spPr>
+          <a:xfrm>
+            <a:off x="6016752" y="3364992"/>
+            <a:ext cx="411480" cy="475488"/>
+          </a:xfrm>
+          <a:prstGeom prst="rect">
+            <a:avLst/>
+          </a:prstGeom>
+          <a:noFill/>
+          <a:ln/>
+        </p:spPr>
+        <p:txBody>
+          <a:bodyPr wrap="square" lIns="0" tIns="0" rIns="0" bIns="0" rtlCol="0" anchor="ctr"/>
+          <a:lstStyle/>
+          <a:p>
+            <a:pPr algn="ctr" indent="0" marL="0">
+              <a:buNone/>
+            </a:pPr>
+            <a:r>
+              <a:rPr lang="en-US" sz="1600" b="1" dirty="0">
+                <a:solidFill>
+                  <a:srgbClr val="0D9488"/>
+                </a:solidFill>
+                <a:latin typeface="Trebuchet MS" pitchFamily="34" charset="0"/>
+                <a:ea typeface="Trebuchet MS" pitchFamily="34" charset="-122"/>
+                <a:cs typeface="Trebuchet MS" pitchFamily="34" charset="-120"/>
+              </a:rPr>
+              <a:t>·</a:t>
+            </a:r>
+            <a:endParaRPr lang="en-US" sz="1600" dirty="0"/>
+          </a:p>
+        </p:txBody>
+      </p:sp>
+      <p:sp>
+        <p:nvSpPr>
+          <p:cNvPr id="34" name="Shape 32"/>
+          <p:cNvSpPr/>
+          <p:nvPr/>
+        </p:nvSpPr>
+        <p:spPr>
+          <a:xfrm>
+            <a:off x="6428232" y="3364992"/>
+            <a:ext cx="1645920" cy="475488"/>
+          </a:xfrm>
+          <a:prstGeom prst="rect">
+            <a:avLst>
+              <a:gd name="adj" fmla="val 9615"/>
+            </a:avLst>
+          </a:prstGeom>
+          <a:solidFill>
+            <a:srgbClr val="FFFFFF"/>
+          </a:solidFill>
+          <a:ln w="12700">
+            <a:solidFill>
+              <a:srgbClr val="0D9488"/>
+            </a:solidFill>
+            <a:prstDash val="solid"/>
+          </a:ln>
+        </p:spPr>
+      </p:sp>
+      <p:sp>
+        <p:nvSpPr>
+          <p:cNvPr id="35" name="Text 33"/>
+          <p:cNvSpPr/>
+          <p:nvPr/>
+        </p:nvSpPr>
+        <p:spPr>
+          <a:xfrm>
+            <a:off x="6428232" y="3364992"/>
+            <a:ext cx="1645920" cy="475488"/>
+          </a:xfrm>
+          <a:prstGeom prst="rect">
+            <a:avLst/>
+          </a:prstGeom>
+          <a:noFill/>
+          <a:ln/>
+        </p:spPr>
+        <p:txBody>
+          <a:bodyPr wrap="square" lIns="0" tIns="0" rIns="0" bIns="0" rtlCol="0" anchor="ctr"/>
+          <a:lstStyle/>
+          <a:p>
+            <a:pPr algn="ctr" indent="0" marL="0">
+              <a:buNone/>
+            </a:pPr>
+            <a:r>
+              <a:rPr lang="en-US" sz="1400" b="1" dirty="0">
+                <a:solidFill>
+                  <a:srgbClr val="0D9488"/>
+                </a:solidFill>
+                <a:latin typeface="Trebuchet MS" pitchFamily="34" charset="0"/>
+                <a:ea typeface="Trebuchet MS" pitchFamily="34" charset="-122"/>
+                <a:cs typeface="Trebuchet MS" pitchFamily="34" charset="-120"/>
+              </a:rPr>
+              <a:t>tive</a:t>
+            </a:r>
+            <a:endParaRPr lang="en-US" sz="1400" dirty="0"/>
+          </a:p>
+        </p:txBody>
+      </p:sp>
+      <p:sp>
+        <p:nvSpPr>
+          <p:cNvPr id="36" name="Shape 34"/>
           <p:cNvSpPr/>
           <p:nvPr/>
         </p:nvSpPr>
@@ -10373,7 +10919,7 @@
       </p:sp>
       <p:sp>
         <p:nvSpPr>
-          <p:cNvPr id="31" name="Text 29"/>
+          <p:cNvPr id="37" name="Text 35"/>
           <p:cNvSpPr/>
           <p:nvPr/>
         </p:nvSpPr>
@@ -10412,7 +10958,7 @@
       </p:sp>
       <p:sp>
         <p:nvSpPr>
-          <p:cNvPr id="32" name="Shape 30"/>
+          <p:cNvPr id="38" name="Shape 36"/>
           <p:cNvSpPr/>
           <p:nvPr/>
         </p:nvSpPr>
@@ -10439,14 +10985,14 @@
       </p:sp>
       <p:sp>
         <p:nvSpPr>
-          <p:cNvPr id="33" name="Shape 31"/>
-          <p:cNvSpPr/>
-          <p:nvPr/>
-        </p:nvSpPr>
-        <p:spPr>
-          <a:xfrm>
-            <a:off x="2254649" y="4169664"/>
-            <a:ext cx="685800" cy="475488"/>
+          <p:cNvPr id="39" name="Shape 37"/>
+          <p:cNvSpPr/>
+          <p:nvPr/>
+        </p:nvSpPr>
+        <p:spPr>
+          <a:xfrm>
+            <a:off x="1951330" y="4169664"/>
+            <a:ext cx="676656" cy="475488"/>
           </a:xfrm>
           <a:prstGeom prst="rect">
             <a:avLst>
@@ -10466,14 +11012,14 @@
       </p:sp>
       <p:sp>
         <p:nvSpPr>
-          <p:cNvPr id="34" name="Text 32"/>
-          <p:cNvSpPr/>
-          <p:nvPr/>
-        </p:nvSpPr>
-        <p:spPr>
-          <a:xfrm>
-            <a:off x="2254649" y="4169664"/>
-            <a:ext cx="685800" cy="475488"/>
+          <p:cNvPr id="40" name="Text 38"/>
+          <p:cNvSpPr/>
+          <p:nvPr/>
+        </p:nvSpPr>
+        <p:spPr>
+          <a:xfrm>
+            <a:off x="1951330" y="4169664"/>
+            <a:ext cx="676656" cy="475488"/>
           </a:xfrm>
           <a:prstGeom prst="rect">
             <a:avLst/>
@@ -10497,7 +11043,7 @@
                 <a:ea typeface="Trebuchet MS" pitchFamily="34" charset="-122"/>
                 <a:cs typeface="Trebuchet MS" pitchFamily="34" charset="-120"/>
               </a:rPr>
-              <a:t>i</a:t>
+              <a:t>o</a:t>
             </a:r>
             <a:endParaRPr lang="en-US" sz="900" dirty="0"/>
           </a:p>
@@ -10505,14 +11051,14 @@
       </p:sp>
       <p:sp>
         <p:nvSpPr>
-          <p:cNvPr id="35" name="Shape 33"/>
-          <p:cNvSpPr/>
-          <p:nvPr/>
-        </p:nvSpPr>
-        <p:spPr>
-          <a:xfrm>
-            <a:off x="3293146" y="4169664"/>
-            <a:ext cx="685800" cy="475488"/>
+          <p:cNvPr id="41" name="Shape 39"/>
+          <p:cNvSpPr/>
+          <p:nvPr/>
+        </p:nvSpPr>
+        <p:spPr>
+          <a:xfrm>
+            <a:off x="2677363" y="4169664"/>
+            <a:ext cx="676656" cy="475488"/>
           </a:xfrm>
           <a:prstGeom prst="rect">
             <a:avLst>
@@ -10532,14 +11078,14 @@
       </p:sp>
       <p:sp>
         <p:nvSpPr>
-          <p:cNvPr id="36" name="Text 34"/>
-          <p:cNvSpPr/>
-          <p:nvPr/>
-        </p:nvSpPr>
-        <p:spPr>
-          <a:xfrm>
-            <a:off x="3293146" y="4169664"/>
-            <a:ext cx="685800" cy="475488"/>
+          <p:cNvPr id="42" name="Text 40"/>
+          <p:cNvSpPr/>
+          <p:nvPr/>
+        </p:nvSpPr>
+        <p:spPr>
+          <a:xfrm>
+            <a:off x="2677363" y="4169664"/>
+            <a:ext cx="676656" cy="475488"/>
           </a:xfrm>
           <a:prstGeom prst="rect">
             <a:avLst/>
@@ -10563,7 +11109,7 @@
                 <a:ea typeface="Trebuchet MS" pitchFamily="34" charset="-122"/>
                 <a:cs typeface="Trebuchet MS" pitchFamily="34" charset="-120"/>
               </a:rPr>
-              <a:t>n</a:t>
+              <a:t>b</a:t>
             </a:r>
             <a:endParaRPr lang="en-US" sz="900" dirty="0"/>
           </a:p>
@@ -10571,14 +11117,14 @@
       </p:sp>
       <p:sp>
         <p:nvSpPr>
-          <p:cNvPr id="37" name="Shape 35"/>
-          <p:cNvSpPr/>
-          <p:nvPr/>
-        </p:nvSpPr>
-        <p:spPr>
-          <a:xfrm>
-            <a:off x="4331643" y="4169664"/>
-            <a:ext cx="685800" cy="475488"/>
+          <p:cNvPr id="43" name="Shape 41"/>
+          <p:cNvSpPr/>
+          <p:nvPr/>
+        </p:nvSpPr>
+        <p:spPr>
+          <a:xfrm>
+            <a:off x="3403397" y="4169664"/>
+            <a:ext cx="676656" cy="475488"/>
           </a:xfrm>
           <a:prstGeom prst="rect">
             <a:avLst>
@@ -10598,14 +11144,14 @@
       </p:sp>
       <p:sp>
         <p:nvSpPr>
-          <p:cNvPr id="38" name="Text 36"/>
-          <p:cNvSpPr/>
-          <p:nvPr/>
-        </p:nvSpPr>
-        <p:spPr>
-          <a:xfrm>
-            <a:off x="4331643" y="4169664"/>
-            <a:ext cx="685800" cy="475488"/>
+          <p:cNvPr id="44" name="Text 42"/>
+          <p:cNvSpPr/>
+          <p:nvPr/>
+        </p:nvSpPr>
+        <p:spPr>
+          <a:xfrm>
+            <a:off x="3403397" y="4169664"/>
+            <a:ext cx="676656" cy="475488"/>
           </a:xfrm>
           <a:prstGeom prst="rect">
             <a:avLst/>
@@ -10637,14 +11183,14 @@
       </p:sp>
       <p:sp>
         <p:nvSpPr>
-          <p:cNvPr id="39" name="Shape 37"/>
-          <p:cNvSpPr/>
-          <p:nvPr/>
-        </p:nvSpPr>
-        <p:spPr>
-          <a:xfrm>
-            <a:off x="5370141" y="4169664"/>
-            <a:ext cx="685800" cy="475488"/>
+          <p:cNvPr id="45" name="Shape 43"/>
+          <p:cNvSpPr/>
+          <p:nvPr/>
+        </p:nvSpPr>
+        <p:spPr>
+          <a:xfrm>
+            <a:off x="4129430" y="4169664"/>
+            <a:ext cx="676656" cy="475488"/>
           </a:xfrm>
           <a:prstGeom prst="rect">
             <a:avLst>
@@ -10664,14 +11210,14 @@
       </p:sp>
       <p:sp>
         <p:nvSpPr>
-          <p:cNvPr id="40" name="Text 38"/>
-          <p:cNvSpPr/>
-          <p:nvPr/>
-        </p:nvSpPr>
-        <p:spPr>
-          <a:xfrm>
-            <a:off x="5370141" y="4169664"/>
-            <a:ext cx="685800" cy="475488"/>
+          <p:cNvPr id="46" name="Text 44"/>
+          <p:cNvSpPr/>
+          <p:nvPr/>
+        </p:nvSpPr>
+        <p:spPr>
+          <a:xfrm>
+            <a:off x="4129430" y="4169664"/>
+            <a:ext cx="676656" cy="475488"/>
           </a:xfrm>
           <a:prstGeom prst="rect">
             <a:avLst/>
@@ -10703,14 +11249,14 @@
       </p:sp>
       <p:sp>
         <p:nvSpPr>
-          <p:cNvPr id="41" name="Shape 39"/>
-          <p:cNvSpPr/>
-          <p:nvPr/>
-        </p:nvSpPr>
-        <p:spPr>
-          <a:xfrm>
-            <a:off x="6408638" y="4169664"/>
-            <a:ext cx="685800" cy="475488"/>
+          <p:cNvPr id="47" name="Shape 45"/>
+          <p:cNvSpPr/>
+          <p:nvPr/>
+        </p:nvSpPr>
+        <p:spPr>
+          <a:xfrm>
+            <a:off x="4855464" y="4169664"/>
+            <a:ext cx="676656" cy="475488"/>
           </a:xfrm>
           <a:prstGeom prst="rect">
             <a:avLst>
@@ -10730,14 +11276,14 @@
       </p:sp>
       <p:sp>
         <p:nvSpPr>
-          <p:cNvPr id="42" name="Text 40"/>
-          <p:cNvSpPr/>
-          <p:nvPr/>
-        </p:nvSpPr>
-        <p:spPr>
-          <a:xfrm>
-            <a:off x="6408638" y="4169664"/>
-            <a:ext cx="685800" cy="475488"/>
+          <p:cNvPr id="48" name="Text 46"/>
+          <p:cNvSpPr/>
+          <p:nvPr/>
+        </p:nvSpPr>
+        <p:spPr>
+          <a:xfrm>
+            <a:off x="4855464" y="4169664"/>
+            <a:ext cx="676656" cy="475488"/>
           </a:xfrm>
           <a:prstGeom prst="rect">
             <a:avLst/>
@@ -10769,14 +11315,14 @@
       </p:sp>
       <p:sp>
         <p:nvSpPr>
-          <p:cNvPr id="43" name="Shape 41"/>
-          <p:cNvSpPr/>
-          <p:nvPr/>
-        </p:nvSpPr>
-        <p:spPr>
-          <a:xfrm>
-            <a:off x="7447135" y="4169664"/>
-            <a:ext cx="685800" cy="475488"/>
+          <p:cNvPr id="49" name="Shape 47"/>
+          <p:cNvSpPr/>
+          <p:nvPr/>
+        </p:nvSpPr>
+        <p:spPr>
+          <a:xfrm>
+            <a:off x="5581498" y="4169664"/>
+            <a:ext cx="676656" cy="475488"/>
           </a:xfrm>
           <a:prstGeom prst="rect">
             <a:avLst>
@@ -10796,14 +11342,14 @@
       </p:sp>
       <p:sp>
         <p:nvSpPr>
-          <p:cNvPr id="44" name="Text 42"/>
-          <p:cNvSpPr/>
-          <p:nvPr/>
-        </p:nvSpPr>
-        <p:spPr>
-          <a:xfrm>
-            <a:off x="7447135" y="4169664"/>
-            <a:ext cx="685800" cy="475488"/>
+          <p:cNvPr id="50" name="Text 48"/>
+          <p:cNvSpPr/>
+          <p:nvPr/>
+        </p:nvSpPr>
+        <p:spPr>
+          <a:xfrm>
+            <a:off x="5581498" y="4169664"/>
+            <a:ext cx="676656" cy="475488"/>
           </a:xfrm>
           <a:prstGeom prst="rect">
             <a:avLst/>
@@ -10828,6 +11374,204 @@
                 <a:cs typeface="Trebuchet MS" pitchFamily="34" charset="-120"/>
               </a:rPr>
               <a:t>t</a:t>
+            </a:r>
+            <a:endParaRPr lang="en-US" sz="900" dirty="0"/>
+          </a:p>
+        </p:txBody>
+      </p:sp>
+      <p:sp>
+        <p:nvSpPr>
+          <p:cNvPr id="51" name="Shape 49"/>
+          <p:cNvSpPr/>
+          <p:nvPr/>
+        </p:nvSpPr>
+        <p:spPr>
+          <a:xfrm>
+            <a:off x="6307531" y="4169664"/>
+            <a:ext cx="676656" cy="475488"/>
+          </a:xfrm>
+          <a:prstGeom prst="rect">
+            <a:avLst>
+              <a:gd name="adj" fmla="val 7692"/>
+            </a:avLst>
+          </a:prstGeom>
+          <a:solidFill>
+            <a:srgbClr val="FFFFFF"/>
+          </a:solidFill>
+          <a:ln w="12700">
+            <a:solidFill>
+              <a:srgbClr val="DB2777"/>
+            </a:solidFill>
+            <a:prstDash val="solid"/>
+          </a:ln>
+        </p:spPr>
+      </p:sp>
+      <p:sp>
+        <p:nvSpPr>
+          <p:cNvPr id="52" name="Text 50"/>
+          <p:cNvSpPr/>
+          <p:nvPr/>
+        </p:nvSpPr>
+        <p:spPr>
+          <a:xfrm>
+            <a:off x="6307531" y="4169664"/>
+            <a:ext cx="676656" cy="475488"/>
+          </a:xfrm>
+          <a:prstGeom prst="rect">
+            <a:avLst/>
+          </a:prstGeom>
+          <a:noFill/>
+          <a:ln/>
+        </p:spPr>
+        <p:txBody>
+          <a:bodyPr wrap="square" lIns="0" tIns="0" rIns="0" bIns="0" rtlCol="0" anchor="ctr"/>
+          <a:lstStyle/>
+          <a:p>
+            <a:pPr algn="ctr" indent="0" marL="0">
+              <a:buNone/>
+            </a:pPr>
+            <a:r>
+              <a:rPr lang="en-US" sz="900" b="1" dirty="0">
+                <a:solidFill>
+                  <a:srgbClr val="9D174D"/>
+                </a:solidFill>
+                <a:latin typeface="Trebuchet MS" pitchFamily="34" charset="0"/>
+                <a:ea typeface="Trebuchet MS" pitchFamily="34" charset="-122"/>
+                <a:cs typeface="Trebuchet MS" pitchFamily="34" charset="-120"/>
+              </a:rPr>
+              <a:t>i</a:t>
+            </a:r>
+            <a:endParaRPr lang="en-US" sz="900" dirty="0"/>
+          </a:p>
+        </p:txBody>
+      </p:sp>
+      <p:sp>
+        <p:nvSpPr>
+          <p:cNvPr id="53" name="Shape 51"/>
+          <p:cNvSpPr/>
+          <p:nvPr/>
+        </p:nvSpPr>
+        <p:spPr>
+          <a:xfrm>
+            <a:off x="7033565" y="4169664"/>
+            <a:ext cx="676656" cy="475488"/>
+          </a:xfrm>
+          <a:prstGeom prst="rect">
+            <a:avLst>
+              <a:gd name="adj" fmla="val 7692"/>
+            </a:avLst>
+          </a:prstGeom>
+          <a:solidFill>
+            <a:srgbClr val="FFFFFF"/>
+          </a:solidFill>
+          <a:ln w="12700">
+            <a:solidFill>
+              <a:srgbClr val="DB2777"/>
+            </a:solidFill>
+            <a:prstDash val="solid"/>
+          </a:ln>
+        </p:spPr>
+      </p:sp>
+      <p:sp>
+        <p:nvSpPr>
+          <p:cNvPr id="54" name="Text 52"/>
+          <p:cNvSpPr/>
+          <p:nvPr/>
+        </p:nvSpPr>
+        <p:spPr>
+          <a:xfrm>
+            <a:off x="7033565" y="4169664"/>
+            <a:ext cx="676656" cy="475488"/>
+          </a:xfrm>
+          <a:prstGeom prst="rect">
+            <a:avLst/>
+          </a:prstGeom>
+          <a:noFill/>
+          <a:ln/>
+        </p:spPr>
+        <p:txBody>
+          <a:bodyPr wrap="square" lIns="0" tIns="0" rIns="0" bIns="0" rtlCol="0" anchor="ctr"/>
+          <a:lstStyle/>
+          <a:p>
+            <a:pPr algn="ctr" indent="0" marL="0">
+              <a:buNone/>
+            </a:pPr>
+            <a:r>
+              <a:rPr lang="en-US" sz="900" b="1" dirty="0">
+                <a:solidFill>
+                  <a:srgbClr val="9D174D"/>
+                </a:solidFill>
+                <a:latin typeface="Trebuchet MS" pitchFamily="34" charset="0"/>
+                <a:ea typeface="Trebuchet MS" pitchFamily="34" charset="-122"/>
+                <a:cs typeface="Trebuchet MS" pitchFamily="34" charset="-120"/>
+              </a:rPr>
+              <a:t>v</a:t>
+            </a:r>
+            <a:endParaRPr lang="en-US" sz="900" dirty="0"/>
+          </a:p>
+        </p:txBody>
+      </p:sp>
+      <p:sp>
+        <p:nvSpPr>
+          <p:cNvPr id="55" name="Shape 53"/>
+          <p:cNvSpPr/>
+          <p:nvPr/>
+        </p:nvSpPr>
+        <p:spPr>
+          <a:xfrm>
+            <a:off x="7759598" y="4169664"/>
+            <a:ext cx="676656" cy="475488"/>
+          </a:xfrm>
+          <a:prstGeom prst="rect">
+            <a:avLst>
+              <a:gd name="adj" fmla="val 7692"/>
+            </a:avLst>
+          </a:prstGeom>
+          <a:solidFill>
+            <a:srgbClr val="FFFFFF"/>
+          </a:solidFill>
+          <a:ln w="12700">
+            <a:solidFill>
+              <a:srgbClr val="DB2777"/>
+            </a:solidFill>
+            <a:prstDash val="solid"/>
+          </a:ln>
+        </p:spPr>
+      </p:sp>
+      <p:sp>
+        <p:nvSpPr>
+          <p:cNvPr id="56" name="Text 54"/>
+          <p:cNvSpPr/>
+          <p:nvPr/>
+        </p:nvSpPr>
+        <p:spPr>
+          <a:xfrm>
+            <a:off x="7759598" y="4169664"/>
+            <a:ext cx="676656" cy="475488"/>
+          </a:xfrm>
+          <a:prstGeom prst="rect">
+            <a:avLst/>
+          </a:prstGeom>
+          <a:noFill/>
+          <a:ln/>
+        </p:spPr>
+        <p:txBody>
+          <a:bodyPr wrap="square" lIns="0" tIns="0" rIns="0" bIns="0" rtlCol="0" anchor="ctr"/>
+          <a:lstStyle/>
+          <a:p>
+            <a:pPr algn="ctr" indent="0" marL="0">
+              <a:buNone/>
+            </a:pPr>
+            <a:r>
+              <a:rPr lang="en-US" sz="900" b="1" dirty="0">
+                <a:solidFill>
+                  <a:srgbClr val="9D174D"/>
+                </a:solidFill>
+                <a:latin typeface="Trebuchet MS" pitchFamily="34" charset="0"/>
+                <a:ea typeface="Trebuchet MS" pitchFamily="34" charset="-122"/>
+                <a:cs typeface="Trebuchet MS" pitchFamily="34" charset="-120"/>
+              </a:rPr>
+              <a:t>e</a:t>
             </a:r>
             <a:endParaRPr lang="en-US" sz="900" dirty="0"/>
           </a:p>
@@ -11119,7 +11863,7 @@
                 <a:ea typeface="Calibri" pitchFamily="34" charset="-122"/>
                 <a:cs typeface="Calibri" pitchFamily="34" charset="-120"/>
               </a:rPr>
-              <a:t>Word Labs  •  wordlabs.app  •  Root: 'ject' = to throw or hurl</a:t>
+              <a:t>Word Labs  •  wordlabs.app  •  Root: 'ject' = throw</a:t>
             </a:r>
             <a:endParaRPr lang="en-US" sz="800" dirty="0"/>
           </a:p>
@@ -11258,7 +12002,7 @@
                 <a:ea typeface="Trebuchet MS" pitchFamily="34" charset="-122"/>
                 <a:cs typeface="Trebuchet MS" pitchFamily="34" charset="-120"/>
               </a:rPr>
-              <a:t>reject</a:t>
+              <a:t>objections</a:t>
             </a:r>
             <a:endParaRPr lang="en-US" sz="2800" dirty="0"/>
           </a:p>
@@ -11946,7 +12690,7 @@
                 <a:ea typeface="Calibri" pitchFamily="34" charset="-122"/>
                 <a:cs typeface="Calibri" pitchFamily="34" charset="-120"/>
               </a:rPr>
-              <a:t>Word Labs  •  wordlabs.app  •  Root: 'ject' = to throw or hurl</a:t>
+              <a:t>Word Labs  •  wordlabs.app  •  Root: 'ject' = throw</a:t>
             </a:r>
             <a:endParaRPr lang="en-US" sz="800" dirty="0"/>
           </a:p>
@@ -12085,7 +12829,7 @@
                 <a:ea typeface="Trebuchet MS" pitchFamily="34" charset="-122"/>
                 <a:cs typeface="Trebuchet MS" pitchFamily="34" charset="-120"/>
               </a:rPr>
-              <a:t>reject</a:t>
+              <a:t>objections</a:t>
             </a:r>
             <a:endParaRPr lang="en-US" sz="2800" dirty="0"/>
           </a:p>
@@ -12165,8 +12909,8 @@
         </p:nvSpPr>
         <p:spPr>
           <a:xfrm>
-            <a:off x="2938272" y="2258568"/>
-            <a:ext cx="1828800" cy="292608"/>
+            <a:off x="1989734" y="2258568"/>
+            <a:ext cx="1581912" cy="292608"/>
           </a:xfrm>
           <a:prstGeom prst="rect">
             <a:avLst>
@@ -12199,8 +12943,8 @@
         </p:nvSpPr>
         <p:spPr>
           <a:xfrm>
-            <a:off x="2938272" y="2258568"/>
-            <a:ext cx="1828800" cy="292608"/>
+            <a:off x="1989734" y="2258568"/>
+            <a:ext cx="1581912" cy="292608"/>
           </a:xfrm>
           <a:prstGeom prst="rect">
             <a:avLst/>
@@ -12224,7 +12968,7 @@
                 <a:ea typeface="Trebuchet MS" pitchFamily="34" charset="-122"/>
                 <a:cs typeface="Trebuchet MS" pitchFamily="34" charset="-120"/>
               </a:rPr>
-              <a:t>re</a:t>
+              <a:t>ob</a:t>
             </a:r>
             <a:endParaRPr lang="en-US" sz="1300" dirty="0"/>
           </a:p>
@@ -12238,8 +12982,8 @@
         </p:nvSpPr>
         <p:spPr>
           <a:xfrm>
-            <a:off x="2938272" y="2569464"/>
-            <a:ext cx="1828800" cy="201168"/>
+            <a:off x="1989734" y="2569464"/>
+            <a:ext cx="1581912" cy="201168"/>
           </a:xfrm>
           <a:prstGeom prst="rect">
             <a:avLst/>
@@ -12263,7 +13007,7 @@
                 <a:ea typeface="Calibri" pitchFamily="34" charset="-122"/>
                 <a:cs typeface="Calibri" pitchFamily="34" charset="-120"/>
               </a:rPr>
-              <a:t>back or again</a:t>
+              <a:t>against; in the way of; towards</a:t>
             </a:r>
             <a:endParaRPr lang="en-US" sz="850" dirty="0"/>
           </a:p>
@@ -12277,8 +13021,8 @@
         </p:nvSpPr>
         <p:spPr>
           <a:xfrm>
-            <a:off x="5803392" y="2258568"/>
-            <a:ext cx="1828800" cy="292608"/>
+            <a:off x="3659429" y="2258568"/>
+            <a:ext cx="1581912" cy="292608"/>
           </a:xfrm>
           <a:prstGeom prst="rect">
             <a:avLst>
@@ -12311,8 +13055,8 @@
         </p:nvSpPr>
         <p:spPr>
           <a:xfrm>
-            <a:off x="5803392" y="2258568"/>
-            <a:ext cx="1828800" cy="292608"/>
+            <a:off x="3659429" y="2258568"/>
+            <a:ext cx="1581912" cy="292608"/>
           </a:xfrm>
           <a:prstGeom prst="rect">
             <a:avLst/>
@@ -12350,8 +13094,8 @@
         </p:nvSpPr>
         <p:spPr>
           <a:xfrm>
-            <a:off x="5803392" y="2569464"/>
-            <a:ext cx="1828800" cy="201168"/>
+            <a:off x="3659429" y="2569464"/>
+            <a:ext cx="1581912" cy="201168"/>
           </a:xfrm>
           <a:prstGeom prst="rect">
             <a:avLst/>
@@ -12375,7 +13119,7 @@
                 <a:ea typeface="Calibri" pitchFamily="34" charset="-122"/>
                 <a:cs typeface="Calibri" pitchFamily="34" charset="-120"/>
               </a:rPr>
-              <a:t>to throw</a:t>
+              <a:t>throw</a:t>
             </a:r>
             <a:endParaRPr lang="en-US" sz="850" dirty="0"/>
           </a:p>
@@ -12384,6 +13128,230 @@
       <p:sp>
         <p:nvSpPr>
           <p:cNvPr id="22" name="Shape 20"/>
+          <p:cNvSpPr/>
+          <p:nvPr/>
+        </p:nvSpPr>
+        <p:spPr>
+          <a:xfrm>
+            <a:off x="5329123" y="2258568"/>
+            <a:ext cx="1581912" cy="292608"/>
+          </a:xfrm>
+          <a:prstGeom prst="rect">
+            <a:avLst>
+              <a:gd name="adj" fmla="val 25000"/>
+            </a:avLst>
+          </a:prstGeom>
+          <a:solidFill>
+            <a:srgbClr val="FCE7F3"/>
+          </a:solidFill>
+          <a:ln w="19050">
+            <a:solidFill>
+              <a:srgbClr val="DB2777"/>
+            </a:solidFill>
+            <a:prstDash val="solid"/>
+          </a:ln>
+          <a:effectLst>
+            <a:outerShdw sx="100000" sy="100000" kx="0" ky="0" algn="bl" rotWithShape="0" blurRad="101600" dist="38100" dir="8100000">
+              <a:srgbClr val="000000">
+                <a:alpha val="12000"/>
+              </a:srgbClr>
+            </a:outerShdw>
+          </a:effectLst>
+        </p:spPr>
+      </p:sp>
+      <p:sp>
+        <p:nvSpPr>
+          <p:cNvPr id="23" name="Text 21"/>
+          <p:cNvSpPr/>
+          <p:nvPr/>
+        </p:nvSpPr>
+        <p:spPr>
+          <a:xfrm>
+            <a:off x="5329123" y="2258568"/>
+            <a:ext cx="1581912" cy="292608"/>
+          </a:xfrm>
+          <a:prstGeom prst="rect">
+            <a:avLst/>
+          </a:prstGeom>
+          <a:noFill/>
+          <a:ln/>
+        </p:spPr>
+        <p:txBody>
+          <a:bodyPr wrap="square" lIns="0" tIns="0" rIns="0" bIns="0" rtlCol="0" anchor="ctr"/>
+          <a:lstStyle/>
+          <a:p>
+            <a:pPr algn="ctr" indent="0" marL="0">
+              <a:buNone/>
+            </a:pPr>
+            <a:r>
+              <a:rPr lang="en-US" sz="1300" b="1" dirty="0">
+                <a:solidFill>
+                  <a:srgbClr val="9D174D"/>
+                </a:solidFill>
+                <a:latin typeface="Trebuchet MS" pitchFamily="34" charset="0"/>
+                <a:ea typeface="Trebuchet MS" pitchFamily="34" charset="-122"/>
+                <a:cs typeface="Trebuchet MS" pitchFamily="34" charset="-120"/>
+              </a:rPr>
+              <a:t>ion</a:t>
+            </a:r>
+            <a:endParaRPr lang="en-US" sz="1300" dirty="0"/>
+          </a:p>
+        </p:txBody>
+      </p:sp>
+      <p:sp>
+        <p:nvSpPr>
+          <p:cNvPr id="24" name="Text 22"/>
+          <p:cNvSpPr/>
+          <p:nvPr/>
+        </p:nvSpPr>
+        <p:spPr>
+          <a:xfrm>
+            <a:off x="5329123" y="2569464"/>
+            <a:ext cx="1581912" cy="201168"/>
+          </a:xfrm>
+          <a:prstGeom prst="rect">
+            <a:avLst/>
+          </a:prstGeom>
+          <a:noFill/>
+          <a:ln/>
+        </p:spPr>
+        <p:txBody>
+          <a:bodyPr wrap="square" lIns="0" tIns="0" rIns="0" bIns="0" rtlCol="0" anchor="t"/>
+          <a:lstStyle/>
+          <a:p>
+            <a:pPr algn="ctr" indent="0" marL="0">
+              <a:buNone/>
+            </a:pPr>
+            <a:r>
+              <a:rPr lang="en-US" sz="850" dirty="0">
+                <a:solidFill>
+                  <a:srgbClr val="475569"/>
+                </a:solidFill>
+                <a:latin typeface="Calibri" pitchFamily="34" charset="0"/>
+                <a:ea typeface="Calibri" pitchFamily="34" charset="-122"/>
+                <a:cs typeface="Calibri" pitchFamily="34" charset="-120"/>
+              </a:rPr>
+              <a:t>act or result of</a:t>
+            </a:r>
+            <a:endParaRPr lang="en-US" sz="850" dirty="0"/>
+          </a:p>
+        </p:txBody>
+      </p:sp>
+      <p:sp>
+        <p:nvSpPr>
+          <p:cNvPr id="25" name="Shape 23"/>
+          <p:cNvSpPr/>
+          <p:nvPr/>
+        </p:nvSpPr>
+        <p:spPr>
+          <a:xfrm>
+            <a:off x="6998818" y="2258568"/>
+            <a:ext cx="1581912" cy="292608"/>
+          </a:xfrm>
+          <a:prstGeom prst="rect">
+            <a:avLst>
+              <a:gd name="adj" fmla="val 25000"/>
+            </a:avLst>
+          </a:prstGeom>
+          <a:solidFill>
+            <a:srgbClr val="FCE7F3"/>
+          </a:solidFill>
+          <a:ln w="19050">
+            <a:solidFill>
+              <a:srgbClr val="DB2777"/>
+            </a:solidFill>
+            <a:prstDash val="solid"/>
+          </a:ln>
+          <a:effectLst>
+            <a:outerShdw sx="100000" sy="100000" kx="0" ky="0" algn="bl" rotWithShape="0" blurRad="101600" dist="38100" dir="8100000">
+              <a:srgbClr val="000000">
+                <a:alpha val="12000"/>
+              </a:srgbClr>
+            </a:outerShdw>
+          </a:effectLst>
+        </p:spPr>
+      </p:sp>
+      <p:sp>
+        <p:nvSpPr>
+          <p:cNvPr id="26" name="Text 24"/>
+          <p:cNvSpPr/>
+          <p:nvPr/>
+        </p:nvSpPr>
+        <p:spPr>
+          <a:xfrm>
+            <a:off x="6998818" y="2258568"/>
+            <a:ext cx="1581912" cy="292608"/>
+          </a:xfrm>
+          <a:prstGeom prst="rect">
+            <a:avLst/>
+          </a:prstGeom>
+          <a:noFill/>
+          <a:ln/>
+        </p:spPr>
+        <p:txBody>
+          <a:bodyPr wrap="square" lIns="0" tIns="0" rIns="0" bIns="0" rtlCol="0" anchor="ctr"/>
+          <a:lstStyle/>
+          <a:p>
+            <a:pPr algn="ctr" indent="0" marL="0">
+              <a:buNone/>
+            </a:pPr>
+            <a:r>
+              <a:rPr lang="en-US" sz="1300" b="1" dirty="0">
+                <a:solidFill>
+                  <a:srgbClr val="9D174D"/>
+                </a:solidFill>
+                <a:latin typeface="Trebuchet MS" pitchFamily="34" charset="0"/>
+                <a:ea typeface="Trebuchet MS" pitchFamily="34" charset="-122"/>
+                <a:cs typeface="Trebuchet MS" pitchFamily="34" charset="-120"/>
+              </a:rPr>
+              <a:t>s</a:t>
+            </a:r>
+            <a:endParaRPr lang="en-US" sz="1300" dirty="0"/>
+          </a:p>
+        </p:txBody>
+      </p:sp>
+      <p:sp>
+        <p:nvSpPr>
+          <p:cNvPr id="27" name="Text 25"/>
+          <p:cNvSpPr/>
+          <p:nvPr/>
+        </p:nvSpPr>
+        <p:spPr>
+          <a:xfrm>
+            <a:off x="6998818" y="2569464"/>
+            <a:ext cx="1581912" cy="201168"/>
+          </a:xfrm>
+          <a:prstGeom prst="rect">
+            <a:avLst/>
+          </a:prstGeom>
+          <a:noFill/>
+          <a:ln/>
+        </p:spPr>
+        <p:txBody>
+          <a:bodyPr wrap="square" lIns="0" tIns="0" rIns="0" bIns="0" rtlCol="0" anchor="t"/>
+          <a:lstStyle/>
+          <a:p>
+            <a:pPr algn="ctr" indent="0" marL="0">
+              <a:buNone/>
+            </a:pPr>
+            <a:r>
+              <a:rPr lang="en-US" sz="850" dirty="0">
+                <a:solidFill>
+                  <a:srgbClr val="475569"/>
+                </a:solidFill>
+                <a:latin typeface="Calibri" pitchFamily="34" charset="0"/>
+                <a:ea typeface="Calibri" pitchFamily="34" charset="-122"/>
+                <a:cs typeface="Calibri" pitchFamily="34" charset="-120"/>
+              </a:rPr>
+              <a:t>plural or present tense</a:t>
+            </a:r>
+            <a:endParaRPr lang="en-US" sz="850" dirty="0"/>
+          </a:p>
+        </p:txBody>
+      </p:sp>
+      <p:sp>
+        <p:nvSpPr>
+          <p:cNvPr id="28" name="Shape 26"/>
           <p:cNvSpPr/>
           <p:nvPr/>
         </p:nvSpPr>
@@ -12410,7 +13378,7 @@
       </p:sp>
       <p:sp>
         <p:nvSpPr>
-          <p:cNvPr id="23" name="Text 21"/>
+          <p:cNvPr id="29" name="Text 27"/>
           <p:cNvSpPr/>
           <p:nvPr/>
         </p:nvSpPr>
@@ -12449,7 +13417,7 @@
       </p:sp>
       <p:sp>
         <p:nvSpPr>
-          <p:cNvPr id="24" name="Shape 22"/>
+          <p:cNvPr id="30" name="Shape 28"/>
           <p:cNvSpPr/>
           <p:nvPr/>
         </p:nvSpPr>
@@ -12476,7 +13444,7 @@
       </p:sp>
       <p:sp>
         <p:nvSpPr>
-          <p:cNvPr id="25" name="Text 23"/>
+          <p:cNvPr id="31" name="Text 29"/>
           <p:cNvSpPr/>
           <p:nvPr/>
         </p:nvSpPr>
@@ -12515,7 +13483,7 @@
       </p:sp>
       <p:sp>
         <p:nvSpPr>
-          <p:cNvPr id="26" name="Shape 24"/>
+          <p:cNvPr id="32" name="Shape 30"/>
           <p:cNvSpPr/>
           <p:nvPr/>
         </p:nvSpPr>
@@ -12542,7 +13510,7 @@
       </p:sp>
       <p:sp>
         <p:nvSpPr>
-          <p:cNvPr id="27" name="Text 25"/>
+          <p:cNvPr id="33" name="Text 31"/>
           <p:cNvSpPr/>
           <p:nvPr/>
         </p:nvSpPr>
@@ -12581,7 +13549,7 @@
       </p:sp>
       <p:sp>
         <p:nvSpPr>
-          <p:cNvPr id="28" name="Shape 26"/>
+          <p:cNvPr id="34" name="Shape 32"/>
           <p:cNvSpPr/>
           <p:nvPr/>
         </p:nvSpPr>
@@ -12608,7 +13576,7 @@
       </p:sp>
       <p:sp>
         <p:nvSpPr>
-          <p:cNvPr id="29" name="Text 27"/>
+          <p:cNvPr id="35" name="Text 33"/>
           <p:cNvSpPr/>
           <p:nvPr/>
         </p:nvSpPr>
@@ -12931,7 +13899,7 @@
                 <a:ea typeface="Calibri" pitchFamily="34" charset="-122"/>
                 <a:cs typeface="Calibri" pitchFamily="34" charset="-120"/>
               </a:rPr>
-              <a:t>Word Labs  •  wordlabs.app  •  Root: 'ject' = to throw or hurl</a:t>
+              <a:t>Word Labs  •  wordlabs.app  •  Root: 'ject' = throw</a:t>
             </a:r>
             <a:endParaRPr lang="en-US" sz="800" dirty="0"/>
           </a:p>
@@ -13070,7 +14038,7 @@
                 <a:ea typeface="Trebuchet MS" pitchFamily="34" charset="-122"/>
                 <a:cs typeface="Trebuchet MS" pitchFamily="34" charset="-120"/>
               </a:rPr>
-              <a:t>reject</a:t>
+              <a:t>objections</a:t>
             </a:r>
             <a:endParaRPr lang="en-US" sz="2800" dirty="0"/>
           </a:p>
@@ -13150,8 +14118,8 @@
         </p:nvSpPr>
         <p:spPr>
           <a:xfrm>
-            <a:off x="2938272" y="2258568"/>
-            <a:ext cx="1828800" cy="292608"/>
+            <a:off x="1989734" y="2258568"/>
+            <a:ext cx="1581912" cy="292608"/>
           </a:xfrm>
           <a:prstGeom prst="rect">
             <a:avLst>
@@ -13184,8 +14152,8 @@
         </p:nvSpPr>
         <p:spPr>
           <a:xfrm>
-            <a:off x="2938272" y="2258568"/>
-            <a:ext cx="1828800" cy="292608"/>
+            <a:off x="1989734" y="2258568"/>
+            <a:ext cx="1581912" cy="292608"/>
           </a:xfrm>
           <a:prstGeom prst="rect">
             <a:avLst/>
@@ -13209,7 +14177,7 @@
                 <a:ea typeface="Trebuchet MS" pitchFamily="34" charset="-122"/>
                 <a:cs typeface="Trebuchet MS" pitchFamily="34" charset="-120"/>
               </a:rPr>
-              <a:t>re</a:t>
+              <a:t>ob</a:t>
             </a:r>
             <a:endParaRPr lang="en-US" sz="1300" dirty="0"/>
           </a:p>
@@ -13223,8 +14191,8 @@
         </p:nvSpPr>
         <p:spPr>
           <a:xfrm>
-            <a:off x="2938272" y="2569464"/>
-            <a:ext cx="1828800" cy="201168"/>
+            <a:off x="1989734" y="2569464"/>
+            <a:ext cx="1581912" cy="201168"/>
           </a:xfrm>
           <a:prstGeom prst="rect">
             <a:avLst/>
@@ -13248,7 +14216,7 @@
                 <a:ea typeface="Calibri" pitchFamily="34" charset="-122"/>
                 <a:cs typeface="Calibri" pitchFamily="34" charset="-120"/>
               </a:rPr>
-              <a:t>back or again</a:t>
+              <a:t>against; in the way of; towards</a:t>
             </a:r>
             <a:endParaRPr lang="en-US" sz="850" dirty="0"/>
           </a:p>
@@ -13262,8 +14230,8 @@
         </p:nvSpPr>
         <p:spPr>
           <a:xfrm>
-            <a:off x="5803392" y="2258568"/>
-            <a:ext cx="1828800" cy="292608"/>
+            <a:off x="3659429" y="2258568"/>
+            <a:ext cx="1581912" cy="292608"/>
           </a:xfrm>
           <a:prstGeom prst="rect">
             <a:avLst>
@@ -13296,8 +14264,8 @@
         </p:nvSpPr>
         <p:spPr>
           <a:xfrm>
-            <a:off x="5803392" y="2258568"/>
-            <a:ext cx="1828800" cy="292608"/>
+            <a:off x="3659429" y="2258568"/>
+            <a:ext cx="1581912" cy="292608"/>
           </a:xfrm>
           <a:prstGeom prst="rect">
             <a:avLst/>
@@ -13335,8 +14303,8 @@
         </p:nvSpPr>
         <p:spPr>
           <a:xfrm>
-            <a:off x="5803392" y="2569464"/>
-            <a:ext cx="1828800" cy="201168"/>
+            <a:off x="3659429" y="2569464"/>
+            <a:ext cx="1581912" cy="201168"/>
           </a:xfrm>
           <a:prstGeom prst="rect">
             <a:avLst/>
@@ -13360,7 +14328,7 @@
                 <a:ea typeface="Calibri" pitchFamily="34" charset="-122"/>
                 <a:cs typeface="Calibri" pitchFamily="34" charset="-120"/>
               </a:rPr>
-              <a:t>to throw</a:t>
+              <a:t>throw</a:t>
             </a:r>
             <a:endParaRPr lang="en-US" sz="850" dirty="0"/>
           </a:p>
@@ -13369,6 +14337,230 @@
       <p:sp>
         <p:nvSpPr>
           <p:cNvPr id="22" name="Shape 20"/>
+          <p:cNvSpPr/>
+          <p:nvPr/>
+        </p:nvSpPr>
+        <p:spPr>
+          <a:xfrm>
+            <a:off x="5329123" y="2258568"/>
+            <a:ext cx="1581912" cy="292608"/>
+          </a:xfrm>
+          <a:prstGeom prst="rect">
+            <a:avLst>
+              <a:gd name="adj" fmla="val 25000"/>
+            </a:avLst>
+          </a:prstGeom>
+          <a:solidFill>
+            <a:srgbClr val="FCE7F3"/>
+          </a:solidFill>
+          <a:ln w="19050">
+            <a:solidFill>
+              <a:srgbClr val="DB2777"/>
+            </a:solidFill>
+            <a:prstDash val="solid"/>
+          </a:ln>
+          <a:effectLst>
+            <a:outerShdw sx="100000" sy="100000" kx="0" ky="0" algn="bl" rotWithShape="0" blurRad="101600" dist="38100" dir="8100000">
+              <a:srgbClr val="000000">
+                <a:alpha val="12000"/>
+              </a:srgbClr>
+            </a:outerShdw>
+          </a:effectLst>
+        </p:spPr>
+      </p:sp>
+      <p:sp>
+        <p:nvSpPr>
+          <p:cNvPr id="23" name="Text 21"/>
+          <p:cNvSpPr/>
+          <p:nvPr/>
+        </p:nvSpPr>
+        <p:spPr>
+          <a:xfrm>
+            <a:off x="5329123" y="2258568"/>
+            <a:ext cx="1581912" cy="292608"/>
+          </a:xfrm>
+          <a:prstGeom prst="rect">
+            <a:avLst/>
+          </a:prstGeom>
+          <a:noFill/>
+          <a:ln/>
+        </p:spPr>
+        <p:txBody>
+          <a:bodyPr wrap="square" lIns="0" tIns="0" rIns="0" bIns="0" rtlCol="0" anchor="ctr"/>
+          <a:lstStyle/>
+          <a:p>
+            <a:pPr algn="ctr" indent="0" marL="0">
+              <a:buNone/>
+            </a:pPr>
+            <a:r>
+              <a:rPr lang="en-US" sz="1300" b="1" dirty="0">
+                <a:solidFill>
+                  <a:srgbClr val="9D174D"/>
+                </a:solidFill>
+                <a:latin typeface="Trebuchet MS" pitchFamily="34" charset="0"/>
+                <a:ea typeface="Trebuchet MS" pitchFamily="34" charset="-122"/>
+                <a:cs typeface="Trebuchet MS" pitchFamily="34" charset="-120"/>
+              </a:rPr>
+              <a:t>ion</a:t>
+            </a:r>
+            <a:endParaRPr lang="en-US" sz="1300" dirty="0"/>
+          </a:p>
+        </p:txBody>
+      </p:sp>
+      <p:sp>
+        <p:nvSpPr>
+          <p:cNvPr id="24" name="Text 22"/>
+          <p:cNvSpPr/>
+          <p:nvPr/>
+        </p:nvSpPr>
+        <p:spPr>
+          <a:xfrm>
+            <a:off x="5329123" y="2569464"/>
+            <a:ext cx="1581912" cy="201168"/>
+          </a:xfrm>
+          <a:prstGeom prst="rect">
+            <a:avLst/>
+          </a:prstGeom>
+          <a:noFill/>
+          <a:ln/>
+        </p:spPr>
+        <p:txBody>
+          <a:bodyPr wrap="square" lIns="0" tIns="0" rIns="0" bIns="0" rtlCol="0" anchor="t"/>
+          <a:lstStyle/>
+          <a:p>
+            <a:pPr algn="ctr" indent="0" marL="0">
+              <a:buNone/>
+            </a:pPr>
+            <a:r>
+              <a:rPr lang="en-US" sz="850" dirty="0">
+                <a:solidFill>
+                  <a:srgbClr val="475569"/>
+                </a:solidFill>
+                <a:latin typeface="Calibri" pitchFamily="34" charset="0"/>
+                <a:ea typeface="Calibri" pitchFamily="34" charset="-122"/>
+                <a:cs typeface="Calibri" pitchFamily="34" charset="-120"/>
+              </a:rPr>
+              <a:t>act or result of</a:t>
+            </a:r>
+            <a:endParaRPr lang="en-US" sz="850" dirty="0"/>
+          </a:p>
+        </p:txBody>
+      </p:sp>
+      <p:sp>
+        <p:nvSpPr>
+          <p:cNvPr id="25" name="Shape 23"/>
+          <p:cNvSpPr/>
+          <p:nvPr/>
+        </p:nvSpPr>
+        <p:spPr>
+          <a:xfrm>
+            <a:off x="6998818" y="2258568"/>
+            <a:ext cx="1581912" cy="292608"/>
+          </a:xfrm>
+          <a:prstGeom prst="rect">
+            <a:avLst>
+              <a:gd name="adj" fmla="val 25000"/>
+            </a:avLst>
+          </a:prstGeom>
+          <a:solidFill>
+            <a:srgbClr val="FCE7F3"/>
+          </a:solidFill>
+          <a:ln w="19050">
+            <a:solidFill>
+              <a:srgbClr val="DB2777"/>
+            </a:solidFill>
+            <a:prstDash val="solid"/>
+          </a:ln>
+          <a:effectLst>
+            <a:outerShdw sx="100000" sy="100000" kx="0" ky="0" algn="bl" rotWithShape="0" blurRad="101600" dist="38100" dir="8100000">
+              <a:srgbClr val="000000">
+                <a:alpha val="12000"/>
+              </a:srgbClr>
+            </a:outerShdw>
+          </a:effectLst>
+        </p:spPr>
+      </p:sp>
+      <p:sp>
+        <p:nvSpPr>
+          <p:cNvPr id="26" name="Text 24"/>
+          <p:cNvSpPr/>
+          <p:nvPr/>
+        </p:nvSpPr>
+        <p:spPr>
+          <a:xfrm>
+            <a:off x="6998818" y="2258568"/>
+            <a:ext cx="1581912" cy="292608"/>
+          </a:xfrm>
+          <a:prstGeom prst="rect">
+            <a:avLst/>
+          </a:prstGeom>
+          <a:noFill/>
+          <a:ln/>
+        </p:spPr>
+        <p:txBody>
+          <a:bodyPr wrap="square" lIns="0" tIns="0" rIns="0" bIns="0" rtlCol="0" anchor="ctr"/>
+          <a:lstStyle/>
+          <a:p>
+            <a:pPr algn="ctr" indent="0" marL="0">
+              <a:buNone/>
+            </a:pPr>
+            <a:r>
+              <a:rPr lang="en-US" sz="1300" b="1" dirty="0">
+                <a:solidFill>
+                  <a:srgbClr val="9D174D"/>
+                </a:solidFill>
+                <a:latin typeface="Trebuchet MS" pitchFamily="34" charset="0"/>
+                <a:ea typeface="Trebuchet MS" pitchFamily="34" charset="-122"/>
+                <a:cs typeface="Trebuchet MS" pitchFamily="34" charset="-120"/>
+              </a:rPr>
+              <a:t>s</a:t>
+            </a:r>
+            <a:endParaRPr lang="en-US" sz="1300" dirty="0"/>
+          </a:p>
+        </p:txBody>
+      </p:sp>
+      <p:sp>
+        <p:nvSpPr>
+          <p:cNvPr id="27" name="Text 25"/>
+          <p:cNvSpPr/>
+          <p:nvPr/>
+        </p:nvSpPr>
+        <p:spPr>
+          <a:xfrm>
+            <a:off x="6998818" y="2569464"/>
+            <a:ext cx="1581912" cy="201168"/>
+          </a:xfrm>
+          <a:prstGeom prst="rect">
+            <a:avLst/>
+          </a:prstGeom>
+          <a:noFill/>
+          <a:ln/>
+        </p:spPr>
+        <p:txBody>
+          <a:bodyPr wrap="square" lIns="0" tIns="0" rIns="0" bIns="0" rtlCol="0" anchor="t"/>
+          <a:lstStyle/>
+          <a:p>
+            <a:pPr algn="ctr" indent="0" marL="0">
+              <a:buNone/>
+            </a:pPr>
+            <a:r>
+              <a:rPr lang="en-US" sz="850" dirty="0">
+                <a:solidFill>
+                  <a:srgbClr val="475569"/>
+                </a:solidFill>
+                <a:latin typeface="Calibri" pitchFamily="34" charset="0"/>
+                <a:ea typeface="Calibri" pitchFamily="34" charset="-122"/>
+                <a:cs typeface="Calibri" pitchFamily="34" charset="-120"/>
+              </a:rPr>
+              <a:t>plural or present tense</a:t>
+            </a:r>
+            <a:endParaRPr lang="en-US" sz="850" dirty="0"/>
+          </a:p>
+        </p:txBody>
+      </p:sp>
+      <p:sp>
+        <p:nvSpPr>
+          <p:cNvPr id="28" name="Shape 26"/>
           <p:cNvSpPr/>
           <p:nvPr/>
         </p:nvSpPr>
@@ -13395,7 +14587,7 @@
       </p:sp>
       <p:sp>
         <p:nvSpPr>
-          <p:cNvPr id="23" name="Text 21"/>
+          <p:cNvPr id="29" name="Text 27"/>
           <p:cNvSpPr/>
           <p:nvPr/>
         </p:nvSpPr>
@@ -13434,7 +14626,7 @@
       </p:sp>
       <p:sp>
         <p:nvSpPr>
-          <p:cNvPr id="24" name="Shape 22"/>
+          <p:cNvPr id="30" name="Shape 28"/>
           <p:cNvSpPr/>
           <p:nvPr/>
         </p:nvSpPr>
@@ -13461,13 +14653,13 @@
       </p:sp>
       <p:sp>
         <p:nvSpPr>
-          <p:cNvPr id="25" name="Shape 23"/>
-          <p:cNvSpPr/>
-          <p:nvPr/>
-        </p:nvSpPr>
-        <p:spPr>
-          <a:xfrm>
-            <a:off x="2999232" y="3364992"/>
+          <p:cNvPr id="31" name="Shape 29"/>
+          <p:cNvSpPr/>
+          <p:nvPr/>
+        </p:nvSpPr>
+        <p:spPr>
+          <a:xfrm>
+            <a:off x="2313432" y="3364992"/>
             <a:ext cx="1645920" cy="475488"/>
           </a:xfrm>
           <a:prstGeom prst="rect">
@@ -13488,13 +14680,13 @@
       </p:sp>
       <p:sp>
         <p:nvSpPr>
-          <p:cNvPr id="26" name="Text 24"/>
-          <p:cNvSpPr/>
-          <p:nvPr/>
-        </p:nvSpPr>
-        <p:spPr>
-          <a:xfrm>
-            <a:off x="2999232" y="3364992"/>
+          <p:cNvPr id="32" name="Text 30"/>
+          <p:cNvSpPr/>
+          <p:nvPr/>
+        </p:nvSpPr>
+        <p:spPr>
+          <a:xfrm>
+            <a:off x="2313432" y="3364992"/>
             <a:ext cx="1645920" cy="475488"/>
           </a:xfrm>
           <a:prstGeom prst="rect">
@@ -13519,7 +14711,7 @@
                 <a:ea typeface="Trebuchet MS" pitchFamily="34" charset="-122"/>
                 <a:cs typeface="Trebuchet MS" pitchFamily="34" charset="-120"/>
               </a:rPr>
-              <a:t>re</a:t>
+              <a:t>ob</a:t>
             </a:r>
             <a:endParaRPr lang="en-US" sz="1400" dirty="0"/>
           </a:p>
@@ -13527,14 +14719,14 @@
       </p:sp>
       <p:sp>
         <p:nvSpPr>
-          <p:cNvPr id="27" name="Text 25"/>
-          <p:cNvSpPr/>
-          <p:nvPr/>
-        </p:nvSpPr>
-        <p:spPr>
-          <a:xfrm>
-            <a:off x="4645152" y="3364992"/>
-            <a:ext cx="1097280" cy="475488"/>
+          <p:cNvPr id="33" name="Text 31"/>
+          <p:cNvSpPr/>
+          <p:nvPr/>
+        </p:nvSpPr>
+        <p:spPr>
+          <a:xfrm>
+            <a:off x="3959352" y="3364992"/>
+            <a:ext cx="411480" cy="475488"/>
           </a:xfrm>
           <a:prstGeom prst="rect">
             <a:avLst/>
@@ -13566,13 +14758,13 @@
       </p:sp>
       <p:sp>
         <p:nvSpPr>
-          <p:cNvPr id="28" name="Shape 26"/>
-          <p:cNvSpPr/>
-          <p:nvPr/>
-        </p:nvSpPr>
-        <p:spPr>
-          <a:xfrm>
-            <a:off x="5742432" y="3364992"/>
+          <p:cNvPr id="34" name="Shape 32"/>
+          <p:cNvSpPr/>
+          <p:nvPr/>
+        </p:nvSpPr>
+        <p:spPr>
+          <a:xfrm>
+            <a:off x="4370832" y="3364992"/>
             <a:ext cx="1645920" cy="475488"/>
           </a:xfrm>
           <a:prstGeom prst="rect">
@@ -13593,13 +14785,13 @@
       </p:sp>
       <p:sp>
         <p:nvSpPr>
-          <p:cNvPr id="29" name="Text 27"/>
-          <p:cNvSpPr/>
-          <p:nvPr/>
-        </p:nvSpPr>
-        <p:spPr>
-          <a:xfrm>
-            <a:off x="5742432" y="3364992"/>
+          <p:cNvPr id="35" name="Text 33"/>
+          <p:cNvSpPr/>
+          <p:nvPr/>
+        </p:nvSpPr>
+        <p:spPr>
+          <a:xfrm>
+            <a:off x="4370832" y="3364992"/>
             <a:ext cx="1645920" cy="475488"/>
           </a:xfrm>
           <a:prstGeom prst="rect">
@@ -13624,7 +14816,7 @@
                 <a:ea typeface="Trebuchet MS" pitchFamily="34" charset="-122"/>
                 <a:cs typeface="Trebuchet MS" pitchFamily="34" charset="-120"/>
               </a:rPr>
-              <a:t>ject</a:t>
+              <a:t>jec</a:t>
             </a:r>
             <a:endParaRPr lang="en-US" sz="1400" dirty="0"/>
           </a:p>
@@ -13632,7 +14824,112 @@
       </p:sp>
       <p:sp>
         <p:nvSpPr>
-          <p:cNvPr id="30" name="Shape 28"/>
+          <p:cNvPr id="36" name="Text 34"/>
+          <p:cNvSpPr/>
+          <p:nvPr/>
+        </p:nvSpPr>
+        <p:spPr>
+          <a:xfrm>
+            <a:off x="6016752" y="3364992"/>
+            <a:ext cx="411480" cy="475488"/>
+          </a:xfrm>
+          <a:prstGeom prst="rect">
+            <a:avLst/>
+          </a:prstGeom>
+          <a:noFill/>
+          <a:ln/>
+        </p:spPr>
+        <p:txBody>
+          <a:bodyPr wrap="square" lIns="0" tIns="0" rIns="0" bIns="0" rtlCol="0" anchor="ctr"/>
+          <a:lstStyle/>
+          <a:p>
+            <a:pPr algn="ctr" indent="0" marL="0">
+              <a:buNone/>
+            </a:pPr>
+            <a:r>
+              <a:rPr lang="en-US" sz="1600" b="1" dirty="0">
+                <a:solidFill>
+                  <a:srgbClr val="0D9488"/>
+                </a:solidFill>
+                <a:latin typeface="Trebuchet MS" pitchFamily="34" charset="0"/>
+                <a:ea typeface="Trebuchet MS" pitchFamily="34" charset="-122"/>
+                <a:cs typeface="Trebuchet MS" pitchFamily="34" charset="-120"/>
+              </a:rPr>
+              <a:t>·</a:t>
+            </a:r>
+            <a:endParaRPr lang="en-US" sz="1600" dirty="0"/>
+          </a:p>
+        </p:txBody>
+      </p:sp>
+      <p:sp>
+        <p:nvSpPr>
+          <p:cNvPr id="37" name="Shape 35"/>
+          <p:cNvSpPr/>
+          <p:nvPr/>
+        </p:nvSpPr>
+        <p:spPr>
+          <a:xfrm>
+            <a:off x="6428232" y="3364992"/>
+            <a:ext cx="1645920" cy="475488"/>
+          </a:xfrm>
+          <a:prstGeom prst="rect">
+            <a:avLst>
+              <a:gd name="adj" fmla="val 9615"/>
+            </a:avLst>
+          </a:prstGeom>
+          <a:solidFill>
+            <a:srgbClr val="FFFFFF"/>
+          </a:solidFill>
+          <a:ln w="12700">
+            <a:solidFill>
+              <a:srgbClr val="0D9488"/>
+            </a:solidFill>
+            <a:prstDash val="solid"/>
+          </a:ln>
+        </p:spPr>
+      </p:sp>
+      <p:sp>
+        <p:nvSpPr>
+          <p:cNvPr id="38" name="Text 36"/>
+          <p:cNvSpPr/>
+          <p:nvPr/>
+        </p:nvSpPr>
+        <p:spPr>
+          <a:xfrm>
+            <a:off x="6428232" y="3364992"/>
+            <a:ext cx="1645920" cy="475488"/>
+          </a:xfrm>
+          <a:prstGeom prst="rect">
+            <a:avLst/>
+          </a:prstGeom>
+          <a:noFill/>
+          <a:ln/>
+        </p:spPr>
+        <p:txBody>
+          <a:bodyPr wrap="square" lIns="0" tIns="0" rIns="0" bIns="0" rtlCol="0" anchor="ctr"/>
+          <a:lstStyle/>
+          <a:p>
+            <a:pPr algn="ctr" indent="0" marL="0">
+              <a:buNone/>
+            </a:pPr>
+            <a:r>
+              <a:rPr lang="en-US" sz="1400" b="1" dirty="0">
+                <a:solidFill>
+                  <a:srgbClr val="0D9488"/>
+                </a:solidFill>
+                <a:latin typeface="Trebuchet MS" pitchFamily="34" charset="0"/>
+                <a:ea typeface="Trebuchet MS" pitchFamily="34" charset="-122"/>
+                <a:cs typeface="Trebuchet MS" pitchFamily="34" charset="-120"/>
+              </a:rPr>
+              <a:t>tions</a:t>
+            </a:r>
+            <a:endParaRPr lang="en-US" sz="1400" dirty="0"/>
+          </a:p>
+        </p:txBody>
+      </p:sp>
+      <p:sp>
+        <p:nvSpPr>
+          <p:cNvPr id="39" name="Shape 37"/>
           <p:cNvSpPr/>
           <p:nvPr/>
         </p:nvSpPr>
@@ -13659,7 +14956,7 @@
       </p:sp>
       <p:sp>
         <p:nvSpPr>
-          <p:cNvPr id="31" name="Text 29"/>
+          <p:cNvPr id="40" name="Text 38"/>
           <p:cNvSpPr/>
           <p:nvPr/>
         </p:nvSpPr>
@@ -13698,7 +14995,7 @@
       </p:sp>
       <p:sp>
         <p:nvSpPr>
-          <p:cNvPr id="32" name="Shape 30"/>
+          <p:cNvPr id="41" name="Shape 39"/>
           <p:cNvSpPr/>
           <p:nvPr/>
         </p:nvSpPr>
@@ -13725,7 +15022,7 @@
       </p:sp>
       <p:sp>
         <p:nvSpPr>
-          <p:cNvPr id="33" name="Text 31"/>
+          <p:cNvPr id="42" name="Text 40"/>
           <p:cNvSpPr/>
           <p:nvPr/>
         </p:nvSpPr>
@@ -13957,7 +15254,7 @@
                 <a:ea typeface="Calibri" pitchFamily="34" charset="-122"/>
                 <a:cs typeface="Calibri" pitchFamily="34" charset="-120"/>
               </a:rPr>
-              <a:t>Root 'ject' — to throw or hurl</a:t>
+              <a:t>Root 'ject' — throw</a:t>
             </a:r>
             <a:endParaRPr lang="en-US" sz="1600" dirty="0"/>
           </a:p>
@@ -14313,7 +15610,7 @@
                 <a:ea typeface="Calibri" pitchFamily="34" charset="-122"/>
                 <a:cs typeface="Calibri" pitchFamily="34" charset="-120"/>
               </a:rPr>
-              <a:t>Word Labs  •  wordlabs.app  •  Root: 'ject' = to throw or hurl</a:t>
+              <a:t>Word Labs  •  wordlabs.app  •  Root: 'ject' = throw</a:t>
             </a:r>
             <a:endParaRPr lang="en-US" sz="800" dirty="0"/>
           </a:p>
@@ -14452,7 +15749,7 @@
                 <a:ea typeface="Trebuchet MS" pitchFamily="34" charset="-122"/>
                 <a:cs typeface="Trebuchet MS" pitchFamily="34" charset="-120"/>
               </a:rPr>
-              <a:t>reject</a:t>
+              <a:t>objections</a:t>
             </a:r>
             <a:endParaRPr lang="en-US" sz="2800" dirty="0"/>
           </a:p>
@@ -14532,8 +15829,8 @@
         </p:nvSpPr>
         <p:spPr>
           <a:xfrm>
-            <a:off x="2938272" y="2258568"/>
-            <a:ext cx="1828800" cy="292608"/>
+            <a:off x="1989734" y="2258568"/>
+            <a:ext cx="1581912" cy="292608"/>
           </a:xfrm>
           <a:prstGeom prst="rect">
             <a:avLst>
@@ -14566,8 +15863,8 @@
         </p:nvSpPr>
         <p:spPr>
           <a:xfrm>
-            <a:off x="2938272" y="2258568"/>
-            <a:ext cx="1828800" cy="292608"/>
+            <a:off x="1989734" y="2258568"/>
+            <a:ext cx="1581912" cy="292608"/>
           </a:xfrm>
           <a:prstGeom prst="rect">
             <a:avLst/>
@@ -14591,7 +15888,7 @@
                 <a:ea typeface="Trebuchet MS" pitchFamily="34" charset="-122"/>
                 <a:cs typeface="Trebuchet MS" pitchFamily="34" charset="-120"/>
               </a:rPr>
-              <a:t>re</a:t>
+              <a:t>ob</a:t>
             </a:r>
             <a:endParaRPr lang="en-US" sz="1300" dirty="0"/>
           </a:p>
@@ -14605,8 +15902,8 @@
         </p:nvSpPr>
         <p:spPr>
           <a:xfrm>
-            <a:off x="2938272" y="2569464"/>
-            <a:ext cx="1828800" cy="201168"/>
+            <a:off x="1989734" y="2569464"/>
+            <a:ext cx="1581912" cy="201168"/>
           </a:xfrm>
           <a:prstGeom prst="rect">
             <a:avLst/>
@@ -14630,7 +15927,7 @@
                 <a:ea typeface="Calibri" pitchFamily="34" charset="-122"/>
                 <a:cs typeface="Calibri" pitchFamily="34" charset="-120"/>
               </a:rPr>
-              <a:t>back or again</a:t>
+              <a:t>against; in the way of; towards</a:t>
             </a:r>
             <a:endParaRPr lang="en-US" sz="850" dirty="0"/>
           </a:p>
@@ -14644,8 +15941,8 @@
         </p:nvSpPr>
         <p:spPr>
           <a:xfrm>
-            <a:off x="5803392" y="2258568"/>
-            <a:ext cx="1828800" cy="292608"/>
+            <a:off x="3659429" y="2258568"/>
+            <a:ext cx="1581912" cy="292608"/>
           </a:xfrm>
           <a:prstGeom prst="rect">
             <a:avLst>
@@ -14678,8 +15975,8 @@
         </p:nvSpPr>
         <p:spPr>
           <a:xfrm>
-            <a:off x="5803392" y="2258568"/>
-            <a:ext cx="1828800" cy="292608"/>
+            <a:off x="3659429" y="2258568"/>
+            <a:ext cx="1581912" cy="292608"/>
           </a:xfrm>
           <a:prstGeom prst="rect">
             <a:avLst/>
@@ -14717,8 +16014,8 @@
         </p:nvSpPr>
         <p:spPr>
           <a:xfrm>
-            <a:off x="5803392" y="2569464"/>
-            <a:ext cx="1828800" cy="201168"/>
+            <a:off x="3659429" y="2569464"/>
+            <a:ext cx="1581912" cy="201168"/>
           </a:xfrm>
           <a:prstGeom prst="rect">
             <a:avLst/>
@@ -14742,7 +16039,7 @@
                 <a:ea typeface="Calibri" pitchFamily="34" charset="-122"/>
                 <a:cs typeface="Calibri" pitchFamily="34" charset="-120"/>
               </a:rPr>
-              <a:t>to throw</a:t>
+              <a:t>throw</a:t>
             </a:r>
             <a:endParaRPr lang="en-US" sz="850" dirty="0"/>
           </a:p>
@@ -14751,6 +16048,230 @@
       <p:sp>
         <p:nvSpPr>
           <p:cNvPr id="22" name="Shape 20"/>
+          <p:cNvSpPr/>
+          <p:nvPr/>
+        </p:nvSpPr>
+        <p:spPr>
+          <a:xfrm>
+            <a:off x="5329123" y="2258568"/>
+            <a:ext cx="1581912" cy="292608"/>
+          </a:xfrm>
+          <a:prstGeom prst="rect">
+            <a:avLst>
+              <a:gd name="adj" fmla="val 25000"/>
+            </a:avLst>
+          </a:prstGeom>
+          <a:solidFill>
+            <a:srgbClr val="FCE7F3"/>
+          </a:solidFill>
+          <a:ln w="19050">
+            <a:solidFill>
+              <a:srgbClr val="DB2777"/>
+            </a:solidFill>
+            <a:prstDash val="solid"/>
+          </a:ln>
+          <a:effectLst>
+            <a:outerShdw sx="100000" sy="100000" kx="0" ky="0" algn="bl" rotWithShape="0" blurRad="101600" dist="38100" dir="8100000">
+              <a:srgbClr val="000000">
+                <a:alpha val="12000"/>
+              </a:srgbClr>
+            </a:outerShdw>
+          </a:effectLst>
+        </p:spPr>
+      </p:sp>
+      <p:sp>
+        <p:nvSpPr>
+          <p:cNvPr id="23" name="Text 21"/>
+          <p:cNvSpPr/>
+          <p:nvPr/>
+        </p:nvSpPr>
+        <p:spPr>
+          <a:xfrm>
+            <a:off x="5329123" y="2258568"/>
+            <a:ext cx="1581912" cy="292608"/>
+          </a:xfrm>
+          <a:prstGeom prst="rect">
+            <a:avLst/>
+          </a:prstGeom>
+          <a:noFill/>
+          <a:ln/>
+        </p:spPr>
+        <p:txBody>
+          <a:bodyPr wrap="square" lIns="0" tIns="0" rIns="0" bIns="0" rtlCol="0" anchor="ctr"/>
+          <a:lstStyle/>
+          <a:p>
+            <a:pPr algn="ctr" indent="0" marL="0">
+              <a:buNone/>
+            </a:pPr>
+            <a:r>
+              <a:rPr lang="en-US" sz="1300" b="1" dirty="0">
+                <a:solidFill>
+                  <a:srgbClr val="9D174D"/>
+                </a:solidFill>
+                <a:latin typeface="Trebuchet MS" pitchFamily="34" charset="0"/>
+                <a:ea typeface="Trebuchet MS" pitchFamily="34" charset="-122"/>
+                <a:cs typeface="Trebuchet MS" pitchFamily="34" charset="-120"/>
+              </a:rPr>
+              <a:t>ion</a:t>
+            </a:r>
+            <a:endParaRPr lang="en-US" sz="1300" dirty="0"/>
+          </a:p>
+        </p:txBody>
+      </p:sp>
+      <p:sp>
+        <p:nvSpPr>
+          <p:cNvPr id="24" name="Text 22"/>
+          <p:cNvSpPr/>
+          <p:nvPr/>
+        </p:nvSpPr>
+        <p:spPr>
+          <a:xfrm>
+            <a:off x="5329123" y="2569464"/>
+            <a:ext cx="1581912" cy="201168"/>
+          </a:xfrm>
+          <a:prstGeom prst="rect">
+            <a:avLst/>
+          </a:prstGeom>
+          <a:noFill/>
+          <a:ln/>
+        </p:spPr>
+        <p:txBody>
+          <a:bodyPr wrap="square" lIns="0" tIns="0" rIns="0" bIns="0" rtlCol="0" anchor="t"/>
+          <a:lstStyle/>
+          <a:p>
+            <a:pPr algn="ctr" indent="0" marL="0">
+              <a:buNone/>
+            </a:pPr>
+            <a:r>
+              <a:rPr lang="en-US" sz="850" dirty="0">
+                <a:solidFill>
+                  <a:srgbClr val="475569"/>
+                </a:solidFill>
+                <a:latin typeface="Calibri" pitchFamily="34" charset="0"/>
+                <a:ea typeface="Calibri" pitchFamily="34" charset="-122"/>
+                <a:cs typeface="Calibri" pitchFamily="34" charset="-120"/>
+              </a:rPr>
+              <a:t>act or result of</a:t>
+            </a:r>
+            <a:endParaRPr lang="en-US" sz="850" dirty="0"/>
+          </a:p>
+        </p:txBody>
+      </p:sp>
+      <p:sp>
+        <p:nvSpPr>
+          <p:cNvPr id="25" name="Shape 23"/>
+          <p:cNvSpPr/>
+          <p:nvPr/>
+        </p:nvSpPr>
+        <p:spPr>
+          <a:xfrm>
+            <a:off x="6998818" y="2258568"/>
+            <a:ext cx="1581912" cy="292608"/>
+          </a:xfrm>
+          <a:prstGeom prst="rect">
+            <a:avLst>
+              <a:gd name="adj" fmla="val 25000"/>
+            </a:avLst>
+          </a:prstGeom>
+          <a:solidFill>
+            <a:srgbClr val="FCE7F3"/>
+          </a:solidFill>
+          <a:ln w="19050">
+            <a:solidFill>
+              <a:srgbClr val="DB2777"/>
+            </a:solidFill>
+            <a:prstDash val="solid"/>
+          </a:ln>
+          <a:effectLst>
+            <a:outerShdw sx="100000" sy="100000" kx="0" ky="0" algn="bl" rotWithShape="0" blurRad="101600" dist="38100" dir="8100000">
+              <a:srgbClr val="000000">
+                <a:alpha val="12000"/>
+              </a:srgbClr>
+            </a:outerShdw>
+          </a:effectLst>
+        </p:spPr>
+      </p:sp>
+      <p:sp>
+        <p:nvSpPr>
+          <p:cNvPr id="26" name="Text 24"/>
+          <p:cNvSpPr/>
+          <p:nvPr/>
+        </p:nvSpPr>
+        <p:spPr>
+          <a:xfrm>
+            <a:off x="6998818" y="2258568"/>
+            <a:ext cx="1581912" cy="292608"/>
+          </a:xfrm>
+          <a:prstGeom prst="rect">
+            <a:avLst/>
+          </a:prstGeom>
+          <a:noFill/>
+          <a:ln/>
+        </p:spPr>
+        <p:txBody>
+          <a:bodyPr wrap="square" lIns="0" tIns="0" rIns="0" bIns="0" rtlCol="0" anchor="ctr"/>
+          <a:lstStyle/>
+          <a:p>
+            <a:pPr algn="ctr" indent="0" marL="0">
+              <a:buNone/>
+            </a:pPr>
+            <a:r>
+              <a:rPr lang="en-US" sz="1300" b="1" dirty="0">
+                <a:solidFill>
+                  <a:srgbClr val="9D174D"/>
+                </a:solidFill>
+                <a:latin typeface="Trebuchet MS" pitchFamily="34" charset="0"/>
+                <a:ea typeface="Trebuchet MS" pitchFamily="34" charset="-122"/>
+                <a:cs typeface="Trebuchet MS" pitchFamily="34" charset="-120"/>
+              </a:rPr>
+              <a:t>s</a:t>
+            </a:r>
+            <a:endParaRPr lang="en-US" sz="1300" dirty="0"/>
+          </a:p>
+        </p:txBody>
+      </p:sp>
+      <p:sp>
+        <p:nvSpPr>
+          <p:cNvPr id="27" name="Text 25"/>
+          <p:cNvSpPr/>
+          <p:nvPr/>
+        </p:nvSpPr>
+        <p:spPr>
+          <a:xfrm>
+            <a:off x="6998818" y="2569464"/>
+            <a:ext cx="1581912" cy="201168"/>
+          </a:xfrm>
+          <a:prstGeom prst="rect">
+            <a:avLst/>
+          </a:prstGeom>
+          <a:noFill/>
+          <a:ln/>
+        </p:spPr>
+        <p:txBody>
+          <a:bodyPr wrap="square" lIns="0" tIns="0" rIns="0" bIns="0" rtlCol="0" anchor="t"/>
+          <a:lstStyle/>
+          <a:p>
+            <a:pPr algn="ctr" indent="0" marL="0">
+              <a:buNone/>
+            </a:pPr>
+            <a:r>
+              <a:rPr lang="en-US" sz="850" dirty="0">
+                <a:solidFill>
+                  <a:srgbClr val="475569"/>
+                </a:solidFill>
+                <a:latin typeface="Calibri" pitchFamily="34" charset="0"/>
+                <a:ea typeface="Calibri" pitchFamily="34" charset="-122"/>
+                <a:cs typeface="Calibri" pitchFamily="34" charset="-120"/>
+              </a:rPr>
+              <a:t>plural or present tense</a:t>
+            </a:r>
+            <a:endParaRPr lang="en-US" sz="850" dirty="0"/>
+          </a:p>
+        </p:txBody>
+      </p:sp>
+      <p:sp>
+        <p:nvSpPr>
+          <p:cNvPr id="28" name="Shape 26"/>
           <p:cNvSpPr/>
           <p:nvPr/>
         </p:nvSpPr>
@@ -14777,7 +16298,7 @@
       </p:sp>
       <p:sp>
         <p:nvSpPr>
-          <p:cNvPr id="23" name="Text 21"/>
+          <p:cNvPr id="29" name="Text 27"/>
           <p:cNvSpPr/>
           <p:nvPr/>
         </p:nvSpPr>
@@ -14816,7 +16337,7 @@
       </p:sp>
       <p:sp>
         <p:nvSpPr>
-          <p:cNvPr id="24" name="Shape 22"/>
+          <p:cNvPr id="30" name="Shape 28"/>
           <p:cNvSpPr/>
           <p:nvPr/>
         </p:nvSpPr>
@@ -14843,13 +16364,13 @@
       </p:sp>
       <p:sp>
         <p:nvSpPr>
-          <p:cNvPr id="25" name="Shape 23"/>
-          <p:cNvSpPr/>
-          <p:nvPr/>
-        </p:nvSpPr>
-        <p:spPr>
-          <a:xfrm>
-            <a:off x="2999232" y="3364992"/>
+          <p:cNvPr id="31" name="Shape 29"/>
+          <p:cNvSpPr/>
+          <p:nvPr/>
+        </p:nvSpPr>
+        <p:spPr>
+          <a:xfrm>
+            <a:off x="2313432" y="3364992"/>
             <a:ext cx="1645920" cy="475488"/>
           </a:xfrm>
           <a:prstGeom prst="rect">
@@ -14870,13 +16391,13 @@
       </p:sp>
       <p:sp>
         <p:nvSpPr>
-          <p:cNvPr id="26" name="Text 24"/>
-          <p:cNvSpPr/>
-          <p:nvPr/>
-        </p:nvSpPr>
-        <p:spPr>
-          <a:xfrm>
-            <a:off x="2999232" y="3364992"/>
+          <p:cNvPr id="32" name="Text 30"/>
+          <p:cNvSpPr/>
+          <p:nvPr/>
+        </p:nvSpPr>
+        <p:spPr>
+          <a:xfrm>
+            <a:off x="2313432" y="3364992"/>
             <a:ext cx="1645920" cy="475488"/>
           </a:xfrm>
           <a:prstGeom prst="rect">
@@ -14901,7 +16422,7 @@
                 <a:ea typeface="Trebuchet MS" pitchFamily="34" charset="-122"/>
                 <a:cs typeface="Trebuchet MS" pitchFamily="34" charset="-120"/>
               </a:rPr>
-              <a:t>re</a:t>
+              <a:t>ob</a:t>
             </a:r>
             <a:endParaRPr lang="en-US" sz="1400" dirty="0"/>
           </a:p>
@@ -14909,14 +16430,14 @@
       </p:sp>
       <p:sp>
         <p:nvSpPr>
-          <p:cNvPr id="27" name="Text 25"/>
-          <p:cNvSpPr/>
-          <p:nvPr/>
-        </p:nvSpPr>
-        <p:spPr>
-          <a:xfrm>
-            <a:off x="4645152" y="3364992"/>
-            <a:ext cx="1097280" cy="475488"/>
+          <p:cNvPr id="33" name="Text 31"/>
+          <p:cNvSpPr/>
+          <p:nvPr/>
+        </p:nvSpPr>
+        <p:spPr>
+          <a:xfrm>
+            <a:off x="3959352" y="3364992"/>
+            <a:ext cx="411480" cy="475488"/>
           </a:xfrm>
           <a:prstGeom prst="rect">
             <a:avLst/>
@@ -14948,13 +16469,13 @@
       </p:sp>
       <p:sp>
         <p:nvSpPr>
-          <p:cNvPr id="28" name="Shape 26"/>
-          <p:cNvSpPr/>
-          <p:nvPr/>
-        </p:nvSpPr>
-        <p:spPr>
-          <a:xfrm>
-            <a:off x="5742432" y="3364992"/>
+          <p:cNvPr id="34" name="Shape 32"/>
+          <p:cNvSpPr/>
+          <p:nvPr/>
+        </p:nvSpPr>
+        <p:spPr>
+          <a:xfrm>
+            <a:off x="4370832" y="3364992"/>
             <a:ext cx="1645920" cy="475488"/>
           </a:xfrm>
           <a:prstGeom prst="rect">
@@ -14975,13 +16496,13 @@
       </p:sp>
       <p:sp>
         <p:nvSpPr>
-          <p:cNvPr id="29" name="Text 27"/>
-          <p:cNvSpPr/>
-          <p:nvPr/>
-        </p:nvSpPr>
-        <p:spPr>
-          <a:xfrm>
-            <a:off x="5742432" y="3364992"/>
+          <p:cNvPr id="35" name="Text 33"/>
+          <p:cNvSpPr/>
+          <p:nvPr/>
+        </p:nvSpPr>
+        <p:spPr>
+          <a:xfrm>
+            <a:off x="4370832" y="3364992"/>
             <a:ext cx="1645920" cy="475488"/>
           </a:xfrm>
           <a:prstGeom prst="rect">
@@ -15006,7 +16527,7 @@
                 <a:ea typeface="Trebuchet MS" pitchFamily="34" charset="-122"/>
                 <a:cs typeface="Trebuchet MS" pitchFamily="34" charset="-120"/>
               </a:rPr>
-              <a:t>ject</a:t>
+              <a:t>jec</a:t>
             </a:r>
             <a:endParaRPr lang="en-US" sz="1400" dirty="0"/>
           </a:p>
@@ -15014,7 +16535,112 @@
       </p:sp>
       <p:sp>
         <p:nvSpPr>
-          <p:cNvPr id="30" name="Shape 28"/>
+          <p:cNvPr id="36" name="Text 34"/>
+          <p:cNvSpPr/>
+          <p:nvPr/>
+        </p:nvSpPr>
+        <p:spPr>
+          <a:xfrm>
+            <a:off x="6016752" y="3364992"/>
+            <a:ext cx="411480" cy="475488"/>
+          </a:xfrm>
+          <a:prstGeom prst="rect">
+            <a:avLst/>
+          </a:prstGeom>
+          <a:noFill/>
+          <a:ln/>
+        </p:spPr>
+        <p:txBody>
+          <a:bodyPr wrap="square" lIns="0" tIns="0" rIns="0" bIns="0" rtlCol="0" anchor="ctr"/>
+          <a:lstStyle/>
+          <a:p>
+            <a:pPr algn="ctr" indent="0" marL="0">
+              <a:buNone/>
+            </a:pPr>
+            <a:r>
+              <a:rPr lang="en-US" sz="1600" b="1" dirty="0">
+                <a:solidFill>
+                  <a:srgbClr val="0D9488"/>
+                </a:solidFill>
+                <a:latin typeface="Trebuchet MS" pitchFamily="34" charset="0"/>
+                <a:ea typeface="Trebuchet MS" pitchFamily="34" charset="-122"/>
+                <a:cs typeface="Trebuchet MS" pitchFamily="34" charset="-120"/>
+              </a:rPr>
+              <a:t>·</a:t>
+            </a:r>
+            <a:endParaRPr lang="en-US" sz="1600" dirty="0"/>
+          </a:p>
+        </p:txBody>
+      </p:sp>
+      <p:sp>
+        <p:nvSpPr>
+          <p:cNvPr id="37" name="Shape 35"/>
+          <p:cNvSpPr/>
+          <p:nvPr/>
+        </p:nvSpPr>
+        <p:spPr>
+          <a:xfrm>
+            <a:off x="6428232" y="3364992"/>
+            <a:ext cx="1645920" cy="475488"/>
+          </a:xfrm>
+          <a:prstGeom prst="rect">
+            <a:avLst>
+              <a:gd name="adj" fmla="val 9615"/>
+            </a:avLst>
+          </a:prstGeom>
+          <a:solidFill>
+            <a:srgbClr val="FFFFFF"/>
+          </a:solidFill>
+          <a:ln w="12700">
+            <a:solidFill>
+              <a:srgbClr val="0D9488"/>
+            </a:solidFill>
+            <a:prstDash val="solid"/>
+          </a:ln>
+        </p:spPr>
+      </p:sp>
+      <p:sp>
+        <p:nvSpPr>
+          <p:cNvPr id="38" name="Text 36"/>
+          <p:cNvSpPr/>
+          <p:nvPr/>
+        </p:nvSpPr>
+        <p:spPr>
+          <a:xfrm>
+            <a:off x="6428232" y="3364992"/>
+            <a:ext cx="1645920" cy="475488"/>
+          </a:xfrm>
+          <a:prstGeom prst="rect">
+            <a:avLst/>
+          </a:prstGeom>
+          <a:noFill/>
+          <a:ln/>
+        </p:spPr>
+        <p:txBody>
+          <a:bodyPr wrap="square" lIns="0" tIns="0" rIns="0" bIns="0" rtlCol="0" anchor="ctr"/>
+          <a:lstStyle/>
+          <a:p>
+            <a:pPr algn="ctr" indent="0" marL="0">
+              <a:buNone/>
+            </a:pPr>
+            <a:r>
+              <a:rPr lang="en-US" sz="1400" b="1" dirty="0">
+                <a:solidFill>
+                  <a:srgbClr val="0D9488"/>
+                </a:solidFill>
+                <a:latin typeface="Trebuchet MS" pitchFamily="34" charset="0"/>
+                <a:ea typeface="Trebuchet MS" pitchFamily="34" charset="-122"/>
+                <a:cs typeface="Trebuchet MS" pitchFamily="34" charset="-120"/>
+              </a:rPr>
+              <a:t>tions</a:t>
+            </a:r>
+            <a:endParaRPr lang="en-US" sz="1400" dirty="0"/>
+          </a:p>
+        </p:txBody>
+      </p:sp>
+      <p:sp>
+        <p:nvSpPr>
+          <p:cNvPr id="39" name="Shape 37"/>
           <p:cNvSpPr/>
           <p:nvPr/>
         </p:nvSpPr>
@@ -15041,7 +16667,7 @@
       </p:sp>
       <p:sp>
         <p:nvSpPr>
-          <p:cNvPr id="31" name="Text 29"/>
+          <p:cNvPr id="40" name="Text 38"/>
           <p:cNvSpPr/>
           <p:nvPr/>
         </p:nvSpPr>
@@ -15080,7 +16706,7 @@
       </p:sp>
       <p:sp>
         <p:nvSpPr>
-          <p:cNvPr id="32" name="Shape 30"/>
+          <p:cNvPr id="41" name="Shape 39"/>
           <p:cNvSpPr/>
           <p:nvPr/>
         </p:nvSpPr>
@@ -15107,14 +16733,14 @@
       </p:sp>
       <p:sp>
         <p:nvSpPr>
-          <p:cNvPr id="33" name="Shape 31"/>
-          <p:cNvSpPr/>
-          <p:nvPr/>
-        </p:nvSpPr>
-        <p:spPr>
-          <a:xfrm>
-            <a:off x="2254649" y="4169664"/>
-            <a:ext cx="685800" cy="475488"/>
+          <p:cNvPr id="42" name="Shape 40"/>
+          <p:cNvSpPr/>
+          <p:nvPr/>
+        </p:nvSpPr>
+        <p:spPr>
+          <a:xfrm>
+            <a:off x="1951330" y="4169664"/>
+            <a:ext cx="676656" cy="475488"/>
           </a:xfrm>
           <a:prstGeom prst="rect">
             <a:avLst>
@@ -15134,14 +16760,14 @@
       </p:sp>
       <p:sp>
         <p:nvSpPr>
-          <p:cNvPr id="34" name="Text 32"/>
-          <p:cNvSpPr/>
-          <p:nvPr/>
-        </p:nvSpPr>
-        <p:spPr>
-          <a:xfrm>
-            <a:off x="2254649" y="4169664"/>
-            <a:ext cx="685800" cy="475488"/>
+          <p:cNvPr id="43" name="Text 41"/>
+          <p:cNvSpPr/>
+          <p:nvPr/>
+        </p:nvSpPr>
+        <p:spPr>
+          <a:xfrm>
+            <a:off x="1951330" y="4169664"/>
+            <a:ext cx="676656" cy="475488"/>
           </a:xfrm>
           <a:prstGeom prst="rect">
             <a:avLst/>
@@ -15165,7 +16791,7 @@
                 <a:ea typeface="Trebuchet MS" pitchFamily="34" charset="-122"/>
                 <a:cs typeface="Trebuchet MS" pitchFamily="34" charset="-120"/>
               </a:rPr>
-              <a:t>r</a:t>
+              <a:t>o</a:t>
             </a:r>
             <a:endParaRPr lang="en-US" sz="900" dirty="0"/>
           </a:p>
@@ -15173,14 +16799,14 @@
       </p:sp>
       <p:sp>
         <p:nvSpPr>
-          <p:cNvPr id="35" name="Shape 33"/>
-          <p:cNvSpPr/>
-          <p:nvPr/>
-        </p:nvSpPr>
-        <p:spPr>
-          <a:xfrm>
-            <a:off x="3293146" y="4169664"/>
-            <a:ext cx="685800" cy="475488"/>
+          <p:cNvPr id="44" name="Shape 42"/>
+          <p:cNvSpPr/>
+          <p:nvPr/>
+        </p:nvSpPr>
+        <p:spPr>
+          <a:xfrm>
+            <a:off x="2677363" y="4169664"/>
+            <a:ext cx="676656" cy="475488"/>
           </a:xfrm>
           <a:prstGeom prst="rect">
             <a:avLst>
@@ -15200,14 +16826,14 @@
       </p:sp>
       <p:sp>
         <p:nvSpPr>
-          <p:cNvPr id="36" name="Text 34"/>
-          <p:cNvSpPr/>
-          <p:nvPr/>
-        </p:nvSpPr>
-        <p:spPr>
-          <a:xfrm>
-            <a:off x="3293146" y="4169664"/>
-            <a:ext cx="685800" cy="475488"/>
+          <p:cNvPr id="45" name="Text 43"/>
+          <p:cNvSpPr/>
+          <p:nvPr/>
+        </p:nvSpPr>
+        <p:spPr>
+          <a:xfrm>
+            <a:off x="2677363" y="4169664"/>
+            <a:ext cx="676656" cy="475488"/>
           </a:xfrm>
           <a:prstGeom prst="rect">
             <a:avLst/>
@@ -15231,7 +16857,7 @@
                 <a:ea typeface="Trebuchet MS" pitchFamily="34" charset="-122"/>
                 <a:cs typeface="Trebuchet MS" pitchFamily="34" charset="-120"/>
               </a:rPr>
-              <a:t>e</a:t>
+              <a:t>b</a:t>
             </a:r>
             <a:endParaRPr lang="en-US" sz="900" dirty="0"/>
           </a:p>
@@ -15239,14 +16865,14 @@
       </p:sp>
       <p:sp>
         <p:nvSpPr>
-          <p:cNvPr id="37" name="Shape 35"/>
-          <p:cNvSpPr/>
-          <p:nvPr/>
-        </p:nvSpPr>
-        <p:spPr>
-          <a:xfrm>
-            <a:off x="4331643" y="4169664"/>
-            <a:ext cx="685800" cy="475488"/>
+          <p:cNvPr id="46" name="Shape 44"/>
+          <p:cNvSpPr/>
+          <p:nvPr/>
+        </p:nvSpPr>
+        <p:spPr>
+          <a:xfrm>
+            <a:off x="3403397" y="4169664"/>
+            <a:ext cx="676656" cy="475488"/>
           </a:xfrm>
           <a:prstGeom prst="rect">
             <a:avLst>
@@ -15266,14 +16892,14 @@
       </p:sp>
       <p:sp>
         <p:nvSpPr>
-          <p:cNvPr id="38" name="Text 36"/>
-          <p:cNvSpPr/>
-          <p:nvPr/>
-        </p:nvSpPr>
-        <p:spPr>
-          <a:xfrm>
-            <a:off x="4331643" y="4169664"/>
-            <a:ext cx="685800" cy="475488"/>
+          <p:cNvPr id="47" name="Text 45"/>
+          <p:cNvSpPr/>
+          <p:nvPr/>
+        </p:nvSpPr>
+        <p:spPr>
+          <a:xfrm>
+            <a:off x="3403397" y="4169664"/>
+            <a:ext cx="676656" cy="475488"/>
           </a:xfrm>
           <a:prstGeom prst="rect">
             <a:avLst/>
@@ -15305,14 +16931,14 @@
       </p:sp>
       <p:sp>
         <p:nvSpPr>
-          <p:cNvPr id="39" name="Shape 37"/>
-          <p:cNvSpPr/>
-          <p:nvPr/>
-        </p:nvSpPr>
-        <p:spPr>
-          <a:xfrm>
-            <a:off x="5370141" y="4169664"/>
-            <a:ext cx="685800" cy="475488"/>
+          <p:cNvPr id="48" name="Shape 46"/>
+          <p:cNvSpPr/>
+          <p:nvPr/>
+        </p:nvSpPr>
+        <p:spPr>
+          <a:xfrm>
+            <a:off x="4129430" y="4169664"/>
+            <a:ext cx="676656" cy="475488"/>
           </a:xfrm>
           <a:prstGeom prst="rect">
             <a:avLst>
@@ -15332,14 +16958,14 @@
       </p:sp>
       <p:sp>
         <p:nvSpPr>
-          <p:cNvPr id="40" name="Text 38"/>
-          <p:cNvSpPr/>
-          <p:nvPr/>
-        </p:nvSpPr>
-        <p:spPr>
-          <a:xfrm>
-            <a:off x="5370141" y="4169664"/>
-            <a:ext cx="685800" cy="475488"/>
+          <p:cNvPr id="49" name="Text 47"/>
+          <p:cNvSpPr/>
+          <p:nvPr/>
+        </p:nvSpPr>
+        <p:spPr>
+          <a:xfrm>
+            <a:off x="4129430" y="4169664"/>
+            <a:ext cx="676656" cy="475488"/>
           </a:xfrm>
           <a:prstGeom prst="rect">
             <a:avLst/>
@@ -15371,14 +16997,14 @@
       </p:sp>
       <p:sp>
         <p:nvSpPr>
-          <p:cNvPr id="41" name="Shape 39"/>
-          <p:cNvSpPr/>
-          <p:nvPr/>
-        </p:nvSpPr>
-        <p:spPr>
-          <a:xfrm>
-            <a:off x="6408638" y="4169664"/>
-            <a:ext cx="685800" cy="475488"/>
+          <p:cNvPr id="50" name="Shape 48"/>
+          <p:cNvSpPr/>
+          <p:nvPr/>
+        </p:nvSpPr>
+        <p:spPr>
+          <a:xfrm>
+            <a:off x="4855464" y="4169664"/>
+            <a:ext cx="676656" cy="475488"/>
           </a:xfrm>
           <a:prstGeom prst="rect">
             <a:avLst>
@@ -15398,14 +17024,14 @@
       </p:sp>
       <p:sp>
         <p:nvSpPr>
-          <p:cNvPr id="42" name="Text 40"/>
-          <p:cNvSpPr/>
-          <p:nvPr/>
-        </p:nvSpPr>
-        <p:spPr>
-          <a:xfrm>
-            <a:off x="6408638" y="4169664"/>
-            <a:ext cx="685800" cy="475488"/>
+          <p:cNvPr id="51" name="Text 49"/>
+          <p:cNvSpPr/>
+          <p:nvPr/>
+        </p:nvSpPr>
+        <p:spPr>
+          <a:xfrm>
+            <a:off x="4855464" y="4169664"/>
+            <a:ext cx="676656" cy="475488"/>
           </a:xfrm>
           <a:prstGeom prst="rect">
             <a:avLst/>
@@ -15437,14 +17063,14 @@
       </p:sp>
       <p:sp>
         <p:nvSpPr>
-          <p:cNvPr id="43" name="Shape 41"/>
-          <p:cNvSpPr/>
-          <p:nvPr/>
-        </p:nvSpPr>
-        <p:spPr>
-          <a:xfrm>
-            <a:off x="7447135" y="4169664"/>
-            <a:ext cx="685800" cy="475488"/>
+          <p:cNvPr id="52" name="Shape 50"/>
+          <p:cNvSpPr/>
+          <p:nvPr/>
+        </p:nvSpPr>
+        <p:spPr>
+          <a:xfrm>
+            <a:off x="5581498" y="4169664"/>
+            <a:ext cx="676656" cy="475488"/>
           </a:xfrm>
           <a:prstGeom prst="rect">
             <a:avLst>
@@ -15464,14 +17090,14 @@
       </p:sp>
       <p:sp>
         <p:nvSpPr>
-          <p:cNvPr id="44" name="Text 42"/>
-          <p:cNvSpPr/>
-          <p:nvPr/>
-        </p:nvSpPr>
-        <p:spPr>
-          <a:xfrm>
-            <a:off x="7447135" y="4169664"/>
-            <a:ext cx="685800" cy="475488"/>
+          <p:cNvPr id="53" name="Text 51"/>
+          <p:cNvSpPr/>
+          <p:nvPr/>
+        </p:nvSpPr>
+        <p:spPr>
+          <a:xfrm>
+            <a:off x="5581498" y="4169664"/>
+            <a:ext cx="676656" cy="475488"/>
           </a:xfrm>
           <a:prstGeom prst="rect">
             <a:avLst/>
@@ -15495,7 +17121,205 @@
                 <a:ea typeface="Trebuchet MS" pitchFamily="34" charset="-122"/>
                 <a:cs typeface="Trebuchet MS" pitchFamily="34" charset="-120"/>
               </a:rPr>
-              <a:t>t</a:t>
+              <a:t>ti</a:t>
+            </a:r>
+            <a:endParaRPr lang="en-US" sz="900" dirty="0"/>
+          </a:p>
+        </p:txBody>
+      </p:sp>
+      <p:sp>
+        <p:nvSpPr>
+          <p:cNvPr id="54" name="Shape 52"/>
+          <p:cNvSpPr/>
+          <p:nvPr/>
+        </p:nvSpPr>
+        <p:spPr>
+          <a:xfrm>
+            <a:off x="6307531" y="4169664"/>
+            <a:ext cx="676656" cy="475488"/>
+          </a:xfrm>
+          <a:prstGeom prst="rect">
+            <a:avLst>
+              <a:gd name="adj" fmla="val 7692"/>
+            </a:avLst>
+          </a:prstGeom>
+          <a:solidFill>
+            <a:srgbClr val="FFFFFF"/>
+          </a:solidFill>
+          <a:ln w="12700">
+            <a:solidFill>
+              <a:srgbClr val="DB2777"/>
+            </a:solidFill>
+            <a:prstDash val="solid"/>
+          </a:ln>
+        </p:spPr>
+      </p:sp>
+      <p:sp>
+        <p:nvSpPr>
+          <p:cNvPr id="55" name="Text 53"/>
+          <p:cNvSpPr/>
+          <p:nvPr/>
+        </p:nvSpPr>
+        <p:spPr>
+          <a:xfrm>
+            <a:off x="6307531" y="4169664"/>
+            <a:ext cx="676656" cy="475488"/>
+          </a:xfrm>
+          <a:prstGeom prst="rect">
+            <a:avLst/>
+          </a:prstGeom>
+          <a:noFill/>
+          <a:ln/>
+        </p:spPr>
+        <p:txBody>
+          <a:bodyPr wrap="square" lIns="0" tIns="0" rIns="0" bIns="0" rtlCol="0" anchor="ctr"/>
+          <a:lstStyle/>
+          <a:p>
+            <a:pPr algn="ctr" indent="0" marL="0">
+              <a:buNone/>
+            </a:pPr>
+            <a:r>
+              <a:rPr lang="en-US" sz="900" b="1" dirty="0">
+                <a:solidFill>
+                  <a:srgbClr val="9D174D"/>
+                </a:solidFill>
+                <a:latin typeface="Trebuchet MS" pitchFamily="34" charset="0"/>
+                <a:ea typeface="Trebuchet MS" pitchFamily="34" charset="-122"/>
+                <a:cs typeface="Trebuchet MS" pitchFamily="34" charset="-120"/>
+              </a:rPr>
+              <a:t>o</a:t>
+            </a:r>
+            <a:endParaRPr lang="en-US" sz="900" dirty="0"/>
+          </a:p>
+        </p:txBody>
+      </p:sp>
+      <p:sp>
+        <p:nvSpPr>
+          <p:cNvPr id="56" name="Shape 54"/>
+          <p:cNvSpPr/>
+          <p:nvPr/>
+        </p:nvSpPr>
+        <p:spPr>
+          <a:xfrm>
+            <a:off x="7033565" y="4169664"/>
+            <a:ext cx="676656" cy="475488"/>
+          </a:xfrm>
+          <a:prstGeom prst="rect">
+            <a:avLst>
+              <a:gd name="adj" fmla="val 7692"/>
+            </a:avLst>
+          </a:prstGeom>
+          <a:solidFill>
+            <a:srgbClr val="FFFFFF"/>
+          </a:solidFill>
+          <a:ln w="12700">
+            <a:solidFill>
+              <a:srgbClr val="DB2777"/>
+            </a:solidFill>
+            <a:prstDash val="solid"/>
+          </a:ln>
+        </p:spPr>
+      </p:sp>
+      <p:sp>
+        <p:nvSpPr>
+          <p:cNvPr id="57" name="Text 55"/>
+          <p:cNvSpPr/>
+          <p:nvPr/>
+        </p:nvSpPr>
+        <p:spPr>
+          <a:xfrm>
+            <a:off x="7033565" y="4169664"/>
+            <a:ext cx="676656" cy="475488"/>
+          </a:xfrm>
+          <a:prstGeom prst="rect">
+            <a:avLst/>
+          </a:prstGeom>
+          <a:noFill/>
+          <a:ln/>
+        </p:spPr>
+        <p:txBody>
+          <a:bodyPr wrap="square" lIns="0" tIns="0" rIns="0" bIns="0" rtlCol="0" anchor="ctr"/>
+          <a:lstStyle/>
+          <a:p>
+            <a:pPr algn="ctr" indent="0" marL="0">
+              <a:buNone/>
+            </a:pPr>
+            <a:r>
+              <a:rPr lang="en-US" sz="900" b="1" dirty="0">
+                <a:solidFill>
+                  <a:srgbClr val="9D174D"/>
+                </a:solidFill>
+                <a:latin typeface="Trebuchet MS" pitchFamily="34" charset="0"/>
+                <a:ea typeface="Trebuchet MS" pitchFamily="34" charset="-122"/>
+                <a:cs typeface="Trebuchet MS" pitchFamily="34" charset="-120"/>
+              </a:rPr>
+              <a:t>n</a:t>
+            </a:r>
+            <a:endParaRPr lang="en-US" sz="900" dirty="0"/>
+          </a:p>
+        </p:txBody>
+      </p:sp>
+      <p:sp>
+        <p:nvSpPr>
+          <p:cNvPr id="58" name="Shape 56"/>
+          <p:cNvSpPr/>
+          <p:nvPr/>
+        </p:nvSpPr>
+        <p:spPr>
+          <a:xfrm>
+            <a:off x="7759598" y="4169664"/>
+            <a:ext cx="676656" cy="475488"/>
+          </a:xfrm>
+          <a:prstGeom prst="rect">
+            <a:avLst>
+              <a:gd name="adj" fmla="val 7692"/>
+            </a:avLst>
+          </a:prstGeom>
+          <a:solidFill>
+            <a:srgbClr val="FFFFFF"/>
+          </a:solidFill>
+          <a:ln w="12700">
+            <a:solidFill>
+              <a:srgbClr val="DB2777"/>
+            </a:solidFill>
+            <a:prstDash val="solid"/>
+          </a:ln>
+        </p:spPr>
+      </p:sp>
+      <p:sp>
+        <p:nvSpPr>
+          <p:cNvPr id="59" name="Text 57"/>
+          <p:cNvSpPr/>
+          <p:nvPr/>
+        </p:nvSpPr>
+        <p:spPr>
+          <a:xfrm>
+            <a:off x="7759598" y="4169664"/>
+            <a:ext cx="676656" cy="475488"/>
+          </a:xfrm>
+          <a:prstGeom prst="rect">
+            <a:avLst/>
+          </a:prstGeom>
+          <a:noFill/>
+          <a:ln/>
+        </p:spPr>
+        <p:txBody>
+          <a:bodyPr wrap="square" lIns="0" tIns="0" rIns="0" bIns="0" rtlCol="0" anchor="ctr"/>
+          <a:lstStyle/>
+          <a:p>
+            <a:pPr algn="ctr" indent="0" marL="0">
+              <a:buNone/>
+            </a:pPr>
+            <a:r>
+              <a:rPr lang="en-US" sz="900" b="1" dirty="0">
+                <a:solidFill>
+                  <a:srgbClr val="9D174D"/>
+                </a:solidFill>
+                <a:latin typeface="Trebuchet MS" pitchFamily="34" charset="0"/>
+                <a:ea typeface="Trebuchet MS" pitchFamily="34" charset="-122"/>
+                <a:cs typeface="Trebuchet MS" pitchFamily="34" charset="-120"/>
+              </a:rPr>
+              <a:t>s</a:t>
             </a:r>
             <a:endParaRPr lang="en-US" sz="900" dirty="0"/>
           </a:p>
@@ -16069,7 +17893,7 @@
                 <a:ea typeface="Calibri" pitchFamily="34" charset="-122"/>
                 <a:cs typeface="Calibri" pitchFamily="34" charset="-120"/>
               </a:rPr>
-              <a:t>Word Labs  •  wordlabs.app  •  Root: 'ject' = to throw or hurl</a:t>
+              <a:t>Word Labs  •  wordlabs.app  •  Root: 'ject' = throw</a:t>
             </a:r>
             <a:endParaRPr lang="en-US" sz="800" dirty="0"/>
           </a:p>
@@ -16403,7 +18227,7 @@
                 <a:ea typeface="Trebuchet MS" pitchFamily="34" charset="-122"/>
                 <a:cs typeface="Trebuchet MS" pitchFamily="34" charset="-120"/>
               </a:rPr>
-              <a:t>2</a:t>
+              <a:t>0</a:t>
             </a:r>
             <a:pPr algn="ctr" indent="0" marL="0">
               <a:buNone/>
@@ -16417,7 +18241,7 @@
                 <a:ea typeface="Trebuchet MS" pitchFamily="34" charset="-122"/>
                 <a:cs typeface="Trebuchet MS" pitchFamily="34" charset="-120"/>
               </a:rPr>
-              <a:t>  punctuation marks</a:t>
+              <a:t>  punctuation mark</a:t>
             </a:r>
             <a:endParaRPr lang="en-US" sz="2800" dirty="0"/>
           </a:p>
@@ -16709,7 +18533,7 @@
                 <a:ea typeface="Calibri" pitchFamily="34" charset="-122"/>
                 <a:cs typeface="Calibri" pitchFamily="34" charset="-120"/>
               </a:rPr>
-              <a:t>Word Labs  •  wordlabs.app  •  Root: 'ject' = to throw or hurl</a:t>
+              <a:t>Word Labs  •  wordlabs.app  •  Root: 'ject' = throw</a:t>
             </a:r>
             <a:endParaRPr lang="en-US" sz="800" dirty="0"/>
           </a:p>
@@ -16821,7 +18645,7 @@
                 <a:ea typeface="Calibri" pitchFamily="34" charset="-122"/>
                 <a:cs typeface="Calibri" pitchFamily="34" charset="-120"/>
               </a:rPr>
-              <a:t>The </a:t>
+              <a:t>The teacher listed the learning </a:t>
             </a:r>
             <a:pPr algn="l" indent="0" marL="0">
               <a:buNone/>
@@ -16838,7 +18662,7 @@
                 <a:ea typeface="Calibri" pitchFamily="34" charset="-122"/>
                 <a:cs typeface="Calibri" pitchFamily="34" charset="-120"/>
               </a:rPr>
-              <a:t>projectile</a:t>
+              <a:t>objectives</a:t>
             </a:r>
             <a:pPr algn="l" indent="0" marL="0">
               <a:buNone/>
@@ -16852,7 +18676,7 @@
                 <a:ea typeface="Calibri" pitchFamily="34" charset="-122"/>
                 <a:cs typeface="Calibri" pitchFamily="34" charset="-120"/>
               </a:rPr>
-              <a:t> flew through the air, which made the </a:t>
+              <a:t> on the board. His rude comments were considered </a:t>
             </a:r>
             <a:pPr algn="l" indent="0" marL="0">
               <a:buNone/>
@@ -16869,7 +18693,7 @@
                 <a:ea typeface="Calibri" pitchFamily="34" charset="-122"/>
                 <a:cs typeface="Calibri" pitchFamily="34" charset="-120"/>
               </a:rPr>
-              <a:t>dejected</a:t>
+              <a:t>objectionable</a:t>
             </a:r>
             <a:pPr algn="l" indent="0" marL="0">
               <a:buNone/>
@@ -16883,7 +18707,7 @@
                 <a:ea typeface="Calibri" pitchFamily="34" charset="-122"/>
                 <a:cs typeface="Calibri" pitchFamily="34" charset="-120"/>
               </a:rPr>
-              <a:t> team </a:t>
+              <a:t> by the whole class. The pilot had to </a:t>
             </a:r>
             <a:pPr algn="l" indent="0" marL="0">
               <a:buNone/>
@@ -16914,7 +18738,7 @@
                 <a:ea typeface="Calibri" pitchFamily="34" charset="-122"/>
                 <a:cs typeface="Calibri" pitchFamily="34" charset="-120"/>
               </a:rPr>
-              <a:t> from the competition early.</a:t>
+              <a:t> from the plane before it crashed.</a:t>
             </a:r>
             <a:endParaRPr lang="en-US" sz="1800" dirty="0"/>
           </a:p>
@@ -17069,7 +18893,7 @@
                 <a:ea typeface="Trebuchet MS" pitchFamily="34" charset="-122"/>
                 <a:cs typeface="Trebuchet MS" pitchFamily="34" charset="-120"/>
               </a:rPr>
-              <a:t>projectile</a:t>
+              <a:t>objectives</a:t>
             </a:r>
             <a:endParaRPr lang="en-US" sz="1400" dirty="0"/>
           </a:p>
@@ -17197,7 +19021,7 @@
                 <a:ea typeface="Trebuchet MS" pitchFamily="34" charset="-122"/>
                 <a:cs typeface="Trebuchet MS" pitchFamily="34" charset="-120"/>
               </a:rPr>
-              <a:t>dejected</a:t>
+              <a:t>objectionable</a:t>
             </a:r>
             <a:endParaRPr lang="en-US" sz="1400" dirty="0"/>
           </a:p>
@@ -17656,7 +19480,7 @@
                 <a:ea typeface="Calibri" pitchFamily="34" charset="-122"/>
                 <a:cs typeface="Calibri" pitchFamily="34" charset="-120"/>
               </a:rPr>
-              <a:t>Word Labs  •  wordlabs.app  •  Root: 'ject' = to throw or hurl</a:t>
+              <a:t>Word Labs  •  wordlabs.app  •  Root: 'ject' = throw</a:t>
             </a:r>
             <a:endParaRPr lang="en-US" sz="800" dirty="0"/>
           </a:p>
@@ -17795,7 +19619,7 @@
                 <a:ea typeface="Trebuchet MS" pitchFamily="34" charset="-122"/>
                 <a:cs typeface="Trebuchet MS" pitchFamily="34" charset="-120"/>
               </a:rPr>
-              <a:t>projectile</a:t>
+              <a:t>objectives</a:t>
             </a:r>
             <a:endParaRPr lang="en-US" sz="2800" dirty="0"/>
           </a:p>
@@ -18483,7 +20307,7 @@
                 <a:ea typeface="Calibri" pitchFamily="34" charset="-122"/>
                 <a:cs typeface="Calibri" pitchFamily="34" charset="-120"/>
               </a:rPr>
-              <a:t>Word Labs  •  wordlabs.app  •  Root: 'ject' = to throw or hurl</a:t>
+              <a:t>Word Labs  •  wordlabs.app  •  Root: 'ject' = throw</a:t>
             </a:r>
             <a:endParaRPr lang="en-US" sz="800" dirty="0"/>
           </a:p>
@@ -18622,7 +20446,7 @@
                 <a:ea typeface="Trebuchet MS" pitchFamily="34" charset="-122"/>
                 <a:cs typeface="Trebuchet MS" pitchFamily="34" charset="-120"/>
               </a:rPr>
-              <a:t>projectile</a:t>
+              <a:t>objectives</a:t>
             </a:r>
             <a:endParaRPr lang="en-US" sz="2800" dirty="0"/>
           </a:p>
@@ -18702,8 +20526,8 @@
         </p:nvSpPr>
         <p:spPr>
           <a:xfrm>
-            <a:off x="2221992" y="2258568"/>
-            <a:ext cx="1828800" cy="292608"/>
+            <a:off x="1989734" y="2258568"/>
+            <a:ext cx="1581912" cy="292608"/>
           </a:xfrm>
           <a:prstGeom prst="rect">
             <a:avLst>
@@ -18736,8 +20560,8 @@
         </p:nvSpPr>
         <p:spPr>
           <a:xfrm>
-            <a:off x="2221992" y="2258568"/>
-            <a:ext cx="1828800" cy="292608"/>
+            <a:off x="1989734" y="2258568"/>
+            <a:ext cx="1581912" cy="292608"/>
           </a:xfrm>
           <a:prstGeom prst="rect">
             <a:avLst/>
@@ -18761,7 +20585,7 @@
                 <a:ea typeface="Trebuchet MS" pitchFamily="34" charset="-122"/>
                 <a:cs typeface="Trebuchet MS" pitchFamily="34" charset="-120"/>
               </a:rPr>
-              <a:t>pro</a:t>
+              <a:t>ob</a:t>
             </a:r>
             <a:endParaRPr lang="en-US" sz="1300" dirty="0"/>
           </a:p>
@@ -18775,8 +20599,8 @@
         </p:nvSpPr>
         <p:spPr>
           <a:xfrm>
-            <a:off x="2221992" y="2569464"/>
-            <a:ext cx="1828800" cy="201168"/>
+            <a:off x="1989734" y="2569464"/>
+            <a:ext cx="1581912" cy="201168"/>
           </a:xfrm>
           <a:prstGeom prst="rect">
             <a:avLst/>
@@ -18800,7 +20624,7 @@
                 <a:ea typeface="Calibri" pitchFamily="34" charset="-122"/>
                 <a:cs typeface="Calibri" pitchFamily="34" charset="-120"/>
               </a:rPr>
-              <a:t>forward</a:t>
+              <a:t>against; in the way of; towards</a:t>
             </a:r>
             <a:endParaRPr lang="en-US" sz="850" dirty="0"/>
           </a:p>
@@ -18814,8 +20638,8 @@
         </p:nvSpPr>
         <p:spPr>
           <a:xfrm>
-            <a:off x="4370832" y="2258568"/>
-            <a:ext cx="1828800" cy="292608"/>
+            <a:off x="3659429" y="2258568"/>
+            <a:ext cx="1581912" cy="292608"/>
           </a:xfrm>
           <a:prstGeom prst="rect">
             <a:avLst>
@@ -18848,8 +20672,8 @@
         </p:nvSpPr>
         <p:spPr>
           <a:xfrm>
-            <a:off x="4370832" y="2258568"/>
-            <a:ext cx="1828800" cy="292608"/>
+            <a:off x="3659429" y="2258568"/>
+            <a:ext cx="1581912" cy="292608"/>
           </a:xfrm>
           <a:prstGeom prst="rect">
             <a:avLst/>
@@ -18887,8 +20711,8 @@
         </p:nvSpPr>
         <p:spPr>
           <a:xfrm>
-            <a:off x="4370832" y="2569464"/>
-            <a:ext cx="1828800" cy="201168"/>
+            <a:off x="3659429" y="2569464"/>
+            <a:ext cx="1581912" cy="201168"/>
           </a:xfrm>
           <a:prstGeom prst="rect">
             <a:avLst/>
@@ -18912,7 +20736,7 @@
                 <a:ea typeface="Calibri" pitchFamily="34" charset="-122"/>
                 <a:cs typeface="Calibri" pitchFamily="34" charset="-120"/>
               </a:rPr>
-              <a:t>to throw</a:t>
+              <a:t>throw</a:t>
             </a:r>
             <a:endParaRPr lang="en-US" sz="850" dirty="0"/>
           </a:p>
@@ -18926,8 +20750,8 @@
         </p:nvSpPr>
         <p:spPr>
           <a:xfrm>
-            <a:off x="6519672" y="2258568"/>
-            <a:ext cx="1828800" cy="292608"/>
+            <a:off x="5329123" y="2258568"/>
+            <a:ext cx="1581912" cy="292608"/>
           </a:xfrm>
           <a:prstGeom prst="rect">
             <a:avLst>
@@ -18960,8 +20784,8 @@
         </p:nvSpPr>
         <p:spPr>
           <a:xfrm>
-            <a:off x="6519672" y="2258568"/>
-            <a:ext cx="1828800" cy="292608"/>
+            <a:off x="5329123" y="2258568"/>
+            <a:ext cx="1581912" cy="292608"/>
           </a:xfrm>
           <a:prstGeom prst="rect">
             <a:avLst/>
@@ -18985,7 +20809,7 @@
                 <a:ea typeface="Trebuchet MS" pitchFamily="34" charset="-122"/>
                 <a:cs typeface="Trebuchet MS" pitchFamily="34" charset="-120"/>
               </a:rPr>
-              <a:t>ile</a:t>
+              <a:t>ive</a:t>
             </a:r>
             <a:endParaRPr lang="en-US" sz="1300" dirty="0"/>
           </a:p>
@@ -18999,8 +20823,8 @@
         </p:nvSpPr>
         <p:spPr>
           <a:xfrm>
-            <a:off x="6519672" y="2569464"/>
-            <a:ext cx="1828800" cy="201168"/>
+            <a:off x="5329123" y="2569464"/>
+            <a:ext cx="1581912" cy="201168"/>
           </a:xfrm>
           <a:prstGeom prst="rect">
             <a:avLst/>
@@ -19024,7 +20848,7 @@
                 <a:ea typeface="Calibri" pitchFamily="34" charset="-122"/>
                 <a:cs typeface="Calibri" pitchFamily="34" charset="-120"/>
               </a:rPr>
-              <a:t>relating to or capable of</a:t>
+              <a:t>having quality of</a:t>
             </a:r>
             <a:endParaRPr lang="en-US" sz="850" dirty="0"/>
           </a:p>
@@ -19033,6 +20857,118 @@
       <p:sp>
         <p:nvSpPr>
           <p:cNvPr id="25" name="Shape 23"/>
+          <p:cNvSpPr/>
+          <p:nvPr/>
+        </p:nvSpPr>
+        <p:spPr>
+          <a:xfrm>
+            <a:off x="6998818" y="2258568"/>
+            <a:ext cx="1581912" cy="292608"/>
+          </a:xfrm>
+          <a:prstGeom prst="rect">
+            <a:avLst>
+              <a:gd name="adj" fmla="val 25000"/>
+            </a:avLst>
+          </a:prstGeom>
+          <a:solidFill>
+            <a:srgbClr val="FCE7F3"/>
+          </a:solidFill>
+          <a:ln w="19050">
+            <a:solidFill>
+              <a:srgbClr val="DB2777"/>
+            </a:solidFill>
+            <a:prstDash val="solid"/>
+          </a:ln>
+          <a:effectLst>
+            <a:outerShdw sx="100000" sy="100000" kx="0" ky="0" algn="bl" rotWithShape="0" blurRad="101600" dist="38100" dir="8100000">
+              <a:srgbClr val="000000">
+                <a:alpha val="12000"/>
+              </a:srgbClr>
+            </a:outerShdw>
+          </a:effectLst>
+        </p:spPr>
+      </p:sp>
+      <p:sp>
+        <p:nvSpPr>
+          <p:cNvPr id="26" name="Text 24"/>
+          <p:cNvSpPr/>
+          <p:nvPr/>
+        </p:nvSpPr>
+        <p:spPr>
+          <a:xfrm>
+            <a:off x="6998818" y="2258568"/>
+            <a:ext cx="1581912" cy="292608"/>
+          </a:xfrm>
+          <a:prstGeom prst="rect">
+            <a:avLst/>
+          </a:prstGeom>
+          <a:noFill/>
+          <a:ln/>
+        </p:spPr>
+        <p:txBody>
+          <a:bodyPr wrap="square" lIns="0" tIns="0" rIns="0" bIns="0" rtlCol="0" anchor="ctr"/>
+          <a:lstStyle/>
+          <a:p>
+            <a:pPr algn="ctr" indent="0" marL="0">
+              <a:buNone/>
+            </a:pPr>
+            <a:r>
+              <a:rPr lang="en-US" sz="1300" b="1" dirty="0">
+                <a:solidFill>
+                  <a:srgbClr val="9D174D"/>
+                </a:solidFill>
+                <a:latin typeface="Trebuchet MS" pitchFamily="34" charset="0"/>
+                <a:ea typeface="Trebuchet MS" pitchFamily="34" charset="-122"/>
+                <a:cs typeface="Trebuchet MS" pitchFamily="34" charset="-120"/>
+              </a:rPr>
+              <a:t>s</a:t>
+            </a:r>
+            <a:endParaRPr lang="en-US" sz="1300" dirty="0"/>
+          </a:p>
+        </p:txBody>
+      </p:sp>
+      <p:sp>
+        <p:nvSpPr>
+          <p:cNvPr id="27" name="Text 25"/>
+          <p:cNvSpPr/>
+          <p:nvPr/>
+        </p:nvSpPr>
+        <p:spPr>
+          <a:xfrm>
+            <a:off x="6998818" y="2569464"/>
+            <a:ext cx="1581912" cy="201168"/>
+          </a:xfrm>
+          <a:prstGeom prst="rect">
+            <a:avLst/>
+          </a:prstGeom>
+          <a:noFill/>
+          <a:ln/>
+        </p:spPr>
+        <p:txBody>
+          <a:bodyPr wrap="square" lIns="0" tIns="0" rIns="0" bIns="0" rtlCol="0" anchor="t"/>
+          <a:lstStyle/>
+          <a:p>
+            <a:pPr algn="ctr" indent="0" marL="0">
+              <a:buNone/>
+            </a:pPr>
+            <a:r>
+              <a:rPr lang="en-US" sz="850" dirty="0">
+                <a:solidFill>
+                  <a:srgbClr val="475569"/>
+                </a:solidFill>
+                <a:latin typeface="Calibri" pitchFamily="34" charset="0"/>
+                <a:ea typeface="Calibri" pitchFamily="34" charset="-122"/>
+                <a:cs typeface="Calibri" pitchFamily="34" charset="-120"/>
+              </a:rPr>
+              <a:t>plural or present tense</a:t>
+            </a:r>
+            <a:endParaRPr lang="en-US" sz="850" dirty="0"/>
+          </a:p>
+        </p:txBody>
+      </p:sp>
+      <p:sp>
+        <p:nvSpPr>
+          <p:cNvPr id="28" name="Shape 26"/>
           <p:cNvSpPr/>
           <p:nvPr/>
         </p:nvSpPr>
@@ -19059,7 +20995,7 @@
       </p:sp>
       <p:sp>
         <p:nvSpPr>
-          <p:cNvPr id="26" name="Text 24"/>
+          <p:cNvPr id="29" name="Text 27"/>
           <p:cNvSpPr/>
           <p:nvPr/>
         </p:nvSpPr>
@@ -19098,7 +21034,7 @@
       </p:sp>
       <p:sp>
         <p:nvSpPr>
-          <p:cNvPr id="27" name="Shape 25"/>
+          <p:cNvPr id="30" name="Shape 28"/>
           <p:cNvSpPr/>
           <p:nvPr/>
         </p:nvSpPr>
@@ -19125,7 +21061,7 @@
       </p:sp>
       <p:sp>
         <p:nvSpPr>
-          <p:cNvPr id="28" name="Text 26"/>
+          <p:cNvPr id="31" name="Text 29"/>
           <p:cNvSpPr/>
           <p:nvPr/>
         </p:nvSpPr>
@@ -19164,7 +21100,7 @@
       </p:sp>
       <p:sp>
         <p:nvSpPr>
-          <p:cNvPr id="29" name="Shape 27"/>
+          <p:cNvPr id="32" name="Shape 30"/>
           <p:cNvSpPr/>
           <p:nvPr/>
         </p:nvSpPr>
@@ -19191,7 +21127,7 @@
       </p:sp>
       <p:sp>
         <p:nvSpPr>
-          <p:cNvPr id="30" name="Text 28"/>
+          <p:cNvPr id="33" name="Text 31"/>
           <p:cNvSpPr/>
           <p:nvPr/>
         </p:nvSpPr>
@@ -19230,7 +21166,7 @@
       </p:sp>
       <p:sp>
         <p:nvSpPr>
-          <p:cNvPr id="31" name="Shape 29"/>
+          <p:cNvPr id="34" name="Shape 32"/>
           <p:cNvSpPr/>
           <p:nvPr/>
         </p:nvSpPr>
@@ -19257,7 +21193,7 @@
       </p:sp>
       <p:sp>
         <p:nvSpPr>
-          <p:cNvPr id="32" name="Text 30"/>
+          <p:cNvPr id="35" name="Text 33"/>
           <p:cNvSpPr/>
           <p:nvPr/>
         </p:nvSpPr>
@@ -19580,7 +21516,7 @@
                 <a:ea typeface="Calibri" pitchFamily="34" charset="-122"/>
                 <a:cs typeface="Calibri" pitchFamily="34" charset="-120"/>
               </a:rPr>
-              <a:t>Word Labs  •  wordlabs.app  •  Root: 'ject' = to throw or hurl</a:t>
+              <a:t>Word Labs  •  wordlabs.app  •  Root: 'ject' = throw</a:t>
             </a:r>
             <a:endParaRPr lang="en-US" sz="800" dirty="0"/>
           </a:p>
@@ -19719,7 +21655,7 @@
                 <a:ea typeface="Trebuchet MS" pitchFamily="34" charset="-122"/>
                 <a:cs typeface="Trebuchet MS" pitchFamily="34" charset="-120"/>
               </a:rPr>
-              <a:t>projectile</a:t>
+              <a:t>objectives</a:t>
             </a:r>
             <a:endParaRPr lang="en-US" sz="2800" dirty="0"/>
           </a:p>
@@ -19799,8 +21735,8 @@
         </p:nvSpPr>
         <p:spPr>
           <a:xfrm>
-            <a:off x="2221992" y="2258568"/>
-            <a:ext cx="1828800" cy="292608"/>
+            <a:off x="1989734" y="2258568"/>
+            <a:ext cx="1581912" cy="292608"/>
           </a:xfrm>
           <a:prstGeom prst="rect">
             <a:avLst>
@@ -19833,8 +21769,8 @@
         </p:nvSpPr>
         <p:spPr>
           <a:xfrm>
-            <a:off x="2221992" y="2258568"/>
-            <a:ext cx="1828800" cy="292608"/>
+            <a:off x="1989734" y="2258568"/>
+            <a:ext cx="1581912" cy="292608"/>
           </a:xfrm>
           <a:prstGeom prst="rect">
             <a:avLst/>
@@ -19858,7 +21794,7 @@
                 <a:ea typeface="Trebuchet MS" pitchFamily="34" charset="-122"/>
                 <a:cs typeface="Trebuchet MS" pitchFamily="34" charset="-120"/>
               </a:rPr>
-              <a:t>pro</a:t>
+              <a:t>ob</a:t>
             </a:r>
             <a:endParaRPr lang="en-US" sz="1300" dirty="0"/>
           </a:p>
@@ -19872,8 +21808,8 @@
         </p:nvSpPr>
         <p:spPr>
           <a:xfrm>
-            <a:off x="2221992" y="2569464"/>
-            <a:ext cx="1828800" cy="201168"/>
+            <a:off x="1989734" y="2569464"/>
+            <a:ext cx="1581912" cy="201168"/>
           </a:xfrm>
           <a:prstGeom prst="rect">
             <a:avLst/>
@@ -19897,7 +21833,7 @@
                 <a:ea typeface="Calibri" pitchFamily="34" charset="-122"/>
                 <a:cs typeface="Calibri" pitchFamily="34" charset="-120"/>
               </a:rPr>
-              <a:t>forward</a:t>
+              <a:t>against; in the way of; towards</a:t>
             </a:r>
             <a:endParaRPr lang="en-US" sz="850" dirty="0"/>
           </a:p>
@@ -19911,8 +21847,8 @@
         </p:nvSpPr>
         <p:spPr>
           <a:xfrm>
-            <a:off x="4370832" y="2258568"/>
-            <a:ext cx="1828800" cy="292608"/>
+            <a:off x="3659429" y="2258568"/>
+            <a:ext cx="1581912" cy="292608"/>
           </a:xfrm>
           <a:prstGeom prst="rect">
             <a:avLst>
@@ -19945,8 +21881,8 @@
         </p:nvSpPr>
         <p:spPr>
           <a:xfrm>
-            <a:off x="4370832" y="2258568"/>
-            <a:ext cx="1828800" cy="292608"/>
+            <a:off x="3659429" y="2258568"/>
+            <a:ext cx="1581912" cy="292608"/>
           </a:xfrm>
           <a:prstGeom prst="rect">
             <a:avLst/>
@@ -19984,8 +21920,8 @@
         </p:nvSpPr>
         <p:spPr>
           <a:xfrm>
-            <a:off x="4370832" y="2569464"/>
-            <a:ext cx="1828800" cy="201168"/>
+            <a:off x="3659429" y="2569464"/>
+            <a:ext cx="1581912" cy="201168"/>
           </a:xfrm>
           <a:prstGeom prst="rect">
             <a:avLst/>
@@ -20009,7 +21945,7 @@
                 <a:ea typeface="Calibri" pitchFamily="34" charset="-122"/>
                 <a:cs typeface="Calibri" pitchFamily="34" charset="-120"/>
               </a:rPr>
-              <a:t>to throw</a:t>
+              <a:t>throw</a:t>
             </a:r>
             <a:endParaRPr lang="en-US" sz="850" dirty="0"/>
           </a:p>
@@ -20023,8 +21959,8 @@
         </p:nvSpPr>
         <p:spPr>
           <a:xfrm>
-            <a:off x="6519672" y="2258568"/>
-            <a:ext cx="1828800" cy="292608"/>
+            <a:off x="5329123" y="2258568"/>
+            <a:ext cx="1581912" cy="292608"/>
           </a:xfrm>
           <a:prstGeom prst="rect">
             <a:avLst>
@@ -20057,8 +21993,8 @@
         </p:nvSpPr>
         <p:spPr>
           <a:xfrm>
-            <a:off x="6519672" y="2258568"/>
-            <a:ext cx="1828800" cy="292608"/>
+            <a:off x="5329123" y="2258568"/>
+            <a:ext cx="1581912" cy="292608"/>
           </a:xfrm>
           <a:prstGeom prst="rect">
             <a:avLst/>
@@ -20082,7 +22018,7 @@
                 <a:ea typeface="Trebuchet MS" pitchFamily="34" charset="-122"/>
                 <a:cs typeface="Trebuchet MS" pitchFamily="34" charset="-120"/>
               </a:rPr>
-              <a:t>ile</a:t>
+              <a:t>ive</a:t>
             </a:r>
             <a:endParaRPr lang="en-US" sz="1300" dirty="0"/>
           </a:p>
@@ -20096,8 +22032,8 @@
         </p:nvSpPr>
         <p:spPr>
           <a:xfrm>
-            <a:off x="6519672" y="2569464"/>
-            <a:ext cx="1828800" cy="201168"/>
+            <a:off x="5329123" y="2569464"/>
+            <a:ext cx="1581912" cy="201168"/>
           </a:xfrm>
           <a:prstGeom prst="rect">
             <a:avLst/>
@@ -20121,7 +22057,7 @@
                 <a:ea typeface="Calibri" pitchFamily="34" charset="-122"/>
                 <a:cs typeface="Calibri" pitchFamily="34" charset="-120"/>
               </a:rPr>
-              <a:t>relating to or capable of</a:t>
+              <a:t>having quality of</a:t>
             </a:r>
             <a:endParaRPr lang="en-US" sz="850" dirty="0"/>
           </a:p>
@@ -20130,6 +22066,118 @@
       <p:sp>
         <p:nvSpPr>
           <p:cNvPr id="25" name="Shape 23"/>
+          <p:cNvSpPr/>
+          <p:nvPr/>
+        </p:nvSpPr>
+        <p:spPr>
+          <a:xfrm>
+            <a:off x="6998818" y="2258568"/>
+            <a:ext cx="1581912" cy="292608"/>
+          </a:xfrm>
+          <a:prstGeom prst="rect">
+            <a:avLst>
+              <a:gd name="adj" fmla="val 25000"/>
+            </a:avLst>
+          </a:prstGeom>
+          <a:solidFill>
+            <a:srgbClr val="FCE7F3"/>
+          </a:solidFill>
+          <a:ln w="19050">
+            <a:solidFill>
+              <a:srgbClr val="DB2777"/>
+            </a:solidFill>
+            <a:prstDash val="solid"/>
+          </a:ln>
+          <a:effectLst>
+            <a:outerShdw sx="100000" sy="100000" kx="0" ky="0" algn="bl" rotWithShape="0" blurRad="101600" dist="38100" dir="8100000">
+              <a:srgbClr val="000000">
+                <a:alpha val="12000"/>
+              </a:srgbClr>
+            </a:outerShdw>
+          </a:effectLst>
+        </p:spPr>
+      </p:sp>
+      <p:sp>
+        <p:nvSpPr>
+          <p:cNvPr id="26" name="Text 24"/>
+          <p:cNvSpPr/>
+          <p:nvPr/>
+        </p:nvSpPr>
+        <p:spPr>
+          <a:xfrm>
+            <a:off x="6998818" y="2258568"/>
+            <a:ext cx="1581912" cy="292608"/>
+          </a:xfrm>
+          <a:prstGeom prst="rect">
+            <a:avLst/>
+          </a:prstGeom>
+          <a:noFill/>
+          <a:ln/>
+        </p:spPr>
+        <p:txBody>
+          <a:bodyPr wrap="square" lIns="0" tIns="0" rIns="0" bIns="0" rtlCol="0" anchor="ctr"/>
+          <a:lstStyle/>
+          <a:p>
+            <a:pPr algn="ctr" indent="0" marL="0">
+              <a:buNone/>
+            </a:pPr>
+            <a:r>
+              <a:rPr lang="en-US" sz="1300" b="1" dirty="0">
+                <a:solidFill>
+                  <a:srgbClr val="9D174D"/>
+                </a:solidFill>
+                <a:latin typeface="Trebuchet MS" pitchFamily="34" charset="0"/>
+                <a:ea typeface="Trebuchet MS" pitchFamily="34" charset="-122"/>
+                <a:cs typeface="Trebuchet MS" pitchFamily="34" charset="-120"/>
+              </a:rPr>
+              <a:t>s</a:t>
+            </a:r>
+            <a:endParaRPr lang="en-US" sz="1300" dirty="0"/>
+          </a:p>
+        </p:txBody>
+      </p:sp>
+      <p:sp>
+        <p:nvSpPr>
+          <p:cNvPr id="27" name="Text 25"/>
+          <p:cNvSpPr/>
+          <p:nvPr/>
+        </p:nvSpPr>
+        <p:spPr>
+          <a:xfrm>
+            <a:off x="6998818" y="2569464"/>
+            <a:ext cx="1581912" cy="201168"/>
+          </a:xfrm>
+          <a:prstGeom prst="rect">
+            <a:avLst/>
+          </a:prstGeom>
+          <a:noFill/>
+          <a:ln/>
+        </p:spPr>
+        <p:txBody>
+          <a:bodyPr wrap="square" lIns="0" tIns="0" rIns="0" bIns="0" rtlCol="0" anchor="t"/>
+          <a:lstStyle/>
+          <a:p>
+            <a:pPr algn="ctr" indent="0" marL="0">
+              <a:buNone/>
+            </a:pPr>
+            <a:r>
+              <a:rPr lang="en-US" sz="850" dirty="0">
+                <a:solidFill>
+                  <a:srgbClr val="475569"/>
+                </a:solidFill>
+                <a:latin typeface="Calibri" pitchFamily="34" charset="0"/>
+                <a:ea typeface="Calibri" pitchFamily="34" charset="-122"/>
+                <a:cs typeface="Calibri" pitchFamily="34" charset="-120"/>
+              </a:rPr>
+              <a:t>plural or present tense</a:t>
+            </a:r>
+            <a:endParaRPr lang="en-US" sz="850" dirty="0"/>
+          </a:p>
+        </p:txBody>
+      </p:sp>
+      <p:sp>
+        <p:nvSpPr>
+          <p:cNvPr id="28" name="Shape 26"/>
           <p:cNvSpPr/>
           <p:nvPr/>
         </p:nvSpPr>
@@ -20156,7 +22204,7 @@
       </p:sp>
       <p:sp>
         <p:nvSpPr>
-          <p:cNvPr id="26" name="Text 24"/>
+          <p:cNvPr id="29" name="Text 27"/>
           <p:cNvSpPr/>
           <p:nvPr/>
         </p:nvSpPr>
@@ -20195,7 +22243,7 @@
       </p:sp>
       <p:sp>
         <p:nvSpPr>
-          <p:cNvPr id="27" name="Shape 25"/>
+          <p:cNvPr id="30" name="Shape 28"/>
           <p:cNvSpPr/>
           <p:nvPr/>
         </p:nvSpPr>
@@ -20222,7 +22270,7 @@
       </p:sp>
       <p:sp>
         <p:nvSpPr>
-          <p:cNvPr id="28" name="Shape 26"/>
+          <p:cNvPr id="31" name="Shape 29"/>
           <p:cNvSpPr/>
           <p:nvPr/>
         </p:nvSpPr>
@@ -20249,7 +22297,7 @@
       </p:sp>
       <p:sp>
         <p:nvSpPr>
-          <p:cNvPr id="29" name="Text 27"/>
+          <p:cNvPr id="32" name="Text 30"/>
           <p:cNvSpPr/>
           <p:nvPr/>
         </p:nvSpPr>
@@ -20280,7 +22328,7 @@
                 <a:ea typeface="Trebuchet MS" pitchFamily="34" charset="-122"/>
                 <a:cs typeface="Trebuchet MS" pitchFamily="34" charset="-120"/>
               </a:rPr>
-              <a:t>pro</a:t>
+              <a:t>ob</a:t>
             </a:r>
             <a:endParaRPr lang="en-US" sz="1400" dirty="0"/>
           </a:p>
@@ -20288,7 +22336,7 @@
       </p:sp>
       <p:sp>
         <p:nvSpPr>
-          <p:cNvPr id="30" name="Text 28"/>
+          <p:cNvPr id="33" name="Text 31"/>
           <p:cNvSpPr/>
           <p:nvPr/>
         </p:nvSpPr>
@@ -20327,7 +22375,7 @@
       </p:sp>
       <p:sp>
         <p:nvSpPr>
-          <p:cNvPr id="31" name="Shape 29"/>
+          <p:cNvPr id="34" name="Shape 32"/>
           <p:cNvSpPr/>
           <p:nvPr/>
         </p:nvSpPr>
@@ -20354,7 +22402,7 @@
       </p:sp>
       <p:sp>
         <p:nvSpPr>
-          <p:cNvPr id="32" name="Text 30"/>
+          <p:cNvPr id="35" name="Text 33"/>
           <p:cNvSpPr/>
           <p:nvPr/>
         </p:nvSpPr>
@@ -20393,7 +22441,7 @@
       </p:sp>
       <p:sp>
         <p:nvSpPr>
-          <p:cNvPr id="33" name="Text 31"/>
+          <p:cNvPr id="36" name="Text 34"/>
           <p:cNvSpPr/>
           <p:nvPr/>
         </p:nvSpPr>
@@ -20432,7 +22480,7 @@
       </p:sp>
       <p:sp>
         <p:nvSpPr>
-          <p:cNvPr id="34" name="Shape 32"/>
+          <p:cNvPr id="37" name="Shape 35"/>
           <p:cNvSpPr/>
           <p:nvPr/>
         </p:nvSpPr>
@@ -20459,7 +22507,7 @@
       </p:sp>
       <p:sp>
         <p:nvSpPr>
-          <p:cNvPr id="35" name="Text 33"/>
+          <p:cNvPr id="38" name="Text 36"/>
           <p:cNvSpPr/>
           <p:nvPr/>
         </p:nvSpPr>
@@ -20490,7 +22538,7 @@
                 <a:ea typeface="Trebuchet MS" pitchFamily="34" charset="-122"/>
                 <a:cs typeface="Trebuchet MS" pitchFamily="34" charset="-120"/>
               </a:rPr>
-              <a:t>tile</a:t>
+              <a:t>tives</a:t>
             </a:r>
             <a:endParaRPr lang="en-US" sz="1400" dirty="0"/>
           </a:p>
@@ -20498,7 +22546,7 @@
       </p:sp>
       <p:sp>
         <p:nvSpPr>
-          <p:cNvPr id="36" name="Shape 34"/>
+          <p:cNvPr id="39" name="Shape 37"/>
           <p:cNvSpPr/>
           <p:nvPr/>
         </p:nvSpPr>
@@ -20525,7 +22573,7 @@
       </p:sp>
       <p:sp>
         <p:nvSpPr>
-          <p:cNvPr id="37" name="Text 35"/>
+          <p:cNvPr id="40" name="Text 38"/>
           <p:cNvSpPr/>
           <p:nvPr/>
         </p:nvSpPr>
@@ -20564,7 +22612,7 @@
       </p:sp>
       <p:sp>
         <p:nvSpPr>
-          <p:cNvPr id="38" name="Shape 36"/>
+          <p:cNvPr id="41" name="Shape 39"/>
           <p:cNvSpPr/>
           <p:nvPr/>
         </p:nvSpPr>
@@ -20591,7 +22639,7 @@
       </p:sp>
       <p:sp>
         <p:nvSpPr>
-          <p:cNvPr id="39" name="Text 37"/>
+          <p:cNvPr id="42" name="Text 40"/>
           <p:cNvSpPr/>
           <p:nvPr/>
         </p:nvSpPr>
@@ -20914,7 +22962,7 @@
                 <a:ea typeface="Calibri" pitchFamily="34" charset="-122"/>
                 <a:cs typeface="Calibri" pitchFamily="34" charset="-120"/>
               </a:rPr>
-              <a:t>Word Labs  •  wordlabs.app  •  Root: 'ject' = to throw or hurl</a:t>
+              <a:t>Word Labs  •  wordlabs.app  •  Root: 'ject' = throw</a:t>
             </a:r>
             <a:endParaRPr lang="en-US" sz="800" dirty="0"/>
           </a:p>
@@ -21053,7 +23101,7 @@
                 <a:ea typeface="Trebuchet MS" pitchFamily="34" charset="-122"/>
                 <a:cs typeface="Trebuchet MS" pitchFamily="34" charset="-120"/>
               </a:rPr>
-              <a:t>projectile</a:t>
+              <a:t>objectives</a:t>
             </a:r>
             <a:endParaRPr lang="en-US" sz="2800" dirty="0"/>
           </a:p>
@@ -21133,8 +23181,8 @@
         </p:nvSpPr>
         <p:spPr>
           <a:xfrm>
-            <a:off x="2221992" y="2258568"/>
-            <a:ext cx="1828800" cy="292608"/>
+            <a:off x="1989734" y="2258568"/>
+            <a:ext cx="1581912" cy="292608"/>
           </a:xfrm>
           <a:prstGeom prst="rect">
             <a:avLst>
@@ -21167,8 +23215,8 @@
         </p:nvSpPr>
         <p:spPr>
           <a:xfrm>
-            <a:off x="2221992" y="2258568"/>
-            <a:ext cx="1828800" cy="292608"/>
+            <a:off x="1989734" y="2258568"/>
+            <a:ext cx="1581912" cy="292608"/>
           </a:xfrm>
           <a:prstGeom prst="rect">
             <a:avLst/>
@@ -21192,7 +23240,7 @@
                 <a:ea typeface="Trebuchet MS" pitchFamily="34" charset="-122"/>
                 <a:cs typeface="Trebuchet MS" pitchFamily="34" charset="-120"/>
               </a:rPr>
-              <a:t>pro</a:t>
+              <a:t>ob</a:t>
             </a:r>
             <a:endParaRPr lang="en-US" sz="1300" dirty="0"/>
           </a:p>
@@ -21206,8 +23254,8 @@
         </p:nvSpPr>
         <p:spPr>
           <a:xfrm>
-            <a:off x="2221992" y="2569464"/>
-            <a:ext cx="1828800" cy="201168"/>
+            <a:off x="1989734" y="2569464"/>
+            <a:ext cx="1581912" cy="201168"/>
           </a:xfrm>
           <a:prstGeom prst="rect">
             <a:avLst/>
@@ -21231,7 +23279,7 @@
                 <a:ea typeface="Calibri" pitchFamily="34" charset="-122"/>
                 <a:cs typeface="Calibri" pitchFamily="34" charset="-120"/>
               </a:rPr>
-              <a:t>forward</a:t>
+              <a:t>against; in the way of; towards</a:t>
             </a:r>
             <a:endParaRPr lang="en-US" sz="850" dirty="0"/>
           </a:p>
@@ -21245,8 +23293,8 @@
         </p:nvSpPr>
         <p:spPr>
           <a:xfrm>
-            <a:off x="4370832" y="2258568"/>
-            <a:ext cx="1828800" cy="292608"/>
+            <a:off x="3659429" y="2258568"/>
+            <a:ext cx="1581912" cy="292608"/>
           </a:xfrm>
           <a:prstGeom prst="rect">
             <a:avLst>
@@ -21279,8 +23327,8 @@
         </p:nvSpPr>
         <p:spPr>
           <a:xfrm>
-            <a:off x="4370832" y="2258568"/>
-            <a:ext cx="1828800" cy="292608"/>
+            <a:off x="3659429" y="2258568"/>
+            <a:ext cx="1581912" cy="292608"/>
           </a:xfrm>
           <a:prstGeom prst="rect">
             <a:avLst/>
@@ -21318,8 +23366,8 @@
         </p:nvSpPr>
         <p:spPr>
           <a:xfrm>
-            <a:off x="4370832" y="2569464"/>
-            <a:ext cx="1828800" cy="201168"/>
+            <a:off x="3659429" y="2569464"/>
+            <a:ext cx="1581912" cy="201168"/>
           </a:xfrm>
           <a:prstGeom prst="rect">
             <a:avLst/>
@@ -21343,7 +23391,7 @@
                 <a:ea typeface="Calibri" pitchFamily="34" charset="-122"/>
                 <a:cs typeface="Calibri" pitchFamily="34" charset="-120"/>
               </a:rPr>
-              <a:t>to throw</a:t>
+              <a:t>throw</a:t>
             </a:r>
             <a:endParaRPr lang="en-US" sz="850" dirty="0"/>
           </a:p>
@@ -21357,8 +23405,8 @@
         </p:nvSpPr>
         <p:spPr>
           <a:xfrm>
-            <a:off x="6519672" y="2258568"/>
-            <a:ext cx="1828800" cy="292608"/>
+            <a:off x="5329123" y="2258568"/>
+            <a:ext cx="1581912" cy="292608"/>
           </a:xfrm>
           <a:prstGeom prst="rect">
             <a:avLst>
@@ -21391,8 +23439,8 @@
         </p:nvSpPr>
         <p:spPr>
           <a:xfrm>
-            <a:off x="6519672" y="2258568"/>
-            <a:ext cx="1828800" cy="292608"/>
+            <a:off x="5329123" y="2258568"/>
+            <a:ext cx="1581912" cy="292608"/>
           </a:xfrm>
           <a:prstGeom prst="rect">
             <a:avLst/>
@@ -21416,7 +23464,7 @@
                 <a:ea typeface="Trebuchet MS" pitchFamily="34" charset="-122"/>
                 <a:cs typeface="Trebuchet MS" pitchFamily="34" charset="-120"/>
               </a:rPr>
-              <a:t>ile</a:t>
+              <a:t>ive</a:t>
             </a:r>
             <a:endParaRPr lang="en-US" sz="1300" dirty="0"/>
           </a:p>
@@ -21430,8 +23478,8 @@
         </p:nvSpPr>
         <p:spPr>
           <a:xfrm>
-            <a:off x="6519672" y="2569464"/>
-            <a:ext cx="1828800" cy="201168"/>
+            <a:off x="5329123" y="2569464"/>
+            <a:ext cx="1581912" cy="201168"/>
           </a:xfrm>
           <a:prstGeom prst="rect">
             <a:avLst/>
@@ -21455,7 +23503,7 @@
                 <a:ea typeface="Calibri" pitchFamily="34" charset="-122"/>
                 <a:cs typeface="Calibri" pitchFamily="34" charset="-120"/>
               </a:rPr>
-              <a:t>relating to or capable of</a:t>
+              <a:t>having quality of</a:t>
             </a:r>
             <a:endParaRPr lang="en-US" sz="850" dirty="0"/>
           </a:p>
@@ -21464,6 +23512,118 @@
       <p:sp>
         <p:nvSpPr>
           <p:cNvPr id="25" name="Shape 23"/>
+          <p:cNvSpPr/>
+          <p:nvPr/>
+        </p:nvSpPr>
+        <p:spPr>
+          <a:xfrm>
+            <a:off x="6998818" y="2258568"/>
+            <a:ext cx="1581912" cy="292608"/>
+          </a:xfrm>
+          <a:prstGeom prst="rect">
+            <a:avLst>
+              <a:gd name="adj" fmla="val 25000"/>
+            </a:avLst>
+          </a:prstGeom>
+          <a:solidFill>
+            <a:srgbClr val="FCE7F3"/>
+          </a:solidFill>
+          <a:ln w="19050">
+            <a:solidFill>
+              <a:srgbClr val="DB2777"/>
+            </a:solidFill>
+            <a:prstDash val="solid"/>
+          </a:ln>
+          <a:effectLst>
+            <a:outerShdw sx="100000" sy="100000" kx="0" ky="0" algn="bl" rotWithShape="0" blurRad="101600" dist="38100" dir="8100000">
+              <a:srgbClr val="000000">
+                <a:alpha val="12000"/>
+              </a:srgbClr>
+            </a:outerShdw>
+          </a:effectLst>
+        </p:spPr>
+      </p:sp>
+      <p:sp>
+        <p:nvSpPr>
+          <p:cNvPr id="26" name="Text 24"/>
+          <p:cNvSpPr/>
+          <p:nvPr/>
+        </p:nvSpPr>
+        <p:spPr>
+          <a:xfrm>
+            <a:off x="6998818" y="2258568"/>
+            <a:ext cx="1581912" cy="292608"/>
+          </a:xfrm>
+          <a:prstGeom prst="rect">
+            <a:avLst/>
+          </a:prstGeom>
+          <a:noFill/>
+          <a:ln/>
+        </p:spPr>
+        <p:txBody>
+          <a:bodyPr wrap="square" lIns="0" tIns="0" rIns="0" bIns="0" rtlCol="0" anchor="ctr"/>
+          <a:lstStyle/>
+          <a:p>
+            <a:pPr algn="ctr" indent="0" marL="0">
+              <a:buNone/>
+            </a:pPr>
+            <a:r>
+              <a:rPr lang="en-US" sz="1300" b="1" dirty="0">
+                <a:solidFill>
+                  <a:srgbClr val="9D174D"/>
+                </a:solidFill>
+                <a:latin typeface="Trebuchet MS" pitchFamily="34" charset="0"/>
+                <a:ea typeface="Trebuchet MS" pitchFamily="34" charset="-122"/>
+                <a:cs typeface="Trebuchet MS" pitchFamily="34" charset="-120"/>
+              </a:rPr>
+              <a:t>s</a:t>
+            </a:r>
+            <a:endParaRPr lang="en-US" sz="1300" dirty="0"/>
+          </a:p>
+        </p:txBody>
+      </p:sp>
+      <p:sp>
+        <p:nvSpPr>
+          <p:cNvPr id="27" name="Text 25"/>
+          <p:cNvSpPr/>
+          <p:nvPr/>
+        </p:nvSpPr>
+        <p:spPr>
+          <a:xfrm>
+            <a:off x="6998818" y="2569464"/>
+            <a:ext cx="1581912" cy="201168"/>
+          </a:xfrm>
+          <a:prstGeom prst="rect">
+            <a:avLst/>
+          </a:prstGeom>
+          <a:noFill/>
+          <a:ln/>
+        </p:spPr>
+        <p:txBody>
+          <a:bodyPr wrap="square" lIns="0" tIns="0" rIns="0" bIns="0" rtlCol="0" anchor="t"/>
+          <a:lstStyle/>
+          <a:p>
+            <a:pPr algn="ctr" indent="0" marL="0">
+              <a:buNone/>
+            </a:pPr>
+            <a:r>
+              <a:rPr lang="en-US" sz="850" dirty="0">
+                <a:solidFill>
+                  <a:srgbClr val="475569"/>
+                </a:solidFill>
+                <a:latin typeface="Calibri" pitchFamily="34" charset="0"/>
+                <a:ea typeface="Calibri" pitchFamily="34" charset="-122"/>
+                <a:cs typeface="Calibri" pitchFamily="34" charset="-120"/>
+              </a:rPr>
+              <a:t>plural or present tense</a:t>
+            </a:r>
+            <a:endParaRPr lang="en-US" sz="850" dirty="0"/>
+          </a:p>
+        </p:txBody>
+      </p:sp>
+      <p:sp>
+        <p:nvSpPr>
+          <p:cNvPr id="28" name="Shape 26"/>
           <p:cNvSpPr/>
           <p:nvPr/>
         </p:nvSpPr>
@@ -21490,7 +23650,7 @@
       </p:sp>
       <p:sp>
         <p:nvSpPr>
-          <p:cNvPr id="26" name="Text 24"/>
+          <p:cNvPr id="29" name="Text 27"/>
           <p:cNvSpPr/>
           <p:nvPr/>
         </p:nvSpPr>
@@ -21529,7 +23689,7 @@
       </p:sp>
       <p:sp>
         <p:nvSpPr>
-          <p:cNvPr id="27" name="Shape 25"/>
+          <p:cNvPr id="30" name="Shape 28"/>
           <p:cNvSpPr/>
           <p:nvPr/>
         </p:nvSpPr>
@@ -21556,7 +23716,7 @@
       </p:sp>
       <p:sp>
         <p:nvSpPr>
-          <p:cNvPr id="28" name="Shape 26"/>
+          <p:cNvPr id="31" name="Shape 29"/>
           <p:cNvSpPr/>
           <p:nvPr/>
         </p:nvSpPr>
@@ -21583,7 +23743,7 @@
       </p:sp>
       <p:sp>
         <p:nvSpPr>
-          <p:cNvPr id="29" name="Text 27"/>
+          <p:cNvPr id="32" name="Text 30"/>
           <p:cNvSpPr/>
           <p:nvPr/>
         </p:nvSpPr>
@@ -21614,7 +23774,7 @@
                 <a:ea typeface="Trebuchet MS" pitchFamily="34" charset="-122"/>
                 <a:cs typeface="Trebuchet MS" pitchFamily="34" charset="-120"/>
               </a:rPr>
-              <a:t>pro</a:t>
+              <a:t>ob</a:t>
             </a:r>
             <a:endParaRPr lang="en-US" sz="1400" dirty="0"/>
           </a:p>
@@ -21622,7 +23782,7 @@
       </p:sp>
       <p:sp>
         <p:nvSpPr>
-          <p:cNvPr id="30" name="Text 28"/>
+          <p:cNvPr id="33" name="Text 31"/>
           <p:cNvSpPr/>
           <p:nvPr/>
         </p:nvSpPr>
@@ -21661,7 +23821,7 @@
       </p:sp>
       <p:sp>
         <p:nvSpPr>
-          <p:cNvPr id="31" name="Shape 29"/>
+          <p:cNvPr id="34" name="Shape 32"/>
           <p:cNvSpPr/>
           <p:nvPr/>
         </p:nvSpPr>
@@ -21688,7 +23848,7 @@
       </p:sp>
       <p:sp>
         <p:nvSpPr>
-          <p:cNvPr id="32" name="Text 30"/>
+          <p:cNvPr id="35" name="Text 33"/>
           <p:cNvSpPr/>
           <p:nvPr/>
         </p:nvSpPr>
@@ -21727,7 +23887,7 @@
       </p:sp>
       <p:sp>
         <p:nvSpPr>
-          <p:cNvPr id="33" name="Text 31"/>
+          <p:cNvPr id="36" name="Text 34"/>
           <p:cNvSpPr/>
           <p:nvPr/>
         </p:nvSpPr>
@@ -21766,7 +23926,7 @@
       </p:sp>
       <p:sp>
         <p:nvSpPr>
-          <p:cNvPr id="34" name="Shape 32"/>
+          <p:cNvPr id="37" name="Shape 35"/>
           <p:cNvSpPr/>
           <p:nvPr/>
         </p:nvSpPr>
@@ -21793,7 +23953,7 @@
       </p:sp>
       <p:sp>
         <p:nvSpPr>
-          <p:cNvPr id="35" name="Text 33"/>
+          <p:cNvPr id="38" name="Text 36"/>
           <p:cNvSpPr/>
           <p:nvPr/>
         </p:nvSpPr>
@@ -21824,7 +23984,7 @@
                 <a:ea typeface="Trebuchet MS" pitchFamily="34" charset="-122"/>
                 <a:cs typeface="Trebuchet MS" pitchFamily="34" charset="-120"/>
               </a:rPr>
-              <a:t>tile</a:t>
+              <a:t>tives</a:t>
             </a:r>
             <a:endParaRPr lang="en-US" sz="1400" dirty="0"/>
           </a:p>
@@ -21832,7 +23992,7 @@
       </p:sp>
       <p:sp>
         <p:nvSpPr>
-          <p:cNvPr id="36" name="Shape 34"/>
+          <p:cNvPr id="39" name="Shape 37"/>
           <p:cNvSpPr/>
           <p:nvPr/>
         </p:nvSpPr>
@@ -21859,7 +24019,7 @@
       </p:sp>
       <p:sp>
         <p:nvSpPr>
-          <p:cNvPr id="37" name="Text 35"/>
+          <p:cNvPr id="40" name="Text 38"/>
           <p:cNvSpPr/>
           <p:nvPr/>
         </p:nvSpPr>
@@ -21898,7 +24058,7 @@
       </p:sp>
       <p:sp>
         <p:nvSpPr>
-          <p:cNvPr id="38" name="Shape 36"/>
+          <p:cNvPr id="41" name="Shape 39"/>
           <p:cNvSpPr/>
           <p:nvPr/>
         </p:nvSpPr>
@@ -21925,14 +24085,14 @@
       </p:sp>
       <p:sp>
         <p:nvSpPr>
-          <p:cNvPr id="39" name="Shape 37"/>
-          <p:cNvSpPr/>
-          <p:nvPr/>
-        </p:nvSpPr>
-        <p:spPr>
-          <a:xfrm>
-            <a:off x="1951330" y="4169664"/>
-            <a:ext cx="676656" cy="475488"/>
+          <p:cNvPr id="42" name="Shape 40"/>
+          <p:cNvSpPr/>
+          <p:nvPr/>
+        </p:nvSpPr>
+        <p:spPr>
+          <a:xfrm>
+            <a:off x="1951828" y="4169664"/>
+            <a:ext cx="603504" cy="475488"/>
           </a:xfrm>
           <a:prstGeom prst="rect">
             <a:avLst>
@@ -21952,14 +24112,14 @@
       </p:sp>
       <p:sp>
         <p:nvSpPr>
-          <p:cNvPr id="40" name="Text 38"/>
-          <p:cNvSpPr/>
-          <p:nvPr/>
-        </p:nvSpPr>
-        <p:spPr>
-          <a:xfrm>
-            <a:off x="1951330" y="4169664"/>
-            <a:ext cx="676656" cy="475488"/>
+          <p:cNvPr id="43" name="Text 41"/>
+          <p:cNvSpPr/>
+          <p:nvPr/>
+        </p:nvSpPr>
+        <p:spPr>
+          <a:xfrm>
+            <a:off x="1951828" y="4169664"/>
+            <a:ext cx="603504" cy="475488"/>
           </a:xfrm>
           <a:prstGeom prst="rect">
             <a:avLst/>
@@ -21983,7 +24143,7 @@
                 <a:ea typeface="Trebuchet MS" pitchFamily="34" charset="-122"/>
                 <a:cs typeface="Trebuchet MS" pitchFamily="34" charset="-120"/>
               </a:rPr>
-              <a:t>p</a:t>
+              <a:t>o</a:t>
             </a:r>
             <a:endParaRPr lang="en-US" sz="900" dirty="0"/>
           </a:p>
@@ -21991,14 +24151,14 @@
       </p:sp>
       <p:sp>
         <p:nvSpPr>
-          <p:cNvPr id="41" name="Shape 39"/>
-          <p:cNvSpPr/>
-          <p:nvPr/>
-        </p:nvSpPr>
-        <p:spPr>
-          <a:xfrm>
-            <a:off x="2677363" y="4169664"/>
-            <a:ext cx="676656" cy="475488"/>
+          <p:cNvPr id="44" name="Shape 42"/>
+          <p:cNvSpPr/>
+          <p:nvPr/>
+        </p:nvSpPr>
+        <p:spPr>
+          <a:xfrm>
+            <a:off x="2605209" y="4169664"/>
+            <a:ext cx="603504" cy="475488"/>
           </a:xfrm>
           <a:prstGeom prst="rect">
             <a:avLst>
@@ -22018,14 +24178,14 @@
       </p:sp>
       <p:sp>
         <p:nvSpPr>
-          <p:cNvPr id="42" name="Text 40"/>
-          <p:cNvSpPr/>
-          <p:nvPr/>
-        </p:nvSpPr>
-        <p:spPr>
-          <a:xfrm>
-            <a:off x="2677363" y="4169664"/>
-            <a:ext cx="676656" cy="475488"/>
+          <p:cNvPr id="45" name="Text 43"/>
+          <p:cNvSpPr/>
+          <p:nvPr/>
+        </p:nvSpPr>
+        <p:spPr>
+          <a:xfrm>
+            <a:off x="2605209" y="4169664"/>
+            <a:ext cx="603504" cy="475488"/>
           </a:xfrm>
           <a:prstGeom prst="rect">
             <a:avLst/>
@@ -22049,7 +24209,7 @@
                 <a:ea typeface="Trebuchet MS" pitchFamily="34" charset="-122"/>
                 <a:cs typeface="Trebuchet MS" pitchFamily="34" charset="-120"/>
               </a:rPr>
-              <a:t>r</a:t>
+              <a:t>b</a:t>
             </a:r>
             <a:endParaRPr lang="en-US" sz="900" dirty="0"/>
           </a:p>
@@ -22057,14 +24217,14 @@
       </p:sp>
       <p:sp>
         <p:nvSpPr>
-          <p:cNvPr id="43" name="Shape 41"/>
-          <p:cNvSpPr/>
-          <p:nvPr/>
-        </p:nvSpPr>
-        <p:spPr>
-          <a:xfrm>
-            <a:off x="3403397" y="4169664"/>
-            <a:ext cx="676656" cy="475488"/>
+          <p:cNvPr id="46" name="Shape 44"/>
+          <p:cNvSpPr/>
+          <p:nvPr/>
+        </p:nvSpPr>
+        <p:spPr>
+          <a:xfrm>
+            <a:off x="3258589" y="4169664"/>
+            <a:ext cx="603504" cy="475488"/>
           </a:xfrm>
           <a:prstGeom prst="rect">
             <a:avLst>
@@ -22084,14 +24244,14 @@
       </p:sp>
       <p:sp>
         <p:nvSpPr>
-          <p:cNvPr id="44" name="Text 42"/>
-          <p:cNvSpPr/>
-          <p:nvPr/>
-        </p:nvSpPr>
-        <p:spPr>
-          <a:xfrm>
-            <a:off x="3403397" y="4169664"/>
-            <a:ext cx="676656" cy="475488"/>
+          <p:cNvPr id="47" name="Text 45"/>
+          <p:cNvSpPr/>
+          <p:nvPr/>
+        </p:nvSpPr>
+        <p:spPr>
+          <a:xfrm>
+            <a:off x="3258589" y="4169664"/>
+            <a:ext cx="603504" cy="475488"/>
           </a:xfrm>
           <a:prstGeom prst="rect">
             <a:avLst/>
@@ -22115,7 +24275,7 @@
                 <a:ea typeface="Trebuchet MS" pitchFamily="34" charset="-122"/>
                 <a:cs typeface="Trebuchet MS" pitchFamily="34" charset="-120"/>
               </a:rPr>
-              <a:t>o</a:t>
+              <a:t>j</a:t>
             </a:r>
             <a:endParaRPr lang="en-US" sz="900" dirty="0"/>
           </a:p>
@@ -22123,14 +24283,14 @@
       </p:sp>
       <p:sp>
         <p:nvSpPr>
-          <p:cNvPr id="45" name="Shape 43"/>
-          <p:cNvSpPr/>
-          <p:nvPr/>
-        </p:nvSpPr>
-        <p:spPr>
-          <a:xfrm>
-            <a:off x="4129430" y="4169664"/>
-            <a:ext cx="676656" cy="475488"/>
+          <p:cNvPr id="48" name="Shape 46"/>
+          <p:cNvSpPr/>
+          <p:nvPr/>
+        </p:nvSpPr>
+        <p:spPr>
+          <a:xfrm>
+            <a:off x="3911969" y="4169664"/>
+            <a:ext cx="603504" cy="475488"/>
           </a:xfrm>
           <a:prstGeom prst="rect">
             <a:avLst>
@@ -22150,14 +24310,14 @@
       </p:sp>
       <p:sp>
         <p:nvSpPr>
-          <p:cNvPr id="46" name="Text 44"/>
-          <p:cNvSpPr/>
-          <p:nvPr/>
-        </p:nvSpPr>
-        <p:spPr>
-          <a:xfrm>
-            <a:off x="4129430" y="4169664"/>
-            <a:ext cx="676656" cy="475488"/>
+          <p:cNvPr id="49" name="Text 47"/>
+          <p:cNvSpPr/>
+          <p:nvPr/>
+        </p:nvSpPr>
+        <p:spPr>
+          <a:xfrm>
+            <a:off x="3911969" y="4169664"/>
+            <a:ext cx="603504" cy="475488"/>
           </a:xfrm>
           <a:prstGeom prst="rect">
             <a:avLst/>
@@ -22181,7 +24341,7 @@
                 <a:ea typeface="Trebuchet MS" pitchFamily="34" charset="-122"/>
                 <a:cs typeface="Trebuchet MS" pitchFamily="34" charset="-120"/>
               </a:rPr>
-              <a:t>j</a:t>
+              <a:t>e</a:t>
             </a:r>
             <a:endParaRPr lang="en-US" sz="900" dirty="0"/>
           </a:p>
@@ -22189,14 +24349,14 @@
       </p:sp>
       <p:sp>
         <p:nvSpPr>
-          <p:cNvPr id="47" name="Shape 45"/>
-          <p:cNvSpPr/>
-          <p:nvPr/>
-        </p:nvSpPr>
-        <p:spPr>
-          <a:xfrm>
-            <a:off x="4855464" y="4169664"/>
-            <a:ext cx="676656" cy="475488"/>
+          <p:cNvPr id="50" name="Shape 48"/>
+          <p:cNvSpPr/>
+          <p:nvPr/>
+        </p:nvSpPr>
+        <p:spPr>
+          <a:xfrm>
+            <a:off x="4565350" y="4169664"/>
+            <a:ext cx="603504" cy="475488"/>
           </a:xfrm>
           <a:prstGeom prst="rect">
             <a:avLst>
@@ -22216,14 +24376,14 @@
       </p:sp>
       <p:sp>
         <p:nvSpPr>
-          <p:cNvPr id="48" name="Text 46"/>
-          <p:cNvSpPr/>
-          <p:nvPr/>
-        </p:nvSpPr>
-        <p:spPr>
-          <a:xfrm>
-            <a:off x="4855464" y="4169664"/>
-            <a:ext cx="676656" cy="475488"/>
+          <p:cNvPr id="51" name="Text 49"/>
+          <p:cNvSpPr/>
+          <p:nvPr/>
+        </p:nvSpPr>
+        <p:spPr>
+          <a:xfrm>
+            <a:off x="4565350" y="4169664"/>
+            <a:ext cx="603504" cy="475488"/>
           </a:xfrm>
           <a:prstGeom prst="rect">
             <a:avLst/>
@@ -22247,7 +24407,7 @@
                 <a:ea typeface="Trebuchet MS" pitchFamily="34" charset="-122"/>
                 <a:cs typeface="Trebuchet MS" pitchFamily="34" charset="-120"/>
               </a:rPr>
-              <a:t>e</a:t>
+              <a:t>c</a:t>
             </a:r>
             <a:endParaRPr lang="en-US" sz="900" dirty="0"/>
           </a:p>
@@ -22255,14 +24415,14 @@
       </p:sp>
       <p:sp>
         <p:nvSpPr>
-          <p:cNvPr id="49" name="Shape 47"/>
-          <p:cNvSpPr/>
-          <p:nvPr/>
-        </p:nvSpPr>
-        <p:spPr>
-          <a:xfrm>
-            <a:off x="5581498" y="4169664"/>
-            <a:ext cx="676656" cy="475488"/>
+          <p:cNvPr id="52" name="Shape 50"/>
+          <p:cNvSpPr/>
+          <p:nvPr/>
+        </p:nvSpPr>
+        <p:spPr>
+          <a:xfrm>
+            <a:off x="5218730" y="4169664"/>
+            <a:ext cx="603504" cy="475488"/>
           </a:xfrm>
           <a:prstGeom prst="rect">
             <a:avLst>
@@ -22282,14 +24442,14 @@
       </p:sp>
       <p:sp>
         <p:nvSpPr>
-          <p:cNvPr id="50" name="Text 48"/>
-          <p:cNvSpPr/>
-          <p:nvPr/>
-        </p:nvSpPr>
-        <p:spPr>
-          <a:xfrm>
-            <a:off x="5581498" y="4169664"/>
-            <a:ext cx="676656" cy="475488"/>
+          <p:cNvPr id="53" name="Text 51"/>
+          <p:cNvSpPr/>
+          <p:nvPr/>
+        </p:nvSpPr>
+        <p:spPr>
+          <a:xfrm>
+            <a:off x="5218730" y="4169664"/>
+            <a:ext cx="603504" cy="475488"/>
           </a:xfrm>
           <a:prstGeom prst="rect">
             <a:avLst/>
@@ -22313,7 +24473,7 @@
                 <a:ea typeface="Trebuchet MS" pitchFamily="34" charset="-122"/>
                 <a:cs typeface="Trebuchet MS" pitchFamily="34" charset="-120"/>
               </a:rPr>
-              <a:t>c</a:t>
+              <a:t>t</a:t>
             </a:r>
             <a:endParaRPr lang="en-US" sz="900" dirty="0"/>
           </a:p>
@@ -22321,14 +24481,14 @@
       </p:sp>
       <p:sp>
         <p:nvSpPr>
-          <p:cNvPr id="51" name="Shape 49"/>
-          <p:cNvSpPr/>
-          <p:nvPr/>
-        </p:nvSpPr>
-        <p:spPr>
-          <a:xfrm>
-            <a:off x="6307531" y="4169664"/>
-            <a:ext cx="676656" cy="475488"/>
+          <p:cNvPr id="54" name="Shape 52"/>
+          <p:cNvSpPr/>
+          <p:nvPr/>
+        </p:nvSpPr>
+        <p:spPr>
+          <a:xfrm>
+            <a:off x="5872111" y="4169664"/>
+            <a:ext cx="603504" cy="475488"/>
           </a:xfrm>
           <a:prstGeom prst="rect">
             <a:avLst>
@@ -22348,14 +24508,14 @@
       </p:sp>
       <p:sp>
         <p:nvSpPr>
-          <p:cNvPr id="52" name="Text 50"/>
-          <p:cNvSpPr/>
-          <p:nvPr/>
-        </p:nvSpPr>
-        <p:spPr>
-          <a:xfrm>
-            <a:off x="6307531" y="4169664"/>
-            <a:ext cx="676656" cy="475488"/>
+          <p:cNvPr id="55" name="Text 53"/>
+          <p:cNvSpPr/>
+          <p:nvPr/>
+        </p:nvSpPr>
+        <p:spPr>
+          <a:xfrm>
+            <a:off x="5872111" y="4169664"/>
+            <a:ext cx="603504" cy="475488"/>
           </a:xfrm>
           <a:prstGeom prst="rect">
             <a:avLst/>
@@ -22379,7 +24539,7 @@
                 <a:ea typeface="Trebuchet MS" pitchFamily="34" charset="-122"/>
                 <a:cs typeface="Trebuchet MS" pitchFamily="34" charset="-120"/>
               </a:rPr>
-              <a:t>t</a:t>
+              <a:t>i</a:t>
             </a:r>
             <a:endParaRPr lang="en-US" sz="900" dirty="0"/>
           </a:p>
@@ -22387,14 +24547,14 @@
       </p:sp>
       <p:sp>
         <p:nvSpPr>
-          <p:cNvPr id="53" name="Shape 51"/>
-          <p:cNvSpPr/>
-          <p:nvPr/>
-        </p:nvSpPr>
-        <p:spPr>
-          <a:xfrm>
-            <a:off x="7033565" y="4169664"/>
-            <a:ext cx="676656" cy="475488"/>
+          <p:cNvPr id="56" name="Shape 54"/>
+          <p:cNvSpPr/>
+          <p:nvPr/>
+        </p:nvSpPr>
+        <p:spPr>
+          <a:xfrm>
+            <a:off x="6525491" y="4169664"/>
+            <a:ext cx="603504" cy="475488"/>
           </a:xfrm>
           <a:prstGeom prst="rect">
             <a:avLst>
@@ -22414,14 +24574,14 @@
       </p:sp>
       <p:sp>
         <p:nvSpPr>
-          <p:cNvPr id="54" name="Text 52"/>
-          <p:cNvSpPr/>
-          <p:nvPr/>
-        </p:nvSpPr>
-        <p:spPr>
-          <a:xfrm>
-            <a:off x="7033565" y="4169664"/>
-            <a:ext cx="676656" cy="475488"/>
+          <p:cNvPr id="57" name="Text 55"/>
+          <p:cNvSpPr/>
+          <p:nvPr/>
+        </p:nvSpPr>
+        <p:spPr>
+          <a:xfrm>
+            <a:off x="6525491" y="4169664"/>
+            <a:ext cx="603504" cy="475488"/>
           </a:xfrm>
           <a:prstGeom prst="rect">
             <a:avLst/>
@@ -22445,7 +24605,7 @@
                 <a:ea typeface="Trebuchet MS" pitchFamily="34" charset="-122"/>
                 <a:cs typeface="Trebuchet MS" pitchFamily="34" charset="-120"/>
               </a:rPr>
-              <a:t>i</a:t>
+              <a:t>v</a:t>
             </a:r>
             <a:endParaRPr lang="en-US" sz="900" dirty="0"/>
           </a:p>
@@ -22453,14 +24613,14 @@
       </p:sp>
       <p:sp>
         <p:nvSpPr>
-          <p:cNvPr id="55" name="Shape 53"/>
-          <p:cNvSpPr/>
-          <p:nvPr/>
-        </p:nvSpPr>
-        <p:spPr>
-          <a:xfrm>
-            <a:off x="7759598" y="4169664"/>
-            <a:ext cx="676656" cy="475488"/>
+          <p:cNvPr id="58" name="Shape 56"/>
+          <p:cNvSpPr/>
+          <p:nvPr/>
+        </p:nvSpPr>
+        <p:spPr>
+          <a:xfrm>
+            <a:off x="7178871" y="4169664"/>
+            <a:ext cx="603504" cy="475488"/>
           </a:xfrm>
           <a:prstGeom prst="rect">
             <a:avLst>
@@ -22480,14 +24640,14 @@
       </p:sp>
       <p:sp>
         <p:nvSpPr>
-          <p:cNvPr id="56" name="Text 54"/>
-          <p:cNvSpPr/>
-          <p:nvPr/>
-        </p:nvSpPr>
-        <p:spPr>
-          <a:xfrm>
-            <a:off x="7759598" y="4169664"/>
-            <a:ext cx="676656" cy="475488"/>
+          <p:cNvPr id="59" name="Text 57"/>
+          <p:cNvSpPr/>
+          <p:nvPr/>
+        </p:nvSpPr>
+        <p:spPr>
+          <a:xfrm>
+            <a:off x="7178871" y="4169664"/>
+            <a:ext cx="603504" cy="475488"/>
           </a:xfrm>
           <a:prstGeom prst="rect">
             <a:avLst/>
@@ -22511,7 +24671,73 @@
                 <a:ea typeface="Trebuchet MS" pitchFamily="34" charset="-122"/>
                 <a:cs typeface="Trebuchet MS" pitchFamily="34" charset="-120"/>
               </a:rPr>
-              <a:t>le</a:t>
+              <a:t>e</a:t>
+            </a:r>
+            <a:endParaRPr lang="en-US" sz="900" dirty="0"/>
+          </a:p>
+        </p:txBody>
+      </p:sp>
+      <p:sp>
+        <p:nvSpPr>
+          <p:cNvPr id="60" name="Shape 58"/>
+          <p:cNvSpPr/>
+          <p:nvPr/>
+        </p:nvSpPr>
+        <p:spPr>
+          <a:xfrm>
+            <a:off x="7832252" y="4169664"/>
+            <a:ext cx="603504" cy="475488"/>
+          </a:xfrm>
+          <a:prstGeom prst="rect">
+            <a:avLst>
+              <a:gd name="adj" fmla="val 7692"/>
+            </a:avLst>
+          </a:prstGeom>
+          <a:solidFill>
+            <a:srgbClr val="FFFFFF"/>
+          </a:solidFill>
+          <a:ln w="12700">
+            <a:solidFill>
+              <a:srgbClr val="DB2777"/>
+            </a:solidFill>
+            <a:prstDash val="solid"/>
+          </a:ln>
+        </p:spPr>
+      </p:sp>
+      <p:sp>
+        <p:nvSpPr>
+          <p:cNvPr id="61" name="Text 59"/>
+          <p:cNvSpPr/>
+          <p:nvPr/>
+        </p:nvSpPr>
+        <p:spPr>
+          <a:xfrm>
+            <a:off x="7832252" y="4169664"/>
+            <a:ext cx="603504" cy="475488"/>
+          </a:xfrm>
+          <a:prstGeom prst="rect">
+            <a:avLst/>
+          </a:prstGeom>
+          <a:noFill/>
+          <a:ln/>
+        </p:spPr>
+        <p:txBody>
+          <a:bodyPr wrap="square" lIns="0" tIns="0" rIns="0" bIns="0" rtlCol="0" anchor="ctr"/>
+          <a:lstStyle/>
+          <a:p>
+            <a:pPr algn="ctr" indent="0" marL="0">
+              <a:buNone/>
+            </a:pPr>
+            <a:r>
+              <a:rPr lang="en-US" sz="900" b="1" dirty="0">
+                <a:solidFill>
+                  <a:srgbClr val="9D174D"/>
+                </a:solidFill>
+                <a:latin typeface="Trebuchet MS" pitchFamily="34" charset="0"/>
+                <a:ea typeface="Trebuchet MS" pitchFamily="34" charset="-122"/>
+                <a:cs typeface="Trebuchet MS" pitchFamily="34" charset="-120"/>
+              </a:rPr>
+              <a:t>s</a:t>
             </a:r>
             <a:endParaRPr lang="en-US" sz="900" dirty="0"/>
           </a:p>
@@ -22803,7 +25029,7 @@
                 <a:ea typeface="Calibri" pitchFamily="34" charset="-122"/>
                 <a:cs typeface="Calibri" pitchFamily="34" charset="-120"/>
               </a:rPr>
-              <a:t>Word Labs  •  wordlabs.app  •  Root: 'ject' = to throw or hurl</a:t>
+              <a:t>Word Labs  •  wordlabs.app  •  Root: 'ject' = throw</a:t>
             </a:r>
             <a:endParaRPr lang="en-US" sz="800" dirty="0"/>
           </a:p>
@@ -22942,7 +25168,7 @@
                 <a:ea typeface="Trebuchet MS" pitchFamily="34" charset="-122"/>
                 <a:cs typeface="Trebuchet MS" pitchFamily="34" charset="-120"/>
               </a:rPr>
-              <a:t>dejected</a:t>
+              <a:t>objectionable</a:t>
             </a:r>
             <a:endParaRPr lang="en-US" sz="2800" dirty="0"/>
           </a:p>
@@ -23630,7 +25856,7 @@
                 <a:ea typeface="Calibri" pitchFamily="34" charset="-122"/>
                 <a:cs typeface="Calibri" pitchFamily="34" charset="-120"/>
               </a:rPr>
-              <a:t>Word Labs  •  wordlabs.app  •  Root: 'ject' = to throw or hurl</a:t>
+              <a:t>Word Labs  •  wordlabs.app  •  Root: 'ject' = throw</a:t>
             </a:r>
             <a:endParaRPr lang="en-US" sz="800" dirty="0"/>
           </a:p>
@@ -23769,7 +25995,7 @@
                 <a:ea typeface="Trebuchet MS" pitchFamily="34" charset="-122"/>
                 <a:cs typeface="Trebuchet MS" pitchFamily="34" charset="-120"/>
               </a:rPr>
-              <a:t>dejected</a:t>
+              <a:t>objectionable</a:t>
             </a:r>
             <a:endParaRPr lang="en-US" sz="2800" dirty="0"/>
           </a:p>
@@ -23849,8 +26075,8 @@
         </p:nvSpPr>
         <p:spPr>
           <a:xfrm>
-            <a:off x="2221992" y="2258568"/>
-            <a:ext cx="1828800" cy="292608"/>
+            <a:off x="1989734" y="2258568"/>
+            <a:ext cx="1581912" cy="292608"/>
           </a:xfrm>
           <a:prstGeom prst="rect">
             <a:avLst>
@@ -23883,8 +26109,8 @@
         </p:nvSpPr>
         <p:spPr>
           <a:xfrm>
-            <a:off x="2221992" y="2258568"/>
-            <a:ext cx="1828800" cy="292608"/>
+            <a:off x="1989734" y="2258568"/>
+            <a:ext cx="1581912" cy="292608"/>
           </a:xfrm>
           <a:prstGeom prst="rect">
             <a:avLst/>
@@ -23908,7 +26134,7 @@
                 <a:ea typeface="Trebuchet MS" pitchFamily="34" charset="-122"/>
                 <a:cs typeface="Trebuchet MS" pitchFamily="34" charset="-120"/>
               </a:rPr>
-              <a:t>de</a:t>
+              <a:t>ob</a:t>
             </a:r>
             <a:endParaRPr lang="en-US" sz="1300" dirty="0"/>
           </a:p>
@@ -23922,8 +26148,8 @@
         </p:nvSpPr>
         <p:spPr>
           <a:xfrm>
-            <a:off x="2221992" y="2569464"/>
-            <a:ext cx="1828800" cy="201168"/>
+            <a:off x="1989734" y="2569464"/>
+            <a:ext cx="1581912" cy="201168"/>
           </a:xfrm>
           <a:prstGeom prst="rect">
             <a:avLst/>
@@ -23947,7 +26173,7 @@
                 <a:ea typeface="Calibri" pitchFamily="34" charset="-122"/>
                 <a:cs typeface="Calibri" pitchFamily="34" charset="-120"/>
               </a:rPr>
-              <a:t>down or away</a:t>
+              <a:t>against; in the way of; towards</a:t>
             </a:r>
             <a:endParaRPr lang="en-US" sz="850" dirty="0"/>
           </a:p>
@@ -23961,8 +26187,8 @@
         </p:nvSpPr>
         <p:spPr>
           <a:xfrm>
-            <a:off x="4370832" y="2258568"/>
-            <a:ext cx="1828800" cy="292608"/>
+            <a:off x="3659429" y="2258568"/>
+            <a:ext cx="1581912" cy="292608"/>
           </a:xfrm>
           <a:prstGeom prst="rect">
             <a:avLst>
@@ -23995,8 +26221,8 @@
         </p:nvSpPr>
         <p:spPr>
           <a:xfrm>
-            <a:off x="4370832" y="2258568"/>
-            <a:ext cx="1828800" cy="292608"/>
+            <a:off x="3659429" y="2258568"/>
+            <a:ext cx="1581912" cy="292608"/>
           </a:xfrm>
           <a:prstGeom prst="rect">
             <a:avLst/>
@@ -24034,8 +26260,8 @@
         </p:nvSpPr>
         <p:spPr>
           <a:xfrm>
-            <a:off x="4370832" y="2569464"/>
-            <a:ext cx="1828800" cy="201168"/>
+            <a:off x="3659429" y="2569464"/>
+            <a:ext cx="1581912" cy="201168"/>
           </a:xfrm>
           <a:prstGeom prst="rect">
             <a:avLst/>
@@ -24059,7 +26285,7 @@
                 <a:ea typeface="Calibri" pitchFamily="34" charset="-122"/>
                 <a:cs typeface="Calibri" pitchFamily="34" charset="-120"/>
               </a:rPr>
-              <a:t>to throw</a:t>
+              <a:t>throw</a:t>
             </a:r>
             <a:endParaRPr lang="en-US" sz="850" dirty="0"/>
           </a:p>
@@ -24073,8 +26299,8 @@
         </p:nvSpPr>
         <p:spPr>
           <a:xfrm>
-            <a:off x="6519672" y="2258568"/>
-            <a:ext cx="1828800" cy="292608"/>
+            <a:off x="5329123" y="2258568"/>
+            <a:ext cx="1581912" cy="292608"/>
           </a:xfrm>
           <a:prstGeom prst="rect">
             <a:avLst>
@@ -24107,8 +26333,8 @@
         </p:nvSpPr>
         <p:spPr>
           <a:xfrm>
-            <a:off x="6519672" y="2258568"/>
-            <a:ext cx="1828800" cy="292608"/>
+            <a:off x="5329123" y="2258568"/>
+            <a:ext cx="1581912" cy="292608"/>
           </a:xfrm>
           <a:prstGeom prst="rect">
             <a:avLst/>
@@ -24132,7 +26358,7 @@
                 <a:ea typeface="Trebuchet MS" pitchFamily="34" charset="-122"/>
                 <a:cs typeface="Trebuchet MS" pitchFamily="34" charset="-120"/>
               </a:rPr>
-              <a:t>ed</a:t>
+              <a:t>ion</a:t>
             </a:r>
             <a:endParaRPr lang="en-US" sz="1300" dirty="0"/>
           </a:p>
@@ -24146,8 +26372,8 @@
         </p:nvSpPr>
         <p:spPr>
           <a:xfrm>
-            <a:off x="6519672" y="2569464"/>
-            <a:ext cx="1828800" cy="201168"/>
+            <a:off x="5329123" y="2569464"/>
+            <a:ext cx="1581912" cy="201168"/>
           </a:xfrm>
           <a:prstGeom prst="rect">
             <a:avLst/>
@@ -24171,7 +26397,7 @@
                 <a:ea typeface="Calibri" pitchFamily="34" charset="-122"/>
                 <a:cs typeface="Calibri" pitchFamily="34" charset="-120"/>
               </a:rPr>
-              <a:t>past tense or having a quality</a:t>
+              <a:t>act or result of</a:t>
             </a:r>
             <a:endParaRPr lang="en-US" sz="850" dirty="0"/>
           </a:p>
@@ -24180,6 +26406,118 @@
       <p:sp>
         <p:nvSpPr>
           <p:cNvPr id="25" name="Shape 23"/>
+          <p:cNvSpPr/>
+          <p:nvPr/>
+        </p:nvSpPr>
+        <p:spPr>
+          <a:xfrm>
+            <a:off x="6998818" y="2258568"/>
+            <a:ext cx="1581912" cy="292608"/>
+          </a:xfrm>
+          <a:prstGeom prst="rect">
+            <a:avLst>
+              <a:gd name="adj" fmla="val 25000"/>
+            </a:avLst>
+          </a:prstGeom>
+          <a:solidFill>
+            <a:srgbClr val="FCE7F3"/>
+          </a:solidFill>
+          <a:ln w="19050">
+            <a:solidFill>
+              <a:srgbClr val="DB2777"/>
+            </a:solidFill>
+            <a:prstDash val="solid"/>
+          </a:ln>
+          <a:effectLst>
+            <a:outerShdw sx="100000" sy="100000" kx="0" ky="0" algn="bl" rotWithShape="0" blurRad="101600" dist="38100" dir="8100000">
+              <a:srgbClr val="000000">
+                <a:alpha val="12000"/>
+              </a:srgbClr>
+            </a:outerShdw>
+          </a:effectLst>
+        </p:spPr>
+      </p:sp>
+      <p:sp>
+        <p:nvSpPr>
+          <p:cNvPr id="26" name="Text 24"/>
+          <p:cNvSpPr/>
+          <p:nvPr/>
+        </p:nvSpPr>
+        <p:spPr>
+          <a:xfrm>
+            <a:off x="6998818" y="2258568"/>
+            <a:ext cx="1581912" cy="292608"/>
+          </a:xfrm>
+          <a:prstGeom prst="rect">
+            <a:avLst/>
+          </a:prstGeom>
+          <a:noFill/>
+          <a:ln/>
+        </p:spPr>
+        <p:txBody>
+          <a:bodyPr wrap="square" lIns="0" tIns="0" rIns="0" bIns="0" rtlCol="0" anchor="ctr"/>
+          <a:lstStyle/>
+          <a:p>
+            <a:pPr algn="ctr" indent="0" marL="0">
+              <a:buNone/>
+            </a:pPr>
+            <a:r>
+              <a:rPr lang="en-US" sz="1300" b="1" dirty="0">
+                <a:solidFill>
+                  <a:srgbClr val="9D174D"/>
+                </a:solidFill>
+                <a:latin typeface="Trebuchet MS" pitchFamily="34" charset="0"/>
+                <a:ea typeface="Trebuchet MS" pitchFamily="34" charset="-122"/>
+                <a:cs typeface="Trebuchet MS" pitchFamily="34" charset="-120"/>
+              </a:rPr>
+              <a:t>able</a:t>
+            </a:r>
+            <a:endParaRPr lang="en-US" sz="1300" dirty="0"/>
+          </a:p>
+        </p:txBody>
+      </p:sp>
+      <p:sp>
+        <p:nvSpPr>
+          <p:cNvPr id="27" name="Text 25"/>
+          <p:cNvSpPr/>
+          <p:nvPr/>
+        </p:nvSpPr>
+        <p:spPr>
+          <a:xfrm>
+            <a:off x="6998818" y="2569464"/>
+            <a:ext cx="1581912" cy="201168"/>
+          </a:xfrm>
+          <a:prstGeom prst="rect">
+            <a:avLst/>
+          </a:prstGeom>
+          <a:noFill/>
+          <a:ln/>
+        </p:spPr>
+        <p:txBody>
+          <a:bodyPr wrap="square" lIns="0" tIns="0" rIns="0" bIns="0" rtlCol="0" anchor="t"/>
+          <a:lstStyle/>
+          <a:p>
+            <a:pPr algn="ctr" indent="0" marL="0">
+              <a:buNone/>
+            </a:pPr>
+            <a:r>
+              <a:rPr lang="en-US" sz="850" dirty="0">
+                <a:solidFill>
+                  <a:srgbClr val="475569"/>
+                </a:solidFill>
+                <a:latin typeface="Calibri" pitchFamily="34" charset="0"/>
+                <a:ea typeface="Calibri" pitchFamily="34" charset="-122"/>
+                <a:cs typeface="Calibri" pitchFamily="34" charset="-120"/>
+              </a:rPr>
+              <a:t>able to</a:t>
+            </a:r>
+            <a:endParaRPr lang="en-US" sz="850" dirty="0"/>
+          </a:p>
+        </p:txBody>
+      </p:sp>
+      <p:sp>
+        <p:nvSpPr>
+          <p:cNvPr id="28" name="Shape 26"/>
           <p:cNvSpPr/>
           <p:nvPr/>
         </p:nvSpPr>
@@ -24206,7 +26544,7 @@
       </p:sp>
       <p:sp>
         <p:nvSpPr>
-          <p:cNvPr id="26" name="Text 24"/>
+          <p:cNvPr id="29" name="Text 27"/>
           <p:cNvSpPr/>
           <p:nvPr/>
         </p:nvSpPr>
@@ -24245,7 +26583,7 @@
       </p:sp>
       <p:sp>
         <p:nvSpPr>
-          <p:cNvPr id="27" name="Shape 25"/>
+          <p:cNvPr id="30" name="Shape 28"/>
           <p:cNvSpPr/>
           <p:nvPr/>
         </p:nvSpPr>
@@ -24272,7 +26610,7 @@
       </p:sp>
       <p:sp>
         <p:nvSpPr>
-          <p:cNvPr id="28" name="Text 26"/>
+          <p:cNvPr id="31" name="Text 29"/>
           <p:cNvSpPr/>
           <p:nvPr/>
         </p:nvSpPr>
@@ -24311,7 +26649,7 @@
       </p:sp>
       <p:sp>
         <p:nvSpPr>
-          <p:cNvPr id="29" name="Shape 27"/>
+          <p:cNvPr id="32" name="Shape 30"/>
           <p:cNvSpPr/>
           <p:nvPr/>
         </p:nvSpPr>
@@ -24338,7 +26676,7 @@
       </p:sp>
       <p:sp>
         <p:nvSpPr>
-          <p:cNvPr id="30" name="Text 28"/>
+          <p:cNvPr id="33" name="Text 31"/>
           <p:cNvSpPr/>
           <p:nvPr/>
         </p:nvSpPr>
@@ -24377,7 +26715,7 @@
       </p:sp>
       <p:sp>
         <p:nvSpPr>
-          <p:cNvPr id="31" name="Shape 29"/>
+          <p:cNvPr id="34" name="Shape 32"/>
           <p:cNvSpPr/>
           <p:nvPr/>
         </p:nvSpPr>
@@ -24404,7 +26742,7 @@
       </p:sp>
       <p:sp>
         <p:nvSpPr>
-          <p:cNvPr id="32" name="Text 30"/>
+          <p:cNvPr id="35" name="Text 33"/>
           <p:cNvSpPr/>
           <p:nvPr/>
         </p:nvSpPr>
@@ -24727,7 +27065,7 @@
                 <a:ea typeface="Calibri" pitchFamily="34" charset="-122"/>
                 <a:cs typeface="Calibri" pitchFamily="34" charset="-120"/>
               </a:rPr>
-              <a:t>Word Labs  •  wordlabs.app  •  Root: 'ject' = to throw or hurl</a:t>
+              <a:t>Word Labs  •  wordlabs.app  •  Root: 'ject' = throw</a:t>
             </a:r>
             <a:endParaRPr lang="en-US" sz="800" dirty="0"/>
           </a:p>
@@ -24800,7 +27138,7 @@
                 <a:ea typeface="Trebuchet MS" pitchFamily="34" charset="-122"/>
                 <a:cs typeface="Trebuchet MS" pitchFamily="34" charset="-120"/>
               </a:rPr>
-              <a:t>We are learning that the root 'ject' means 'to throw or hurl'.</a:t>
+              <a:t>We are learning that the root 'ject' means 'throw'.</a:t>
             </a:r>
             <a:endParaRPr lang="en-US" sz="2000" dirty="0"/>
           </a:p>
@@ -25446,7 +27784,7 @@
                 <a:ea typeface="Calibri" pitchFamily="34" charset="-122"/>
                 <a:cs typeface="Calibri" pitchFamily="34" charset="-120"/>
               </a:rPr>
-              <a:t>Word Labs  •  wordlabs.app  •  Root: 'ject' = to throw or hurl</a:t>
+              <a:t>Word Labs  •  wordlabs.app  •  Root: 'ject' = throw</a:t>
             </a:r>
             <a:endParaRPr lang="en-US" sz="800" dirty="0"/>
           </a:p>
@@ -25585,7 +27923,7 @@
                 <a:ea typeface="Trebuchet MS" pitchFamily="34" charset="-122"/>
                 <a:cs typeface="Trebuchet MS" pitchFamily="34" charset="-120"/>
               </a:rPr>
-              <a:t>dejected</a:t>
+              <a:t>objectionable</a:t>
             </a:r>
             <a:endParaRPr lang="en-US" sz="2800" dirty="0"/>
           </a:p>
@@ -25665,8 +28003,8 @@
         </p:nvSpPr>
         <p:spPr>
           <a:xfrm>
-            <a:off x="2221992" y="2258568"/>
-            <a:ext cx="1828800" cy="292608"/>
+            <a:off x="1989734" y="2258568"/>
+            <a:ext cx="1581912" cy="292608"/>
           </a:xfrm>
           <a:prstGeom prst="rect">
             <a:avLst>
@@ -25699,8 +28037,8 @@
         </p:nvSpPr>
         <p:spPr>
           <a:xfrm>
-            <a:off x="2221992" y="2258568"/>
-            <a:ext cx="1828800" cy="292608"/>
+            <a:off x="1989734" y="2258568"/>
+            <a:ext cx="1581912" cy="292608"/>
           </a:xfrm>
           <a:prstGeom prst="rect">
             <a:avLst/>
@@ -25724,7 +28062,7 @@
                 <a:ea typeface="Trebuchet MS" pitchFamily="34" charset="-122"/>
                 <a:cs typeface="Trebuchet MS" pitchFamily="34" charset="-120"/>
               </a:rPr>
-              <a:t>de</a:t>
+              <a:t>ob</a:t>
             </a:r>
             <a:endParaRPr lang="en-US" sz="1300" dirty="0"/>
           </a:p>
@@ -25738,8 +28076,8 @@
         </p:nvSpPr>
         <p:spPr>
           <a:xfrm>
-            <a:off x="2221992" y="2569464"/>
-            <a:ext cx="1828800" cy="201168"/>
+            <a:off x="1989734" y="2569464"/>
+            <a:ext cx="1581912" cy="201168"/>
           </a:xfrm>
           <a:prstGeom prst="rect">
             <a:avLst/>
@@ -25763,7 +28101,7 @@
                 <a:ea typeface="Calibri" pitchFamily="34" charset="-122"/>
                 <a:cs typeface="Calibri" pitchFamily="34" charset="-120"/>
               </a:rPr>
-              <a:t>down or away</a:t>
+              <a:t>against; in the way of; towards</a:t>
             </a:r>
             <a:endParaRPr lang="en-US" sz="850" dirty="0"/>
           </a:p>
@@ -25777,8 +28115,8 @@
         </p:nvSpPr>
         <p:spPr>
           <a:xfrm>
-            <a:off x="4370832" y="2258568"/>
-            <a:ext cx="1828800" cy="292608"/>
+            <a:off x="3659429" y="2258568"/>
+            <a:ext cx="1581912" cy="292608"/>
           </a:xfrm>
           <a:prstGeom prst="rect">
             <a:avLst>
@@ -25811,8 +28149,8 @@
         </p:nvSpPr>
         <p:spPr>
           <a:xfrm>
-            <a:off x="4370832" y="2258568"/>
-            <a:ext cx="1828800" cy="292608"/>
+            <a:off x="3659429" y="2258568"/>
+            <a:ext cx="1581912" cy="292608"/>
           </a:xfrm>
           <a:prstGeom prst="rect">
             <a:avLst/>
@@ -25850,8 +28188,8 @@
         </p:nvSpPr>
         <p:spPr>
           <a:xfrm>
-            <a:off x="4370832" y="2569464"/>
-            <a:ext cx="1828800" cy="201168"/>
+            <a:off x="3659429" y="2569464"/>
+            <a:ext cx="1581912" cy="201168"/>
           </a:xfrm>
           <a:prstGeom prst="rect">
             <a:avLst/>
@@ -25875,7 +28213,7 @@
                 <a:ea typeface="Calibri" pitchFamily="34" charset="-122"/>
                 <a:cs typeface="Calibri" pitchFamily="34" charset="-120"/>
               </a:rPr>
-              <a:t>to throw</a:t>
+              <a:t>throw</a:t>
             </a:r>
             <a:endParaRPr lang="en-US" sz="850" dirty="0"/>
           </a:p>
@@ -25889,8 +28227,8 @@
         </p:nvSpPr>
         <p:spPr>
           <a:xfrm>
-            <a:off x="6519672" y="2258568"/>
-            <a:ext cx="1828800" cy="292608"/>
+            <a:off x="5329123" y="2258568"/>
+            <a:ext cx="1581912" cy="292608"/>
           </a:xfrm>
           <a:prstGeom prst="rect">
             <a:avLst>
@@ -25923,8 +28261,8 @@
         </p:nvSpPr>
         <p:spPr>
           <a:xfrm>
-            <a:off x="6519672" y="2258568"/>
-            <a:ext cx="1828800" cy="292608"/>
+            <a:off x="5329123" y="2258568"/>
+            <a:ext cx="1581912" cy="292608"/>
           </a:xfrm>
           <a:prstGeom prst="rect">
             <a:avLst/>
@@ -25948,7 +28286,7 @@
                 <a:ea typeface="Trebuchet MS" pitchFamily="34" charset="-122"/>
                 <a:cs typeface="Trebuchet MS" pitchFamily="34" charset="-120"/>
               </a:rPr>
-              <a:t>ed</a:t>
+              <a:t>ion</a:t>
             </a:r>
             <a:endParaRPr lang="en-US" sz="1300" dirty="0"/>
           </a:p>
@@ -25962,8 +28300,8 @@
         </p:nvSpPr>
         <p:spPr>
           <a:xfrm>
-            <a:off x="6519672" y="2569464"/>
-            <a:ext cx="1828800" cy="201168"/>
+            <a:off x="5329123" y="2569464"/>
+            <a:ext cx="1581912" cy="201168"/>
           </a:xfrm>
           <a:prstGeom prst="rect">
             <a:avLst/>
@@ -25987,7 +28325,7 @@
                 <a:ea typeface="Calibri" pitchFamily="34" charset="-122"/>
                 <a:cs typeface="Calibri" pitchFamily="34" charset="-120"/>
               </a:rPr>
-              <a:t>past tense or having a quality</a:t>
+              <a:t>act or result of</a:t>
             </a:r>
             <a:endParaRPr lang="en-US" sz="850" dirty="0"/>
           </a:p>
@@ -25996,6 +28334,118 @@
       <p:sp>
         <p:nvSpPr>
           <p:cNvPr id="25" name="Shape 23"/>
+          <p:cNvSpPr/>
+          <p:nvPr/>
+        </p:nvSpPr>
+        <p:spPr>
+          <a:xfrm>
+            <a:off x="6998818" y="2258568"/>
+            <a:ext cx="1581912" cy="292608"/>
+          </a:xfrm>
+          <a:prstGeom prst="rect">
+            <a:avLst>
+              <a:gd name="adj" fmla="val 25000"/>
+            </a:avLst>
+          </a:prstGeom>
+          <a:solidFill>
+            <a:srgbClr val="FCE7F3"/>
+          </a:solidFill>
+          <a:ln w="19050">
+            <a:solidFill>
+              <a:srgbClr val="DB2777"/>
+            </a:solidFill>
+            <a:prstDash val="solid"/>
+          </a:ln>
+          <a:effectLst>
+            <a:outerShdw sx="100000" sy="100000" kx="0" ky="0" algn="bl" rotWithShape="0" blurRad="101600" dist="38100" dir="8100000">
+              <a:srgbClr val="000000">
+                <a:alpha val="12000"/>
+              </a:srgbClr>
+            </a:outerShdw>
+          </a:effectLst>
+        </p:spPr>
+      </p:sp>
+      <p:sp>
+        <p:nvSpPr>
+          <p:cNvPr id="26" name="Text 24"/>
+          <p:cNvSpPr/>
+          <p:nvPr/>
+        </p:nvSpPr>
+        <p:spPr>
+          <a:xfrm>
+            <a:off x="6998818" y="2258568"/>
+            <a:ext cx="1581912" cy="292608"/>
+          </a:xfrm>
+          <a:prstGeom prst="rect">
+            <a:avLst/>
+          </a:prstGeom>
+          <a:noFill/>
+          <a:ln/>
+        </p:spPr>
+        <p:txBody>
+          <a:bodyPr wrap="square" lIns="0" tIns="0" rIns="0" bIns="0" rtlCol="0" anchor="ctr"/>
+          <a:lstStyle/>
+          <a:p>
+            <a:pPr algn="ctr" indent="0" marL="0">
+              <a:buNone/>
+            </a:pPr>
+            <a:r>
+              <a:rPr lang="en-US" sz="1300" b="1" dirty="0">
+                <a:solidFill>
+                  <a:srgbClr val="9D174D"/>
+                </a:solidFill>
+                <a:latin typeface="Trebuchet MS" pitchFamily="34" charset="0"/>
+                <a:ea typeface="Trebuchet MS" pitchFamily="34" charset="-122"/>
+                <a:cs typeface="Trebuchet MS" pitchFamily="34" charset="-120"/>
+              </a:rPr>
+              <a:t>able</a:t>
+            </a:r>
+            <a:endParaRPr lang="en-US" sz="1300" dirty="0"/>
+          </a:p>
+        </p:txBody>
+      </p:sp>
+      <p:sp>
+        <p:nvSpPr>
+          <p:cNvPr id="27" name="Text 25"/>
+          <p:cNvSpPr/>
+          <p:nvPr/>
+        </p:nvSpPr>
+        <p:spPr>
+          <a:xfrm>
+            <a:off x="6998818" y="2569464"/>
+            <a:ext cx="1581912" cy="201168"/>
+          </a:xfrm>
+          <a:prstGeom prst="rect">
+            <a:avLst/>
+          </a:prstGeom>
+          <a:noFill/>
+          <a:ln/>
+        </p:spPr>
+        <p:txBody>
+          <a:bodyPr wrap="square" lIns="0" tIns="0" rIns="0" bIns="0" rtlCol="0" anchor="t"/>
+          <a:lstStyle/>
+          <a:p>
+            <a:pPr algn="ctr" indent="0" marL="0">
+              <a:buNone/>
+            </a:pPr>
+            <a:r>
+              <a:rPr lang="en-US" sz="850" dirty="0">
+                <a:solidFill>
+                  <a:srgbClr val="475569"/>
+                </a:solidFill>
+                <a:latin typeface="Calibri" pitchFamily="34" charset="0"/>
+                <a:ea typeface="Calibri" pitchFamily="34" charset="-122"/>
+                <a:cs typeface="Calibri" pitchFamily="34" charset="-120"/>
+              </a:rPr>
+              <a:t>able to</a:t>
+            </a:r>
+            <a:endParaRPr lang="en-US" sz="850" dirty="0"/>
+          </a:p>
+        </p:txBody>
+      </p:sp>
+      <p:sp>
+        <p:nvSpPr>
+          <p:cNvPr id="28" name="Shape 26"/>
           <p:cNvSpPr/>
           <p:nvPr/>
         </p:nvSpPr>
@@ -26022,7 +28472,7 @@
       </p:sp>
       <p:sp>
         <p:nvSpPr>
-          <p:cNvPr id="26" name="Text 24"/>
+          <p:cNvPr id="29" name="Text 27"/>
           <p:cNvSpPr/>
           <p:nvPr/>
         </p:nvSpPr>
@@ -26061,7 +28511,7 @@
       </p:sp>
       <p:sp>
         <p:nvSpPr>
-          <p:cNvPr id="27" name="Shape 25"/>
+          <p:cNvPr id="30" name="Shape 28"/>
           <p:cNvSpPr/>
           <p:nvPr/>
         </p:nvSpPr>
@@ -26088,14 +28538,14 @@
       </p:sp>
       <p:sp>
         <p:nvSpPr>
-          <p:cNvPr id="28" name="Shape 26"/>
-          <p:cNvSpPr/>
-          <p:nvPr/>
-        </p:nvSpPr>
-        <p:spPr>
-          <a:xfrm>
-            <a:off x="2313432" y="3364992"/>
-            <a:ext cx="1645920" cy="475488"/>
+          <p:cNvPr id="31" name="Shape 29"/>
+          <p:cNvSpPr/>
+          <p:nvPr/>
+        </p:nvSpPr>
+        <p:spPr>
+          <a:xfrm>
+            <a:off x="1978152" y="3364992"/>
+            <a:ext cx="1225296" cy="475488"/>
           </a:xfrm>
           <a:prstGeom prst="rect">
             <a:avLst>
@@ -26115,14 +28565,14 @@
       </p:sp>
       <p:sp>
         <p:nvSpPr>
-          <p:cNvPr id="29" name="Text 27"/>
-          <p:cNvSpPr/>
-          <p:nvPr/>
-        </p:nvSpPr>
-        <p:spPr>
-          <a:xfrm>
-            <a:off x="2313432" y="3364992"/>
-            <a:ext cx="1645920" cy="475488"/>
+          <p:cNvPr id="32" name="Text 30"/>
+          <p:cNvSpPr/>
+          <p:nvPr/>
+        </p:nvSpPr>
+        <p:spPr>
+          <a:xfrm>
+            <a:off x="1978152" y="3364992"/>
+            <a:ext cx="1225296" cy="475488"/>
           </a:xfrm>
           <a:prstGeom prst="rect">
             <a:avLst/>
@@ -26146,7 +28596,7 @@
                 <a:ea typeface="Trebuchet MS" pitchFamily="34" charset="-122"/>
                 <a:cs typeface="Trebuchet MS" pitchFamily="34" charset="-120"/>
               </a:rPr>
-              <a:t>de</a:t>
+              <a:t>ob</a:t>
             </a:r>
             <a:endParaRPr lang="en-US" sz="1400" dirty="0"/>
           </a:p>
@@ -26154,14 +28604,14 @@
       </p:sp>
       <p:sp>
         <p:nvSpPr>
-          <p:cNvPr id="30" name="Text 28"/>
-          <p:cNvSpPr/>
-          <p:nvPr/>
-        </p:nvSpPr>
-        <p:spPr>
-          <a:xfrm>
-            <a:off x="3959352" y="3364992"/>
-            <a:ext cx="411480" cy="475488"/>
+          <p:cNvPr id="33" name="Text 31"/>
+          <p:cNvSpPr/>
+          <p:nvPr/>
+        </p:nvSpPr>
+        <p:spPr>
+          <a:xfrm>
+            <a:off x="3203448" y="3364992"/>
+            <a:ext cx="76200" cy="475488"/>
           </a:xfrm>
           <a:prstGeom prst="rect">
             <a:avLst/>
@@ -26193,14 +28643,14 @@
       </p:sp>
       <p:sp>
         <p:nvSpPr>
-          <p:cNvPr id="31" name="Shape 29"/>
-          <p:cNvSpPr/>
-          <p:nvPr/>
-        </p:nvSpPr>
-        <p:spPr>
-          <a:xfrm>
-            <a:off x="4370832" y="3364992"/>
-            <a:ext cx="1645920" cy="475488"/>
+          <p:cNvPr id="34" name="Shape 32"/>
+          <p:cNvSpPr/>
+          <p:nvPr/>
+        </p:nvSpPr>
+        <p:spPr>
+          <a:xfrm>
+            <a:off x="3279648" y="3364992"/>
+            <a:ext cx="1225296" cy="475488"/>
           </a:xfrm>
           <a:prstGeom prst="rect">
             <a:avLst>
@@ -26220,14 +28670,14 @@
       </p:sp>
       <p:sp>
         <p:nvSpPr>
-          <p:cNvPr id="32" name="Text 30"/>
-          <p:cNvSpPr/>
-          <p:nvPr/>
-        </p:nvSpPr>
-        <p:spPr>
-          <a:xfrm>
-            <a:off x="4370832" y="3364992"/>
-            <a:ext cx="1645920" cy="475488"/>
+          <p:cNvPr id="35" name="Text 33"/>
+          <p:cNvSpPr/>
+          <p:nvPr/>
+        </p:nvSpPr>
+        <p:spPr>
+          <a:xfrm>
+            <a:off x="3279648" y="3364992"/>
+            <a:ext cx="1225296" cy="475488"/>
           </a:xfrm>
           <a:prstGeom prst="rect">
             <a:avLst/>
@@ -26259,14 +28709,14 @@
       </p:sp>
       <p:sp>
         <p:nvSpPr>
-          <p:cNvPr id="33" name="Text 31"/>
-          <p:cNvSpPr/>
-          <p:nvPr/>
-        </p:nvSpPr>
-        <p:spPr>
-          <a:xfrm>
-            <a:off x="6016752" y="3364992"/>
-            <a:ext cx="411480" cy="475488"/>
+          <p:cNvPr id="36" name="Text 34"/>
+          <p:cNvSpPr/>
+          <p:nvPr/>
+        </p:nvSpPr>
+        <p:spPr>
+          <a:xfrm>
+            <a:off x="4504944" y="3364992"/>
+            <a:ext cx="76200" cy="475488"/>
           </a:xfrm>
           <a:prstGeom prst="rect">
             <a:avLst/>
@@ -26298,14 +28748,14 @@
       </p:sp>
       <p:sp>
         <p:nvSpPr>
-          <p:cNvPr id="34" name="Shape 32"/>
-          <p:cNvSpPr/>
-          <p:nvPr/>
-        </p:nvSpPr>
-        <p:spPr>
-          <a:xfrm>
-            <a:off x="6428232" y="3364992"/>
-            <a:ext cx="1645920" cy="475488"/>
+          <p:cNvPr id="37" name="Shape 35"/>
+          <p:cNvSpPr/>
+          <p:nvPr/>
+        </p:nvSpPr>
+        <p:spPr>
+          <a:xfrm>
+            <a:off x="4581144" y="3364992"/>
+            <a:ext cx="1225296" cy="475488"/>
           </a:xfrm>
           <a:prstGeom prst="rect">
             <a:avLst>
@@ -26325,14 +28775,14 @@
       </p:sp>
       <p:sp>
         <p:nvSpPr>
-          <p:cNvPr id="35" name="Text 33"/>
-          <p:cNvSpPr/>
-          <p:nvPr/>
-        </p:nvSpPr>
-        <p:spPr>
-          <a:xfrm>
-            <a:off x="6428232" y="3364992"/>
-            <a:ext cx="1645920" cy="475488"/>
+          <p:cNvPr id="38" name="Text 36"/>
+          <p:cNvSpPr/>
+          <p:nvPr/>
+        </p:nvSpPr>
+        <p:spPr>
+          <a:xfrm>
+            <a:off x="4581144" y="3364992"/>
+            <a:ext cx="1225296" cy="475488"/>
           </a:xfrm>
           <a:prstGeom prst="rect">
             <a:avLst/>
@@ -26356,7 +28806,7 @@
                 <a:ea typeface="Trebuchet MS" pitchFamily="34" charset="-122"/>
                 <a:cs typeface="Trebuchet MS" pitchFamily="34" charset="-120"/>
               </a:rPr>
-              <a:t>ted</a:t>
+              <a:t>tion</a:t>
             </a:r>
             <a:endParaRPr lang="en-US" sz="1400" dirty="0"/>
           </a:p>
@@ -26364,7 +28814,217 @@
       </p:sp>
       <p:sp>
         <p:nvSpPr>
-          <p:cNvPr id="36" name="Shape 34"/>
+          <p:cNvPr id="39" name="Text 37"/>
+          <p:cNvSpPr/>
+          <p:nvPr/>
+        </p:nvSpPr>
+        <p:spPr>
+          <a:xfrm>
+            <a:off x="5806440" y="3364992"/>
+            <a:ext cx="76200" cy="475488"/>
+          </a:xfrm>
+          <a:prstGeom prst="rect">
+            <a:avLst/>
+          </a:prstGeom>
+          <a:noFill/>
+          <a:ln/>
+        </p:spPr>
+        <p:txBody>
+          <a:bodyPr wrap="square" lIns="0" tIns="0" rIns="0" bIns="0" rtlCol="0" anchor="ctr"/>
+          <a:lstStyle/>
+          <a:p>
+            <a:pPr algn="ctr" indent="0" marL="0">
+              <a:buNone/>
+            </a:pPr>
+            <a:r>
+              <a:rPr lang="en-US" sz="1600" b="1" dirty="0">
+                <a:solidFill>
+                  <a:srgbClr val="0D9488"/>
+                </a:solidFill>
+                <a:latin typeface="Trebuchet MS" pitchFamily="34" charset="0"/>
+                <a:ea typeface="Trebuchet MS" pitchFamily="34" charset="-122"/>
+                <a:cs typeface="Trebuchet MS" pitchFamily="34" charset="-120"/>
+              </a:rPr>
+              <a:t>·</a:t>
+            </a:r>
+            <a:endParaRPr lang="en-US" sz="1600" dirty="0"/>
+          </a:p>
+        </p:txBody>
+      </p:sp>
+      <p:sp>
+        <p:nvSpPr>
+          <p:cNvPr id="40" name="Shape 38"/>
+          <p:cNvSpPr/>
+          <p:nvPr/>
+        </p:nvSpPr>
+        <p:spPr>
+          <a:xfrm>
+            <a:off x="5882640" y="3364992"/>
+            <a:ext cx="1225296" cy="475488"/>
+          </a:xfrm>
+          <a:prstGeom prst="rect">
+            <a:avLst>
+              <a:gd name="adj" fmla="val 9615"/>
+            </a:avLst>
+          </a:prstGeom>
+          <a:solidFill>
+            <a:srgbClr val="FFFFFF"/>
+          </a:solidFill>
+          <a:ln w="12700">
+            <a:solidFill>
+              <a:srgbClr val="0D9488"/>
+            </a:solidFill>
+            <a:prstDash val="solid"/>
+          </a:ln>
+        </p:spPr>
+      </p:sp>
+      <p:sp>
+        <p:nvSpPr>
+          <p:cNvPr id="41" name="Text 39"/>
+          <p:cNvSpPr/>
+          <p:nvPr/>
+        </p:nvSpPr>
+        <p:spPr>
+          <a:xfrm>
+            <a:off x="5882640" y="3364992"/>
+            <a:ext cx="1225296" cy="475488"/>
+          </a:xfrm>
+          <a:prstGeom prst="rect">
+            <a:avLst/>
+          </a:prstGeom>
+          <a:noFill/>
+          <a:ln/>
+        </p:spPr>
+        <p:txBody>
+          <a:bodyPr wrap="square" lIns="0" tIns="0" rIns="0" bIns="0" rtlCol="0" anchor="ctr"/>
+          <a:lstStyle/>
+          <a:p>
+            <a:pPr algn="ctr" indent="0" marL="0">
+              <a:buNone/>
+            </a:pPr>
+            <a:r>
+              <a:rPr lang="en-US" sz="1400" b="1" dirty="0">
+                <a:solidFill>
+                  <a:srgbClr val="0D9488"/>
+                </a:solidFill>
+                <a:latin typeface="Trebuchet MS" pitchFamily="34" charset="0"/>
+                <a:ea typeface="Trebuchet MS" pitchFamily="34" charset="-122"/>
+                <a:cs typeface="Trebuchet MS" pitchFamily="34" charset="-120"/>
+              </a:rPr>
+              <a:t>a</a:t>
+            </a:r>
+            <a:endParaRPr lang="en-US" sz="1400" dirty="0"/>
+          </a:p>
+        </p:txBody>
+      </p:sp>
+      <p:sp>
+        <p:nvSpPr>
+          <p:cNvPr id="42" name="Text 40"/>
+          <p:cNvSpPr/>
+          <p:nvPr/>
+        </p:nvSpPr>
+        <p:spPr>
+          <a:xfrm>
+            <a:off x="7107936" y="3364992"/>
+            <a:ext cx="76200" cy="475488"/>
+          </a:xfrm>
+          <a:prstGeom prst="rect">
+            <a:avLst/>
+          </a:prstGeom>
+          <a:noFill/>
+          <a:ln/>
+        </p:spPr>
+        <p:txBody>
+          <a:bodyPr wrap="square" lIns="0" tIns="0" rIns="0" bIns="0" rtlCol="0" anchor="ctr"/>
+          <a:lstStyle/>
+          <a:p>
+            <a:pPr algn="ctr" indent="0" marL="0">
+              <a:buNone/>
+            </a:pPr>
+            <a:r>
+              <a:rPr lang="en-US" sz="1600" b="1" dirty="0">
+                <a:solidFill>
+                  <a:srgbClr val="0D9488"/>
+                </a:solidFill>
+                <a:latin typeface="Trebuchet MS" pitchFamily="34" charset="0"/>
+                <a:ea typeface="Trebuchet MS" pitchFamily="34" charset="-122"/>
+                <a:cs typeface="Trebuchet MS" pitchFamily="34" charset="-120"/>
+              </a:rPr>
+              <a:t>·</a:t>
+            </a:r>
+            <a:endParaRPr lang="en-US" sz="1600" dirty="0"/>
+          </a:p>
+        </p:txBody>
+      </p:sp>
+      <p:sp>
+        <p:nvSpPr>
+          <p:cNvPr id="43" name="Shape 41"/>
+          <p:cNvSpPr/>
+          <p:nvPr/>
+        </p:nvSpPr>
+        <p:spPr>
+          <a:xfrm>
+            <a:off x="7184136" y="3364992"/>
+            <a:ext cx="1225296" cy="475488"/>
+          </a:xfrm>
+          <a:prstGeom prst="rect">
+            <a:avLst>
+              <a:gd name="adj" fmla="val 9615"/>
+            </a:avLst>
+          </a:prstGeom>
+          <a:solidFill>
+            <a:srgbClr val="FFFFFF"/>
+          </a:solidFill>
+          <a:ln w="12700">
+            <a:solidFill>
+              <a:srgbClr val="0D9488"/>
+            </a:solidFill>
+            <a:prstDash val="solid"/>
+          </a:ln>
+        </p:spPr>
+      </p:sp>
+      <p:sp>
+        <p:nvSpPr>
+          <p:cNvPr id="44" name="Text 42"/>
+          <p:cNvSpPr/>
+          <p:nvPr/>
+        </p:nvSpPr>
+        <p:spPr>
+          <a:xfrm>
+            <a:off x="7184136" y="3364992"/>
+            <a:ext cx="1225296" cy="475488"/>
+          </a:xfrm>
+          <a:prstGeom prst="rect">
+            <a:avLst/>
+          </a:prstGeom>
+          <a:noFill/>
+          <a:ln/>
+        </p:spPr>
+        <p:txBody>
+          <a:bodyPr wrap="square" lIns="0" tIns="0" rIns="0" bIns="0" rtlCol="0" anchor="ctr"/>
+          <a:lstStyle/>
+          <a:p>
+            <a:pPr algn="ctr" indent="0" marL="0">
+              <a:buNone/>
+            </a:pPr>
+            <a:r>
+              <a:rPr lang="en-US" sz="1400" b="1" dirty="0">
+                <a:solidFill>
+                  <a:srgbClr val="0D9488"/>
+                </a:solidFill>
+                <a:latin typeface="Trebuchet MS" pitchFamily="34" charset="0"/>
+                <a:ea typeface="Trebuchet MS" pitchFamily="34" charset="-122"/>
+                <a:cs typeface="Trebuchet MS" pitchFamily="34" charset="-120"/>
+              </a:rPr>
+              <a:t>ble</a:t>
+            </a:r>
+            <a:endParaRPr lang="en-US" sz="1400" dirty="0"/>
+          </a:p>
+        </p:txBody>
+      </p:sp>
+      <p:sp>
+        <p:nvSpPr>
+          <p:cNvPr id="45" name="Shape 43"/>
           <p:cNvSpPr/>
           <p:nvPr/>
         </p:nvSpPr>
@@ -26391,7 +29051,7 @@
       </p:sp>
       <p:sp>
         <p:nvSpPr>
-          <p:cNvPr id="37" name="Text 35"/>
+          <p:cNvPr id="46" name="Text 44"/>
           <p:cNvSpPr/>
           <p:nvPr/>
         </p:nvSpPr>
@@ -26430,7 +29090,7 @@
       </p:sp>
       <p:sp>
         <p:nvSpPr>
-          <p:cNvPr id="38" name="Shape 36"/>
+          <p:cNvPr id="47" name="Shape 45"/>
           <p:cNvSpPr/>
           <p:nvPr/>
         </p:nvSpPr>
@@ -26457,7 +29117,7 @@
       </p:sp>
       <p:sp>
         <p:nvSpPr>
-          <p:cNvPr id="39" name="Text 37"/>
+          <p:cNvPr id="48" name="Text 46"/>
           <p:cNvSpPr/>
           <p:nvPr/>
         </p:nvSpPr>
@@ -26780,7 +29440,7 @@
                 <a:ea typeface="Calibri" pitchFamily="34" charset="-122"/>
                 <a:cs typeface="Calibri" pitchFamily="34" charset="-120"/>
               </a:rPr>
-              <a:t>Word Labs  •  wordlabs.app  •  Root: 'ject' = to throw or hurl</a:t>
+              <a:t>Word Labs  •  wordlabs.app  •  Root: 'ject' = throw</a:t>
             </a:r>
             <a:endParaRPr lang="en-US" sz="800" dirty="0"/>
           </a:p>
@@ -26919,7 +29579,7 @@
                 <a:ea typeface="Trebuchet MS" pitchFamily="34" charset="-122"/>
                 <a:cs typeface="Trebuchet MS" pitchFamily="34" charset="-120"/>
               </a:rPr>
-              <a:t>dejected</a:t>
+              <a:t>objectionable</a:t>
             </a:r>
             <a:endParaRPr lang="en-US" sz="2800" dirty="0"/>
           </a:p>
@@ -26999,8 +29659,8 @@
         </p:nvSpPr>
         <p:spPr>
           <a:xfrm>
-            <a:off x="2221992" y="2258568"/>
-            <a:ext cx="1828800" cy="292608"/>
+            <a:off x="1989734" y="2258568"/>
+            <a:ext cx="1581912" cy="292608"/>
           </a:xfrm>
           <a:prstGeom prst="rect">
             <a:avLst>
@@ -27033,8 +29693,8 @@
         </p:nvSpPr>
         <p:spPr>
           <a:xfrm>
-            <a:off x="2221992" y="2258568"/>
-            <a:ext cx="1828800" cy="292608"/>
+            <a:off x="1989734" y="2258568"/>
+            <a:ext cx="1581912" cy="292608"/>
           </a:xfrm>
           <a:prstGeom prst="rect">
             <a:avLst/>
@@ -27058,7 +29718,7 @@
                 <a:ea typeface="Trebuchet MS" pitchFamily="34" charset="-122"/>
                 <a:cs typeface="Trebuchet MS" pitchFamily="34" charset="-120"/>
               </a:rPr>
-              <a:t>de</a:t>
+              <a:t>ob</a:t>
             </a:r>
             <a:endParaRPr lang="en-US" sz="1300" dirty="0"/>
           </a:p>
@@ -27072,8 +29732,8 @@
         </p:nvSpPr>
         <p:spPr>
           <a:xfrm>
-            <a:off x="2221992" y="2569464"/>
-            <a:ext cx="1828800" cy="201168"/>
+            <a:off x="1989734" y="2569464"/>
+            <a:ext cx="1581912" cy="201168"/>
           </a:xfrm>
           <a:prstGeom prst="rect">
             <a:avLst/>
@@ -27097,7 +29757,7 @@
                 <a:ea typeface="Calibri" pitchFamily="34" charset="-122"/>
                 <a:cs typeface="Calibri" pitchFamily="34" charset="-120"/>
               </a:rPr>
-              <a:t>down or away</a:t>
+              <a:t>against; in the way of; towards</a:t>
             </a:r>
             <a:endParaRPr lang="en-US" sz="850" dirty="0"/>
           </a:p>
@@ -27111,8 +29771,8 @@
         </p:nvSpPr>
         <p:spPr>
           <a:xfrm>
-            <a:off x="4370832" y="2258568"/>
-            <a:ext cx="1828800" cy="292608"/>
+            <a:off x="3659429" y="2258568"/>
+            <a:ext cx="1581912" cy="292608"/>
           </a:xfrm>
           <a:prstGeom prst="rect">
             <a:avLst>
@@ -27145,8 +29805,8 @@
         </p:nvSpPr>
         <p:spPr>
           <a:xfrm>
-            <a:off x="4370832" y="2258568"/>
-            <a:ext cx="1828800" cy="292608"/>
+            <a:off x="3659429" y="2258568"/>
+            <a:ext cx="1581912" cy="292608"/>
           </a:xfrm>
           <a:prstGeom prst="rect">
             <a:avLst/>
@@ -27184,8 +29844,8 @@
         </p:nvSpPr>
         <p:spPr>
           <a:xfrm>
-            <a:off x="4370832" y="2569464"/>
-            <a:ext cx="1828800" cy="201168"/>
+            <a:off x="3659429" y="2569464"/>
+            <a:ext cx="1581912" cy="201168"/>
           </a:xfrm>
           <a:prstGeom prst="rect">
             <a:avLst/>
@@ -27209,7 +29869,7 @@
                 <a:ea typeface="Calibri" pitchFamily="34" charset="-122"/>
                 <a:cs typeface="Calibri" pitchFamily="34" charset="-120"/>
               </a:rPr>
-              <a:t>to throw</a:t>
+              <a:t>throw</a:t>
             </a:r>
             <a:endParaRPr lang="en-US" sz="850" dirty="0"/>
           </a:p>
@@ -27223,8 +29883,8 @@
         </p:nvSpPr>
         <p:spPr>
           <a:xfrm>
-            <a:off x="6519672" y="2258568"/>
-            <a:ext cx="1828800" cy="292608"/>
+            <a:off x="5329123" y="2258568"/>
+            <a:ext cx="1581912" cy="292608"/>
           </a:xfrm>
           <a:prstGeom prst="rect">
             <a:avLst>
@@ -27257,8 +29917,8 @@
         </p:nvSpPr>
         <p:spPr>
           <a:xfrm>
-            <a:off x="6519672" y="2258568"/>
-            <a:ext cx="1828800" cy="292608"/>
+            <a:off x="5329123" y="2258568"/>
+            <a:ext cx="1581912" cy="292608"/>
           </a:xfrm>
           <a:prstGeom prst="rect">
             <a:avLst/>
@@ -27282,7 +29942,7 @@
                 <a:ea typeface="Trebuchet MS" pitchFamily="34" charset="-122"/>
                 <a:cs typeface="Trebuchet MS" pitchFamily="34" charset="-120"/>
               </a:rPr>
-              <a:t>ed</a:t>
+              <a:t>ion</a:t>
             </a:r>
             <a:endParaRPr lang="en-US" sz="1300" dirty="0"/>
           </a:p>
@@ -27296,8 +29956,8 @@
         </p:nvSpPr>
         <p:spPr>
           <a:xfrm>
-            <a:off x="6519672" y="2569464"/>
-            <a:ext cx="1828800" cy="201168"/>
+            <a:off x="5329123" y="2569464"/>
+            <a:ext cx="1581912" cy="201168"/>
           </a:xfrm>
           <a:prstGeom prst="rect">
             <a:avLst/>
@@ -27321,7 +29981,7 @@
                 <a:ea typeface="Calibri" pitchFamily="34" charset="-122"/>
                 <a:cs typeface="Calibri" pitchFamily="34" charset="-120"/>
               </a:rPr>
-              <a:t>past tense or having a quality</a:t>
+              <a:t>act or result of</a:t>
             </a:r>
             <a:endParaRPr lang="en-US" sz="850" dirty="0"/>
           </a:p>
@@ -27330,6 +29990,118 @@
       <p:sp>
         <p:nvSpPr>
           <p:cNvPr id="25" name="Shape 23"/>
+          <p:cNvSpPr/>
+          <p:nvPr/>
+        </p:nvSpPr>
+        <p:spPr>
+          <a:xfrm>
+            <a:off x="6998818" y="2258568"/>
+            <a:ext cx="1581912" cy="292608"/>
+          </a:xfrm>
+          <a:prstGeom prst="rect">
+            <a:avLst>
+              <a:gd name="adj" fmla="val 25000"/>
+            </a:avLst>
+          </a:prstGeom>
+          <a:solidFill>
+            <a:srgbClr val="FCE7F3"/>
+          </a:solidFill>
+          <a:ln w="19050">
+            <a:solidFill>
+              <a:srgbClr val="DB2777"/>
+            </a:solidFill>
+            <a:prstDash val="solid"/>
+          </a:ln>
+          <a:effectLst>
+            <a:outerShdw sx="100000" sy="100000" kx="0" ky="0" algn="bl" rotWithShape="0" blurRad="101600" dist="38100" dir="8100000">
+              <a:srgbClr val="000000">
+                <a:alpha val="12000"/>
+              </a:srgbClr>
+            </a:outerShdw>
+          </a:effectLst>
+        </p:spPr>
+      </p:sp>
+      <p:sp>
+        <p:nvSpPr>
+          <p:cNvPr id="26" name="Text 24"/>
+          <p:cNvSpPr/>
+          <p:nvPr/>
+        </p:nvSpPr>
+        <p:spPr>
+          <a:xfrm>
+            <a:off x="6998818" y="2258568"/>
+            <a:ext cx="1581912" cy="292608"/>
+          </a:xfrm>
+          <a:prstGeom prst="rect">
+            <a:avLst/>
+          </a:prstGeom>
+          <a:noFill/>
+          <a:ln/>
+        </p:spPr>
+        <p:txBody>
+          <a:bodyPr wrap="square" lIns="0" tIns="0" rIns="0" bIns="0" rtlCol="0" anchor="ctr"/>
+          <a:lstStyle/>
+          <a:p>
+            <a:pPr algn="ctr" indent="0" marL="0">
+              <a:buNone/>
+            </a:pPr>
+            <a:r>
+              <a:rPr lang="en-US" sz="1300" b="1" dirty="0">
+                <a:solidFill>
+                  <a:srgbClr val="9D174D"/>
+                </a:solidFill>
+                <a:latin typeface="Trebuchet MS" pitchFamily="34" charset="0"/>
+                <a:ea typeface="Trebuchet MS" pitchFamily="34" charset="-122"/>
+                <a:cs typeface="Trebuchet MS" pitchFamily="34" charset="-120"/>
+              </a:rPr>
+              <a:t>able</a:t>
+            </a:r>
+            <a:endParaRPr lang="en-US" sz="1300" dirty="0"/>
+          </a:p>
+        </p:txBody>
+      </p:sp>
+      <p:sp>
+        <p:nvSpPr>
+          <p:cNvPr id="27" name="Text 25"/>
+          <p:cNvSpPr/>
+          <p:nvPr/>
+        </p:nvSpPr>
+        <p:spPr>
+          <a:xfrm>
+            <a:off x="6998818" y="2569464"/>
+            <a:ext cx="1581912" cy="201168"/>
+          </a:xfrm>
+          <a:prstGeom prst="rect">
+            <a:avLst/>
+          </a:prstGeom>
+          <a:noFill/>
+          <a:ln/>
+        </p:spPr>
+        <p:txBody>
+          <a:bodyPr wrap="square" lIns="0" tIns="0" rIns="0" bIns="0" rtlCol="0" anchor="t"/>
+          <a:lstStyle/>
+          <a:p>
+            <a:pPr algn="ctr" indent="0" marL="0">
+              <a:buNone/>
+            </a:pPr>
+            <a:r>
+              <a:rPr lang="en-US" sz="850" dirty="0">
+                <a:solidFill>
+                  <a:srgbClr val="475569"/>
+                </a:solidFill>
+                <a:latin typeface="Calibri" pitchFamily="34" charset="0"/>
+                <a:ea typeface="Calibri" pitchFamily="34" charset="-122"/>
+                <a:cs typeface="Calibri" pitchFamily="34" charset="-120"/>
+              </a:rPr>
+              <a:t>able to</a:t>
+            </a:r>
+            <a:endParaRPr lang="en-US" sz="850" dirty="0"/>
+          </a:p>
+        </p:txBody>
+      </p:sp>
+      <p:sp>
+        <p:nvSpPr>
+          <p:cNvPr id="28" name="Shape 26"/>
           <p:cNvSpPr/>
           <p:nvPr/>
         </p:nvSpPr>
@@ -27356,7 +30128,7 @@
       </p:sp>
       <p:sp>
         <p:nvSpPr>
-          <p:cNvPr id="26" name="Text 24"/>
+          <p:cNvPr id="29" name="Text 27"/>
           <p:cNvSpPr/>
           <p:nvPr/>
         </p:nvSpPr>
@@ -27395,7 +30167,7 @@
       </p:sp>
       <p:sp>
         <p:nvSpPr>
-          <p:cNvPr id="27" name="Shape 25"/>
+          <p:cNvPr id="30" name="Shape 28"/>
           <p:cNvSpPr/>
           <p:nvPr/>
         </p:nvSpPr>
@@ -27422,14 +30194,14 @@
       </p:sp>
       <p:sp>
         <p:nvSpPr>
-          <p:cNvPr id="28" name="Shape 26"/>
-          <p:cNvSpPr/>
-          <p:nvPr/>
-        </p:nvSpPr>
-        <p:spPr>
-          <a:xfrm>
-            <a:off x="2313432" y="3364992"/>
-            <a:ext cx="1645920" cy="475488"/>
+          <p:cNvPr id="31" name="Shape 29"/>
+          <p:cNvSpPr/>
+          <p:nvPr/>
+        </p:nvSpPr>
+        <p:spPr>
+          <a:xfrm>
+            <a:off x="1978152" y="3364992"/>
+            <a:ext cx="1225296" cy="475488"/>
           </a:xfrm>
           <a:prstGeom prst="rect">
             <a:avLst>
@@ -27449,14 +30221,14 @@
       </p:sp>
       <p:sp>
         <p:nvSpPr>
-          <p:cNvPr id="29" name="Text 27"/>
-          <p:cNvSpPr/>
-          <p:nvPr/>
-        </p:nvSpPr>
-        <p:spPr>
-          <a:xfrm>
-            <a:off x="2313432" y="3364992"/>
-            <a:ext cx="1645920" cy="475488"/>
+          <p:cNvPr id="32" name="Text 30"/>
+          <p:cNvSpPr/>
+          <p:nvPr/>
+        </p:nvSpPr>
+        <p:spPr>
+          <a:xfrm>
+            <a:off x="1978152" y="3364992"/>
+            <a:ext cx="1225296" cy="475488"/>
           </a:xfrm>
           <a:prstGeom prst="rect">
             <a:avLst/>
@@ -27480,7 +30252,7 @@
                 <a:ea typeface="Trebuchet MS" pitchFamily="34" charset="-122"/>
                 <a:cs typeface="Trebuchet MS" pitchFamily="34" charset="-120"/>
               </a:rPr>
-              <a:t>de</a:t>
+              <a:t>ob</a:t>
             </a:r>
             <a:endParaRPr lang="en-US" sz="1400" dirty="0"/>
           </a:p>
@@ -27488,14 +30260,14 @@
       </p:sp>
       <p:sp>
         <p:nvSpPr>
-          <p:cNvPr id="30" name="Text 28"/>
-          <p:cNvSpPr/>
-          <p:nvPr/>
-        </p:nvSpPr>
-        <p:spPr>
-          <a:xfrm>
-            <a:off x="3959352" y="3364992"/>
-            <a:ext cx="411480" cy="475488"/>
+          <p:cNvPr id="33" name="Text 31"/>
+          <p:cNvSpPr/>
+          <p:nvPr/>
+        </p:nvSpPr>
+        <p:spPr>
+          <a:xfrm>
+            <a:off x="3203448" y="3364992"/>
+            <a:ext cx="76200" cy="475488"/>
           </a:xfrm>
           <a:prstGeom prst="rect">
             <a:avLst/>
@@ -27527,14 +30299,14 @@
       </p:sp>
       <p:sp>
         <p:nvSpPr>
-          <p:cNvPr id="31" name="Shape 29"/>
-          <p:cNvSpPr/>
-          <p:nvPr/>
-        </p:nvSpPr>
-        <p:spPr>
-          <a:xfrm>
-            <a:off x="4370832" y="3364992"/>
-            <a:ext cx="1645920" cy="475488"/>
+          <p:cNvPr id="34" name="Shape 32"/>
+          <p:cNvSpPr/>
+          <p:nvPr/>
+        </p:nvSpPr>
+        <p:spPr>
+          <a:xfrm>
+            <a:off x="3279648" y="3364992"/>
+            <a:ext cx="1225296" cy="475488"/>
           </a:xfrm>
           <a:prstGeom prst="rect">
             <a:avLst>
@@ -27554,14 +30326,14 @@
       </p:sp>
       <p:sp>
         <p:nvSpPr>
-          <p:cNvPr id="32" name="Text 30"/>
-          <p:cNvSpPr/>
-          <p:nvPr/>
-        </p:nvSpPr>
-        <p:spPr>
-          <a:xfrm>
-            <a:off x="4370832" y="3364992"/>
-            <a:ext cx="1645920" cy="475488"/>
+          <p:cNvPr id="35" name="Text 33"/>
+          <p:cNvSpPr/>
+          <p:nvPr/>
+        </p:nvSpPr>
+        <p:spPr>
+          <a:xfrm>
+            <a:off x="3279648" y="3364992"/>
+            <a:ext cx="1225296" cy="475488"/>
           </a:xfrm>
           <a:prstGeom prst="rect">
             <a:avLst/>
@@ -27593,14 +30365,14 @@
       </p:sp>
       <p:sp>
         <p:nvSpPr>
-          <p:cNvPr id="33" name="Text 31"/>
-          <p:cNvSpPr/>
-          <p:nvPr/>
-        </p:nvSpPr>
-        <p:spPr>
-          <a:xfrm>
-            <a:off x="6016752" y="3364992"/>
-            <a:ext cx="411480" cy="475488"/>
+          <p:cNvPr id="36" name="Text 34"/>
+          <p:cNvSpPr/>
+          <p:nvPr/>
+        </p:nvSpPr>
+        <p:spPr>
+          <a:xfrm>
+            <a:off x="4504944" y="3364992"/>
+            <a:ext cx="76200" cy="475488"/>
           </a:xfrm>
           <a:prstGeom prst="rect">
             <a:avLst/>
@@ -27632,14 +30404,14 @@
       </p:sp>
       <p:sp>
         <p:nvSpPr>
-          <p:cNvPr id="34" name="Shape 32"/>
-          <p:cNvSpPr/>
-          <p:nvPr/>
-        </p:nvSpPr>
-        <p:spPr>
-          <a:xfrm>
-            <a:off x="6428232" y="3364992"/>
-            <a:ext cx="1645920" cy="475488"/>
+          <p:cNvPr id="37" name="Shape 35"/>
+          <p:cNvSpPr/>
+          <p:nvPr/>
+        </p:nvSpPr>
+        <p:spPr>
+          <a:xfrm>
+            <a:off x="4581144" y="3364992"/>
+            <a:ext cx="1225296" cy="475488"/>
           </a:xfrm>
           <a:prstGeom prst="rect">
             <a:avLst>
@@ -27659,14 +30431,14 @@
       </p:sp>
       <p:sp>
         <p:nvSpPr>
-          <p:cNvPr id="35" name="Text 33"/>
-          <p:cNvSpPr/>
-          <p:nvPr/>
-        </p:nvSpPr>
-        <p:spPr>
-          <a:xfrm>
-            <a:off x="6428232" y="3364992"/>
-            <a:ext cx="1645920" cy="475488"/>
+          <p:cNvPr id="38" name="Text 36"/>
+          <p:cNvSpPr/>
+          <p:nvPr/>
+        </p:nvSpPr>
+        <p:spPr>
+          <a:xfrm>
+            <a:off x="4581144" y="3364992"/>
+            <a:ext cx="1225296" cy="475488"/>
           </a:xfrm>
           <a:prstGeom prst="rect">
             <a:avLst/>
@@ -27690,7 +30462,7 @@
                 <a:ea typeface="Trebuchet MS" pitchFamily="34" charset="-122"/>
                 <a:cs typeface="Trebuchet MS" pitchFamily="34" charset="-120"/>
               </a:rPr>
-              <a:t>ted</a:t>
+              <a:t>tion</a:t>
             </a:r>
             <a:endParaRPr lang="en-US" sz="1400" dirty="0"/>
           </a:p>
@@ -27698,7 +30470,217 @@
       </p:sp>
       <p:sp>
         <p:nvSpPr>
-          <p:cNvPr id="36" name="Shape 34"/>
+          <p:cNvPr id="39" name="Text 37"/>
+          <p:cNvSpPr/>
+          <p:nvPr/>
+        </p:nvSpPr>
+        <p:spPr>
+          <a:xfrm>
+            <a:off x="5806440" y="3364992"/>
+            <a:ext cx="76200" cy="475488"/>
+          </a:xfrm>
+          <a:prstGeom prst="rect">
+            <a:avLst/>
+          </a:prstGeom>
+          <a:noFill/>
+          <a:ln/>
+        </p:spPr>
+        <p:txBody>
+          <a:bodyPr wrap="square" lIns="0" tIns="0" rIns="0" bIns="0" rtlCol="0" anchor="ctr"/>
+          <a:lstStyle/>
+          <a:p>
+            <a:pPr algn="ctr" indent="0" marL="0">
+              <a:buNone/>
+            </a:pPr>
+            <a:r>
+              <a:rPr lang="en-US" sz="1600" b="1" dirty="0">
+                <a:solidFill>
+                  <a:srgbClr val="0D9488"/>
+                </a:solidFill>
+                <a:latin typeface="Trebuchet MS" pitchFamily="34" charset="0"/>
+                <a:ea typeface="Trebuchet MS" pitchFamily="34" charset="-122"/>
+                <a:cs typeface="Trebuchet MS" pitchFamily="34" charset="-120"/>
+              </a:rPr>
+              <a:t>·</a:t>
+            </a:r>
+            <a:endParaRPr lang="en-US" sz="1600" dirty="0"/>
+          </a:p>
+        </p:txBody>
+      </p:sp>
+      <p:sp>
+        <p:nvSpPr>
+          <p:cNvPr id="40" name="Shape 38"/>
+          <p:cNvSpPr/>
+          <p:nvPr/>
+        </p:nvSpPr>
+        <p:spPr>
+          <a:xfrm>
+            <a:off x="5882640" y="3364992"/>
+            <a:ext cx="1225296" cy="475488"/>
+          </a:xfrm>
+          <a:prstGeom prst="rect">
+            <a:avLst>
+              <a:gd name="adj" fmla="val 9615"/>
+            </a:avLst>
+          </a:prstGeom>
+          <a:solidFill>
+            <a:srgbClr val="FFFFFF"/>
+          </a:solidFill>
+          <a:ln w="12700">
+            <a:solidFill>
+              <a:srgbClr val="0D9488"/>
+            </a:solidFill>
+            <a:prstDash val="solid"/>
+          </a:ln>
+        </p:spPr>
+      </p:sp>
+      <p:sp>
+        <p:nvSpPr>
+          <p:cNvPr id="41" name="Text 39"/>
+          <p:cNvSpPr/>
+          <p:nvPr/>
+        </p:nvSpPr>
+        <p:spPr>
+          <a:xfrm>
+            <a:off x="5882640" y="3364992"/>
+            <a:ext cx="1225296" cy="475488"/>
+          </a:xfrm>
+          <a:prstGeom prst="rect">
+            <a:avLst/>
+          </a:prstGeom>
+          <a:noFill/>
+          <a:ln/>
+        </p:spPr>
+        <p:txBody>
+          <a:bodyPr wrap="square" lIns="0" tIns="0" rIns="0" bIns="0" rtlCol="0" anchor="ctr"/>
+          <a:lstStyle/>
+          <a:p>
+            <a:pPr algn="ctr" indent="0" marL="0">
+              <a:buNone/>
+            </a:pPr>
+            <a:r>
+              <a:rPr lang="en-US" sz="1400" b="1" dirty="0">
+                <a:solidFill>
+                  <a:srgbClr val="0D9488"/>
+                </a:solidFill>
+                <a:latin typeface="Trebuchet MS" pitchFamily="34" charset="0"/>
+                <a:ea typeface="Trebuchet MS" pitchFamily="34" charset="-122"/>
+                <a:cs typeface="Trebuchet MS" pitchFamily="34" charset="-120"/>
+              </a:rPr>
+              <a:t>a</a:t>
+            </a:r>
+            <a:endParaRPr lang="en-US" sz="1400" dirty="0"/>
+          </a:p>
+        </p:txBody>
+      </p:sp>
+      <p:sp>
+        <p:nvSpPr>
+          <p:cNvPr id="42" name="Text 40"/>
+          <p:cNvSpPr/>
+          <p:nvPr/>
+        </p:nvSpPr>
+        <p:spPr>
+          <a:xfrm>
+            <a:off x="7107936" y="3364992"/>
+            <a:ext cx="76200" cy="475488"/>
+          </a:xfrm>
+          <a:prstGeom prst="rect">
+            <a:avLst/>
+          </a:prstGeom>
+          <a:noFill/>
+          <a:ln/>
+        </p:spPr>
+        <p:txBody>
+          <a:bodyPr wrap="square" lIns="0" tIns="0" rIns="0" bIns="0" rtlCol="0" anchor="ctr"/>
+          <a:lstStyle/>
+          <a:p>
+            <a:pPr algn="ctr" indent="0" marL="0">
+              <a:buNone/>
+            </a:pPr>
+            <a:r>
+              <a:rPr lang="en-US" sz="1600" b="1" dirty="0">
+                <a:solidFill>
+                  <a:srgbClr val="0D9488"/>
+                </a:solidFill>
+                <a:latin typeface="Trebuchet MS" pitchFamily="34" charset="0"/>
+                <a:ea typeface="Trebuchet MS" pitchFamily="34" charset="-122"/>
+                <a:cs typeface="Trebuchet MS" pitchFamily="34" charset="-120"/>
+              </a:rPr>
+              <a:t>·</a:t>
+            </a:r>
+            <a:endParaRPr lang="en-US" sz="1600" dirty="0"/>
+          </a:p>
+        </p:txBody>
+      </p:sp>
+      <p:sp>
+        <p:nvSpPr>
+          <p:cNvPr id="43" name="Shape 41"/>
+          <p:cNvSpPr/>
+          <p:nvPr/>
+        </p:nvSpPr>
+        <p:spPr>
+          <a:xfrm>
+            <a:off x="7184136" y="3364992"/>
+            <a:ext cx="1225296" cy="475488"/>
+          </a:xfrm>
+          <a:prstGeom prst="rect">
+            <a:avLst>
+              <a:gd name="adj" fmla="val 9615"/>
+            </a:avLst>
+          </a:prstGeom>
+          <a:solidFill>
+            <a:srgbClr val="FFFFFF"/>
+          </a:solidFill>
+          <a:ln w="12700">
+            <a:solidFill>
+              <a:srgbClr val="0D9488"/>
+            </a:solidFill>
+            <a:prstDash val="solid"/>
+          </a:ln>
+        </p:spPr>
+      </p:sp>
+      <p:sp>
+        <p:nvSpPr>
+          <p:cNvPr id="44" name="Text 42"/>
+          <p:cNvSpPr/>
+          <p:nvPr/>
+        </p:nvSpPr>
+        <p:spPr>
+          <a:xfrm>
+            <a:off x="7184136" y="3364992"/>
+            <a:ext cx="1225296" cy="475488"/>
+          </a:xfrm>
+          <a:prstGeom prst="rect">
+            <a:avLst/>
+          </a:prstGeom>
+          <a:noFill/>
+          <a:ln/>
+        </p:spPr>
+        <p:txBody>
+          <a:bodyPr wrap="square" lIns="0" tIns="0" rIns="0" bIns="0" rtlCol="0" anchor="ctr"/>
+          <a:lstStyle/>
+          <a:p>
+            <a:pPr algn="ctr" indent="0" marL="0">
+              <a:buNone/>
+            </a:pPr>
+            <a:r>
+              <a:rPr lang="en-US" sz="1400" b="1" dirty="0">
+                <a:solidFill>
+                  <a:srgbClr val="0D9488"/>
+                </a:solidFill>
+                <a:latin typeface="Trebuchet MS" pitchFamily="34" charset="0"/>
+                <a:ea typeface="Trebuchet MS" pitchFamily="34" charset="-122"/>
+                <a:cs typeface="Trebuchet MS" pitchFamily="34" charset="-120"/>
+              </a:rPr>
+              <a:t>ble</a:t>
+            </a:r>
+            <a:endParaRPr lang="en-US" sz="1400" dirty="0"/>
+          </a:p>
+        </p:txBody>
+      </p:sp>
+      <p:sp>
+        <p:nvSpPr>
+          <p:cNvPr id="45" name="Shape 43"/>
           <p:cNvSpPr/>
           <p:nvPr/>
         </p:nvSpPr>
@@ -27725,7 +30707,7 @@
       </p:sp>
       <p:sp>
         <p:nvSpPr>
-          <p:cNvPr id="37" name="Text 35"/>
+          <p:cNvPr id="46" name="Text 44"/>
           <p:cNvSpPr/>
           <p:nvPr/>
         </p:nvSpPr>
@@ -27764,7 +30746,7 @@
       </p:sp>
       <p:sp>
         <p:nvSpPr>
-          <p:cNvPr id="38" name="Shape 36"/>
+          <p:cNvPr id="47" name="Shape 45"/>
           <p:cNvSpPr/>
           <p:nvPr/>
         </p:nvSpPr>
@@ -27791,14 +30773,14 @@
       </p:sp>
       <p:sp>
         <p:nvSpPr>
-          <p:cNvPr id="39" name="Shape 37"/>
-          <p:cNvSpPr/>
-          <p:nvPr/>
-        </p:nvSpPr>
-        <p:spPr>
-          <a:xfrm>
-            <a:off x="2023872" y="4169664"/>
-            <a:ext cx="685800" cy="475488"/>
+          <p:cNvPr id="48" name="Shape 46"/>
+          <p:cNvSpPr/>
+          <p:nvPr/>
+        </p:nvSpPr>
+        <p:spPr>
+          <a:xfrm>
+            <a:off x="1952244" y="4169664"/>
+            <a:ext cx="543652" cy="475488"/>
           </a:xfrm>
           <a:prstGeom prst="rect">
             <a:avLst>
@@ -27818,14 +30800,14 @@
       </p:sp>
       <p:sp>
         <p:nvSpPr>
-          <p:cNvPr id="40" name="Text 38"/>
-          <p:cNvSpPr/>
-          <p:nvPr/>
-        </p:nvSpPr>
-        <p:spPr>
-          <a:xfrm>
-            <a:off x="2023872" y="4169664"/>
-            <a:ext cx="685800" cy="475488"/>
+          <p:cNvPr id="49" name="Text 47"/>
+          <p:cNvSpPr/>
+          <p:nvPr/>
+        </p:nvSpPr>
+        <p:spPr>
+          <a:xfrm>
+            <a:off x="1952244" y="4169664"/>
+            <a:ext cx="543652" cy="475488"/>
           </a:xfrm>
           <a:prstGeom prst="rect">
             <a:avLst/>
@@ -27849,7 +30831,7 @@
                 <a:ea typeface="Trebuchet MS" pitchFamily="34" charset="-122"/>
                 <a:cs typeface="Trebuchet MS" pitchFamily="34" charset="-120"/>
               </a:rPr>
-              <a:t>d</a:t>
+              <a:t>o</a:t>
             </a:r>
             <a:endParaRPr lang="en-US" sz="900" dirty="0"/>
           </a:p>
@@ -27857,14 +30839,14 @@
       </p:sp>
       <p:sp>
         <p:nvSpPr>
-          <p:cNvPr id="41" name="Shape 39"/>
-          <p:cNvSpPr/>
-          <p:nvPr/>
-        </p:nvSpPr>
-        <p:spPr>
-          <a:xfrm>
-            <a:off x="2831592" y="4169664"/>
-            <a:ext cx="685800" cy="475488"/>
+          <p:cNvPr id="50" name="Shape 48"/>
+          <p:cNvSpPr/>
+          <p:nvPr/>
+        </p:nvSpPr>
+        <p:spPr>
+          <a:xfrm>
+            <a:off x="2546188" y="4169664"/>
+            <a:ext cx="543652" cy="475488"/>
           </a:xfrm>
           <a:prstGeom prst="rect">
             <a:avLst>
@@ -27884,14 +30866,14 @@
       </p:sp>
       <p:sp>
         <p:nvSpPr>
-          <p:cNvPr id="42" name="Text 40"/>
-          <p:cNvSpPr/>
-          <p:nvPr/>
-        </p:nvSpPr>
-        <p:spPr>
-          <a:xfrm>
-            <a:off x="2831592" y="4169664"/>
-            <a:ext cx="685800" cy="475488"/>
+          <p:cNvPr id="51" name="Text 49"/>
+          <p:cNvSpPr/>
+          <p:nvPr/>
+        </p:nvSpPr>
+        <p:spPr>
+          <a:xfrm>
+            <a:off x="2546188" y="4169664"/>
+            <a:ext cx="543652" cy="475488"/>
           </a:xfrm>
           <a:prstGeom prst="rect">
             <a:avLst/>
@@ -27915,7 +30897,7 @@
                 <a:ea typeface="Trebuchet MS" pitchFamily="34" charset="-122"/>
                 <a:cs typeface="Trebuchet MS" pitchFamily="34" charset="-120"/>
               </a:rPr>
-              <a:t>e</a:t>
+              <a:t>b</a:t>
             </a:r>
             <a:endParaRPr lang="en-US" sz="900" dirty="0"/>
           </a:p>
@@ -27923,14 +30905,14 @@
       </p:sp>
       <p:sp>
         <p:nvSpPr>
-          <p:cNvPr id="43" name="Shape 41"/>
-          <p:cNvSpPr/>
-          <p:nvPr/>
-        </p:nvSpPr>
-        <p:spPr>
-          <a:xfrm>
-            <a:off x="3639312" y="4169664"/>
-            <a:ext cx="685800" cy="475488"/>
+          <p:cNvPr id="52" name="Shape 50"/>
+          <p:cNvSpPr/>
+          <p:nvPr/>
+        </p:nvSpPr>
+        <p:spPr>
+          <a:xfrm>
+            <a:off x="3140133" y="4169664"/>
+            <a:ext cx="543652" cy="475488"/>
           </a:xfrm>
           <a:prstGeom prst="rect">
             <a:avLst>
@@ -27950,14 +30932,14 @@
       </p:sp>
       <p:sp>
         <p:nvSpPr>
-          <p:cNvPr id="44" name="Text 42"/>
-          <p:cNvSpPr/>
-          <p:nvPr/>
-        </p:nvSpPr>
-        <p:spPr>
-          <a:xfrm>
-            <a:off x="3639312" y="4169664"/>
-            <a:ext cx="685800" cy="475488"/>
+          <p:cNvPr id="53" name="Text 51"/>
+          <p:cNvSpPr/>
+          <p:nvPr/>
+        </p:nvSpPr>
+        <p:spPr>
+          <a:xfrm>
+            <a:off x="3140133" y="4169664"/>
+            <a:ext cx="543652" cy="475488"/>
           </a:xfrm>
           <a:prstGeom prst="rect">
             <a:avLst/>
@@ -27989,14 +30971,14 @@
       </p:sp>
       <p:sp>
         <p:nvSpPr>
-          <p:cNvPr id="45" name="Shape 43"/>
-          <p:cNvSpPr/>
-          <p:nvPr/>
-        </p:nvSpPr>
-        <p:spPr>
-          <a:xfrm>
-            <a:off x="4447032" y="4169664"/>
-            <a:ext cx="685800" cy="475488"/>
+          <p:cNvPr id="54" name="Shape 52"/>
+          <p:cNvSpPr/>
+          <p:nvPr/>
+        </p:nvSpPr>
+        <p:spPr>
+          <a:xfrm>
+            <a:off x="3734077" y="4169664"/>
+            <a:ext cx="543652" cy="475488"/>
           </a:xfrm>
           <a:prstGeom prst="rect">
             <a:avLst>
@@ -28016,14 +30998,14 @@
       </p:sp>
       <p:sp>
         <p:nvSpPr>
-          <p:cNvPr id="46" name="Text 44"/>
-          <p:cNvSpPr/>
-          <p:nvPr/>
-        </p:nvSpPr>
-        <p:spPr>
-          <a:xfrm>
-            <a:off x="4447032" y="4169664"/>
-            <a:ext cx="685800" cy="475488"/>
+          <p:cNvPr id="55" name="Text 53"/>
+          <p:cNvSpPr/>
+          <p:nvPr/>
+        </p:nvSpPr>
+        <p:spPr>
+          <a:xfrm>
+            <a:off x="3734077" y="4169664"/>
+            <a:ext cx="543652" cy="475488"/>
           </a:xfrm>
           <a:prstGeom prst="rect">
             <a:avLst/>
@@ -28055,14 +31037,14 @@
       </p:sp>
       <p:sp>
         <p:nvSpPr>
-          <p:cNvPr id="47" name="Shape 45"/>
-          <p:cNvSpPr/>
-          <p:nvPr/>
-        </p:nvSpPr>
-        <p:spPr>
-          <a:xfrm>
-            <a:off x="5254752" y="4169664"/>
-            <a:ext cx="685800" cy="475488"/>
+          <p:cNvPr id="56" name="Shape 54"/>
+          <p:cNvSpPr/>
+          <p:nvPr/>
+        </p:nvSpPr>
+        <p:spPr>
+          <a:xfrm>
+            <a:off x="4328021" y="4169664"/>
+            <a:ext cx="543652" cy="475488"/>
           </a:xfrm>
           <a:prstGeom prst="rect">
             <a:avLst>
@@ -28082,14 +31064,14 @@
       </p:sp>
       <p:sp>
         <p:nvSpPr>
-          <p:cNvPr id="48" name="Text 46"/>
-          <p:cNvSpPr/>
-          <p:nvPr/>
-        </p:nvSpPr>
-        <p:spPr>
-          <a:xfrm>
-            <a:off x="5254752" y="4169664"/>
-            <a:ext cx="685800" cy="475488"/>
+          <p:cNvPr id="57" name="Text 55"/>
+          <p:cNvSpPr/>
+          <p:nvPr/>
+        </p:nvSpPr>
+        <p:spPr>
+          <a:xfrm>
+            <a:off x="4328021" y="4169664"/>
+            <a:ext cx="543652" cy="475488"/>
           </a:xfrm>
           <a:prstGeom prst="rect">
             <a:avLst/>
@@ -28121,14 +31103,14 @@
       </p:sp>
       <p:sp>
         <p:nvSpPr>
-          <p:cNvPr id="49" name="Shape 47"/>
-          <p:cNvSpPr/>
-          <p:nvPr/>
-        </p:nvSpPr>
-        <p:spPr>
-          <a:xfrm>
-            <a:off x="6062472" y="4169664"/>
-            <a:ext cx="685800" cy="475488"/>
+          <p:cNvPr id="58" name="Shape 56"/>
+          <p:cNvSpPr/>
+          <p:nvPr/>
+        </p:nvSpPr>
+        <p:spPr>
+          <a:xfrm>
+            <a:off x="4921966" y="4169664"/>
+            <a:ext cx="543652" cy="475488"/>
           </a:xfrm>
           <a:prstGeom prst="rect">
             <a:avLst>
@@ -28148,14 +31130,14 @@
       </p:sp>
       <p:sp>
         <p:nvSpPr>
-          <p:cNvPr id="50" name="Text 48"/>
-          <p:cNvSpPr/>
-          <p:nvPr/>
-        </p:nvSpPr>
-        <p:spPr>
-          <a:xfrm>
-            <a:off x="6062472" y="4169664"/>
-            <a:ext cx="685800" cy="475488"/>
+          <p:cNvPr id="59" name="Text 57"/>
+          <p:cNvSpPr/>
+          <p:nvPr/>
+        </p:nvSpPr>
+        <p:spPr>
+          <a:xfrm>
+            <a:off x="4921966" y="4169664"/>
+            <a:ext cx="543652" cy="475488"/>
           </a:xfrm>
           <a:prstGeom prst="rect">
             <a:avLst/>
@@ -28179,7 +31161,7 @@
                 <a:ea typeface="Trebuchet MS" pitchFamily="34" charset="-122"/>
                 <a:cs typeface="Trebuchet MS" pitchFamily="34" charset="-120"/>
               </a:rPr>
-              <a:t>t</a:t>
+              <a:t>ti</a:t>
             </a:r>
             <a:endParaRPr lang="en-US" sz="900" dirty="0"/>
           </a:p>
@@ -28187,14 +31169,14 @@
       </p:sp>
       <p:sp>
         <p:nvSpPr>
-          <p:cNvPr id="51" name="Shape 49"/>
-          <p:cNvSpPr/>
-          <p:nvPr/>
-        </p:nvSpPr>
-        <p:spPr>
-          <a:xfrm>
-            <a:off x="6870192" y="4169664"/>
-            <a:ext cx="685800" cy="475488"/>
+          <p:cNvPr id="60" name="Shape 58"/>
+          <p:cNvSpPr/>
+          <p:nvPr/>
+        </p:nvSpPr>
+        <p:spPr>
+          <a:xfrm>
+            <a:off x="5515910" y="4169664"/>
+            <a:ext cx="543652" cy="475488"/>
           </a:xfrm>
           <a:prstGeom prst="rect">
             <a:avLst>
@@ -28214,14 +31196,14 @@
       </p:sp>
       <p:sp>
         <p:nvSpPr>
-          <p:cNvPr id="52" name="Text 50"/>
-          <p:cNvSpPr/>
-          <p:nvPr/>
-        </p:nvSpPr>
-        <p:spPr>
-          <a:xfrm>
-            <a:off x="6870192" y="4169664"/>
-            <a:ext cx="685800" cy="475488"/>
+          <p:cNvPr id="61" name="Text 59"/>
+          <p:cNvSpPr/>
+          <p:nvPr/>
+        </p:nvSpPr>
+        <p:spPr>
+          <a:xfrm>
+            <a:off x="5515910" y="4169664"/>
+            <a:ext cx="543652" cy="475488"/>
           </a:xfrm>
           <a:prstGeom prst="rect">
             <a:avLst/>
@@ -28245,7 +31227,7 @@
                 <a:ea typeface="Trebuchet MS" pitchFamily="34" charset="-122"/>
                 <a:cs typeface="Trebuchet MS" pitchFamily="34" charset="-120"/>
               </a:rPr>
-              <a:t>e</a:t>
+              <a:t>o</a:t>
             </a:r>
             <a:endParaRPr lang="en-US" sz="900" dirty="0"/>
           </a:p>
@@ -28253,14 +31235,14 @@
       </p:sp>
       <p:sp>
         <p:nvSpPr>
-          <p:cNvPr id="53" name="Shape 51"/>
-          <p:cNvSpPr/>
-          <p:nvPr/>
-        </p:nvSpPr>
-        <p:spPr>
-          <a:xfrm>
-            <a:off x="7677912" y="4169664"/>
-            <a:ext cx="685800" cy="475488"/>
+          <p:cNvPr id="62" name="Shape 60"/>
+          <p:cNvSpPr/>
+          <p:nvPr/>
+        </p:nvSpPr>
+        <p:spPr>
+          <a:xfrm>
+            <a:off x="6109855" y="4169664"/>
+            <a:ext cx="543652" cy="475488"/>
           </a:xfrm>
           <a:prstGeom prst="rect">
             <a:avLst>
@@ -28280,14 +31262,14 @@
       </p:sp>
       <p:sp>
         <p:nvSpPr>
-          <p:cNvPr id="54" name="Text 52"/>
-          <p:cNvSpPr/>
-          <p:nvPr/>
-        </p:nvSpPr>
-        <p:spPr>
-          <a:xfrm>
-            <a:off x="7677912" y="4169664"/>
-            <a:ext cx="685800" cy="475488"/>
+          <p:cNvPr id="63" name="Text 61"/>
+          <p:cNvSpPr/>
+          <p:nvPr/>
+        </p:nvSpPr>
+        <p:spPr>
+          <a:xfrm>
+            <a:off x="6109855" y="4169664"/>
+            <a:ext cx="543652" cy="475488"/>
           </a:xfrm>
           <a:prstGeom prst="rect">
             <a:avLst/>
@@ -28311,7 +31293,205 @@
                 <a:ea typeface="Trebuchet MS" pitchFamily="34" charset="-122"/>
                 <a:cs typeface="Trebuchet MS" pitchFamily="34" charset="-120"/>
               </a:rPr>
-              <a:t>d</a:t>
+              <a:t>n</a:t>
+            </a:r>
+            <a:endParaRPr lang="en-US" sz="900" dirty="0"/>
+          </a:p>
+        </p:txBody>
+      </p:sp>
+      <p:sp>
+        <p:nvSpPr>
+          <p:cNvPr id="64" name="Shape 62"/>
+          <p:cNvSpPr/>
+          <p:nvPr/>
+        </p:nvSpPr>
+        <p:spPr>
+          <a:xfrm>
+            <a:off x="6703799" y="4169664"/>
+            <a:ext cx="543652" cy="475488"/>
+          </a:xfrm>
+          <a:prstGeom prst="rect">
+            <a:avLst>
+              <a:gd name="adj" fmla="val 7692"/>
+            </a:avLst>
+          </a:prstGeom>
+          <a:solidFill>
+            <a:srgbClr val="FFFFFF"/>
+          </a:solidFill>
+          <a:ln w="12700">
+            <a:solidFill>
+              <a:srgbClr val="DB2777"/>
+            </a:solidFill>
+            <a:prstDash val="solid"/>
+          </a:ln>
+        </p:spPr>
+      </p:sp>
+      <p:sp>
+        <p:nvSpPr>
+          <p:cNvPr id="65" name="Text 63"/>
+          <p:cNvSpPr/>
+          <p:nvPr/>
+        </p:nvSpPr>
+        <p:spPr>
+          <a:xfrm>
+            <a:off x="6703799" y="4169664"/>
+            <a:ext cx="543652" cy="475488"/>
+          </a:xfrm>
+          <a:prstGeom prst="rect">
+            <a:avLst/>
+          </a:prstGeom>
+          <a:noFill/>
+          <a:ln/>
+        </p:spPr>
+        <p:txBody>
+          <a:bodyPr wrap="square" lIns="0" tIns="0" rIns="0" bIns="0" rtlCol="0" anchor="ctr"/>
+          <a:lstStyle/>
+          <a:p>
+            <a:pPr algn="ctr" indent="0" marL="0">
+              <a:buNone/>
+            </a:pPr>
+            <a:r>
+              <a:rPr lang="en-US" sz="900" b="1" dirty="0">
+                <a:solidFill>
+                  <a:srgbClr val="9D174D"/>
+                </a:solidFill>
+                <a:latin typeface="Trebuchet MS" pitchFamily="34" charset="0"/>
+                <a:ea typeface="Trebuchet MS" pitchFamily="34" charset="-122"/>
+                <a:cs typeface="Trebuchet MS" pitchFamily="34" charset="-120"/>
+              </a:rPr>
+              <a:t>a</a:t>
+            </a:r>
+            <a:endParaRPr lang="en-US" sz="900" dirty="0"/>
+          </a:p>
+        </p:txBody>
+      </p:sp>
+      <p:sp>
+        <p:nvSpPr>
+          <p:cNvPr id="66" name="Shape 64"/>
+          <p:cNvSpPr/>
+          <p:nvPr/>
+        </p:nvSpPr>
+        <p:spPr>
+          <a:xfrm>
+            <a:off x="7297743" y="4169664"/>
+            <a:ext cx="543652" cy="475488"/>
+          </a:xfrm>
+          <a:prstGeom prst="rect">
+            <a:avLst>
+              <a:gd name="adj" fmla="val 7692"/>
+            </a:avLst>
+          </a:prstGeom>
+          <a:solidFill>
+            <a:srgbClr val="FFFFFF"/>
+          </a:solidFill>
+          <a:ln w="12700">
+            <a:solidFill>
+              <a:srgbClr val="DB2777"/>
+            </a:solidFill>
+            <a:prstDash val="solid"/>
+          </a:ln>
+        </p:spPr>
+      </p:sp>
+      <p:sp>
+        <p:nvSpPr>
+          <p:cNvPr id="67" name="Text 65"/>
+          <p:cNvSpPr/>
+          <p:nvPr/>
+        </p:nvSpPr>
+        <p:spPr>
+          <a:xfrm>
+            <a:off x="7297743" y="4169664"/>
+            <a:ext cx="543652" cy="475488"/>
+          </a:xfrm>
+          <a:prstGeom prst="rect">
+            <a:avLst/>
+          </a:prstGeom>
+          <a:noFill/>
+          <a:ln/>
+        </p:spPr>
+        <p:txBody>
+          <a:bodyPr wrap="square" lIns="0" tIns="0" rIns="0" bIns="0" rtlCol="0" anchor="ctr"/>
+          <a:lstStyle/>
+          <a:p>
+            <a:pPr algn="ctr" indent="0" marL="0">
+              <a:buNone/>
+            </a:pPr>
+            <a:r>
+              <a:rPr lang="en-US" sz="900" b="1" dirty="0">
+                <a:solidFill>
+                  <a:srgbClr val="9D174D"/>
+                </a:solidFill>
+                <a:latin typeface="Trebuchet MS" pitchFamily="34" charset="0"/>
+                <a:ea typeface="Trebuchet MS" pitchFamily="34" charset="-122"/>
+                <a:cs typeface="Trebuchet MS" pitchFamily="34" charset="-120"/>
+              </a:rPr>
+              <a:t>b</a:t>
+            </a:r>
+            <a:endParaRPr lang="en-US" sz="900" dirty="0"/>
+          </a:p>
+        </p:txBody>
+      </p:sp>
+      <p:sp>
+        <p:nvSpPr>
+          <p:cNvPr id="68" name="Shape 66"/>
+          <p:cNvSpPr/>
+          <p:nvPr/>
+        </p:nvSpPr>
+        <p:spPr>
+          <a:xfrm>
+            <a:off x="7891688" y="4169664"/>
+            <a:ext cx="543652" cy="475488"/>
+          </a:xfrm>
+          <a:prstGeom prst="rect">
+            <a:avLst>
+              <a:gd name="adj" fmla="val 7692"/>
+            </a:avLst>
+          </a:prstGeom>
+          <a:solidFill>
+            <a:srgbClr val="FFFFFF"/>
+          </a:solidFill>
+          <a:ln w="12700">
+            <a:solidFill>
+              <a:srgbClr val="DB2777"/>
+            </a:solidFill>
+            <a:prstDash val="solid"/>
+          </a:ln>
+        </p:spPr>
+      </p:sp>
+      <p:sp>
+        <p:nvSpPr>
+          <p:cNvPr id="69" name="Text 67"/>
+          <p:cNvSpPr/>
+          <p:nvPr/>
+        </p:nvSpPr>
+        <p:spPr>
+          <a:xfrm>
+            <a:off x="7891688" y="4169664"/>
+            <a:ext cx="543652" cy="475488"/>
+          </a:xfrm>
+          <a:prstGeom prst="rect">
+            <a:avLst/>
+          </a:prstGeom>
+          <a:noFill/>
+          <a:ln/>
+        </p:spPr>
+        <p:txBody>
+          <a:bodyPr wrap="square" lIns="0" tIns="0" rIns="0" bIns="0" rtlCol="0" anchor="ctr"/>
+          <a:lstStyle/>
+          <a:p>
+            <a:pPr algn="ctr" indent="0" marL="0">
+              <a:buNone/>
+            </a:pPr>
+            <a:r>
+              <a:rPr lang="en-US" sz="900" b="1" dirty="0">
+                <a:solidFill>
+                  <a:srgbClr val="9D174D"/>
+                </a:solidFill>
+                <a:latin typeface="Trebuchet MS" pitchFamily="34" charset="0"/>
+                <a:ea typeface="Trebuchet MS" pitchFamily="34" charset="-122"/>
+                <a:cs typeface="Trebuchet MS" pitchFamily="34" charset="-120"/>
+              </a:rPr>
+              <a:t>le</a:t>
             </a:r>
             <a:endParaRPr lang="en-US" sz="900" dirty="0"/>
           </a:p>
@@ -28603,7 +31783,7 @@
                 <a:ea typeface="Calibri" pitchFamily="34" charset="-122"/>
                 <a:cs typeface="Calibri" pitchFamily="34" charset="-120"/>
               </a:rPr>
-              <a:t>Word Labs  •  wordlabs.app  •  Root: 'ject' = to throw or hurl</a:t>
+              <a:t>Word Labs  •  wordlabs.app  •  Root: 'ject' = throw</a:t>
             </a:r>
             <a:endParaRPr lang="en-US" sz="800" dirty="0"/>
           </a:p>
@@ -29430,7 +32610,7 @@
                 <a:ea typeface="Calibri" pitchFamily="34" charset="-122"/>
                 <a:cs typeface="Calibri" pitchFamily="34" charset="-120"/>
               </a:rPr>
-              <a:t>Word Labs  •  wordlabs.app  •  Root: 'ject' = to throw or hurl</a:t>
+              <a:t>Word Labs  •  wordlabs.app  •  Root: 'ject' = throw</a:t>
             </a:r>
             <a:endParaRPr lang="en-US" sz="800" dirty="0"/>
           </a:p>
@@ -29747,7 +32927,7 @@
                 <a:ea typeface="Calibri" pitchFamily="34" charset="-122"/>
                 <a:cs typeface="Calibri" pitchFamily="34" charset="-120"/>
               </a:rPr>
-              <a:t>out</a:t>
+              <a:t>electronic; online</a:t>
             </a:r>
             <a:endParaRPr lang="en-US" sz="850" dirty="0"/>
           </a:p>
@@ -29859,7 +33039,7 @@
                 <a:ea typeface="Calibri" pitchFamily="34" charset="-122"/>
                 <a:cs typeface="Calibri" pitchFamily="34" charset="-120"/>
               </a:rPr>
-              <a:t>to throw</a:t>
+              <a:t>throw</a:t>
             </a:r>
             <a:endParaRPr lang="en-US" sz="850" dirty="0"/>
           </a:p>
@@ -30415,7 +33595,7 @@
                 <a:ea typeface="Calibri" pitchFamily="34" charset="-122"/>
                 <a:cs typeface="Calibri" pitchFamily="34" charset="-120"/>
               </a:rPr>
-              <a:t>Word Labs  •  wordlabs.app  •  Root: 'ject' = to throw or hurl</a:t>
+              <a:t>Word Labs  •  wordlabs.app  •  Root: 'ject' = throw</a:t>
             </a:r>
             <a:endParaRPr lang="en-US" sz="800" dirty="0"/>
           </a:p>
@@ -30732,7 +33912,7 @@
                 <a:ea typeface="Calibri" pitchFamily="34" charset="-122"/>
                 <a:cs typeface="Calibri" pitchFamily="34" charset="-120"/>
               </a:rPr>
-              <a:t>out</a:t>
+              <a:t>electronic; online</a:t>
             </a:r>
             <a:endParaRPr lang="en-US" sz="850" dirty="0"/>
           </a:p>
@@ -30844,7 +34024,7 @@
                 <a:ea typeface="Calibri" pitchFamily="34" charset="-122"/>
                 <a:cs typeface="Calibri" pitchFamily="34" charset="-120"/>
               </a:rPr>
-              <a:t>to throw</a:t>
+              <a:t>throw</a:t>
             </a:r>
             <a:endParaRPr lang="en-US" sz="850" dirty="0"/>
           </a:p>
@@ -31532,7 +34712,7 @@
                 <a:ea typeface="Calibri" pitchFamily="34" charset="-122"/>
                 <a:cs typeface="Calibri" pitchFamily="34" charset="-120"/>
               </a:rPr>
-              <a:t>Word Labs  •  wordlabs.app  •  Root: 'ject' = to throw or hurl</a:t>
+              <a:t>Word Labs  •  wordlabs.app  •  Root: 'ject' = throw</a:t>
             </a:r>
             <a:endParaRPr lang="en-US" sz="800" dirty="0"/>
           </a:p>
@@ -31849,7 +35029,7 @@
                 <a:ea typeface="Calibri" pitchFamily="34" charset="-122"/>
                 <a:cs typeface="Calibri" pitchFamily="34" charset="-120"/>
               </a:rPr>
-              <a:t>out</a:t>
+              <a:t>electronic; online</a:t>
             </a:r>
             <a:endParaRPr lang="en-US" sz="850" dirty="0"/>
           </a:p>
@@ -31961,7 +35141,7 @@
                 <a:ea typeface="Calibri" pitchFamily="34" charset="-122"/>
                 <a:cs typeface="Calibri" pitchFamily="34" charset="-120"/>
               </a:rPr>
-              <a:t>to throw</a:t>
+              <a:t>throw</a:t>
             </a:r>
             <a:endParaRPr lang="en-US" sz="850" dirty="0"/>
           </a:p>
@@ -32940,7 +36120,7 @@
                 <a:ea typeface="Calibri" pitchFamily="34" charset="-122"/>
                 <a:cs typeface="Calibri" pitchFamily="34" charset="-120"/>
               </a:rPr>
-              <a:t>Word Labs  •  wordlabs.app  •  Root: 'ject' = to throw or hurl</a:t>
+              <a:t>Word Labs  •  wordlabs.app  •  Root: 'ject' = throw</a:t>
             </a:r>
             <a:endParaRPr lang="en-US" sz="800" dirty="0"/>
           </a:p>
@@ -34109,7 +37289,7 @@
                 <a:ea typeface="Calibri" pitchFamily="34" charset="-122"/>
                 <a:cs typeface="Calibri" pitchFamily="34" charset="-120"/>
               </a:rPr>
-              <a:t>Word Labs  •  wordlabs.app  •  Root: 'ject' = to throw or hurl</a:t>
+              <a:t>Word Labs  •  wordlabs.app  •  Root: 'ject' = throw</a:t>
             </a:r>
             <a:endParaRPr lang="en-US" sz="800" dirty="0"/>
           </a:p>
@@ -34410,7 +37590,7 @@
                 <a:ea typeface="Trebuchet MS" pitchFamily="34" charset="-122"/>
                 <a:cs typeface="Trebuchet MS" pitchFamily="34" charset="-120"/>
               </a:rPr>
-              <a:t>re-</a:t>
+              <a:t>e-</a:t>
             </a:r>
             <a:endParaRPr lang="en-US" sz="1300" dirty="0"/>
           </a:p>
@@ -34538,7 +37718,7 @@
                 <a:ea typeface="Trebuchet MS" pitchFamily="34" charset="-122"/>
                 <a:cs typeface="Trebuchet MS" pitchFamily="34" charset="-120"/>
               </a:rPr>
-              <a:t>-ion</a:t>
+              <a:t>-ed</a:t>
             </a:r>
             <a:endParaRPr lang="en-US" sz="1300" dirty="0"/>
           </a:p>
@@ -34602,7 +37782,7 @@
                 <a:ea typeface="Trebuchet MS" pitchFamily="34" charset="-122"/>
                 <a:cs typeface="Trebuchet MS" pitchFamily="34" charset="-120"/>
               </a:rPr>
-              <a:t>pro-</a:t>
+              <a:t>in-</a:t>
             </a:r>
             <a:endParaRPr lang="en-US" sz="1300" dirty="0"/>
           </a:p>
@@ -34691,7 +37871,7 @@
                 <a:ea typeface="Trebuchet MS" pitchFamily="34" charset="-122"/>
                 <a:cs typeface="Trebuchet MS" pitchFamily="34" charset="-120"/>
               </a:rPr>
-              <a:t>-ed</a:t>
+              <a:t>-ion</a:t>
             </a:r>
             <a:endParaRPr lang="en-US" sz="1300" dirty="0"/>
           </a:p>
@@ -34755,7 +37935,7 @@
                 <a:ea typeface="Trebuchet MS" pitchFamily="34" charset="-122"/>
                 <a:cs typeface="Trebuchet MS" pitchFamily="34" charset="-120"/>
               </a:rPr>
-              <a:t>in-</a:t>
+              <a:t>ob-</a:t>
             </a:r>
             <a:endParaRPr lang="en-US" sz="1300" dirty="0"/>
           </a:p>
@@ -34844,7 +38024,7 @@
                 <a:ea typeface="Trebuchet MS" pitchFamily="34" charset="-122"/>
                 <a:cs typeface="Trebuchet MS" pitchFamily="34" charset="-120"/>
               </a:rPr>
-              <a:t>-ing</a:t>
+              <a:t>-ive</a:t>
             </a:r>
             <a:endParaRPr lang="en-US" sz="1300" dirty="0"/>
           </a:p>
@@ -34908,7 +38088,7 @@
                 <a:ea typeface="Trebuchet MS" pitchFamily="34" charset="-122"/>
                 <a:cs typeface="Trebuchet MS" pitchFamily="34" charset="-120"/>
               </a:rPr>
-              <a:t>e-</a:t>
+              <a:t>pro-</a:t>
             </a:r>
             <a:endParaRPr lang="en-US" sz="1300" dirty="0"/>
           </a:p>
@@ -34997,7 +38177,7 @@
                 <a:ea typeface="Trebuchet MS" pitchFamily="34" charset="-122"/>
                 <a:cs typeface="Trebuchet MS" pitchFamily="34" charset="-120"/>
               </a:rPr>
-              <a:t>-ile</a:t>
+              <a:t>-s</a:t>
             </a:r>
             <a:endParaRPr lang="en-US" sz="1300" dirty="0"/>
           </a:p>
@@ -35061,7 +38241,7 @@
                 <a:ea typeface="Trebuchet MS" pitchFamily="34" charset="-122"/>
                 <a:cs typeface="Trebuchet MS" pitchFamily="34" charset="-120"/>
               </a:rPr>
-              <a:t>ob-</a:t>
+              <a:t>sub-</a:t>
             </a:r>
             <a:endParaRPr lang="en-US" sz="1300" dirty="0"/>
           </a:p>
@@ -35321,7 +38501,7 @@
                 <a:ea typeface="Trebuchet MS" pitchFamily="34" charset="-122"/>
                 <a:cs typeface="Trebuchet MS" pitchFamily="34" charset="-120"/>
               </a:rPr>
-              <a:t>reject</a:t>
+              <a:t>subject</a:t>
             </a:r>
             <a:endParaRPr lang="en-US" sz="1200" dirty="0"/>
           </a:p>
@@ -35387,7 +38567,7 @@
                 <a:ea typeface="Trebuchet MS" pitchFamily="34" charset="-122"/>
                 <a:cs typeface="Trebuchet MS" pitchFamily="34" charset="-120"/>
               </a:rPr>
-              <a:t>project</a:t>
+              <a:t>injected</a:t>
             </a:r>
             <a:endParaRPr lang="en-US" sz="1200" dirty="0"/>
           </a:p>
@@ -35453,7 +38633,7 @@
                 <a:ea typeface="Trebuchet MS" pitchFamily="34" charset="-122"/>
                 <a:cs typeface="Trebuchet MS" pitchFamily="34" charset="-120"/>
               </a:rPr>
-              <a:t>eject</a:t>
+              <a:t>subjects</a:t>
             </a:r>
             <a:endParaRPr lang="en-US" sz="1200" dirty="0"/>
           </a:p>
@@ -35519,7 +38699,7 @@
                 <a:ea typeface="Trebuchet MS" pitchFamily="34" charset="-122"/>
                 <a:cs typeface="Trebuchet MS" pitchFamily="34" charset="-120"/>
               </a:rPr>
-              <a:t>object</a:t>
+              <a:t>injection</a:t>
             </a:r>
             <a:endParaRPr lang="en-US" sz="1200" dirty="0"/>
           </a:p>
@@ -35585,7 +38765,7 @@
                 <a:ea typeface="Trebuchet MS" pitchFamily="34" charset="-122"/>
                 <a:cs typeface="Trebuchet MS" pitchFamily="34" charset="-120"/>
               </a:rPr>
-              <a:t>subject</a:t>
+              <a:t>subjected</a:t>
             </a:r>
             <a:endParaRPr lang="en-US" sz="1200" dirty="0"/>
           </a:p>
@@ -35651,73 +38831,7 @@
                 <a:ea typeface="Trebuchet MS" pitchFamily="34" charset="-122"/>
                 <a:cs typeface="Trebuchet MS" pitchFamily="34" charset="-120"/>
               </a:rPr>
-              <a:t>dejected</a:t>
-            </a:r>
-            <a:endParaRPr lang="en-US" sz="1200" dirty="0"/>
-          </a:p>
-        </p:txBody>
-      </p:sp>
-      <p:sp>
-        <p:nvSpPr>
-          <p:cNvPr id="58" name="Shape 56"/>
-          <p:cNvSpPr/>
-          <p:nvPr/>
-        </p:nvSpPr>
-        <p:spPr>
-          <a:xfrm>
-            <a:off x="6894576" y="4498848"/>
-            <a:ext cx="2011680" cy="402336"/>
-          </a:xfrm>
-          <a:prstGeom prst="rect">
-            <a:avLst>
-              <a:gd name="adj" fmla="val 13636"/>
-            </a:avLst>
-          </a:prstGeom>
-          <a:solidFill>
-            <a:srgbClr val="EEF2FF"/>
-          </a:solidFill>
-          <a:ln w="12700">
-            <a:solidFill>
-              <a:srgbClr val="6366F1"/>
-            </a:solidFill>
-            <a:prstDash val="solid"/>
-          </a:ln>
-        </p:spPr>
-      </p:sp>
-      <p:sp>
-        <p:nvSpPr>
-          <p:cNvPr id="59" name="Text 57"/>
-          <p:cNvSpPr/>
-          <p:nvPr/>
-        </p:nvSpPr>
-        <p:spPr>
-          <a:xfrm>
-            <a:off x="6894576" y="4498848"/>
-            <a:ext cx="2011680" cy="402336"/>
-          </a:xfrm>
-          <a:prstGeom prst="rect">
-            <a:avLst/>
-          </a:prstGeom>
-          <a:noFill/>
-          <a:ln/>
-        </p:spPr>
-        <p:txBody>
-          <a:bodyPr wrap="square" lIns="0" tIns="0" rIns="0" bIns="0" rtlCol="0" anchor="ctr"/>
-          <a:lstStyle/>
-          <a:p>
-            <a:pPr algn="ctr" indent="0" marL="0">
-              <a:buNone/>
-            </a:pPr>
-            <a:r>
-              <a:rPr lang="en-US" sz="1200" b="1" dirty="0">
-                <a:solidFill>
-                  <a:srgbClr val="4338CA"/>
-                </a:solidFill>
-                <a:latin typeface="Trebuchet MS" pitchFamily="34" charset="0"/>
-                <a:ea typeface="Trebuchet MS" pitchFamily="34" charset="-122"/>
-                <a:cs typeface="Trebuchet MS" pitchFamily="34" charset="-120"/>
-              </a:rPr>
-              <a:t>trajectory</a:t>
+              <a:t>injections</a:t>
             </a:r>
             <a:endParaRPr lang="en-US" sz="1200" dirty="0"/>
           </a:p>
@@ -36009,7 +39123,7 @@
                 <a:ea typeface="Calibri" pitchFamily="34" charset="-122"/>
                 <a:cs typeface="Calibri" pitchFamily="34" charset="-120"/>
               </a:rPr>
-              <a:t>Word Labs  •  wordlabs.app  •  Root: 'ject' = to throw or hurl</a:t>
+              <a:t>Word Labs  •  wordlabs.app  •  Root: 'ject' = throw</a:t>
             </a:r>
             <a:endParaRPr lang="en-US" sz="800" dirty="0"/>
           </a:p>
@@ -36173,7 +39287,7 @@
                 <a:ea typeface="Calibri" pitchFamily="34" charset="-122"/>
                 <a:cs typeface="Calibri" pitchFamily="34" charset="-120"/>
               </a:rPr>
-              <a:t>The core part of a word carrying its basic meaning. For example, 'ject' means 'to throw or hurl'.</a:t>
+              <a:t>The core part of a word carrying its basic meaning. For example, 'ject' means 'throw'.</a:t>
             </a:r>
             <a:endParaRPr lang="en-US" sz="1350" dirty="0"/>
           </a:p>
@@ -36793,7 +39907,7 @@
                 <a:ea typeface="Calibri" pitchFamily="34" charset="-122"/>
                 <a:cs typeface="Calibri" pitchFamily="34" charset="-120"/>
               </a:rPr>
-              <a:t>Word Labs  •  wordlabs.app  •  Root: 'ject' = to throw or hurl</a:t>
+              <a:t>Word Labs  •  wordlabs.app  •  Root: 'ject' = throw</a:t>
             </a:r>
             <a:endParaRPr lang="en-US" sz="800" dirty="0"/>
           </a:p>
@@ -36905,7 +40019,7 @@
                 <a:ea typeface="Calibri" pitchFamily="34" charset="-122"/>
                 <a:cs typeface="Calibri" pitchFamily="34" charset="-120"/>
               </a:rPr>
-              <a:t>1.  The word 'eject' contains the root 'ject'.</a:t>
+              <a:t>1.  'inject' means 'to remove something completely from a place'.</a:t>
             </a:r>
             <a:endParaRPr lang="en-US" sz="1300" dirty="0"/>
           </a:p>
@@ -36928,11 +40042,11 @@
             </a:avLst>
           </a:prstGeom>
           <a:solidFill>
-            <a:srgbClr val="DCFCE7"/>
-          </a:solidFill>
-          <a:ln w="12700">
-            <a:solidFill>
-              <a:srgbClr val="16A34A"/>
+            <a:srgbClr val="FEE2E2"/>
+          </a:solidFill>
+          <a:ln w="12700">
+            <a:solidFill>
+              <a:srgbClr val="DC2626"/>
             </a:solidFill>
             <a:prstDash val="solid"/>
           </a:ln>
@@ -36965,13 +40079,13 @@
             <a:r>
               <a:rPr lang="en-US" sz="1100" b="1" dirty="0">
                 <a:solidFill>
-                  <a:srgbClr val="16A34A"/>
+                  <a:srgbClr val="DC2626"/>
                 </a:solidFill>
                 <a:latin typeface="Trebuchet MS" pitchFamily="34" charset="0"/>
                 <a:ea typeface="Trebuchet MS" pitchFamily="34" charset="-122"/>
                 <a:cs typeface="Trebuchet MS" pitchFamily="34" charset="-120"/>
               </a:rPr>
-              <a:t>TRUE</a:t>
+              <a:t>FALSE</a:t>
             </a:r>
             <a:endParaRPr lang="en-US" sz="1100" dirty="0"/>
           </a:p>
@@ -37044,7 +40158,7 @@
                 <a:ea typeface="Calibri" pitchFamily="34" charset="-122"/>
                 <a:cs typeface="Calibri" pitchFamily="34" charset="-120"/>
               </a:rPr>
-              <a:t>2.  The prefix 're' in 'reject' means back, so reject means to throw back.</a:t>
+              <a:t>2.  'ject' means 'throw'.</a:t>
             </a:r>
             <a:endParaRPr lang="en-US" sz="1300" dirty="0"/>
           </a:p>
@@ -37183,7 +40297,7 @@
                 <a:ea typeface="Calibri" pitchFamily="34" charset="-122"/>
                 <a:cs typeface="Calibri" pitchFamily="34" charset="-120"/>
               </a:rPr>
-              <a:t>3.  The word 'inject' means to throw something away from you.</a:t>
+              <a:t>3.  'subject' means 'a tool used for cutting paper'.</a:t>
             </a:r>
             <a:endParaRPr lang="en-US" sz="1300" dirty="0"/>
           </a:p>
@@ -37322,7 +40436,7 @@
                 <a:ea typeface="Calibri" pitchFamily="34" charset="-122"/>
                 <a:cs typeface="Calibri" pitchFamily="34" charset="-120"/>
               </a:rPr>
-              <a:t>4.  The root 'ject' originally came from a Greek word.</a:t>
+              <a:t>4.  'subject' means 'a topic or area of study, or the main person or thing a sentence is about'.</a:t>
             </a:r>
             <a:endParaRPr lang="en-US" sz="1300" dirty="0"/>
           </a:p>
@@ -37345,11 +40459,11 @@
             </a:avLst>
           </a:prstGeom>
           <a:solidFill>
-            <a:srgbClr val="FEE2E2"/>
-          </a:solidFill>
-          <a:ln w="12700">
-            <a:solidFill>
-              <a:srgbClr val="DC2626"/>
+            <a:srgbClr val="DCFCE7"/>
+          </a:solidFill>
+          <a:ln w="12700">
+            <a:solidFill>
+              <a:srgbClr val="16A34A"/>
             </a:solidFill>
             <a:prstDash val="solid"/>
           </a:ln>
@@ -37382,13 +40496,13 @@
             <a:r>
               <a:rPr lang="en-US" sz="1100" b="1" dirty="0">
                 <a:solidFill>
-                  <a:srgbClr val="DC2626"/>
+                  <a:srgbClr val="16A34A"/>
                 </a:solidFill>
                 <a:latin typeface="Trebuchet MS" pitchFamily="34" charset="0"/>
                 <a:ea typeface="Trebuchet MS" pitchFamily="34" charset="-122"/>
                 <a:cs typeface="Trebuchet MS" pitchFamily="34" charset="-120"/>
               </a:rPr>
-              <a:t>FALSE</a:t>
+              <a:t>TRUE</a:t>
             </a:r>
             <a:endParaRPr lang="en-US" sz="1100" dirty="0"/>
           </a:p>
@@ -37461,7 +40575,7 @@
                 <a:ea typeface="Calibri" pitchFamily="34" charset="-122"/>
                 <a:cs typeface="Calibri" pitchFamily="34" charset="-120"/>
               </a:rPr>
-              <a:t>5.  The root 'ject' comes from a Latin word meaning 'to throw'.</a:t>
+              <a:t>5.  'inject' means 'to force a liquid into something, often using a needle'.</a:t>
             </a:r>
             <a:endParaRPr lang="en-US" sz="1300" dirty="0"/>
           </a:p>
@@ -37819,7 +40933,7 @@
                 <a:ea typeface="Calibri" pitchFamily="34" charset="-122"/>
                 <a:cs typeface="Calibri" pitchFamily="34" charset="-120"/>
               </a:rPr>
-              <a:t>Word Labs  •  wordlabs.app  •  Root: 'ject' = to throw or hurl</a:t>
+              <a:t>Word Labs  •  wordlabs.app  •  Root: 'ject' = throw</a:t>
             </a:r>
             <a:endParaRPr lang="en-US" sz="800" dirty="0"/>
           </a:p>
@@ -37956,7 +41070,7 @@
                 <a:ea typeface="Trebuchet MS" pitchFamily="34" charset="-122"/>
                 <a:cs typeface="Trebuchet MS" pitchFamily="34" charset="-120"/>
               </a:rPr>
-              <a:t>to throw or hurl</a:t>
+              <a:t>throw</a:t>
             </a:r>
             <a:endParaRPr lang="en-US" sz="2000" dirty="0"/>
           </a:p>
@@ -37995,7 +41109,7 @@
                 <a:ea typeface="Calibri" pitchFamily="34" charset="-122"/>
                 <a:cs typeface="Calibri" pitchFamily="34" charset="-120"/>
               </a:rPr>
-              <a:t>Origin: Latin: jacere</a:t>
+              <a:t>Origin: Latin root</a:t>
             </a:r>
             <a:endParaRPr lang="en-US" sz="1100" dirty="0"/>
           </a:p>
@@ -38166,7 +41280,7 @@
                 <a:ea typeface="Trebuchet MS" pitchFamily="34" charset="-122"/>
                 <a:cs typeface="Trebuchet MS" pitchFamily="34" charset="-120"/>
               </a:rPr>
-              <a:t>reject</a:t>
+              <a:t>subject</a:t>
             </a:r>
             <a:endParaRPr lang="en-US" sz="1300" dirty="0"/>
           </a:p>
@@ -38232,7 +41346,7 @@
                 <a:ea typeface="Trebuchet MS" pitchFamily="34" charset="-122"/>
                 <a:cs typeface="Trebuchet MS" pitchFamily="34" charset="-120"/>
               </a:rPr>
-              <a:t>project</a:t>
+              <a:t>injected</a:t>
             </a:r>
             <a:endParaRPr lang="en-US" sz="1300" dirty="0"/>
           </a:p>
@@ -38298,7 +41412,7 @@
                 <a:ea typeface="Trebuchet MS" pitchFamily="34" charset="-122"/>
                 <a:cs typeface="Trebuchet MS" pitchFamily="34" charset="-120"/>
               </a:rPr>
-              <a:t>eject</a:t>
+              <a:t>subjects</a:t>
             </a:r>
             <a:endParaRPr lang="en-US" sz="1300" dirty="0"/>
           </a:p>
@@ -38364,7 +41478,7 @@
                 <a:ea typeface="Trebuchet MS" pitchFamily="34" charset="-122"/>
                 <a:cs typeface="Trebuchet MS" pitchFamily="34" charset="-120"/>
               </a:rPr>
-              <a:t>object</a:t>
+              <a:t>injection</a:t>
             </a:r>
             <a:endParaRPr lang="en-US" sz="1300" dirty="0"/>
           </a:p>
@@ -38430,7 +41544,7 @@
                 <a:ea typeface="Trebuchet MS" pitchFamily="34" charset="-122"/>
                 <a:cs typeface="Trebuchet MS" pitchFamily="34" charset="-120"/>
               </a:rPr>
-              <a:t>subject</a:t>
+              <a:t>subjected</a:t>
             </a:r>
             <a:endParaRPr lang="en-US" sz="1300" dirty="0"/>
           </a:p>
@@ -38496,7 +41610,7 @@
                 <a:ea typeface="Trebuchet MS" pitchFamily="34" charset="-122"/>
                 <a:cs typeface="Trebuchet MS" pitchFamily="34" charset="-120"/>
               </a:rPr>
-              <a:t>dejected</a:t>
+              <a:t>injections</a:t>
             </a:r>
             <a:endParaRPr lang="en-US" sz="1300" dirty="0"/>
           </a:p>
@@ -38788,7 +41902,7 @@
                 <a:ea typeface="Calibri" pitchFamily="34" charset="-122"/>
                 <a:cs typeface="Calibri" pitchFamily="34" charset="-120"/>
               </a:rPr>
-              <a:t>Word Labs  •  wordlabs.app  •  Root: 'ject' = to throw or hurl</a:t>
+              <a:t>Word Labs  •  wordlabs.app  •  Root: 'ject' = throw</a:t>
             </a:r>
             <a:endParaRPr lang="en-US" sz="800" dirty="0"/>
           </a:p>
@@ -39089,7 +42203,7 @@
                 <a:ea typeface="Trebuchet MS" pitchFamily="34" charset="-122"/>
                 <a:cs typeface="Trebuchet MS" pitchFamily="34" charset="-120"/>
               </a:rPr>
-              <a:t>re-</a:t>
+              <a:t>e-</a:t>
             </a:r>
             <a:endParaRPr lang="en-US" sz="1300" dirty="0"/>
           </a:p>
@@ -39217,7 +42331,7 @@
                 <a:ea typeface="Trebuchet MS" pitchFamily="34" charset="-122"/>
                 <a:cs typeface="Trebuchet MS" pitchFamily="34" charset="-120"/>
               </a:rPr>
-              <a:t>-ion</a:t>
+              <a:t>-ed</a:t>
             </a:r>
             <a:endParaRPr lang="en-US" sz="1300" dirty="0"/>
           </a:p>
@@ -39281,7 +42395,7 @@
                 <a:ea typeface="Trebuchet MS" pitchFamily="34" charset="-122"/>
                 <a:cs typeface="Trebuchet MS" pitchFamily="34" charset="-120"/>
               </a:rPr>
-              <a:t>pro-</a:t>
+              <a:t>in-</a:t>
             </a:r>
             <a:endParaRPr lang="en-US" sz="1300" dirty="0"/>
           </a:p>
@@ -39370,7 +42484,7 @@
                 <a:ea typeface="Trebuchet MS" pitchFamily="34" charset="-122"/>
                 <a:cs typeface="Trebuchet MS" pitchFamily="34" charset="-120"/>
               </a:rPr>
-              <a:t>-ed</a:t>
+              <a:t>-ion</a:t>
             </a:r>
             <a:endParaRPr lang="en-US" sz="1300" dirty="0"/>
           </a:p>
@@ -39434,7 +42548,7 @@
                 <a:ea typeface="Trebuchet MS" pitchFamily="34" charset="-122"/>
                 <a:cs typeface="Trebuchet MS" pitchFamily="34" charset="-120"/>
               </a:rPr>
-              <a:t>in-</a:t>
+              <a:t>ob-</a:t>
             </a:r>
             <a:endParaRPr lang="en-US" sz="1300" dirty="0"/>
           </a:p>
@@ -39523,7 +42637,7 @@
                 <a:ea typeface="Trebuchet MS" pitchFamily="34" charset="-122"/>
                 <a:cs typeface="Trebuchet MS" pitchFamily="34" charset="-120"/>
               </a:rPr>
-              <a:t>-ing</a:t>
+              <a:t>-ive</a:t>
             </a:r>
             <a:endParaRPr lang="en-US" sz="1300" dirty="0"/>
           </a:p>
@@ -39587,7 +42701,7 @@
                 <a:ea typeface="Trebuchet MS" pitchFamily="34" charset="-122"/>
                 <a:cs typeface="Trebuchet MS" pitchFamily="34" charset="-120"/>
               </a:rPr>
-              <a:t>e-</a:t>
+              <a:t>pro-</a:t>
             </a:r>
             <a:endParaRPr lang="en-US" sz="1300" dirty="0"/>
           </a:p>
@@ -39676,7 +42790,7 @@
                 <a:ea typeface="Trebuchet MS" pitchFamily="34" charset="-122"/>
                 <a:cs typeface="Trebuchet MS" pitchFamily="34" charset="-120"/>
               </a:rPr>
-              <a:t>-ile</a:t>
+              <a:t>-s</a:t>
             </a:r>
             <a:endParaRPr lang="en-US" sz="1300" dirty="0"/>
           </a:p>
@@ -39740,7 +42854,7 @@
                 <a:ea typeface="Trebuchet MS" pitchFamily="34" charset="-122"/>
                 <a:cs typeface="Trebuchet MS" pitchFamily="34" charset="-120"/>
               </a:rPr>
-              <a:t>ob-</a:t>
+              <a:t>sub-</a:t>
             </a:r>
             <a:endParaRPr lang="en-US" sz="1300" dirty="0"/>
           </a:p>
@@ -39941,7 +43055,7 @@
                 <a:ea typeface="Trebuchet MS" pitchFamily="34" charset="-122"/>
                 <a:cs typeface="Trebuchet MS" pitchFamily="34" charset="-120"/>
               </a:rPr>
-              <a:t>re-</a:t>
+              <a:t>e-</a:t>
             </a:r>
             <a:endParaRPr lang="en-US" sz="1300" dirty="0"/>
           </a:p>
@@ -40107,7 +43221,7 @@
         <p:spPr>
           <a:xfrm>
             <a:off x="4325112" y="4178808"/>
-            <a:ext cx="950976" cy="420624"/>
+            <a:ext cx="822960" cy="420624"/>
           </a:xfrm>
           <a:prstGeom prst="rect">
             <a:avLst>
@@ -40141,7 +43255,7 @@
         <p:spPr>
           <a:xfrm>
             <a:off x="4325112" y="4178808"/>
-            <a:ext cx="950976" cy="420624"/>
+            <a:ext cx="822960" cy="420624"/>
           </a:xfrm>
           <a:prstGeom prst="rect">
             <a:avLst/>
@@ -40165,7 +43279,7 @@
                 <a:ea typeface="Trebuchet MS" pitchFamily="34" charset="-122"/>
                 <a:cs typeface="Trebuchet MS" pitchFamily="34" charset="-120"/>
               </a:rPr>
-              <a:t>-ion</a:t>
+              <a:t>-ed</a:t>
             </a:r>
             <a:endParaRPr lang="en-US" sz="1300" dirty="0"/>
           </a:p>
@@ -40179,7 +43293,7 @@
         </p:nvSpPr>
         <p:spPr>
           <a:xfrm>
-            <a:off x="5349240" y="4178808"/>
+            <a:off x="5221224" y="4178808"/>
             <a:ext cx="365760" cy="420624"/>
           </a:xfrm>
           <a:prstGeom prst="rect">
@@ -40218,7 +43332,7 @@
         </p:nvSpPr>
         <p:spPr>
           <a:xfrm>
-            <a:off x="5760720" y="4178808"/>
+            <a:off x="5632704" y="4178808"/>
             <a:ext cx="2194560" cy="420624"/>
           </a:xfrm>
           <a:prstGeom prst="rect">
@@ -40245,7 +43359,7 @@
         </p:nvSpPr>
         <p:spPr>
           <a:xfrm>
-            <a:off x="5760720" y="4178808"/>
+            <a:off x="5632704" y="4178808"/>
             <a:ext cx="2194560" cy="420624"/>
           </a:xfrm>
           <a:prstGeom prst="rect">
@@ -40562,7 +43676,7 @@
                 <a:ea typeface="Calibri" pitchFamily="34" charset="-122"/>
                 <a:cs typeface="Calibri" pitchFamily="34" charset="-120"/>
               </a:rPr>
-              <a:t>Word Labs  •  wordlabs.app  •  Root: 'ject' = to throw or hurl</a:t>
+              <a:t>Word Labs  •  wordlabs.app  •  Root: 'ject' = throw</a:t>
             </a:r>
             <a:endParaRPr lang="en-US" sz="800" dirty="0"/>
           </a:p>
@@ -40740,7 +43854,7 @@
                 <a:ea typeface="Calibri" pitchFamily="34" charset="-122"/>
                 <a:cs typeface="Calibri" pitchFamily="34" charset="-120"/>
               </a:rPr>
-              <a:t>To throw an idea forward or show something on a screen, or a big piece of work you do at school.</a:t>
+              <a:t>forced a liquid into something, often using a needle</a:t>
             </a:r>
             <a:endParaRPr lang="en-US" sz="1200" dirty="0"/>
           </a:p>
@@ -40813,7 +43927,7 @@
                 <a:ea typeface="Trebuchet MS" pitchFamily="34" charset="-122"/>
                 <a:cs typeface="Trebuchet MS" pitchFamily="34" charset="-120"/>
               </a:rPr>
-              <a:t>reject</a:t>
+              <a:t>subject</a:t>
             </a:r>
             <a:endParaRPr lang="en-US" sz="1200" dirty="0"/>
           </a:p>
@@ -40879,7 +43993,7 @@
                 <a:ea typeface="Calibri" pitchFamily="34" charset="-122"/>
                 <a:cs typeface="Calibri" pitchFamily="34" charset="-120"/>
               </a:rPr>
-              <a:t>Something thrown under discussion, like a topic at school such as maths or science.</a:t>
+              <a:t>made to go through or experience something, often unpleasant</a:t>
             </a:r>
             <a:endParaRPr lang="en-US" sz="1200" dirty="0"/>
           </a:p>
@@ -40952,7 +44066,7 @@
                 <a:ea typeface="Trebuchet MS" pitchFamily="34" charset="-122"/>
                 <a:cs typeface="Trebuchet MS" pitchFamily="34" charset="-120"/>
               </a:rPr>
-              <a:t>project</a:t>
+              <a:t>injected</a:t>
             </a:r>
             <a:endParaRPr lang="en-US" sz="1200" dirty="0"/>
           </a:p>
@@ -41018,7 +44132,7 @@
                 <a:ea typeface="Calibri" pitchFamily="34" charset="-122"/>
                 <a:cs typeface="Calibri" pitchFamily="34" charset="-120"/>
               </a:rPr>
-              <a:t>To push liquid into something using a needle, like when a doctor gives you a vaccination.</a:t>
+              <a:t>to force a liquid into something, often using a needle</a:t>
             </a:r>
             <a:endParaRPr lang="en-US" sz="1200" dirty="0"/>
           </a:p>
@@ -41091,7 +44205,7 @@
                 <a:ea typeface="Trebuchet MS" pitchFamily="34" charset="-122"/>
                 <a:cs typeface="Trebuchet MS" pitchFamily="34" charset="-120"/>
               </a:rPr>
-              <a:t>eject</a:t>
+              <a:t>subjects</a:t>
             </a:r>
             <a:endParaRPr lang="en-US" sz="1200" dirty="0"/>
           </a:p>
@@ -41157,7 +44271,7 @@
                 <a:ea typeface="Calibri" pitchFamily="34" charset="-122"/>
                 <a:cs typeface="Calibri" pitchFamily="34" charset="-120"/>
               </a:rPr>
-              <a:t>Feeling thrown down and very sad or disappointed about something.</a:t>
+              <a:t>more than one act of putting liquid into the body using a needle</a:t>
             </a:r>
             <a:endParaRPr lang="en-US" sz="1200" dirty="0"/>
           </a:p>
@@ -41230,7 +44344,7 @@
                 <a:ea typeface="Trebuchet MS" pitchFamily="34" charset="-122"/>
                 <a:cs typeface="Trebuchet MS" pitchFamily="34" charset="-120"/>
               </a:rPr>
-              <a:t>object</a:t>
+              <a:t>injection</a:t>
             </a:r>
             <a:endParaRPr lang="en-US" sz="1200" dirty="0"/>
           </a:p>
@@ -41296,7 +44410,7 @@
                 <a:ea typeface="Calibri" pitchFamily="34" charset="-122"/>
                 <a:cs typeface="Calibri" pitchFamily="34" charset="-120"/>
               </a:rPr>
-              <a:t>To throw your feelings against something because you disagree with it, or a thing you can touch.</a:t>
+              <a:t>an act of putting liquid into the body using a needle</a:t>
             </a:r>
             <a:endParaRPr lang="en-US" sz="1200" dirty="0"/>
           </a:p>
@@ -41369,7 +44483,7 @@
                 <a:ea typeface="Trebuchet MS" pitchFamily="34" charset="-122"/>
                 <a:cs typeface="Trebuchet MS" pitchFamily="34" charset="-120"/>
               </a:rPr>
-              <a:t>subject</a:t>
+              <a:t>subjected</a:t>
             </a:r>
             <a:endParaRPr lang="en-US" sz="1200" dirty="0"/>
           </a:p>
@@ -41435,7 +44549,7 @@
                 <a:ea typeface="Calibri" pitchFamily="34" charset="-122"/>
                 <a:cs typeface="Calibri" pitchFamily="34" charset="-120"/>
               </a:rPr>
-              <a:t>To throw something out forcefully, like being pushed out of a seat or removing a disc from a machine.</a:t>
+              <a:t>topics of study, or people or things a sentence or ruler is about</a:t>
             </a:r>
             <a:endParaRPr lang="en-US" sz="1200" dirty="0"/>
           </a:p>
@@ -41508,7 +44622,7 @@
                 <a:ea typeface="Trebuchet MS" pitchFamily="34" charset="-122"/>
                 <a:cs typeface="Trebuchet MS" pitchFamily="34" charset="-120"/>
               </a:rPr>
-              <a:t>dejected</a:t>
+              <a:t>injections</a:t>
             </a:r>
             <a:endParaRPr lang="en-US" sz="1200" dirty="0"/>
           </a:p>
@@ -41574,7 +44688,7 @@
                 <a:ea typeface="Calibri" pitchFamily="34" charset="-122"/>
                 <a:cs typeface="Calibri" pitchFamily="34" charset="-120"/>
               </a:rPr>
-              <a:t>To throw something back or say no to it, like when you don't want to keep something.</a:t>
+              <a:t>a topic or area of study, or the main person or thing a sentence is about</a:t>
             </a:r>
             <a:endParaRPr lang="en-US" sz="1200" dirty="0"/>
           </a:p>
@@ -41866,7 +44980,7 @@
                 <a:ea typeface="Calibri" pitchFamily="34" charset="-122"/>
                 <a:cs typeface="Calibri" pitchFamily="34" charset="-120"/>
               </a:rPr>
-              <a:t>Word Labs  •  wordlabs.app  •  Root: 'ject' = to throw or hurl</a:t>
+              <a:t>Word Labs  •  wordlabs.app  •  Root: 'ject' = throw</a:t>
             </a:r>
             <a:endParaRPr lang="en-US" sz="800" dirty="0"/>
           </a:p>
@@ -42069,7 +45183,7 @@
                 <a:ea typeface="Calibri" pitchFamily="34" charset="-122"/>
                 <a:cs typeface="Calibri" pitchFamily="34" charset="-120"/>
               </a:rPr>
-              <a:t>The scientist had to reject the results of the experiment because they were not accurate.</a:t>
+              <a:t>The nurse will inject the medicine into your arm.</a:t>
             </a:r>
             <a:endParaRPr lang="en-US" sz="1500" dirty="0"/>
           </a:p>
@@ -42233,7 +45347,7 @@
                 <a:ea typeface="Calibri" pitchFamily="34" charset="-122"/>
                 <a:cs typeface="Calibri" pitchFamily="34" charset="-120"/>
               </a:rPr>
-              <a:t>The teacher asked us to project our voices so everyone in the classroom could hear us clearly.</a:t>
+              <a:t>Maths is her favourite subject at school.</a:t>
             </a:r>
             <a:endParaRPr lang="en-US" sz="1500" dirty="0"/>
           </a:p>
@@ -42397,7 +45511,7 @@
                 <a:ea typeface="Calibri" pitchFamily="34" charset="-122"/>
                 <a:cs typeface="Calibri" pitchFamily="34" charset="-120"/>
               </a:rPr>
-              <a:t>After missing the goal, the player felt dejected and sat quietly on the bench.</a:t>
+              <a:t>The vet injected the medicine into the sick dog.</a:t>
             </a:r>
             <a:endParaRPr lang="en-US" sz="1500" dirty="0"/>
           </a:p>
